--- a/Phase II Major Project(1).pptx
+++ b/Phase II Major Project(1).pptx
@@ -28,6 +28,7 @@
     <p:sldId id="268" r:id="rId21"/>
     <p:sldId id="269" r:id="rId22"/>
     <p:sldId id="270" r:id="rId23"/>
+    <p:sldId id="271" r:id="rId24"/>
   </p:sldIdLst>
   <p:sldSz cx="20104100" cy="11309350"/>
   <p:notesSz cx="20104100" cy="11309350"/>
@@ -358,7 +359,7 @@
             <a:pPr indent="0" algn="r">
               <a:buNone/>
             </a:pPr>
-            <a:fld id="{4EC9C40F-4236-4DAE-B021-3D92C44A1E52}" type="slidenum">
+            <a:fld id="{8D777BF7-3783-4F54-A3B4-A3D6D5FC4369}" type="slidenum">
               <a:rPr b="0" lang="en-US" sz="1400" spc="-1" strike="noStrike">
                 <a:solidFill>
                   <a:srgbClr val="000000"/>
@@ -401,7 +402,7 @@
       </p:grpSpPr>
       <p:sp>
         <p:nvSpPr>
-          <p:cNvPr id="128" name="PlaceHolder 1"/>
+          <p:cNvPr id="130" name="PlaceHolder 1"/>
           <p:cNvSpPr>
             <a:spLocks noGrp="1"/>
           </p:cNvSpPr>
@@ -424,7 +425,7 @@
       </p:sp>
       <p:sp>
         <p:nvSpPr>
-          <p:cNvPr id="129" name="PlaceHolder 2"/>
+          <p:cNvPr id="131" name="PlaceHolder 2"/>
           <p:cNvSpPr>
             <a:spLocks noGrp="1"/>
           </p:cNvSpPr>
@@ -464,7 +465,7 @@
       </p:sp>
       <p:sp>
         <p:nvSpPr>
-          <p:cNvPr id="130" name="PlaceHolder 3"/>
+          <p:cNvPr id="132" name="PlaceHolder 3"/>
           <p:cNvSpPr>
             <a:spLocks noGrp="1"/>
           </p:cNvSpPr>
@@ -517,7 +518,7 @@
                 <a:tab algn="l" pos="0"/>
               </a:tabLst>
             </a:pPr>
-            <a:fld id="{D8A23CA2-E0DE-4E18-BD51-A5A34D6F5781}" type="slidenum">
+            <a:fld id="{DC335C69-302C-4B30-B7B5-42966BB0BE18}" type="slidenum">
               <a:rPr b="0" lang="en-IN" sz="1200" spc="-1" strike="noStrike">
                 <a:solidFill>
                   <a:schemeClr val="dk1"/>
@@ -525,7 +526,7 @@
                 <a:latin typeface="Calibri"/>
                 <a:ea typeface="Calibri"/>
               </a:rPr>
-              <a:t>15</a:t>
+              <a:t>16</a:t>
             </a:fld>
             <a:endParaRPr b="0" lang="en-US" sz="1200" spc="-1" strike="noStrike">
               <a:solidFill>
@@ -560,7 +561,7 @@
       </p:grpSpPr>
       <p:sp>
         <p:nvSpPr>
-          <p:cNvPr id="131" name="PlaceHolder 1"/>
+          <p:cNvPr id="133" name="PlaceHolder 1"/>
           <p:cNvSpPr>
             <a:spLocks noGrp="1"/>
           </p:cNvSpPr>
@@ -583,7 +584,7 @@
       </p:sp>
       <p:sp>
         <p:nvSpPr>
-          <p:cNvPr id="132" name="PlaceHolder 2"/>
+          <p:cNvPr id="134" name="PlaceHolder 2"/>
           <p:cNvSpPr>
             <a:spLocks noGrp="1"/>
           </p:cNvSpPr>
@@ -623,7 +624,7 @@
       </p:sp>
       <p:sp>
         <p:nvSpPr>
-          <p:cNvPr id="133" name="PlaceHolder 3"/>
+          <p:cNvPr id="135" name="PlaceHolder 3"/>
           <p:cNvSpPr>
             <a:spLocks noGrp="1"/>
           </p:cNvSpPr>
@@ -676,7 +677,7 @@
                 <a:tab algn="l" pos="0"/>
               </a:tabLst>
             </a:pPr>
-            <a:fld id="{41894E9D-6F49-4C7E-9979-8CD34B9E1A06}" type="slidenum">
+            <a:fld id="{34A90B42-6C46-4961-AC36-74C8FE9B7606}" type="slidenum">
               <a:rPr b="0" lang="en-IN" sz="1200" spc="-1" strike="noStrike">
                 <a:solidFill>
                   <a:schemeClr val="dk1"/>
@@ -684,7 +685,7 @@
                 <a:latin typeface="Calibri"/>
                 <a:ea typeface="Calibri"/>
               </a:rPr>
-              <a:t>15</a:t>
+              <a:t>16</a:t>
             </a:fld>
             <a:endParaRPr b="0" lang="en-US" sz="1200" spc="-1" strike="noStrike">
               <a:solidFill>
@@ -719,7 +720,7 @@
       </p:grpSpPr>
       <p:sp>
         <p:nvSpPr>
-          <p:cNvPr id="134" name="PlaceHolder 1"/>
+          <p:cNvPr id="136" name="PlaceHolder 1"/>
           <p:cNvSpPr>
             <a:spLocks noGrp="1"/>
           </p:cNvSpPr>
@@ -742,7 +743,7 @@
       </p:sp>
       <p:sp>
         <p:nvSpPr>
-          <p:cNvPr id="135" name="PlaceHolder 2"/>
+          <p:cNvPr id="137" name="PlaceHolder 2"/>
           <p:cNvSpPr>
             <a:spLocks noGrp="1"/>
           </p:cNvSpPr>
@@ -782,7 +783,7 @@
       </p:sp>
       <p:sp>
         <p:nvSpPr>
-          <p:cNvPr id="136" name="PlaceHolder 3"/>
+          <p:cNvPr id="138" name="PlaceHolder 3"/>
           <p:cNvSpPr>
             <a:spLocks noGrp="1"/>
           </p:cNvSpPr>
@@ -835,7 +836,7 @@
                 <a:tab algn="l" pos="0"/>
               </a:tabLst>
             </a:pPr>
-            <a:fld id="{7EDCBF0E-C0FA-4113-88F0-2275348BDE64}" type="slidenum">
+            <a:fld id="{287AAF89-22A4-47A0-B6B6-81187DC145EF}" type="slidenum">
               <a:rPr b="0" lang="en-IN" sz="1200" spc="-1" strike="noStrike">
                 <a:solidFill>
                   <a:schemeClr val="dk1"/>
@@ -843,7 +844,7 @@
                 <a:latin typeface="Calibri"/>
                 <a:ea typeface="Calibri"/>
               </a:rPr>
-              <a:t>15</a:t>
+              <a:t>16</a:t>
             </a:fld>
             <a:endParaRPr b="0" lang="en-US" sz="1200" spc="-1" strike="noStrike">
               <a:solidFill>
@@ -878,7 +879,7 @@
       </p:grpSpPr>
       <p:sp>
         <p:nvSpPr>
-          <p:cNvPr id="137" name="PlaceHolder 1"/>
+          <p:cNvPr id="139" name="PlaceHolder 1"/>
           <p:cNvSpPr>
             <a:spLocks noGrp="1"/>
           </p:cNvSpPr>
@@ -901,7 +902,7 @@
       </p:sp>
       <p:sp>
         <p:nvSpPr>
-          <p:cNvPr id="138" name="PlaceHolder 2"/>
+          <p:cNvPr id="140" name="PlaceHolder 2"/>
           <p:cNvSpPr>
             <a:spLocks noGrp="1"/>
           </p:cNvSpPr>
@@ -941,7 +942,7 @@
       </p:sp>
       <p:sp>
         <p:nvSpPr>
-          <p:cNvPr id="139" name="PlaceHolder 3"/>
+          <p:cNvPr id="141" name="PlaceHolder 3"/>
           <p:cNvSpPr>
             <a:spLocks noGrp="1"/>
           </p:cNvSpPr>
@@ -994,7 +995,7 @@
                 <a:tab algn="l" pos="0"/>
               </a:tabLst>
             </a:pPr>
-            <a:fld id="{C93FB90C-C631-4288-B0F6-E0EB28999BED}" type="slidenum">
+            <a:fld id="{50D86701-62CE-45A2-BDD3-A44B6941301A}" type="slidenum">
               <a:rPr b="0" lang="en-IN" sz="1200" spc="-1" strike="noStrike">
                 <a:solidFill>
                   <a:schemeClr val="dk1"/>
@@ -1002,7 +1003,7 @@
                 <a:latin typeface="Calibri"/>
                 <a:ea typeface="Calibri"/>
               </a:rPr>
-              <a:t>15</a:t>
+              <a:t>16</a:t>
             </a:fld>
             <a:endParaRPr b="0" lang="en-US" sz="1200" spc="-1" strike="noStrike">
               <a:solidFill>
@@ -1018,7 +1019,7 @@
 </p:notes>
 </file>
 
-<file path=ppt/notesSlides/notesSlide14.xml><?xml version="1.0" encoding="utf-8"?>
+<file path=ppt/notesSlides/notesSlide15.xml><?xml version="1.0" encoding="utf-8"?>
 <p:notes xmlns:a="http://schemas.openxmlformats.org/drawingml/2006/main" xmlns:p="http://schemas.openxmlformats.org/presentationml/2006/main" xmlns:r="http://schemas.openxmlformats.org/officeDocument/2006/relationships" xmlns:p14="http://schemas.microsoft.com/office/powerpoint/2010/main" xmlns:p15="http://schemas.microsoft.com/office/powerpoint/2012/main" xmlns:mc="http://schemas.openxmlformats.org/markup-compatibility/2006">
   <p:cSld>
     <p:spTree>
@@ -1037,7 +1038,7 @@
       </p:grpSpPr>
       <p:sp>
         <p:nvSpPr>
-          <p:cNvPr id="140" name="PlaceHolder 1"/>
+          <p:cNvPr id="142" name="PlaceHolder 1"/>
           <p:cNvSpPr>
             <a:spLocks noGrp="1"/>
           </p:cNvSpPr>
@@ -1060,7 +1061,7 @@
       </p:sp>
       <p:sp>
         <p:nvSpPr>
-          <p:cNvPr id="141" name="PlaceHolder 2"/>
+          <p:cNvPr id="143" name="PlaceHolder 2"/>
           <p:cNvSpPr>
             <a:spLocks noGrp="1"/>
           </p:cNvSpPr>
@@ -1100,7 +1101,7 @@
       </p:sp>
       <p:sp>
         <p:nvSpPr>
-          <p:cNvPr id="142" name="PlaceHolder 3"/>
+          <p:cNvPr id="144" name="PlaceHolder 3"/>
           <p:cNvSpPr>
             <a:spLocks noGrp="1"/>
           </p:cNvSpPr>
@@ -1153,7 +1154,7 @@
                 <a:tab algn="l" pos="0"/>
               </a:tabLst>
             </a:pPr>
-            <a:fld id="{5BA544CC-EEF5-4E6D-9C82-5BA6ADF8017B}" type="slidenum">
+            <a:fld id="{4AFA3A68-D45E-4289-89BC-C3CDAB3C8D3D}" type="slidenum">
               <a:rPr b="0" lang="en-IN" sz="1200" spc="-1" strike="noStrike">
                 <a:solidFill>
                   <a:schemeClr val="dk1"/>
@@ -1177,7 +1178,7 @@
 </p:notes>
 </file>
 
-<file path=ppt/notesSlides/notesSlide15.xml><?xml version="1.0" encoding="utf-8"?>
+<file path=ppt/notesSlides/notesSlide16.xml><?xml version="1.0" encoding="utf-8"?>
 <p:notes xmlns:a="http://schemas.openxmlformats.org/drawingml/2006/main" xmlns:p="http://schemas.openxmlformats.org/presentationml/2006/main" xmlns:r="http://schemas.openxmlformats.org/officeDocument/2006/relationships" xmlns:p14="http://schemas.microsoft.com/office/powerpoint/2010/main" xmlns:p15="http://schemas.microsoft.com/office/powerpoint/2012/main" xmlns:mc="http://schemas.openxmlformats.org/markup-compatibility/2006">
   <p:cSld>
     <p:spTree>
@@ -1196,7 +1197,7 @@
       </p:grpSpPr>
       <p:sp>
         <p:nvSpPr>
-          <p:cNvPr id="143" name="PlaceHolder 1"/>
+          <p:cNvPr id="145" name="PlaceHolder 1"/>
           <p:cNvSpPr>
             <a:spLocks noGrp="1"/>
           </p:cNvSpPr>
@@ -1219,7 +1220,7 @@
       </p:sp>
       <p:sp>
         <p:nvSpPr>
-          <p:cNvPr id="144" name="PlaceHolder 2"/>
+          <p:cNvPr id="146" name="PlaceHolder 2"/>
           <p:cNvSpPr>
             <a:spLocks noGrp="1"/>
           </p:cNvSpPr>
@@ -1259,7 +1260,7 @@
       </p:sp>
       <p:sp>
         <p:nvSpPr>
-          <p:cNvPr id="145" name="PlaceHolder 3"/>
+          <p:cNvPr id="147" name="PlaceHolder 3"/>
           <p:cNvSpPr>
             <a:spLocks noGrp="1"/>
           </p:cNvSpPr>
@@ -1312,7 +1313,7 @@
                 <a:tab algn="l" pos="0"/>
               </a:tabLst>
             </a:pPr>
-            <a:fld id="{EEAC5DE2-9359-46B8-A52F-2AE321628AED}" type="slidenum">
+            <a:fld id="{427F4391-13F3-4CF6-BD13-9D9236B690DF}" type="slidenum">
               <a:rPr b="0" lang="en-IN" sz="1200" spc="-1" strike="noStrike">
                 <a:solidFill>
                   <a:schemeClr val="dk1"/>
@@ -1355,7 +1356,7 @@
       </p:grpSpPr>
       <p:sp>
         <p:nvSpPr>
-          <p:cNvPr id="107" name="PlaceHolder 1"/>
+          <p:cNvPr id="109" name="PlaceHolder 1"/>
           <p:cNvSpPr>
             <a:spLocks noGrp="1"/>
           </p:cNvSpPr>
@@ -1378,7 +1379,7 @@
       </p:sp>
       <p:sp>
         <p:nvSpPr>
-          <p:cNvPr id="108" name="PlaceHolder 2"/>
+          <p:cNvPr id="110" name="PlaceHolder 2"/>
           <p:cNvSpPr>
             <a:spLocks noGrp="1"/>
           </p:cNvSpPr>
@@ -1418,7 +1419,7 @@
       </p:sp>
       <p:sp>
         <p:nvSpPr>
-          <p:cNvPr id="109" name="PlaceHolder 3"/>
+          <p:cNvPr id="111" name="PlaceHolder 3"/>
           <p:cNvSpPr>
             <a:spLocks noGrp="1"/>
           </p:cNvSpPr>
@@ -1471,7 +1472,7 @@
                 <a:tab algn="l" pos="0"/>
               </a:tabLst>
             </a:pPr>
-            <a:fld id="{6E699AA3-FC08-48CB-981A-224BE5FD29EB}" type="slidenum">
+            <a:fld id="{49FAF096-5417-45C7-87B0-BF606C38F0D6}" type="slidenum">
               <a:rPr b="0" lang="en-IN" sz="1200" spc="-1" strike="noStrike">
                 <a:solidFill>
                   <a:schemeClr val="dk1"/>
@@ -1479,7 +1480,7 @@
                 <a:latin typeface="Calibri"/>
                 <a:ea typeface="Calibri"/>
               </a:rPr>
-              <a:t>15</a:t>
+              <a:t>16</a:t>
             </a:fld>
             <a:endParaRPr b="0" lang="en-US" sz="1200" spc="-1" strike="noStrike">
               <a:solidFill>
@@ -1514,7 +1515,7 @@
       </p:grpSpPr>
       <p:sp>
         <p:nvSpPr>
-          <p:cNvPr id="110" name="PlaceHolder 1"/>
+          <p:cNvPr id="112" name="PlaceHolder 1"/>
           <p:cNvSpPr>
             <a:spLocks noGrp="1"/>
           </p:cNvSpPr>
@@ -1537,7 +1538,7 @@
       </p:sp>
       <p:sp>
         <p:nvSpPr>
-          <p:cNvPr id="111" name="PlaceHolder 2"/>
+          <p:cNvPr id="113" name="PlaceHolder 2"/>
           <p:cNvSpPr>
             <a:spLocks noGrp="1"/>
           </p:cNvSpPr>
@@ -1577,7 +1578,7 @@
       </p:sp>
       <p:sp>
         <p:nvSpPr>
-          <p:cNvPr id="112" name="PlaceHolder 3"/>
+          <p:cNvPr id="114" name="PlaceHolder 3"/>
           <p:cNvSpPr>
             <a:spLocks noGrp="1"/>
           </p:cNvSpPr>
@@ -1630,7 +1631,7 @@
                 <a:tab algn="l" pos="0"/>
               </a:tabLst>
             </a:pPr>
-            <a:fld id="{AE5ACA20-D7DA-4C98-BC77-1EE580544B92}" type="slidenum">
+            <a:fld id="{74782664-25ED-4922-BF9F-E4D63252DC7E}" type="slidenum">
               <a:rPr b="0" lang="en-IN" sz="1200" spc="-1" strike="noStrike">
                 <a:solidFill>
                   <a:schemeClr val="dk1"/>
@@ -1638,7 +1639,7 @@
                 <a:latin typeface="Calibri"/>
                 <a:ea typeface="Calibri"/>
               </a:rPr>
-              <a:t>15</a:t>
+              <a:t>16</a:t>
             </a:fld>
             <a:endParaRPr b="0" lang="en-US" sz="1200" spc="-1" strike="noStrike">
               <a:solidFill>
@@ -1673,7 +1674,7 @@
       </p:grpSpPr>
       <p:sp>
         <p:nvSpPr>
-          <p:cNvPr id="113" name="PlaceHolder 1"/>
+          <p:cNvPr id="115" name="PlaceHolder 1"/>
           <p:cNvSpPr>
             <a:spLocks noGrp="1"/>
           </p:cNvSpPr>
@@ -1696,7 +1697,7 @@
       </p:sp>
       <p:sp>
         <p:nvSpPr>
-          <p:cNvPr id="114" name="PlaceHolder 2"/>
+          <p:cNvPr id="116" name="PlaceHolder 2"/>
           <p:cNvSpPr>
             <a:spLocks noGrp="1"/>
           </p:cNvSpPr>
@@ -1736,7 +1737,7 @@
       </p:sp>
       <p:sp>
         <p:nvSpPr>
-          <p:cNvPr id="115" name="PlaceHolder 3"/>
+          <p:cNvPr id="117" name="PlaceHolder 3"/>
           <p:cNvSpPr>
             <a:spLocks noGrp="1"/>
           </p:cNvSpPr>
@@ -1789,7 +1790,7 @@
                 <a:tab algn="l" pos="0"/>
               </a:tabLst>
             </a:pPr>
-            <a:fld id="{39A20EFD-4B1A-4962-A9F3-1A96B716B0EA}" type="slidenum">
+            <a:fld id="{61B6BE06-27CD-4E82-8052-2309237C1A5D}" type="slidenum">
               <a:rPr b="0" lang="en-IN" sz="1200" spc="-1" strike="noStrike">
                 <a:solidFill>
                   <a:schemeClr val="dk1"/>
@@ -1797,7 +1798,7 @@
                 <a:latin typeface="Calibri"/>
                 <a:ea typeface="Calibri"/>
               </a:rPr>
-              <a:t>15</a:t>
+              <a:t>16</a:t>
             </a:fld>
             <a:endParaRPr b="0" lang="en-US" sz="1200" spc="-1" strike="noStrike">
               <a:solidFill>
@@ -1832,7 +1833,7 @@
       </p:grpSpPr>
       <p:sp>
         <p:nvSpPr>
-          <p:cNvPr id="116" name="PlaceHolder 1"/>
+          <p:cNvPr id="118" name="PlaceHolder 1"/>
           <p:cNvSpPr>
             <a:spLocks noGrp="1"/>
           </p:cNvSpPr>
@@ -1855,7 +1856,7 @@
       </p:sp>
       <p:sp>
         <p:nvSpPr>
-          <p:cNvPr id="117" name="PlaceHolder 2"/>
+          <p:cNvPr id="119" name="PlaceHolder 2"/>
           <p:cNvSpPr>
             <a:spLocks noGrp="1"/>
           </p:cNvSpPr>
@@ -1895,7 +1896,7 @@
       </p:sp>
       <p:sp>
         <p:nvSpPr>
-          <p:cNvPr id="118" name="PlaceHolder 3"/>
+          <p:cNvPr id="120" name="PlaceHolder 3"/>
           <p:cNvSpPr>
             <a:spLocks noGrp="1"/>
           </p:cNvSpPr>
@@ -1948,7 +1949,7 @@
                 <a:tab algn="l" pos="0"/>
               </a:tabLst>
             </a:pPr>
-            <a:fld id="{EF5B9C8A-91F9-4A6C-AE8E-29DDE00D2AD5}" type="slidenum">
+            <a:fld id="{2B0ED760-A3E6-4F52-A45E-1A8C0A853AA5}" type="slidenum">
               <a:rPr b="0" lang="en-IN" sz="1200" spc="-1" strike="noStrike">
                 <a:solidFill>
                   <a:schemeClr val="dk1"/>
@@ -1956,7 +1957,7 @@
                 <a:latin typeface="Calibri"/>
                 <a:ea typeface="Calibri"/>
               </a:rPr>
-              <a:t>15</a:t>
+              <a:t>16</a:t>
             </a:fld>
             <a:endParaRPr b="0" lang="en-US" sz="1200" spc="-1" strike="noStrike">
               <a:solidFill>
@@ -1991,7 +1992,7 @@
       </p:grpSpPr>
       <p:sp>
         <p:nvSpPr>
-          <p:cNvPr id="119" name="PlaceHolder 1"/>
+          <p:cNvPr id="121" name="PlaceHolder 1"/>
           <p:cNvSpPr>
             <a:spLocks noGrp="1"/>
           </p:cNvSpPr>
@@ -2014,7 +2015,7 @@
       </p:sp>
       <p:sp>
         <p:nvSpPr>
-          <p:cNvPr id="120" name="PlaceHolder 2"/>
+          <p:cNvPr id="122" name="PlaceHolder 2"/>
           <p:cNvSpPr>
             <a:spLocks noGrp="1"/>
           </p:cNvSpPr>
@@ -2054,7 +2055,7 @@
       </p:sp>
       <p:sp>
         <p:nvSpPr>
-          <p:cNvPr id="121" name="PlaceHolder 3"/>
+          <p:cNvPr id="123" name="PlaceHolder 3"/>
           <p:cNvSpPr>
             <a:spLocks noGrp="1"/>
           </p:cNvSpPr>
@@ -2107,7 +2108,7 @@
                 <a:tab algn="l" pos="0"/>
               </a:tabLst>
             </a:pPr>
-            <a:fld id="{AE44A4A0-9951-4E20-B330-6A1583F89B2C}" type="slidenum">
+            <a:fld id="{EA3473BD-C3FB-4B13-8CE2-CC9B20E66B0F}" type="slidenum">
               <a:rPr b="0" lang="en-IN" sz="1200" spc="-1" strike="noStrike">
                 <a:solidFill>
                   <a:schemeClr val="dk1"/>
@@ -2115,7 +2116,7 @@
                 <a:latin typeface="Calibri"/>
                 <a:ea typeface="Calibri"/>
               </a:rPr>
-              <a:t>15</a:t>
+              <a:t>16</a:t>
             </a:fld>
             <a:endParaRPr b="0" lang="en-US" sz="1200" spc="-1" strike="noStrike">
               <a:solidFill>
@@ -2150,7 +2151,7 @@
       </p:grpSpPr>
       <p:sp>
         <p:nvSpPr>
-          <p:cNvPr id="122" name="PlaceHolder 1"/>
+          <p:cNvPr id="124" name="PlaceHolder 1"/>
           <p:cNvSpPr>
             <a:spLocks noGrp="1"/>
           </p:cNvSpPr>
@@ -2173,7 +2174,7 @@
       </p:sp>
       <p:sp>
         <p:nvSpPr>
-          <p:cNvPr id="123" name="PlaceHolder 2"/>
+          <p:cNvPr id="125" name="PlaceHolder 2"/>
           <p:cNvSpPr>
             <a:spLocks noGrp="1"/>
           </p:cNvSpPr>
@@ -2213,7 +2214,7 @@
       </p:sp>
       <p:sp>
         <p:nvSpPr>
-          <p:cNvPr id="124" name="PlaceHolder 3"/>
+          <p:cNvPr id="126" name="PlaceHolder 3"/>
           <p:cNvSpPr>
             <a:spLocks noGrp="1"/>
           </p:cNvSpPr>
@@ -2266,7 +2267,7 @@
                 <a:tab algn="l" pos="0"/>
               </a:tabLst>
             </a:pPr>
-            <a:fld id="{205B9B68-B77E-40F6-91A0-1215353689F8}" type="slidenum">
+            <a:fld id="{6B626A81-CC1E-4916-A536-FBE1ECF135F3}" type="slidenum">
               <a:rPr b="0" lang="en-IN" sz="1200" spc="-1" strike="noStrike">
                 <a:solidFill>
                   <a:schemeClr val="dk1"/>
@@ -2274,7 +2275,7 @@
                 <a:latin typeface="Calibri"/>
                 <a:ea typeface="Calibri"/>
               </a:rPr>
-              <a:t>15</a:t>
+              <a:t>16</a:t>
             </a:fld>
             <a:endParaRPr b="0" lang="en-US" sz="1200" spc="-1" strike="noStrike">
               <a:solidFill>
@@ -2309,7 +2310,7 @@
       </p:grpSpPr>
       <p:sp>
         <p:nvSpPr>
-          <p:cNvPr id="125" name="PlaceHolder 1"/>
+          <p:cNvPr id="127" name="PlaceHolder 1"/>
           <p:cNvSpPr>
             <a:spLocks noGrp="1"/>
           </p:cNvSpPr>
@@ -2332,7 +2333,7 @@
       </p:sp>
       <p:sp>
         <p:nvSpPr>
-          <p:cNvPr id="126" name="PlaceHolder 2"/>
+          <p:cNvPr id="128" name="PlaceHolder 2"/>
           <p:cNvSpPr>
             <a:spLocks noGrp="1"/>
           </p:cNvSpPr>
@@ -2372,7 +2373,7 @@
       </p:sp>
       <p:sp>
         <p:nvSpPr>
-          <p:cNvPr id="127" name="PlaceHolder 3"/>
+          <p:cNvPr id="129" name="PlaceHolder 3"/>
           <p:cNvSpPr>
             <a:spLocks noGrp="1"/>
           </p:cNvSpPr>
@@ -2425,7 +2426,7 @@
                 <a:tab algn="l" pos="0"/>
               </a:tabLst>
             </a:pPr>
-            <a:fld id="{1834A404-737D-4474-B349-7A3B96F58ABB}" type="slidenum">
+            <a:fld id="{1AFD1CB9-6783-4087-BBEA-DF7D8180BA06}" type="slidenum">
               <a:rPr b="0" lang="en-IN" sz="1200" spc="-1" strike="noStrike">
                 <a:solidFill>
                   <a:schemeClr val="dk1"/>
@@ -2433,7 +2434,7 @@
                 <a:latin typeface="Calibri"/>
                 <a:ea typeface="Calibri"/>
               </a:rPr>
-              <a:t>15</a:t>
+              <a:t>16</a:t>
             </a:fld>
             <a:endParaRPr b="0" lang="en-US" sz="1200" spc="-1" strike="noStrike">
               <a:solidFill>
@@ -2480,7 +2481,7 @@
         <p:txBody>
           <a:bodyPr/>
           <a:p>
-            <a:fld id="{E1EBD854-F1F0-4562-A1F6-98A328F32DD6}" type="slidenum">
+            <a:fld id="{CC81E020-81D9-4B00-B018-3A9FDCB64EFA}" type="slidenum">
               <a:t>&lt;#&gt;</a:t>
             </a:fld>
           </a:p>
@@ -2522,7 +2523,7 @@
         <p:txBody>
           <a:bodyPr/>
           <a:p>
-            <a:fld id="{CF755A33-6896-4697-9BAA-B2D5E1B5B3BD}" type="slidenum">
+            <a:fld id="{5C7E0DAD-7B48-4D3E-A1F6-DCD6212DFF55}" type="slidenum">
               <a:t>&lt;#&gt;</a:t>
             </a:fld>
           </a:p>
@@ -2564,7 +2565,7 @@
         <p:txBody>
           <a:bodyPr/>
           <a:p>
-            <a:fld id="{C1FD31F2-FD3C-4513-AD3D-84F09F801B4A}" type="slidenum">
+            <a:fld id="{A19D0530-5380-4BA3-8095-2BF2642B55F5}" type="slidenum">
               <a:t>&lt;#&gt;</a:t>
             </a:fld>
           </a:p>
@@ -2606,7 +2607,7 @@
         <p:txBody>
           <a:bodyPr/>
           <a:p>
-            <a:fld id="{F8F4CCA8-DF2B-40E9-9D8C-6388AF31E82F}" type="slidenum">
+            <a:fld id="{FFA37664-17DD-4853-B64B-A2663B9CB5B7}" type="slidenum">
               <a:t>&lt;#&gt;</a:t>
             </a:fld>
           </a:p>
@@ -2648,7 +2649,7 @@
         <p:txBody>
           <a:bodyPr/>
           <a:p>
-            <a:fld id="{C8776463-8338-45D5-B1E4-38C5A14A6CB3}" type="slidenum">
+            <a:fld id="{39222588-7862-431E-BB45-1179D94A2E75}" type="slidenum">
               <a:t>&lt;#&gt;</a:t>
             </a:fld>
           </a:p>
@@ -2773,7 +2774,7 @@
         <p:txBody>
           <a:bodyPr/>
           <a:p>
-            <a:fld id="{3C250CA8-03B6-4EA3-BEC5-20D232EFA0F5}" type="slidenum">
+            <a:fld id="{59E00233-B5C6-4A5E-AE2E-F6559CA03E6F}" type="slidenum">
               <a:t>&lt;#&gt;</a:t>
             </a:fld>
           </a:p>
@@ -3273,7 +3274,7 @@
                 <a:tab algn="l" pos="0"/>
               </a:tabLst>
             </a:pPr>
-            <a:fld id="{F37EBB23-38F6-476C-B41B-0D02B77D5F35}" type="slidenum">
+            <a:fld id="{E98D9C2B-8AA4-4C13-B0BC-BF597E9EB94E}" type="slidenum">
               <a:rPr b="0" lang="en-IN" sz="2200" spc="-1" strike="noStrike">
                 <a:solidFill>
                   <a:schemeClr val="dk2"/>
@@ -3330,7 +3331,70 @@
                 </a:solidFill>
                 <a:latin typeface="Arial"/>
               </a:rPr>
-              <a:t>Click to edit the title text format</a:t>
+              <a:t>Clic</a:t>
+            </a:r>
+            <a:r>
+              <a:rPr b="0" lang="en-US" sz="4400" spc="-1" strike="noStrike">
+                <a:solidFill>
+                  <a:srgbClr val="000000"/>
+                </a:solidFill>
+                <a:latin typeface="Arial"/>
+              </a:rPr>
+              <a:t>k to </a:t>
+            </a:r>
+            <a:r>
+              <a:rPr b="0" lang="en-US" sz="4400" spc="-1" strike="noStrike">
+                <a:solidFill>
+                  <a:srgbClr val="000000"/>
+                </a:solidFill>
+                <a:latin typeface="Arial"/>
+              </a:rPr>
+              <a:t>edit </a:t>
+            </a:r>
+            <a:r>
+              <a:rPr b="0" lang="en-US" sz="4400" spc="-1" strike="noStrike">
+                <a:solidFill>
+                  <a:srgbClr val="000000"/>
+                </a:solidFill>
+                <a:latin typeface="Arial"/>
+              </a:rPr>
+              <a:t>the </a:t>
+            </a:r>
+            <a:r>
+              <a:rPr b="0" lang="en-US" sz="4400" spc="-1" strike="noStrike">
+                <a:solidFill>
+                  <a:srgbClr val="000000"/>
+                </a:solidFill>
+                <a:latin typeface="Arial"/>
+              </a:rPr>
+              <a:t>title </a:t>
+            </a:r>
+            <a:r>
+              <a:rPr b="0" lang="en-US" sz="4400" spc="-1" strike="noStrike">
+                <a:solidFill>
+                  <a:srgbClr val="000000"/>
+                </a:solidFill>
+                <a:latin typeface="Arial"/>
+              </a:rPr>
+              <a:t>text </a:t>
+            </a:r>
+            <a:r>
+              <a:rPr b="0" lang="en-US" sz="4400" spc="-1" strike="noStrike">
+                <a:solidFill>
+                  <a:srgbClr val="000000"/>
+                </a:solidFill>
+                <a:latin typeface="Arial"/>
+              </a:rPr>
+              <a:t>for</a:t>
+            </a:r>
+            <a:r>
+              <a:rPr b="0" lang="en-US" sz="4400" spc="-1" strike="noStrike">
+                <a:solidFill>
+                  <a:srgbClr val="000000"/>
+                </a:solidFill>
+                <a:latin typeface="Arial"/>
+              </a:rPr>
+              <a:t>mat</a:t>
             </a:r>
             <a:endParaRPr b="0" lang="en-US" sz="4400" spc="-1" strike="noStrike">
               <a:solidFill>
@@ -3701,7 +3765,7 @@
                 <a:tab algn="l" pos="0"/>
               </a:tabLst>
             </a:pPr>
-            <a:fld id="{FF1A6B72-22A9-4931-8CE8-D4F9FB5BB0BF}" type="slidenum">
+            <a:fld id="{7C21F9C5-EF1C-4A65-915D-8421512D4BBF}" type="slidenum">
               <a:rPr b="0" lang="en-IN" sz="2200" spc="-1" strike="noStrike">
                 <a:solidFill>
                   <a:schemeClr val="dk2"/>
@@ -3855,7 +3919,7 @@
                 <a:tab algn="l" pos="0"/>
               </a:tabLst>
             </a:pPr>
-            <a:fld id="{E527A81D-96F8-4DD0-B7CF-F66144E374EB}" type="slidenum">
+            <a:fld id="{1EF799C1-9C2A-44A5-B585-18068E698C08}" type="slidenum">
               <a:rPr b="0" lang="en-IN" sz="2200" spc="-1" strike="noStrike">
                 <a:solidFill>
                   <a:schemeClr val="dk2"/>
@@ -4009,7 +4073,7 @@
                 <a:tab algn="l" pos="0"/>
               </a:tabLst>
             </a:pPr>
-            <a:fld id="{2F352170-CA63-4AD9-A16A-DC442286BB5E}" type="slidenum">
+            <a:fld id="{FF632869-88ED-4621-BF11-29C45D7BA7D7}" type="slidenum">
               <a:rPr b="0" lang="en-IN" sz="2200" spc="-1" strike="noStrike">
                 <a:solidFill>
                   <a:schemeClr val="dk2"/>
@@ -4163,7 +4227,7 @@
                 <a:tab algn="l" pos="0"/>
               </a:tabLst>
             </a:pPr>
-            <a:fld id="{145B6EFE-645E-450A-B869-C831E8B6C35A}" type="slidenum">
+            <a:fld id="{1C5DF5CA-E1D5-4D90-86D2-B3421018F798}" type="slidenum">
               <a:rPr b="0" lang="en-IN" sz="2200" spc="-1" strike="noStrike">
                 <a:solidFill>
                   <a:schemeClr val="dk2"/>
@@ -4591,7 +4655,7 @@
                 <a:tab algn="l" pos="0"/>
               </a:tabLst>
             </a:pPr>
-            <a:fld id="{10A7EF6A-EBB7-40D9-A8AC-0E0B5B22F270}" type="slidenum">
+            <a:fld id="{E3473B71-CE2F-4529-94B2-5F24FA1A8305}" type="slidenum">
               <a:rPr b="0" lang="en-IN" sz="2200" spc="-1" strike="noStrike">
                 <a:solidFill>
                   <a:schemeClr val="dk2"/>
@@ -5167,7 +5231,7 @@
                 <a:tab algn="l" pos="0"/>
               </a:tabLst>
             </a:pPr>
-            <a:fld id="{614257D6-F296-4839-A0EF-FA47E67326A2}" type="slidenum">
+            <a:fld id="{39806F76-F5B4-461F-94DD-D7B344B9AE31}" type="slidenum">
               <a:rPr b="0" lang="en-IN" sz="2200" spc="-1" strike="noStrike">
                 <a:solidFill>
                   <a:schemeClr val="dk2"/>
@@ -5691,7 +5755,7 @@
                 <a:tab algn="l" pos="0"/>
               </a:tabLst>
             </a:pPr>
-            <a:fld id="{C21E1FC2-ACCB-48BE-BA0F-4926BA0A0E0B}" type="slidenum">
+            <a:fld id="{7035FA7D-A95F-40EC-9168-036FD17DECA0}" type="slidenum">
               <a:rPr b="0" lang="en-IN" sz="2200" spc="-1" strike="noStrike">
                 <a:solidFill>
                   <a:schemeClr val="dk2"/>
@@ -6295,7 +6359,7 @@
                 <a:tab algn="l" pos="0"/>
               </a:tabLst>
             </a:pPr>
-            <a:fld id="{F57ABCE5-FF0D-46EE-8320-A770525BD382}" type="slidenum">
+            <a:fld id="{6150BF2C-B353-43FC-8759-A65B641D4266}" type="slidenum">
               <a:rPr b="0" lang="en-IN" sz="2200" spc="-1" strike="noStrike">
                 <a:solidFill>
                   <a:schemeClr val="dk2"/>
@@ -6982,7 +7046,7 @@
                 <a:tab algn="l" pos="0"/>
               </a:tabLst>
             </a:pPr>
-            <a:fld id="{FF256091-EEFC-4B56-A444-47C2A1931564}" type="slidenum">
+            <a:fld id="{87276BB9-2B25-458C-AFD2-27AD11E6791A}" type="slidenum">
               <a:rPr b="0" lang="en-IN" sz="2200" spc="-1" strike="noStrike">
                 <a:solidFill>
                   <a:schemeClr val="dk2"/>
@@ -7650,7 +7714,7 @@
                 <a:tab algn="l" pos="0"/>
               </a:tabLst>
             </a:pPr>
-            <a:fld id="{F954FF66-709C-4EC1-837C-2D3A83206F49}" type="slidenum">
+            <a:fld id="{6139BE90-E2DC-410D-A1C7-3D213D30990F}" type="slidenum">
               <a:rPr b="0" lang="en-IN" sz="2200" spc="-1" strike="noStrike">
                 <a:solidFill>
                   <a:schemeClr val="dk2"/>
@@ -7822,9 +7886,105 @@
           <a:chExt cx="0" cy="0"/>
         </a:xfrm>
       </p:grpSpPr>
+      <p:pic>
+        <p:nvPicPr>
+          <p:cNvPr id="97" name="" descr=""/>
+          <p:cNvPicPr/>
+          <p:nvPr/>
+        </p:nvPicPr>
+        <p:blipFill>
+          <a:blip r:embed="rId1"/>
+          <a:stretch/>
+        </p:blipFill>
+        <p:spPr>
+          <a:xfrm>
+            <a:off x="4401360" y="2286000"/>
+            <a:ext cx="10700280" cy="7533000"/>
+          </a:xfrm>
+          <a:prstGeom prst="rect">
+            <a:avLst/>
+          </a:prstGeom>
+          <a:ln w="0">
+            <a:noFill/>
+          </a:ln>
+        </p:spPr>
+      </p:pic>
       <p:sp>
         <p:nvSpPr>
-          <p:cNvPr id="97" name="Google Shape;157;p14"/>
+          <p:cNvPr id="98" name=""/>
+          <p:cNvSpPr txBox="1"/>
+          <p:nvPr/>
+        </p:nvSpPr>
+        <p:spPr>
+          <a:xfrm>
+            <a:off x="8121240" y="10092240"/>
+            <a:ext cx="3237840" cy="653040"/>
+          </a:xfrm>
+          <a:prstGeom prst="rect">
+            <a:avLst/>
+          </a:prstGeom>
+          <a:noFill/>
+          <a:ln w="0">
+            <a:noFill/>
+          </a:ln>
+        </p:spPr>
+        <p:txBody>
+          <a:bodyPr lIns="90000" rIns="90000" tIns="45000" bIns="45000" anchor="t">
+            <a:noAutofit/>
+          </a:bodyPr>
+          <a:p>
+            <a:r>
+              <a:rPr b="0" lang="en-IN" sz="4000" spc="-1" strike="noStrike">
+                <a:solidFill>
+                  <a:srgbClr val="000000"/>
+                </a:solidFill>
+                <a:latin typeface="Times New Roman"/>
+                <a:ea typeface="Times New Roman"/>
+              </a:rPr>
+              <a:t>DFD – Level 1</a:t>
+            </a:r>
+            <a:endParaRPr b="0" lang="en-US" sz="4000" spc="-1" strike="noStrike">
+              <a:solidFill>
+                <a:srgbClr val="000000"/>
+              </a:solidFill>
+              <a:latin typeface="Arial"/>
+            </a:endParaRPr>
+          </a:p>
+        </p:txBody>
+      </p:sp>
+    </p:spTree>
+  </p:cSld>
+  <mc:AlternateContent>
+    <mc:Choice Requires="p14">
+      <p:transition spd="slow" p14:dur="2000"/>
+    </mc:Choice>
+    <mc:Fallback>
+      <p:transition spd="slow"/>
+    </mc:Fallback>
+  </mc:AlternateContent>
+</p:sld>
+</file>
+
+<file path=ppt/slides/slide15.xml><?xml version="1.0" encoding="utf-8"?>
+<p:sld xmlns:a="http://schemas.openxmlformats.org/drawingml/2006/main" xmlns:p="http://schemas.openxmlformats.org/presentationml/2006/main" xmlns:r="http://schemas.openxmlformats.org/officeDocument/2006/relationships" xmlns:p14="http://schemas.microsoft.com/office/powerpoint/2010/main" xmlns:p15="http://schemas.microsoft.com/office/powerpoint/2012/main" xmlns:mc="http://schemas.openxmlformats.org/markup-compatibility/2006">
+  <p:cSld>
+    <p:spTree>
+      <p:nvGrpSpPr>
+        <p:cNvPr id="1" name=""/>
+        <p:cNvGrpSpPr/>
+        <p:nvPr/>
+      </p:nvGrpSpPr>
+      <p:grpSpPr>
+        <a:xfrm>
+          <a:off x="0" y="0"/>
+          <a:ext cx="0" cy="0"/>
+          <a:chOff x="0" y="0"/>
+          <a:chExt cx="0" cy="0"/>
+        </a:xfrm>
+      </p:grpSpPr>
+      <p:sp>
+        <p:nvSpPr>
+          <p:cNvPr id="99" name="Google Shape;157;p14"/>
           <p:cNvSpPr/>
           <p:nvPr/>
         </p:nvSpPr>
@@ -8010,7 +8170,7 @@
       </p:sp>
       <p:sp>
         <p:nvSpPr>
-          <p:cNvPr id="98" name="Google Shape;158;p14"/>
+          <p:cNvPr id="100" name="Google Shape;158;p14"/>
           <p:cNvSpPr/>
           <p:nvPr/>
         </p:nvSpPr>
@@ -8187,7 +8347,7 @@
       </p:sp>
       <p:sp>
         <p:nvSpPr>
-          <p:cNvPr id="99" name="PlaceHolder 1"/>
+          <p:cNvPr id="101" name="PlaceHolder 1"/>
           <p:cNvSpPr>
             <a:spLocks noGrp="1"/>
           </p:cNvSpPr>
@@ -8240,7 +8400,7 @@
                 <a:tab algn="l" pos="0"/>
               </a:tabLst>
             </a:pPr>
-            <a:fld id="{DA09E36F-8326-4863-B59C-AD80DD699D4A}" type="slidenum">
+            <a:fld id="{3D36BBDB-F57E-435A-8E8A-9C340A24C99F}" type="slidenum">
               <a:rPr b="0" lang="en-IN" sz="2200" spc="-1" strike="noStrike">
                 <a:solidFill>
                   <a:schemeClr val="dk2"/>
@@ -8248,7 +8408,7 @@
                 <a:latin typeface="Arial"/>
                 <a:ea typeface="Arial"/>
               </a:rPr>
-              <a:t>14</a:t>
+              <a:t>15</a:t>
             </a:fld>
             <a:endParaRPr b="0" lang="en-US" sz="2200" spc="-1" strike="noStrike">
               <a:solidFill>
@@ -8261,7 +8421,7 @@
       </p:sp>
       <p:sp>
         <p:nvSpPr>
-          <p:cNvPr id="100" name="Google Shape;161;p14"/>
+          <p:cNvPr id="102" name="Google Shape;161;p14"/>
           <p:cNvSpPr/>
           <p:nvPr/>
         </p:nvSpPr>
@@ -8318,7 +8478,7 @@
       </p:sp>
       <p:sp>
         <p:nvSpPr>
-          <p:cNvPr id="101" name=""/>
+          <p:cNvPr id="103" name=""/>
           <p:cNvSpPr txBox="1"/>
           <p:nvPr/>
         </p:nvSpPr>
@@ -8364,16 +8524,7 @@
                 </a:solidFill>
                 <a:latin typeface="Arial"/>
               </a:rPr>
-              <a:t>Design and selection of all hardware components (ESP32, LoRa, GPS, </a:t>
-            </a:r>
-            <a:r>
-              <a:rPr b="0" lang="en-US" sz="2400" spc="-1" strike="noStrike">
-                <a:solidFill>
-                  <a:srgbClr val="000000"/>
-                </a:solidFill>
-                <a:latin typeface="Arial"/>
-              </a:rPr>
-              <a:t>BMP180, Li-ion battery)</a:t>
+              <a:t>Design and selection of all hardware components (ESP32, LoRa, GPS, BMP180, Li-ion battery)</a:t>
             </a:r>
             <a:endParaRPr b="0" lang="en-US" sz="2400" spc="-1" strike="noStrike">
               <a:solidFill>
@@ -8401,16 +8552,7 @@
                 </a:solidFill>
                 <a:latin typeface="Arial"/>
               </a:rPr>
-              <a:t>Initial web dashboard (Next.js) for user authentication, location display, </a:t>
-            </a:r>
-            <a:r>
-              <a:rPr b="0" lang="en-US" sz="2400" spc="-1" strike="noStrike">
-                <a:solidFill>
-                  <a:srgbClr val="000000"/>
-                </a:solidFill>
-                <a:latin typeface="Arial"/>
-              </a:rPr>
-              <a:t>and alert visualization</a:t>
+              <a:t>Initial web dashboard (Next.js) for user authentication, location display, and alert visualization</a:t>
             </a:r>
             <a:endParaRPr b="0" lang="en-US" sz="2400" spc="-1" strike="noStrike">
               <a:solidFill>
@@ -8460,16 +8602,7 @@
                 </a:solidFill>
                 <a:latin typeface="Arial"/>
               </a:rPr>
-              <a:t>Complete physical assembly and wiring of ESP32+LoRa+GPS+BME280 </a:t>
-            </a:r>
-            <a:r>
-              <a:rPr b="0" lang="en-US" sz="2400" spc="-1" strike="noStrike">
-                <a:solidFill>
-                  <a:srgbClr val="000000"/>
-                </a:solidFill>
-                <a:latin typeface="Arial"/>
-              </a:rPr>
-              <a:t>hardware nodes</a:t>
+              <a:t>Complete physical assembly and wiring of ESP32+LoRa+GPS+BME280 hardware nodes</a:t>
             </a:r>
             <a:endParaRPr b="0" lang="en-US" sz="2400" spc="-1" strike="noStrike">
               <a:solidFill>
@@ -8520,16 +8653,7 @@
                 </a:solidFill>
                 <a:latin typeface="Arial"/>
               </a:rPr>
-              <a:t>Enhance dashboard with historical data visualization and advanced </a:t>
-            </a:r>
-            <a:r>
-              <a:rPr b="0" lang="en-US" sz="2400" spc="-1" strike="noStrike">
-                <a:solidFill>
-                  <a:srgbClr val="000000"/>
-                </a:solidFill>
-                <a:latin typeface="Arial"/>
-              </a:rPr>
-              <a:t>filtering</a:t>
+              <a:t>Enhance dashboard with historical data visualization and advanced filtering</a:t>
             </a:r>
             <a:endParaRPr b="0" lang="en-US" sz="2400" spc="-1" strike="noStrike">
               <a:solidFill>
@@ -8586,7 +8710,7 @@
 </p:sld>
 </file>
 
-<file path=ppt/slides/slide15.xml><?xml version="1.0" encoding="utf-8"?>
+<file path=ppt/slides/slide16.xml><?xml version="1.0" encoding="utf-8"?>
 <p:sld xmlns:a="http://schemas.openxmlformats.org/drawingml/2006/main" xmlns:p="http://schemas.openxmlformats.org/presentationml/2006/main" xmlns:r="http://schemas.openxmlformats.org/officeDocument/2006/relationships" xmlns:p14="http://schemas.microsoft.com/office/powerpoint/2010/main" xmlns:p15="http://schemas.microsoft.com/office/powerpoint/2012/main" xmlns:mc="http://schemas.openxmlformats.org/markup-compatibility/2006">
   <p:cSld>
     <p:spTree>
@@ -8605,7 +8729,7 @@
       </p:grpSpPr>
       <p:sp>
         <p:nvSpPr>
-          <p:cNvPr id="102" name="Google Shape;167;p15"/>
+          <p:cNvPr id="104" name="Google Shape;167;p15"/>
           <p:cNvSpPr/>
           <p:nvPr/>
         </p:nvSpPr>
@@ -8791,7 +8915,7 @@
       </p:sp>
       <p:sp>
         <p:nvSpPr>
-          <p:cNvPr id="103" name="Google Shape;168;p15"/>
+          <p:cNvPr id="105" name="Google Shape;168;p15"/>
           <p:cNvSpPr/>
           <p:nvPr/>
         </p:nvSpPr>
@@ -8968,7 +9092,7 @@
       </p:sp>
       <p:sp>
         <p:nvSpPr>
-          <p:cNvPr id="104" name="PlaceHolder 1"/>
+          <p:cNvPr id="106" name="PlaceHolder 1"/>
           <p:cNvSpPr>
             <a:spLocks noGrp="1"/>
           </p:cNvSpPr>
@@ -9021,7 +9145,7 @@
                 <a:tab algn="l" pos="0"/>
               </a:tabLst>
             </a:pPr>
-            <a:fld id="{BB9037A7-D54E-40B9-9708-4AF207B40533}" type="slidenum">
+            <a:fld id="{CFEE2D88-EACB-4FA7-965A-916722DD006F}" type="slidenum">
               <a:rPr b="0" lang="en-IN" sz="2200" spc="-1" strike="noStrike">
                 <a:solidFill>
                   <a:schemeClr val="dk2"/>
@@ -9029,7 +9153,7 @@
                 <a:latin typeface="Arial"/>
                 <a:ea typeface="Arial"/>
               </a:rPr>
-              <a:t>15</a:t>
+              <a:t>16</a:t>
             </a:fld>
             <a:endParaRPr b="0" lang="en-US" sz="2200" spc="-1" strike="noStrike">
               <a:solidFill>
@@ -9042,7 +9166,7 @@
       </p:sp>
       <p:sp>
         <p:nvSpPr>
-          <p:cNvPr id="105" name="Google Shape;171;p15"/>
+          <p:cNvPr id="107" name="Google Shape;171;p15"/>
           <p:cNvSpPr/>
           <p:nvPr/>
         </p:nvSpPr>
@@ -9415,7 +9539,7 @@
       </p:sp>
       <p:sp>
         <p:nvSpPr>
-          <p:cNvPr id="106" name="Google Shape;172;p15"/>
+          <p:cNvPr id="108" name="Google Shape;172;p15"/>
           <p:cNvSpPr/>
           <p:nvPr/>
         </p:nvSpPr>
@@ -9950,7 +10074,7 @@
                 <a:tab algn="l" pos="0"/>
               </a:tabLst>
             </a:pPr>
-            <a:fld id="{7F19288D-7EF1-40F9-A29B-1F8B16773474}" type="slidenum">
+            <a:fld id="{6277AB44-203E-46BA-AB9D-503C16A6B319}" type="slidenum">
               <a:rPr b="0" lang="en-IN" sz="2200" spc="-1" strike="noStrike">
                 <a:solidFill>
                   <a:schemeClr val="dk2"/>
@@ -10785,7 +10909,7 @@
                 <a:tab algn="l" pos="0"/>
               </a:tabLst>
             </a:pPr>
-            <a:fld id="{2C316212-511F-4D1C-9522-B4F3CB0E0E24}" type="slidenum">
+            <a:fld id="{4ADA46FD-5D47-410D-A33F-B834D5B52679}" type="slidenum">
               <a:rPr b="0" lang="en-IN" sz="2200" spc="-1" strike="noStrike">
                 <a:solidFill>
                   <a:schemeClr val="dk2"/>
@@ -11504,7 +11628,7 @@
                 <a:tab algn="l" pos="0"/>
               </a:tabLst>
             </a:pPr>
-            <a:fld id="{23634088-AA61-45AF-A454-4E5E353E2471}" type="slidenum">
+            <a:fld id="{018A3EDE-5371-4C1F-A299-F916942699BE}" type="slidenum">
               <a:rPr b="0" lang="en-IN" sz="2200" spc="-1" strike="noStrike">
                 <a:solidFill>
                   <a:schemeClr val="dk2"/>
@@ -12649,7 +12773,7 @@
                 <a:tab algn="l" pos="0"/>
               </a:tabLst>
             </a:pPr>
-            <a:fld id="{CB81CA47-C83B-4106-AA21-3E977CCFEE8D}" type="slidenum">
+            <a:fld id="{C17D3A9D-CED7-4795-87B0-4A5B4EAD6C01}" type="slidenum">
               <a:rPr b="0" lang="en-IN" sz="2200" spc="-1" strike="noStrike">
                 <a:solidFill>
                   <a:schemeClr val="dk2"/>
@@ -15209,7 +15333,7 @@
                 <a:tab algn="l" pos="0"/>
               </a:tabLst>
             </a:pPr>
-            <a:fld id="{4653CB36-2552-4B8E-ABA2-15AC5097B9CB}" type="slidenum">
+            <a:fld id="{D3B93913-971E-42F0-836D-84DCB221511E}" type="slidenum">
               <a:rPr b="0" lang="en-IN" sz="2200" spc="-1" strike="noStrike">
                 <a:solidFill>
                   <a:schemeClr val="dk2"/>
@@ -16114,7 +16238,7 @@
                 <a:tab algn="l" pos="0"/>
               </a:tabLst>
             </a:pPr>
-            <a:fld id="{6C8583A0-9985-4D0F-8CC3-3C431D4EA0AD}" type="slidenum">
+            <a:fld id="{2A3B69BD-FDAC-4055-AC56-54A61F4125E3}" type="slidenum">
               <a:rPr b="0" lang="en-IN" sz="2200" spc="-1" strike="noStrike">
                 <a:solidFill>
                   <a:schemeClr val="dk2"/>
@@ -17018,7 +17142,7 @@
                 <a:tab algn="l" pos="0"/>
               </a:tabLst>
             </a:pPr>
-            <a:fld id="{91CF2D1E-82B9-4646-B3DD-26753FE787EB}" type="slidenum">
+            <a:fld id="{40C2A507-AC0B-41E1-95ED-14A1DD87B90A}" type="slidenum">
               <a:rPr b="0" lang="en-IN" sz="2200" spc="-1" strike="noStrike">
                 <a:solidFill>
                   <a:schemeClr val="dk2"/>

--- a/Phase II Major Project(1).pptx
+++ b/Phase II Major Project(1).pptx
@@ -29,6 +29,10 @@
     <p:sldId id="269" r:id="rId22"/>
     <p:sldId id="270" r:id="rId23"/>
     <p:sldId id="271" r:id="rId24"/>
+    <p:sldId id="272" r:id="rId25"/>
+    <p:sldId id="273" r:id="rId26"/>
+    <p:sldId id="274" r:id="rId27"/>
+    <p:sldId id="275" r:id="rId28"/>
   </p:sldIdLst>
   <p:sldSz cx="20104100" cy="11309350"/>
   <p:notesSz cx="20104100" cy="11309350"/>
@@ -359,7 +363,7 @@
             <a:pPr indent="0" algn="r">
               <a:buNone/>
             </a:pPr>
-            <a:fld id="{8D777BF7-3783-4F54-A3B4-A3D6D5FC4369}" type="slidenum">
+            <a:fld id="{30C02409-CF1C-4F77-A6CB-E73643DA2789}" type="slidenum">
               <a:rPr b="0" lang="en-US" sz="1400" spc="-1" strike="noStrike">
                 <a:solidFill>
                   <a:srgbClr val="000000"/>
@@ -402,7 +406,7 @@
       </p:grpSpPr>
       <p:sp>
         <p:nvSpPr>
-          <p:cNvPr id="130" name="PlaceHolder 1"/>
+          <p:cNvPr id="140" name="PlaceHolder 1"/>
           <p:cNvSpPr>
             <a:spLocks noGrp="1"/>
           </p:cNvSpPr>
@@ -413,7 +417,7 @@
         <p:spPr>
           <a:xfrm>
             <a:off x="6281640" y="847800"/>
-            <a:ext cx="7538760" cy="4240080"/>
+            <a:ext cx="7538040" cy="4239360"/>
           </a:xfrm>
           <a:prstGeom prst="rect">
             <a:avLst/>
@@ -425,7 +429,7 @@
       </p:sp>
       <p:sp>
         <p:nvSpPr>
-          <p:cNvPr id="131" name="PlaceHolder 2"/>
+          <p:cNvPr id="141" name="PlaceHolder 2"/>
           <p:cNvSpPr>
             <a:spLocks noGrp="1"/>
           </p:cNvSpPr>
@@ -436,7 +440,7 @@
         <p:spPr>
           <a:xfrm>
             <a:off x="2009880" y="5372280"/>
-            <a:ext cx="16082640" cy="5087880"/>
+            <a:ext cx="16081920" cy="5087160"/>
           </a:xfrm>
           <a:prstGeom prst="rect">
             <a:avLst/>
@@ -465,18 +469,18 @@
       </p:sp>
       <p:sp>
         <p:nvSpPr>
-          <p:cNvPr id="132" name="PlaceHolder 3"/>
+          <p:cNvPr id="142" name="PlaceHolder 3"/>
           <p:cNvSpPr>
             <a:spLocks noGrp="1"/>
           </p:cNvSpPr>
           <p:nvPr>
-            <p:ph type="sldNum" idx="31"/>
+            <p:ph type="sldNum" idx="30"/>
           </p:nvPr>
         </p:nvSpPr>
         <p:spPr>
           <a:xfrm>
             <a:off x="11387160" y="10742760"/>
-            <a:ext cx="8710560" cy="563400"/>
+            <a:ext cx="8709840" cy="562680"/>
           </a:xfrm>
           <a:prstGeom prst="rect">
             <a:avLst/>
@@ -518,7 +522,7 @@
                 <a:tab algn="l" pos="0"/>
               </a:tabLst>
             </a:pPr>
-            <a:fld id="{DC335C69-302C-4B30-B7B5-42966BB0BE18}" type="slidenum">
+            <a:fld id="{26A3EFD6-09F1-45A2-8AD6-54B0818EF629}" type="slidenum">
               <a:rPr b="0" lang="en-IN" sz="1200" spc="-1" strike="noStrike">
                 <a:solidFill>
                   <a:schemeClr val="dk1"/>
@@ -526,7 +530,7 @@
                 <a:latin typeface="Calibri"/>
                 <a:ea typeface="Calibri"/>
               </a:rPr>
-              <a:t>16</a:t>
+              <a:t>&lt;number&gt;</a:t>
             </a:fld>
             <a:endParaRPr b="0" lang="en-US" sz="1200" spc="-1" strike="noStrike">
               <a:solidFill>
@@ -561,7 +565,7 @@
       </p:grpSpPr>
       <p:sp>
         <p:nvSpPr>
-          <p:cNvPr id="133" name="PlaceHolder 1"/>
+          <p:cNvPr id="143" name="PlaceHolder 1"/>
           <p:cNvSpPr>
             <a:spLocks noGrp="1"/>
           </p:cNvSpPr>
@@ -572,7 +576,7 @@
         <p:spPr>
           <a:xfrm>
             <a:off x="6281640" y="847800"/>
-            <a:ext cx="7538760" cy="4240080"/>
+            <a:ext cx="7538040" cy="4239360"/>
           </a:xfrm>
           <a:prstGeom prst="rect">
             <a:avLst/>
@@ -584,7 +588,7 @@
       </p:sp>
       <p:sp>
         <p:nvSpPr>
-          <p:cNvPr id="134" name="PlaceHolder 2"/>
+          <p:cNvPr id="144" name="PlaceHolder 2"/>
           <p:cNvSpPr>
             <a:spLocks noGrp="1"/>
           </p:cNvSpPr>
@@ -595,7 +599,7 @@
         <p:spPr>
           <a:xfrm>
             <a:off x="2009880" y="5372280"/>
-            <a:ext cx="16082640" cy="5087880"/>
+            <a:ext cx="16081920" cy="5087160"/>
           </a:xfrm>
           <a:prstGeom prst="rect">
             <a:avLst/>
@@ -624,18 +628,18 @@
       </p:sp>
       <p:sp>
         <p:nvSpPr>
-          <p:cNvPr id="135" name="PlaceHolder 3"/>
+          <p:cNvPr id="145" name="PlaceHolder 3"/>
           <p:cNvSpPr>
             <a:spLocks noGrp="1"/>
           </p:cNvSpPr>
           <p:nvPr>
-            <p:ph type="sldNum" idx="32"/>
+            <p:ph type="sldNum" idx="31"/>
           </p:nvPr>
         </p:nvSpPr>
         <p:spPr>
           <a:xfrm>
             <a:off x="11387160" y="10742760"/>
-            <a:ext cx="8710560" cy="563400"/>
+            <a:ext cx="8709840" cy="562680"/>
           </a:xfrm>
           <a:prstGeom prst="rect">
             <a:avLst/>
@@ -677,484 +681,7 @@
                 <a:tab algn="l" pos="0"/>
               </a:tabLst>
             </a:pPr>
-            <a:fld id="{34A90B42-6C46-4961-AC36-74C8FE9B7606}" type="slidenum">
-              <a:rPr b="0" lang="en-IN" sz="1200" spc="-1" strike="noStrike">
-                <a:solidFill>
-                  <a:schemeClr val="dk1"/>
-                </a:solidFill>
-                <a:latin typeface="Calibri"/>
-                <a:ea typeface="Calibri"/>
-              </a:rPr>
-              <a:t>16</a:t>
-            </a:fld>
-            <a:endParaRPr b="0" lang="en-US" sz="1200" spc="-1" strike="noStrike">
-              <a:solidFill>
-                <a:srgbClr val="000000"/>
-              </a:solidFill>
-              <a:latin typeface="Times New Roman"/>
-            </a:endParaRPr>
-          </a:p>
-        </p:txBody>
-      </p:sp>
-    </p:spTree>
-  </p:cSld>
-</p:notes>
-</file>
-
-<file path=ppt/notesSlides/notesSlide12.xml><?xml version="1.0" encoding="utf-8"?>
-<p:notes xmlns:a="http://schemas.openxmlformats.org/drawingml/2006/main" xmlns:p="http://schemas.openxmlformats.org/presentationml/2006/main" xmlns:r="http://schemas.openxmlformats.org/officeDocument/2006/relationships" xmlns:p14="http://schemas.microsoft.com/office/powerpoint/2010/main" xmlns:p15="http://schemas.microsoft.com/office/powerpoint/2012/main" xmlns:mc="http://schemas.openxmlformats.org/markup-compatibility/2006">
-  <p:cSld>
-    <p:spTree>
-      <p:nvGrpSpPr>
-        <p:cNvPr id="1" name=""/>
-        <p:cNvGrpSpPr/>
-        <p:nvPr/>
-      </p:nvGrpSpPr>
-      <p:grpSpPr>
-        <a:xfrm>
-          <a:off x="0" y="0"/>
-          <a:ext cx="0" cy="0"/>
-          <a:chOff x="0" y="0"/>
-          <a:chExt cx="0" cy="0"/>
-        </a:xfrm>
-      </p:grpSpPr>
-      <p:sp>
-        <p:nvSpPr>
-          <p:cNvPr id="136" name="PlaceHolder 1"/>
-          <p:cNvSpPr>
-            <a:spLocks noGrp="1"/>
-          </p:cNvSpPr>
-          <p:nvPr>
-            <p:ph type="sldImg"/>
-          </p:nvPr>
-        </p:nvSpPr>
-        <p:spPr>
-          <a:xfrm>
-            <a:off x="6281640" y="847800"/>
-            <a:ext cx="7538760" cy="4240080"/>
-          </a:xfrm>
-          <a:prstGeom prst="rect">
-            <a:avLst/>
-          </a:prstGeom>
-          <a:ln w="0">
-            <a:noFill/>
-          </a:ln>
-        </p:spPr>
-      </p:sp>
-      <p:sp>
-        <p:nvSpPr>
-          <p:cNvPr id="137" name="PlaceHolder 2"/>
-          <p:cNvSpPr>
-            <a:spLocks noGrp="1"/>
-          </p:cNvSpPr>
-          <p:nvPr>
-            <p:ph type="body"/>
-          </p:nvPr>
-        </p:nvSpPr>
-        <p:spPr>
-          <a:xfrm>
-            <a:off x="2009880" y="5372280"/>
-            <a:ext cx="16082640" cy="5087880"/>
-          </a:xfrm>
-          <a:prstGeom prst="rect">
-            <a:avLst/>
-          </a:prstGeom>
-          <a:noFill/>
-          <a:ln w="0">
-            <a:noFill/>
-          </a:ln>
-        </p:spPr>
-        <p:txBody>
-          <a:bodyPr lIns="91440" rIns="91440" tIns="45720" bIns="45720" anchor="t">
-            <a:noAutofit/>
-          </a:bodyPr>
-          <a:p>
-            <a:pPr marL="216000" indent="-216000">
-              <a:buNone/>
-            </a:pPr>
-            <a:endParaRPr b="0" lang="en-US" sz="1800" spc="-1" strike="noStrike">
-              <a:solidFill>
-                <a:srgbClr val="000000"/>
-              </a:solidFill>
-              <a:latin typeface="Arial"/>
-            </a:endParaRPr>
-          </a:p>
-        </p:txBody>
-      </p:sp>
-      <p:sp>
-        <p:nvSpPr>
-          <p:cNvPr id="138" name="PlaceHolder 3"/>
-          <p:cNvSpPr>
-            <a:spLocks noGrp="1"/>
-          </p:cNvSpPr>
-          <p:nvPr>
-            <p:ph type="sldNum" idx="33"/>
-          </p:nvPr>
-        </p:nvSpPr>
-        <p:spPr>
-          <a:xfrm>
-            <a:off x="11387160" y="10742760"/>
-            <a:ext cx="8710560" cy="563400"/>
-          </a:xfrm>
-          <a:prstGeom prst="rect">
-            <a:avLst/>
-          </a:prstGeom>
-          <a:noFill/>
-          <a:ln w="0">
-            <a:noFill/>
-          </a:ln>
-        </p:spPr>
-        <p:txBody>
-          <a:bodyPr lIns="91440" rIns="91440" tIns="45720" bIns="45720" anchor="b">
-            <a:noAutofit/>
-          </a:bodyPr>
-          <a:lstStyle>
-            <a:lvl1pPr indent="0" algn="r">
-              <a:lnSpc>
-                <a:spcPct val="100000"/>
-              </a:lnSpc>
-              <a:buNone/>
-              <a:tabLst>
-                <a:tab algn="l" pos="0"/>
-              </a:tabLst>
-              <a:defRPr b="0" lang="en-IN" sz="1200" spc="-1" strike="noStrike">
-                <a:solidFill>
-                  <a:schemeClr val="dk1"/>
-                </a:solidFill>
-                <a:latin typeface="Calibri"/>
-                <a:ea typeface="Calibri"/>
-              </a:defRPr>
-            </a:lvl1pPr>
-          </a:lstStyle>
-          <a:p>
-            <a:pPr indent="0" algn="r">
-              <a:lnSpc>
-                <a:spcPct val="100000"/>
-              </a:lnSpc>
-              <a:buNone/>
-              <a:tabLst>
-                <a:tab algn="l" pos="0"/>
-              </a:tabLst>
-            </a:pPr>
-            <a:fld id="{287AAF89-22A4-47A0-B6B6-81187DC145EF}" type="slidenum">
-              <a:rPr b="0" lang="en-IN" sz="1200" spc="-1" strike="noStrike">
-                <a:solidFill>
-                  <a:schemeClr val="dk1"/>
-                </a:solidFill>
-                <a:latin typeface="Calibri"/>
-                <a:ea typeface="Calibri"/>
-              </a:rPr>
-              <a:t>16</a:t>
-            </a:fld>
-            <a:endParaRPr b="0" lang="en-US" sz="1200" spc="-1" strike="noStrike">
-              <a:solidFill>
-                <a:srgbClr val="000000"/>
-              </a:solidFill>
-              <a:latin typeface="Times New Roman"/>
-            </a:endParaRPr>
-          </a:p>
-        </p:txBody>
-      </p:sp>
-    </p:spTree>
-  </p:cSld>
-</p:notes>
-</file>
-
-<file path=ppt/notesSlides/notesSlide13.xml><?xml version="1.0" encoding="utf-8"?>
-<p:notes xmlns:a="http://schemas.openxmlformats.org/drawingml/2006/main" xmlns:p="http://schemas.openxmlformats.org/presentationml/2006/main" xmlns:r="http://schemas.openxmlformats.org/officeDocument/2006/relationships" xmlns:p14="http://schemas.microsoft.com/office/powerpoint/2010/main" xmlns:p15="http://schemas.microsoft.com/office/powerpoint/2012/main" xmlns:mc="http://schemas.openxmlformats.org/markup-compatibility/2006">
-  <p:cSld>
-    <p:spTree>
-      <p:nvGrpSpPr>
-        <p:cNvPr id="1" name=""/>
-        <p:cNvGrpSpPr/>
-        <p:nvPr/>
-      </p:nvGrpSpPr>
-      <p:grpSpPr>
-        <a:xfrm>
-          <a:off x="0" y="0"/>
-          <a:ext cx="0" cy="0"/>
-          <a:chOff x="0" y="0"/>
-          <a:chExt cx="0" cy="0"/>
-        </a:xfrm>
-      </p:grpSpPr>
-      <p:sp>
-        <p:nvSpPr>
-          <p:cNvPr id="139" name="PlaceHolder 1"/>
-          <p:cNvSpPr>
-            <a:spLocks noGrp="1"/>
-          </p:cNvSpPr>
-          <p:nvPr>
-            <p:ph type="sldImg"/>
-          </p:nvPr>
-        </p:nvSpPr>
-        <p:spPr>
-          <a:xfrm>
-            <a:off x="6281640" y="847800"/>
-            <a:ext cx="7538760" cy="4240080"/>
-          </a:xfrm>
-          <a:prstGeom prst="rect">
-            <a:avLst/>
-          </a:prstGeom>
-          <a:ln w="0">
-            <a:noFill/>
-          </a:ln>
-        </p:spPr>
-      </p:sp>
-      <p:sp>
-        <p:nvSpPr>
-          <p:cNvPr id="140" name="PlaceHolder 2"/>
-          <p:cNvSpPr>
-            <a:spLocks noGrp="1"/>
-          </p:cNvSpPr>
-          <p:nvPr>
-            <p:ph type="body"/>
-          </p:nvPr>
-        </p:nvSpPr>
-        <p:spPr>
-          <a:xfrm>
-            <a:off x="2009880" y="5372280"/>
-            <a:ext cx="16082640" cy="5087880"/>
-          </a:xfrm>
-          <a:prstGeom prst="rect">
-            <a:avLst/>
-          </a:prstGeom>
-          <a:noFill/>
-          <a:ln w="0">
-            <a:noFill/>
-          </a:ln>
-        </p:spPr>
-        <p:txBody>
-          <a:bodyPr lIns="91440" rIns="91440" tIns="45720" bIns="45720" anchor="t">
-            <a:noAutofit/>
-          </a:bodyPr>
-          <a:p>
-            <a:pPr marL="216000" indent="-216000">
-              <a:buNone/>
-            </a:pPr>
-            <a:endParaRPr b="0" lang="en-US" sz="1800" spc="-1" strike="noStrike">
-              <a:solidFill>
-                <a:srgbClr val="000000"/>
-              </a:solidFill>
-              <a:latin typeface="Arial"/>
-            </a:endParaRPr>
-          </a:p>
-        </p:txBody>
-      </p:sp>
-      <p:sp>
-        <p:nvSpPr>
-          <p:cNvPr id="141" name="PlaceHolder 3"/>
-          <p:cNvSpPr>
-            <a:spLocks noGrp="1"/>
-          </p:cNvSpPr>
-          <p:nvPr>
-            <p:ph type="sldNum" idx="34"/>
-          </p:nvPr>
-        </p:nvSpPr>
-        <p:spPr>
-          <a:xfrm>
-            <a:off x="11387160" y="10742760"/>
-            <a:ext cx="8710560" cy="563400"/>
-          </a:xfrm>
-          <a:prstGeom prst="rect">
-            <a:avLst/>
-          </a:prstGeom>
-          <a:noFill/>
-          <a:ln w="0">
-            <a:noFill/>
-          </a:ln>
-        </p:spPr>
-        <p:txBody>
-          <a:bodyPr lIns="91440" rIns="91440" tIns="45720" bIns="45720" anchor="b">
-            <a:noAutofit/>
-          </a:bodyPr>
-          <a:lstStyle>
-            <a:lvl1pPr indent="0" algn="r">
-              <a:lnSpc>
-                <a:spcPct val="100000"/>
-              </a:lnSpc>
-              <a:buNone/>
-              <a:tabLst>
-                <a:tab algn="l" pos="0"/>
-              </a:tabLst>
-              <a:defRPr b="0" lang="en-IN" sz="1200" spc="-1" strike="noStrike">
-                <a:solidFill>
-                  <a:schemeClr val="dk1"/>
-                </a:solidFill>
-                <a:latin typeface="Calibri"/>
-                <a:ea typeface="Calibri"/>
-              </a:defRPr>
-            </a:lvl1pPr>
-          </a:lstStyle>
-          <a:p>
-            <a:pPr indent="0" algn="r">
-              <a:lnSpc>
-                <a:spcPct val="100000"/>
-              </a:lnSpc>
-              <a:buNone/>
-              <a:tabLst>
-                <a:tab algn="l" pos="0"/>
-              </a:tabLst>
-            </a:pPr>
-            <a:fld id="{50D86701-62CE-45A2-BDD3-A44B6941301A}" type="slidenum">
-              <a:rPr b="0" lang="en-IN" sz="1200" spc="-1" strike="noStrike">
-                <a:solidFill>
-                  <a:schemeClr val="dk1"/>
-                </a:solidFill>
-                <a:latin typeface="Calibri"/>
-                <a:ea typeface="Calibri"/>
-              </a:rPr>
-              <a:t>16</a:t>
-            </a:fld>
-            <a:endParaRPr b="0" lang="en-US" sz="1200" spc="-1" strike="noStrike">
-              <a:solidFill>
-                <a:srgbClr val="000000"/>
-              </a:solidFill>
-              <a:latin typeface="Times New Roman"/>
-            </a:endParaRPr>
-          </a:p>
-        </p:txBody>
-      </p:sp>
-    </p:spTree>
-  </p:cSld>
-</p:notes>
-</file>
-
-<file path=ppt/notesSlides/notesSlide15.xml><?xml version="1.0" encoding="utf-8"?>
-<p:notes xmlns:a="http://schemas.openxmlformats.org/drawingml/2006/main" xmlns:p="http://schemas.openxmlformats.org/presentationml/2006/main" xmlns:r="http://schemas.openxmlformats.org/officeDocument/2006/relationships" xmlns:p14="http://schemas.microsoft.com/office/powerpoint/2010/main" xmlns:p15="http://schemas.microsoft.com/office/powerpoint/2012/main" xmlns:mc="http://schemas.openxmlformats.org/markup-compatibility/2006">
-  <p:cSld>
-    <p:spTree>
-      <p:nvGrpSpPr>
-        <p:cNvPr id="1" name=""/>
-        <p:cNvGrpSpPr/>
-        <p:nvPr/>
-      </p:nvGrpSpPr>
-      <p:grpSpPr>
-        <a:xfrm>
-          <a:off x="0" y="0"/>
-          <a:ext cx="0" cy="0"/>
-          <a:chOff x="0" y="0"/>
-          <a:chExt cx="0" cy="0"/>
-        </a:xfrm>
-      </p:grpSpPr>
-      <p:sp>
-        <p:nvSpPr>
-          <p:cNvPr id="142" name="PlaceHolder 1"/>
-          <p:cNvSpPr>
-            <a:spLocks noGrp="1"/>
-          </p:cNvSpPr>
-          <p:nvPr>
-            <p:ph type="sldImg"/>
-          </p:nvPr>
-        </p:nvSpPr>
-        <p:spPr>
-          <a:xfrm>
-            <a:off x="6281640" y="847800"/>
-            <a:ext cx="7538760" cy="4240080"/>
-          </a:xfrm>
-          <a:prstGeom prst="rect">
-            <a:avLst/>
-          </a:prstGeom>
-          <a:ln w="0">
-            <a:noFill/>
-          </a:ln>
-        </p:spPr>
-      </p:sp>
-      <p:sp>
-        <p:nvSpPr>
-          <p:cNvPr id="143" name="PlaceHolder 2"/>
-          <p:cNvSpPr>
-            <a:spLocks noGrp="1"/>
-          </p:cNvSpPr>
-          <p:nvPr>
-            <p:ph type="body"/>
-          </p:nvPr>
-        </p:nvSpPr>
-        <p:spPr>
-          <a:xfrm>
-            <a:off x="2009880" y="5372280"/>
-            <a:ext cx="16082640" cy="5087880"/>
-          </a:xfrm>
-          <a:prstGeom prst="rect">
-            <a:avLst/>
-          </a:prstGeom>
-          <a:noFill/>
-          <a:ln w="0">
-            <a:noFill/>
-          </a:ln>
-        </p:spPr>
-        <p:txBody>
-          <a:bodyPr lIns="91440" rIns="91440" tIns="45720" bIns="45720" anchor="t">
-            <a:noAutofit/>
-          </a:bodyPr>
-          <a:p>
-            <a:pPr marL="216000" indent="-216000">
-              <a:buNone/>
-            </a:pPr>
-            <a:endParaRPr b="0" lang="en-US" sz="1800" spc="-1" strike="noStrike">
-              <a:solidFill>
-                <a:srgbClr val="000000"/>
-              </a:solidFill>
-              <a:latin typeface="Arial"/>
-            </a:endParaRPr>
-          </a:p>
-        </p:txBody>
-      </p:sp>
-      <p:sp>
-        <p:nvSpPr>
-          <p:cNvPr id="144" name="PlaceHolder 3"/>
-          <p:cNvSpPr>
-            <a:spLocks noGrp="1"/>
-          </p:cNvSpPr>
-          <p:nvPr>
-            <p:ph type="sldNum" idx="35"/>
-          </p:nvPr>
-        </p:nvSpPr>
-        <p:spPr>
-          <a:xfrm>
-            <a:off x="11387160" y="10742760"/>
-            <a:ext cx="8710560" cy="563400"/>
-          </a:xfrm>
-          <a:prstGeom prst="rect">
-            <a:avLst/>
-          </a:prstGeom>
-          <a:noFill/>
-          <a:ln w="0">
-            <a:noFill/>
-          </a:ln>
-        </p:spPr>
-        <p:txBody>
-          <a:bodyPr lIns="91440" rIns="91440" tIns="45720" bIns="45720" anchor="b">
-            <a:noAutofit/>
-          </a:bodyPr>
-          <a:lstStyle>
-            <a:lvl1pPr indent="0" algn="r">
-              <a:lnSpc>
-                <a:spcPct val="100000"/>
-              </a:lnSpc>
-              <a:buNone/>
-              <a:tabLst>
-                <a:tab algn="l" pos="0"/>
-              </a:tabLst>
-              <a:defRPr b="0" lang="en-IN" sz="1200" spc="-1" strike="noStrike">
-                <a:solidFill>
-                  <a:schemeClr val="dk1"/>
-                </a:solidFill>
-                <a:latin typeface="Calibri"/>
-                <a:ea typeface="Calibri"/>
-              </a:defRPr>
-            </a:lvl1pPr>
-          </a:lstStyle>
-          <a:p>
-            <a:pPr indent="0" algn="r">
-              <a:lnSpc>
-                <a:spcPct val="100000"/>
-              </a:lnSpc>
-              <a:buNone/>
-              <a:tabLst>
-                <a:tab algn="l" pos="0"/>
-              </a:tabLst>
-            </a:pPr>
-            <a:fld id="{4AFA3A68-D45E-4289-89BC-C3CDAB3C8D3D}" type="slidenum">
+            <a:fld id="{D85CBA85-8E60-414A-9C30-A1EB492C6BBF}" type="slidenum">
               <a:rPr b="0" lang="en-IN" sz="1200" spc="-1" strike="noStrike">
                 <a:solidFill>
                   <a:schemeClr val="dk1"/>
@@ -1197,7 +724,7 @@
       </p:grpSpPr>
       <p:sp>
         <p:nvSpPr>
-          <p:cNvPr id="145" name="PlaceHolder 1"/>
+          <p:cNvPr id="146" name="PlaceHolder 1"/>
           <p:cNvSpPr>
             <a:spLocks noGrp="1"/>
           </p:cNvSpPr>
@@ -1208,7 +735,7 @@
         <p:spPr>
           <a:xfrm>
             <a:off x="6281640" y="847800"/>
-            <a:ext cx="7538760" cy="4240080"/>
+            <a:ext cx="7538040" cy="4239360"/>
           </a:xfrm>
           <a:prstGeom prst="rect">
             <a:avLst/>
@@ -1220,7 +747,7 @@
       </p:sp>
       <p:sp>
         <p:nvSpPr>
-          <p:cNvPr id="146" name="PlaceHolder 2"/>
+          <p:cNvPr id="147" name="PlaceHolder 2"/>
           <p:cNvSpPr>
             <a:spLocks noGrp="1"/>
           </p:cNvSpPr>
@@ -1231,7 +758,7 @@
         <p:spPr>
           <a:xfrm>
             <a:off x="2009880" y="5372280"/>
-            <a:ext cx="16082640" cy="5087880"/>
+            <a:ext cx="16081920" cy="5087160"/>
           </a:xfrm>
           <a:prstGeom prst="rect">
             <a:avLst/>
@@ -1260,18 +787,18 @@
       </p:sp>
       <p:sp>
         <p:nvSpPr>
-          <p:cNvPr id="147" name="PlaceHolder 3"/>
+          <p:cNvPr id="148" name="PlaceHolder 3"/>
           <p:cNvSpPr>
             <a:spLocks noGrp="1"/>
           </p:cNvSpPr>
           <p:nvPr>
-            <p:ph type="sldNum" idx="36"/>
+            <p:ph type="sldNum" idx="32"/>
           </p:nvPr>
         </p:nvSpPr>
         <p:spPr>
           <a:xfrm>
             <a:off x="11387160" y="10742760"/>
-            <a:ext cx="8710560" cy="563400"/>
+            <a:ext cx="8709840" cy="562680"/>
           </a:xfrm>
           <a:prstGeom prst="rect">
             <a:avLst/>
@@ -1313,7 +840,166 @@
                 <a:tab algn="l" pos="0"/>
               </a:tabLst>
             </a:pPr>
-            <a:fld id="{427F4391-13F3-4CF6-BD13-9D9236B690DF}" type="slidenum">
+            <a:fld id="{9F56E80B-DBE7-40F6-90B9-1C284672ECAF}" type="slidenum">
+              <a:rPr b="0" lang="en-IN" sz="1200" spc="-1" strike="noStrike">
+                <a:solidFill>
+                  <a:schemeClr val="dk1"/>
+                </a:solidFill>
+                <a:latin typeface="Calibri"/>
+                <a:ea typeface="Calibri"/>
+              </a:rPr>
+              <a:t>&lt;number&gt;</a:t>
+            </a:fld>
+            <a:endParaRPr b="0" lang="en-US" sz="1200" spc="-1" strike="noStrike">
+              <a:solidFill>
+                <a:srgbClr val="000000"/>
+              </a:solidFill>
+              <a:latin typeface="Times New Roman"/>
+            </a:endParaRPr>
+          </a:p>
+        </p:txBody>
+      </p:sp>
+    </p:spTree>
+  </p:cSld>
+</p:notes>
+</file>
+
+<file path=ppt/notesSlides/notesSlide19.xml><?xml version="1.0" encoding="utf-8"?>
+<p:notes xmlns:a="http://schemas.openxmlformats.org/drawingml/2006/main" xmlns:p="http://schemas.openxmlformats.org/presentationml/2006/main" xmlns:r="http://schemas.openxmlformats.org/officeDocument/2006/relationships" xmlns:p14="http://schemas.microsoft.com/office/powerpoint/2010/main" xmlns:p15="http://schemas.microsoft.com/office/powerpoint/2012/main" xmlns:mc="http://schemas.openxmlformats.org/markup-compatibility/2006">
+  <p:cSld>
+    <p:spTree>
+      <p:nvGrpSpPr>
+        <p:cNvPr id="1" name=""/>
+        <p:cNvGrpSpPr/>
+        <p:nvPr/>
+      </p:nvGrpSpPr>
+      <p:grpSpPr>
+        <a:xfrm>
+          <a:off x="0" y="0"/>
+          <a:ext cx="0" cy="0"/>
+          <a:chOff x="0" y="0"/>
+          <a:chExt cx="0" cy="0"/>
+        </a:xfrm>
+      </p:grpSpPr>
+      <p:sp>
+        <p:nvSpPr>
+          <p:cNvPr id="149" name="PlaceHolder 1"/>
+          <p:cNvSpPr>
+            <a:spLocks noGrp="1"/>
+          </p:cNvSpPr>
+          <p:nvPr>
+            <p:ph type="sldImg"/>
+          </p:nvPr>
+        </p:nvSpPr>
+        <p:spPr>
+          <a:xfrm>
+            <a:off x="6281640" y="847800"/>
+            <a:ext cx="7538040" cy="4239360"/>
+          </a:xfrm>
+          <a:prstGeom prst="rect">
+            <a:avLst/>
+          </a:prstGeom>
+          <a:ln w="0">
+            <a:noFill/>
+          </a:ln>
+        </p:spPr>
+      </p:sp>
+      <p:sp>
+        <p:nvSpPr>
+          <p:cNvPr id="150" name="PlaceHolder 2"/>
+          <p:cNvSpPr>
+            <a:spLocks noGrp="1"/>
+          </p:cNvSpPr>
+          <p:nvPr>
+            <p:ph type="body"/>
+          </p:nvPr>
+        </p:nvSpPr>
+        <p:spPr>
+          <a:xfrm>
+            <a:off x="2009880" y="5372280"/>
+            <a:ext cx="16081920" cy="5087160"/>
+          </a:xfrm>
+          <a:prstGeom prst="rect">
+            <a:avLst/>
+          </a:prstGeom>
+          <a:noFill/>
+          <a:ln w="0">
+            <a:noFill/>
+          </a:ln>
+        </p:spPr>
+        <p:txBody>
+          <a:bodyPr lIns="91440" rIns="91440" tIns="45720" bIns="45720" anchor="t">
+            <a:noAutofit/>
+          </a:bodyPr>
+          <a:p>
+            <a:pPr marL="216000" indent="-216000">
+              <a:buNone/>
+            </a:pPr>
+            <a:endParaRPr b="0" lang="en-US" sz="1800" spc="-1" strike="noStrike">
+              <a:solidFill>
+                <a:srgbClr val="000000"/>
+              </a:solidFill>
+              <a:latin typeface="Arial"/>
+            </a:endParaRPr>
+          </a:p>
+        </p:txBody>
+      </p:sp>
+      <p:sp>
+        <p:nvSpPr>
+          <p:cNvPr id="151" name="PlaceHolder 3"/>
+          <p:cNvSpPr>
+            <a:spLocks noGrp="1"/>
+          </p:cNvSpPr>
+          <p:nvPr>
+            <p:ph type="sldNum" idx="33"/>
+          </p:nvPr>
+        </p:nvSpPr>
+        <p:spPr>
+          <a:xfrm>
+            <a:off x="11387160" y="10742760"/>
+            <a:ext cx="8709840" cy="562680"/>
+          </a:xfrm>
+          <a:prstGeom prst="rect">
+            <a:avLst/>
+          </a:prstGeom>
+          <a:noFill/>
+          <a:ln w="0">
+            <a:noFill/>
+          </a:ln>
+        </p:spPr>
+        <p:txBody>
+          <a:bodyPr lIns="91440" rIns="91440" tIns="45720" bIns="45720" anchor="b">
+            <a:noAutofit/>
+          </a:bodyPr>
+          <a:lstStyle>
+            <a:lvl1pPr indent="0" algn="r">
+              <a:lnSpc>
+                <a:spcPct val="100000"/>
+              </a:lnSpc>
+              <a:buNone/>
+              <a:tabLst>
+                <a:tab algn="l" pos="0"/>
+              </a:tabLst>
+              <a:defRPr b="0" lang="en-IN" sz="1200" spc="-1" strike="noStrike">
+                <a:solidFill>
+                  <a:schemeClr val="dk1"/>
+                </a:solidFill>
+                <a:latin typeface="Calibri"/>
+                <a:ea typeface="Calibri"/>
+              </a:defRPr>
+            </a:lvl1pPr>
+          </a:lstStyle>
+          <a:p>
+            <a:pPr indent="0" algn="r">
+              <a:lnSpc>
+                <a:spcPct val="100000"/>
+              </a:lnSpc>
+              <a:buNone/>
+              <a:tabLst>
+                <a:tab algn="l" pos="0"/>
+              </a:tabLst>
+            </a:pPr>
+            <a:fld id="{220EA817-05D3-4145-84A3-A96EABB2C265}" type="slidenum">
               <a:rPr b="0" lang="en-IN" sz="1200" spc="-1" strike="noStrike">
                 <a:solidFill>
                   <a:schemeClr val="dk1"/>
@@ -1356,7 +1042,7 @@
       </p:grpSpPr>
       <p:sp>
         <p:nvSpPr>
-          <p:cNvPr id="109" name="PlaceHolder 1"/>
+          <p:cNvPr id="119" name="PlaceHolder 1"/>
           <p:cNvSpPr>
             <a:spLocks noGrp="1"/>
           </p:cNvSpPr>
@@ -1367,7 +1053,7 @@
         <p:spPr>
           <a:xfrm>
             <a:off x="6281640" y="847800"/>
-            <a:ext cx="7538760" cy="4240080"/>
+            <a:ext cx="7538040" cy="4239360"/>
           </a:xfrm>
           <a:prstGeom prst="rect">
             <a:avLst/>
@@ -1379,7 +1065,7 @@
       </p:sp>
       <p:sp>
         <p:nvSpPr>
-          <p:cNvPr id="110" name="PlaceHolder 2"/>
+          <p:cNvPr id="120" name="PlaceHolder 2"/>
           <p:cNvSpPr>
             <a:spLocks noGrp="1"/>
           </p:cNvSpPr>
@@ -1390,7 +1076,7 @@
         <p:spPr>
           <a:xfrm>
             <a:off x="2009880" y="5372280"/>
-            <a:ext cx="16082640" cy="5087880"/>
+            <a:ext cx="16081920" cy="5087160"/>
           </a:xfrm>
           <a:prstGeom prst="rect">
             <a:avLst/>
@@ -1419,18 +1105,18 @@
       </p:sp>
       <p:sp>
         <p:nvSpPr>
-          <p:cNvPr id="111" name="PlaceHolder 3"/>
+          <p:cNvPr id="121" name="PlaceHolder 3"/>
           <p:cNvSpPr>
             <a:spLocks noGrp="1"/>
           </p:cNvSpPr>
           <p:nvPr>
-            <p:ph type="sldNum" idx="24"/>
+            <p:ph type="sldNum" idx="23"/>
           </p:nvPr>
         </p:nvSpPr>
         <p:spPr>
           <a:xfrm>
             <a:off x="11387160" y="10742760"/>
-            <a:ext cx="8710560" cy="563400"/>
+            <a:ext cx="8709840" cy="562680"/>
           </a:xfrm>
           <a:prstGeom prst="rect">
             <a:avLst/>
@@ -1472,7 +1158,7 @@
                 <a:tab algn="l" pos="0"/>
               </a:tabLst>
             </a:pPr>
-            <a:fld id="{49FAF096-5417-45C7-87B0-BF606C38F0D6}" type="slidenum">
+            <a:fld id="{21472F75-516A-47AA-812A-F8507642E149}" type="slidenum">
               <a:rPr b="0" lang="en-IN" sz="1200" spc="-1" strike="noStrike">
                 <a:solidFill>
                   <a:schemeClr val="dk1"/>
@@ -1480,7 +1166,7 @@
                 <a:latin typeface="Calibri"/>
                 <a:ea typeface="Calibri"/>
               </a:rPr>
-              <a:t>16</a:t>
+              <a:t>&lt;number&gt;</a:t>
             </a:fld>
             <a:endParaRPr b="0" lang="en-US" sz="1200" spc="-1" strike="noStrike">
               <a:solidFill>
@@ -1496,7 +1182,7 @@
 </p:notes>
 </file>
 
-<file path=ppt/notesSlides/notesSlide3.xml><?xml version="1.0" encoding="utf-8"?>
+<file path=ppt/notesSlides/notesSlide20.xml><?xml version="1.0" encoding="utf-8"?>
 <p:notes xmlns:a="http://schemas.openxmlformats.org/drawingml/2006/main" xmlns:p="http://schemas.openxmlformats.org/presentationml/2006/main" xmlns:r="http://schemas.openxmlformats.org/officeDocument/2006/relationships" xmlns:p14="http://schemas.microsoft.com/office/powerpoint/2010/main" xmlns:p15="http://schemas.microsoft.com/office/powerpoint/2012/main" xmlns:mc="http://schemas.openxmlformats.org/markup-compatibility/2006">
   <p:cSld>
     <p:spTree>
@@ -1515,7 +1201,7 @@
       </p:grpSpPr>
       <p:sp>
         <p:nvSpPr>
-          <p:cNvPr id="112" name="PlaceHolder 1"/>
+          <p:cNvPr id="152" name="PlaceHolder 1"/>
           <p:cNvSpPr>
             <a:spLocks noGrp="1"/>
           </p:cNvSpPr>
@@ -1526,7 +1212,7 @@
         <p:spPr>
           <a:xfrm>
             <a:off x="6281640" y="847800"/>
-            <a:ext cx="7538760" cy="4240080"/>
+            <a:ext cx="7538040" cy="4239360"/>
           </a:xfrm>
           <a:prstGeom prst="rect">
             <a:avLst/>
@@ -1538,7 +1224,7 @@
       </p:sp>
       <p:sp>
         <p:nvSpPr>
-          <p:cNvPr id="113" name="PlaceHolder 2"/>
+          <p:cNvPr id="153" name="PlaceHolder 2"/>
           <p:cNvSpPr>
             <a:spLocks noGrp="1"/>
           </p:cNvSpPr>
@@ -1549,7 +1235,7 @@
         <p:spPr>
           <a:xfrm>
             <a:off x="2009880" y="5372280"/>
-            <a:ext cx="16082640" cy="5087880"/>
+            <a:ext cx="16081920" cy="5087160"/>
           </a:xfrm>
           <a:prstGeom prst="rect">
             <a:avLst/>
@@ -1578,18 +1264,18 @@
       </p:sp>
       <p:sp>
         <p:nvSpPr>
-          <p:cNvPr id="114" name="PlaceHolder 3"/>
+          <p:cNvPr id="154" name="PlaceHolder 3"/>
           <p:cNvSpPr>
             <a:spLocks noGrp="1"/>
           </p:cNvSpPr>
           <p:nvPr>
-            <p:ph type="sldNum" idx="25"/>
+            <p:ph type="sldNum" idx="34"/>
           </p:nvPr>
         </p:nvSpPr>
         <p:spPr>
           <a:xfrm>
             <a:off x="11387160" y="10742760"/>
-            <a:ext cx="8710560" cy="563400"/>
+            <a:ext cx="8709840" cy="562680"/>
           </a:xfrm>
           <a:prstGeom prst="rect">
             <a:avLst/>
@@ -1631,7 +1317,7 @@
                 <a:tab algn="l" pos="0"/>
               </a:tabLst>
             </a:pPr>
-            <a:fld id="{74782664-25ED-4922-BF9F-E4D63252DC7E}" type="slidenum">
+            <a:fld id="{64BE2ACF-E157-42CE-BEBD-8D9EFB09AA90}" type="slidenum">
               <a:rPr b="0" lang="en-IN" sz="1200" spc="-1" strike="noStrike">
                 <a:solidFill>
                   <a:schemeClr val="dk1"/>
@@ -1639,7 +1325,7 @@
                 <a:latin typeface="Calibri"/>
                 <a:ea typeface="Calibri"/>
               </a:rPr>
-              <a:t>16</a:t>
+              <a:t>&lt;number&gt;</a:t>
             </a:fld>
             <a:endParaRPr b="0" lang="en-US" sz="1200" spc="-1" strike="noStrike">
               <a:solidFill>
@@ -1655,7 +1341,7 @@
 </p:notes>
 </file>
 
-<file path=ppt/notesSlides/notesSlide4.xml><?xml version="1.0" encoding="utf-8"?>
+<file path=ppt/notesSlides/notesSlide3.xml><?xml version="1.0" encoding="utf-8"?>
 <p:notes xmlns:a="http://schemas.openxmlformats.org/drawingml/2006/main" xmlns:p="http://schemas.openxmlformats.org/presentationml/2006/main" xmlns:r="http://schemas.openxmlformats.org/officeDocument/2006/relationships" xmlns:p14="http://schemas.microsoft.com/office/powerpoint/2010/main" xmlns:p15="http://schemas.microsoft.com/office/powerpoint/2012/main" xmlns:mc="http://schemas.openxmlformats.org/markup-compatibility/2006">
   <p:cSld>
     <p:spTree>
@@ -1674,7 +1360,7 @@
       </p:grpSpPr>
       <p:sp>
         <p:nvSpPr>
-          <p:cNvPr id="115" name="PlaceHolder 1"/>
+          <p:cNvPr id="122" name="PlaceHolder 1"/>
           <p:cNvSpPr>
             <a:spLocks noGrp="1"/>
           </p:cNvSpPr>
@@ -1685,7 +1371,7 @@
         <p:spPr>
           <a:xfrm>
             <a:off x="6281640" y="847800"/>
-            <a:ext cx="7538760" cy="4240080"/>
+            <a:ext cx="7538040" cy="4239360"/>
           </a:xfrm>
           <a:prstGeom prst="rect">
             <a:avLst/>
@@ -1697,7 +1383,7 @@
       </p:sp>
       <p:sp>
         <p:nvSpPr>
-          <p:cNvPr id="116" name="PlaceHolder 2"/>
+          <p:cNvPr id="123" name="PlaceHolder 2"/>
           <p:cNvSpPr>
             <a:spLocks noGrp="1"/>
           </p:cNvSpPr>
@@ -1708,7 +1394,7 @@
         <p:spPr>
           <a:xfrm>
             <a:off x="2009880" y="5372280"/>
-            <a:ext cx="16082640" cy="5087880"/>
+            <a:ext cx="16081920" cy="5087160"/>
           </a:xfrm>
           <a:prstGeom prst="rect">
             <a:avLst/>
@@ -1737,18 +1423,18 @@
       </p:sp>
       <p:sp>
         <p:nvSpPr>
-          <p:cNvPr id="117" name="PlaceHolder 3"/>
+          <p:cNvPr id="124" name="PlaceHolder 3"/>
           <p:cNvSpPr>
             <a:spLocks noGrp="1"/>
           </p:cNvSpPr>
           <p:nvPr>
-            <p:ph type="sldNum" idx="26"/>
+            <p:ph type="sldNum" idx="24"/>
           </p:nvPr>
         </p:nvSpPr>
         <p:spPr>
           <a:xfrm>
             <a:off x="11387160" y="10742760"/>
-            <a:ext cx="8710560" cy="563400"/>
+            <a:ext cx="8709840" cy="562680"/>
           </a:xfrm>
           <a:prstGeom prst="rect">
             <a:avLst/>
@@ -1790,7 +1476,7 @@
                 <a:tab algn="l" pos="0"/>
               </a:tabLst>
             </a:pPr>
-            <a:fld id="{61B6BE06-27CD-4E82-8052-2309237C1A5D}" type="slidenum">
+            <a:fld id="{DE7D4014-F8F2-4E3F-919A-C819778CA041}" type="slidenum">
               <a:rPr b="0" lang="en-IN" sz="1200" spc="-1" strike="noStrike">
                 <a:solidFill>
                   <a:schemeClr val="dk1"/>
@@ -1798,7 +1484,7 @@
                 <a:latin typeface="Calibri"/>
                 <a:ea typeface="Calibri"/>
               </a:rPr>
-              <a:t>16</a:t>
+              <a:t>&lt;number&gt;</a:t>
             </a:fld>
             <a:endParaRPr b="0" lang="en-US" sz="1200" spc="-1" strike="noStrike">
               <a:solidFill>
@@ -1814,7 +1500,7 @@
 </p:notes>
 </file>
 
-<file path=ppt/notesSlides/notesSlide5.xml><?xml version="1.0" encoding="utf-8"?>
+<file path=ppt/notesSlides/notesSlide4.xml><?xml version="1.0" encoding="utf-8"?>
 <p:notes xmlns:a="http://schemas.openxmlformats.org/drawingml/2006/main" xmlns:p="http://schemas.openxmlformats.org/presentationml/2006/main" xmlns:r="http://schemas.openxmlformats.org/officeDocument/2006/relationships" xmlns:p14="http://schemas.microsoft.com/office/powerpoint/2010/main" xmlns:p15="http://schemas.microsoft.com/office/powerpoint/2012/main" xmlns:mc="http://schemas.openxmlformats.org/markup-compatibility/2006">
   <p:cSld>
     <p:spTree>
@@ -1833,7 +1519,7 @@
       </p:grpSpPr>
       <p:sp>
         <p:nvSpPr>
-          <p:cNvPr id="118" name="PlaceHolder 1"/>
+          <p:cNvPr id="125" name="PlaceHolder 1"/>
           <p:cNvSpPr>
             <a:spLocks noGrp="1"/>
           </p:cNvSpPr>
@@ -1844,7 +1530,7 @@
         <p:spPr>
           <a:xfrm>
             <a:off x="6281640" y="847800"/>
-            <a:ext cx="7538760" cy="4240080"/>
+            <a:ext cx="7538040" cy="4239360"/>
           </a:xfrm>
           <a:prstGeom prst="rect">
             <a:avLst/>
@@ -1856,7 +1542,7 @@
       </p:sp>
       <p:sp>
         <p:nvSpPr>
-          <p:cNvPr id="119" name="PlaceHolder 2"/>
+          <p:cNvPr id="126" name="PlaceHolder 2"/>
           <p:cNvSpPr>
             <a:spLocks noGrp="1"/>
           </p:cNvSpPr>
@@ -1867,7 +1553,7 @@
         <p:spPr>
           <a:xfrm>
             <a:off x="2009880" y="5372280"/>
-            <a:ext cx="16082640" cy="5087880"/>
+            <a:ext cx="16081920" cy="5087160"/>
           </a:xfrm>
           <a:prstGeom prst="rect">
             <a:avLst/>
@@ -1896,18 +1582,18 @@
       </p:sp>
       <p:sp>
         <p:nvSpPr>
-          <p:cNvPr id="120" name="PlaceHolder 3"/>
+          <p:cNvPr id="127" name="PlaceHolder 3"/>
           <p:cNvSpPr>
             <a:spLocks noGrp="1"/>
           </p:cNvSpPr>
           <p:nvPr>
-            <p:ph type="sldNum" idx="27"/>
+            <p:ph type="sldNum" idx="25"/>
           </p:nvPr>
         </p:nvSpPr>
         <p:spPr>
           <a:xfrm>
             <a:off x="11387160" y="10742760"/>
-            <a:ext cx="8710560" cy="563400"/>
+            <a:ext cx="8709840" cy="562680"/>
           </a:xfrm>
           <a:prstGeom prst="rect">
             <a:avLst/>
@@ -1949,7 +1635,7 @@
                 <a:tab algn="l" pos="0"/>
               </a:tabLst>
             </a:pPr>
-            <a:fld id="{2B0ED760-A3E6-4F52-A45E-1A8C0A853AA5}" type="slidenum">
+            <a:fld id="{28DD61AB-9A7B-431F-AA47-3C46918ED230}" type="slidenum">
               <a:rPr b="0" lang="en-IN" sz="1200" spc="-1" strike="noStrike">
                 <a:solidFill>
                   <a:schemeClr val="dk1"/>
@@ -1957,7 +1643,7 @@
                 <a:latin typeface="Calibri"/>
                 <a:ea typeface="Calibri"/>
               </a:rPr>
-              <a:t>16</a:t>
+              <a:t>&lt;number&gt;</a:t>
             </a:fld>
             <a:endParaRPr b="0" lang="en-US" sz="1200" spc="-1" strike="noStrike">
               <a:solidFill>
@@ -1973,7 +1659,7 @@
 </p:notes>
 </file>
 
-<file path=ppt/notesSlides/notesSlide6.xml><?xml version="1.0" encoding="utf-8"?>
+<file path=ppt/notesSlides/notesSlide5.xml><?xml version="1.0" encoding="utf-8"?>
 <p:notes xmlns:a="http://schemas.openxmlformats.org/drawingml/2006/main" xmlns:p="http://schemas.openxmlformats.org/presentationml/2006/main" xmlns:r="http://schemas.openxmlformats.org/officeDocument/2006/relationships" xmlns:p14="http://schemas.microsoft.com/office/powerpoint/2010/main" xmlns:p15="http://schemas.microsoft.com/office/powerpoint/2012/main" xmlns:mc="http://schemas.openxmlformats.org/markup-compatibility/2006">
   <p:cSld>
     <p:spTree>
@@ -1992,7 +1678,7 @@
       </p:grpSpPr>
       <p:sp>
         <p:nvSpPr>
-          <p:cNvPr id="121" name="PlaceHolder 1"/>
+          <p:cNvPr id="128" name="PlaceHolder 1"/>
           <p:cNvSpPr>
             <a:spLocks noGrp="1"/>
           </p:cNvSpPr>
@@ -2003,7 +1689,7 @@
         <p:spPr>
           <a:xfrm>
             <a:off x="6281640" y="847800"/>
-            <a:ext cx="7538760" cy="4240080"/>
+            <a:ext cx="7538040" cy="4239360"/>
           </a:xfrm>
           <a:prstGeom prst="rect">
             <a:avLst/>
@@ -2015,7 +1701,7 @@
       </p:sp>
       <p:sp>
         <p:nvSpPr>
-          <p:cNvPr id="122" name="PlaceHolder 2"/>
+          <p:cNvPr id="129" name="PlaceHolder 2"/>
           <p:cNvSpPr>
             <a:spLocks noGrp="1"/>
           </p:cNvSpPr>
@@ -2026,7 +1712,7 @@
         <p:spPr>
           <a:xfrm>
             <a:off x="2009880" y="5372280"/>
-            <a:ext cx="16082640" cy="5087880"/>
+            <a:ext cx="16081920" cy="5087160"/>
           </a:xfrm>
           <a:prstGeom prst="rect">
             <a:avLst/>
@@ -2055,18 +1741,18 @@
       </p:sp>
       <p:sp>
         <p:nvSpPr>
-          <p:cNvPr id="123" name="PlaceHolder 3"/>
+          <p:cNvPr id="130" name="PlaceHolder 3"/>
           <p:cNvSpPr>
             <a:spLocks noGrp="1"/>
           </p:cNvSpPr>
           <p:nvPr>
-            <p:ph type="sldNum" idx="28"/>
+            <p:ph type="sldNum" idx="26"/>
           </p:nvPr>
         </p:nvSpPr>
         <p:spPr>
           <a:xfrm>
             <a:off x="11387160" y="10742760"/>
-            <a:ext cx="8710560" cy="563400"/>
+            <a:ext cx="8709840" cy="562680"/>
           </a:xfrm>
           <a:prstGeom prst="rect">
             <a:avLst/>
@@ -2108,7 +1794,7 @@
                 <a:tab algn="l" pos="0"/>
               </a:tabLst>
             </a:pPr>
-            <a:fld id="{EA3473BD-C3FB-4B13-8CE2-CC9B20E66B0F}" type="slidenum">
+            <a:fld id="{106DD086-4CE3-4341-BA22-8A96606F4C5A}" type="slidenum">
               <a:rPr b="0" lang="en-IN" sz="1200" spc="-1" strike="noStrike">
                 <a:solidFill>
                   <a:schemeClr val="dk1"/>
@@ -2116,7 +1802,7 @@
                 <a:latin typeface="Calibri"/>
                 <a:ea typeface="Calibri"/>
               </a:rPr>
-              <a:t>16</a:t>
+              <a:t>&lt;number&gt;</a:t>
             </a:fld>
             <a:endParaRPr b="0" lang="en-US" sz="1200" spc="-1" strike="noStrike">
               <a:solidFill>
@@ -2132,7 +1818,7 @@
 </p:notes>
 </file>
 
-<file path=ppt/notesSlides/notesSlide7.xml><?xml version="1.0" encoding="utf-8"?>
+<file path=ppt/notesSlides/notesSlide6.xml><?xml version="1.0" encoding="utf-8"?>
 <p:notes xmlns:a="http://schemas.openxmlformats.org/drawingml/2006/main" xmlns:p="http://schemas.openxmlformats.org/presentationml/2006/main" xmlns:r="http://schemas.openxmlformats.org/officeDocument/2006/relationships" xmlns:p14="http://schemas.microsoft.com/office/powerpoint/2010/main" xmlns:p15="http://schemas.microsoft.com/office/powerpoint/2012/main" xmlns:mc="http://schemas.openxmlformats.org/markup-compatibility/2006">
   <p:cSld>
     <p:spTree>
@@ -2151,7 +1837,7 @@
       </p:grpSpPr>
       <p:sp>
         <p:nvSpPr>
-          <p:cNvPr id="124" name="PlaceHolder 1"/>
+          <p:cNvPr id="131" name="PlaceHolder 1"/>
           <p:cNvSpPr>
             <a:spLocks noGrp="1"/>
           </p:cNvSpPr>
@@ -2162,7 +1848,7 @@
         <p:spPr>
           <a:xfrm>
             <a:off x="6281640" y="847800"/>
-            <a:ext cx="7538760" cy="4240080"/>
+            <a:ext cx="7538040" cy="4239360"/>
           </a:xfrm>
           <a:prstGeom prst="rect">
             <a:avLst/>
@@ -2174,7 +1860,7 @@
       </p:sp>
       <p:sp>
         <p:nvSpPr>
-          <p:cNvPr id="125" name="PlaceHolder 2"/>
+          <p:cNvPr id="132" name="PlaceHolder 2"/>
           <p:cNvSpPr>
             <a:spLocks noGrp="1"/>
           </p:cNvSpPr>
@@ -2185,7 +1871,7 @@
         <p:spPr>
           <a:xfrm>
             <a:off x="2009880" y="5372280"/>
-            <a:ext cx="16082640" cy="5087880"/>
+            <a:ext cx="16081920" cy="5087160"/>
           </a:xfrm>
           <a:prstGeom prst="rect">
             <a:avLst/>
@@ -2214,18 +1900,18 @@
       </p:sp>
       <p:sp>
         <p:nvSpPr>
-          <p:cNvPr id="126" name="PlaceHolder 3"/>
+          <p:cNvPr id="133" name="PlaceHolder 3"/>
           <p:cNvSpPr>
             <a:spLocks noGrp="1"/>
           </p:cNvSpPr>
           <p:nvPr>
-            <p:ph type="sldNum" idx="29"/>
+            <p:ph type="sldNum" idx="27"/>
           </p:nvPr>
         </p:nvSpPr>
         <p:spPr>
           <a:xfrm>
             <a:off x="11387160" y="10742760"/>
-            <a:ext cx="8710560" cy="563400"/>
+            <a:ext cx="8709840" cy="562680"/>
           </a:xfrm>
           <a:prstGeom prst="rect">
             <a:avLst/>
@@ -2267,7 +1953,7 @@
                 <a:tab algn="l" pos="0"/>
               </a:tabLst>
             </a:pPr>
-            <a:fld id="{6B626A81-CC1E-4916-A536-FBE1ECF135F3}" type="slidenum">
+            <a:fld id="{C66535FF-B4CB-4932-B2FD-3A4D6D35D75C}" type="slidenum">
               <a:rPr b="0" lang="en-IN" sz="1200" spc="-1" strike="noStrike">
                 <a:solidFill>
                   <a:schemeClr val="dk1"/>
@@ -2275,7 +1961,7 @@
                 <a:latin typeface="Calibri"/>
                 <a:ea typeface="Calibri"/>
               </a:rPr>
-              <a:t>16</a:t>
+              <a:t>&lt;number&gt;</a:t>
             </a:fld>
             <a:endParaRPr b="0" lang="en-US" sz="1200" spc="-1" strike="noStrike">
               <a:solidFill>
@@ -2291,7 +1977,7 @@
 </p:notes>
 </file>
 
-<file path=ppt/notesSlides/notesSlide8.xml><?xml version="1.0" encoding="utf-8"?>
+<file path=ppt/notesSlides/notesSlide7.xml><?xml version="1.0" encoding="utf-8"?>
 <p:notes xmlns:a="http://schemas.openxmlformats.org/drawingml/2006/main" xmlns:p="http://schemas.openxmlformats.org/presentationml/2006/main" xmlns:r="http://schemas.openxmlformats.org/officeDocument/2006/relationships" xmlns:p14="http://schemas.microsoft.com/office/powerpoint/2010/main" xmlns:p15="http://schemas.microsoft.com/office/powerpoint/2012/main" xmlns:mc="http://schemas.openxmlformats.org/markup-compatibility/2006">
   <p:cSld>
     <p:spTree>
@@ -2310,7 +1996,7 @@
       </p:grpSpPr>
       <p:sp>
         <p:nvSpPr>
-          <p:cNvPr id="127" name="PlaceHolder 1"/>
+          <p:cNvPr id="134" name="PlaceHolder 1"/>
           <p:cNvSpPr>
             <a:spLocks noGrp="1"/>
           </p:cNvSpPr>
@@ -2321,7 +2007,7 @@
         <p:spPr>
           <a:xfrm>
             <a:off x="6281640" y="847800"/>
-            <a:ext cx="7538760" cy="4240080"/>
+            <a:ext cx="7538040" cy="4239360"/>
           </a:xfrm>
           <a:prstGeom prst="rect">
             <a:avLst/>
@@ -2333,7 +2019,7 @@
       </p:sp>
       <p:sp>
         <p:nvSpPr>
-          <p:cNvPr id="128" name="PlaceHolder 2"/>
+          <p:cNvPr id="135" name="PlaceHolder 2"/>
           <p:cNvSpPr>
             <a:spLocks noGrp="1"/>
           </p:cNvSpPr>
@@ -2344,7 +2030,7 @@
         <p:spPr>
           <a:xfrm>
             <a:off x="2009880" y="5372280"/>
-            <a:ext cx="16082640" cy="5087880"/>
+            <a:ext cx="16081920" cy="5087160"/>
           </a:xfrm>
           <a:prstGeom prst="rect">
             <a:avLst/>
@@ -2373,18 +2059,18 @@
       </p:sp>
       <p:sp>
         <p:nvSpPr>
-          <p:cNvPr id="129" name="PlaceHolder 3"/>
+          <p:cNvPr id="136" name="PlaceHolder 3"/>
           <p:cNvSpPr>
             <a:spLocks noGrp="1"/>
           </p:cNvSpPr>
           <p:nvPr>
-            <p:ph type="sldNum" idx="30"/>
+            <p:ph type="sldNum" idx="28"/>
           </p:nvPr>
         </p:nvSpPr>
         <p:spPr>
           <a:xfrm>
             <a:off x="11387160" y="10742760"/>
-            <a:ext cx="8710560" cy="563400"/>
+            <a:ext cx="8709840" cy="562680"/>
           </a:xfrm>
           <a:prstGeom prst="rect">
             <a:avLst/>
@@ -2426,7 +2112,7 @@
                 <a:tab algn="l" pos="0"/>
               </a:tabLst>
             </a:pPr>
-            <a:fld id="{1AFD1CB9-6783-4087-BBEA-DF7D8180BA06}" type="slidenum">
+            <a:fld id="{46AC5F7B-0CA5-4C91-9F0B-72334E6A8F0C}" type="slidenum">
               <a:rPr b="0" lang="en-IN" sz="1200" spc="-1" strike="noStrike">
                 <a:solidFill>
                   <a:schemeClr val="dk1"/>
@@ -2434,7 +2120,166 @@
                 <a:latin typeface="Calibri"/>
                 <a:ea typeface="Calibri"/>
               </a:rPr>
-              <a:t>16</a:t>
+              <a:t>&lt;number&gt;</a:t>
+            </a:fld>
+            <a:endParaRPr b="0" lang="en-US" sz="1200" spc="-1" strike="noStrike">
+              <a:solidFill>
+                <a:srgbClr val="000000"/>
+              </a:solidFill>
+              <a:latin typeface="Times New Roman"/>
+            </a:endParaRPr>
+          </a:p>
+        </p:txBody>
+      </p:sp>
+    </p:spTree>
+  </p:cSld>
+</p:notes>
+</file>
+
+<file path=ppt/notesSlides/notesSlide8.xml><?xml version="1.0" encoding="utf-8"?>
+<p:notes xmlns:a="http://schemas.openxmlformats.org/drawingml/2006/main" xmlns:p="http://schemas.openxmlformats.org/presentationml/2006/main" xmlns:r="http://schemas.openxmlformats.org/officeDocument/2006/relationships" xmlns:p14="http://schemas.microsoft.com/office/powerpoint/2010/main" xmlns:p15="http://schemas.microsoft.com/office/powerpoint/2012/main" xmlns:mc="http://schemas.openxmlformats.org/markup-compatibility/2006">
+  <p:cSld>
+    <p:spTree>
+      <p:nvGrpSpPr>
+        <p:cNvPr id="1" name=""/>
+        <p:cNvGrpSpPr/>
+        <p:nvPr/>
+      </p:nvGrpSpPr>
+      <p:grpSpPr>
+        <a:xfrm>
+          <a:off x="0" y="0"/>
+          <a:ext cx="0" cy="0"/>
+          <a:chOff x="0" y="0"/>
+          <a:chExt cx="0" cy="0"/>
+        </a:xfrm>
+      </p:grpSpPr>
+      <p:sp>
+        <p:nvSpPr>
+          <p:cNvPr id="137" name="PlaceHolder 1"/>
+          <p:cNvSpPr>
+            <a:spLocks noGrp="1"/>
+          </p:cNvSpPr>
+          <p:nvPr>
+            <p:ph type="sldImg"/>
+          </p:nvPr>
+        </p:nvSpPr>
+        <p:spPr>
+          <a:xfrm>
+            <a:off x="6281640" y="847800"/>
+            <a:ext cx="7538040" cy="4239360"/>
+          </a:xfrm>
+          <a:prstGeom prst="rect">
+            <a:avLst/>
+          </a:prstGeom>
+          <a:ln w="0">
+            <a:noFill/>
+          </a:ln>
+        </p:spPr>
+      </p:sp>
+      <p:sp>
+        <p:nvSpPr>
+          <p:cNvPr id="138" name="PlaceHolder 2"/>
+          <p:cNvSpPr>
+            <a:spLocks noGrp="1"/>
+          </p:cNvSpPr>
+          <p:nvPr>
+            <p:ph type="body"/>
+          </p:nvPr>
+        </p:nvSpPr>
+        <p:spPr>
+          <a:xfrm>
+            <a:off x="2009880" y="5372280"/>
+            <a:ext cx="16081920" cy="5087160"/>
+          </a:xfrm>
+          <a:prstGeom prst="rect">
+            <a:avLst/>
+          </a:prstGeom>
+          <a:noFill/>
+          <a:ln w="0">
+            <a:noFill/>
+          </a:ln>
+        </p:spPr>
+        <p:txBody>
+          <a:bodyPr lIns="91440" rIns="91440" tIns="45720" bIns="45720" anchor="t">
+            <a:noAutofit/>
+          </a:bodyPr>
+          <a:p>
+            <a:pPr marL="216000" indent="-216000">
+              <a:buNone/>
+            </a:pPr>
+            <a:endParaRPr b="0" lang="en-US" sz="1800" spc="-1" strike="noStrike">
+              <a:solidFill>
+                <a:srgbClr val="000000"/>
+              </a:solidFill>
+              <a:latin typeface="Arial"/>
+            </a:endParaRPr>
+          </a:p>
+        </p:txBody>
+      </p:sp>
+      <p:sp>
+        <p:nvSpPr>
+          <p:cNvPr id="139" name="PlaceHolder 3"/>
+          <p:cNvSpPr>
+            <a:spLocks noGrp="1"/>
+          </p:cNvSpPr>
+          <p:nvPr>
+            <p:ph type="sldNum" idx="29"/>
+          </p:nvPr>
+        </p:nvSpPr>
+        <p:spPr>
+          <a:xfrm>
+            <a:off x="11387160" y="10742760"/>
+            <a:ext cx="8709840" cy="562680"/>
+          </a:xfrm>
+          <a:prstGeom prst="rect">
+            <a:avLst/>
+          </a:prstGeom>
+          <a:noFill/>
+          <a:ln w="0">
+            <a:noFill/>
+          </a:ln>
+        </p:spPr>
+        <p:txBody>
+          <a:bodyPr lIns="91440" rIns="91440" tIns="45720" bIns="45720" anchor="b">
+            <a:noAutofit/>
+          </a:bodyPr>
+          <a:lstStyle>
+            <a:lvl1pPr indent="0" algn="r">
+              <a:lnSpc>
+                <a:spcPct val="100000"/>
+              </a:lnSpc>
+              <a:buNone/>
+              <a:tabLst>
+                <a:tab algn="l" pos="0"/>
+              </a:tabLst>
+              <a:defRPr b="0" lang="en-IN" sz="1200" spc="-1" strike="noStrike">
+                <a:solidFill>
+                  <a:schemeClr val="dk1"/>
+                </a:solidFill>
+                <a:latin typeface="Calibri"/>
+                <a:ea typeface="Calibri"/>
+              </a:defRPr>
+            </a:lvl1pPr>
+          </a:lstStyle>
+          <a:p>
+            <a:pPr indent="0" algn="r">
+              <a:lnSpc>
+                <a:spcPct val="100000"/>
+              </a:lnSpc>
+              <a:buNone/>
+              <a:tabLst>
+                <a:tab algn="l" pos="0"/>
+              </a:tabLst>
+            </a:pPr>
+            <a:fld id="{CA54B716-5663-433C-8B3D-76A88BF6F6D7}" type="slidenum">
+              <a:rPr b="0" lang="en-IN" sz="1200" spc="-1" strike="noStrike">
+                <a:solidFill>
+                  <a:schemeClr val="dk1"/>
+                </a:solidFill>
+                <a:latin typeface="Calibri"/>
+                <a:ea typeface="Calibri"/>
+              </a:rPr>
+              <a:t>&lt;number&gt;</a:t>
             </a:fld>
             <a:endParaRPr b="0" lang="en-US" sz="1200" spc="-1" strike="noStrike">
               <a:solidFill>
@@ -2481,7 +2326,7 @@
         <p:txBody>
           <a:bodyPr/>
           <a:p>
-            <a:fld id="{CC81E020-81D9-4B00-B018-3A9FDCB64EFA}" type="slidenum">
+            <a:fld id="{01036C2F-6932-4A53-A8AE-1F627AE355CF}" type="slidenum">
               <a:t>&lt;#&gt;</a:t>
             </a:fld>
           </a:p>
@@ -2523,7 +2368,7 @@
         <p:txBody>
           <a:bodyPr/>
           <a:p>
-            <a:fld id="{5C7E0DAD-7B48-4D3E-A1F6-DCD6212DFF55}" type="slidenum">
+            <a:fld id="{4AF3E2A8-C712-4110-AD75-E1855F2A3E9E}" type="slidenum">
               <a:t>&lt;#&gt;</a:t>
             </a:fld>
           </a:p>
@@ -2565,7 +2410,7 @@
         <p:txBody>
           <a:bodyPr/>
           <a:p>
-            <a:fld id="{A19D0530-5380-4BA3-8095-2BF2642B55F5}" type="slidenum">
+            <a:fld id="{3FEB5206-625A-44F6-8D5C-D6C759EF0062}" type="slidenum">
               <a:t>&lt;#&gt;</a:t>
             </a:fld>
           </a:p>
@@ -2607,7 +2452,7 @@
         <p:txBody>
           <a:bodyPr/>
           <a:p>
-            <a:fld id="{FFA37664-17DD-4853-B64B-A2663B9CB5B7}" type="slidenum">
+            <a:fld id="{C7B07CDA-1D52-43C8-B040-16F47DB899BF}" type="slidenum">
               <a:t>&lt;#&gt;</a:t>
             </a:fld>
           </a:p>
@@ -2649,7 +2494,7 @@
         <p:txBody>
           <a:bodyPr/>
           <a:p>
-            <a:fld id="{39222588-7862-431E-BB45-1179D94A2E75}" type="slidenum">
+            <a:fld id="{9921E679-79D2-4FCC-BE29-2C4D24BECED4}" type="slidenum">
               <a:t>&lt;#&gt;</a:t>
             </a:fld>
           </a:p>
@@ -2690,7 +2535,7 @@
         <p:spPr>
           <a:xfrm>
             <a:off x="861120" y="2054160"/>
-            <a:ext cx="18730800" cy="1256760"/>
+            <a:ext cx="18730080" cy="1256040"/>
           </a:xfrm>
           <a:prstGeom prst="rect">
             <a:avLst/>
@@ -2730,7 +2575,7 @@
         <p:spPr>
           <a:xfrm>
             <a:off x="556560" y="4084560"/>
-            <a:ext cx="18730800" cy="7509240"/>
+            <a:ext cx="18730080" cy="7508520"/>
           </a:xfrm>
           <a:prstGeom prst="rect">
             <a:avLst/>
@@ -2774,7 +2619,7 @@
         <p:txBody>
           <a:bodyPr/>
           <a:p>
-            <a:fld id="{59E00233-B5C6-4A5E-AE2E-F6559CA03E6F}" type="slidenum">
+            <a:fld id="{F812F2A0-263A-48E6-B9DE-D06A4DEBF861}" type="slidenum">
               <a:t>&lt;#&gt;</a:t>
             </a:fld>
           </a:p>
@@ -2823,7 +2668,7 @@
         <p:spPr>
           <a:xfrm>
             <a:off x="474840" y="474840"/>
-            <a:ext cx="3312360" cy="1422360"/>
+            <a:ext cx="3311640" cy="1421640"/>
           </a:xfrm>
           <a:prstGeom prst="rect">
             <a:avLst/>
@@ -2846,7 +2691,7 @@
         <p:spPr>
           <a:xfrm>
             <a:off x="7614360" y="10400400"/>
-            <a:ext cx="4872960" cy="739080"/>
+            <a:ext cx="4872240" cy="738360"/>
           </a:xfrm>
           <a:prstGeom prst="rect">
             <a:avLst/>
@@ -2865,15 +2710,15 @@
         <p:spPr>
           <a:xfrm>
             <a:off x="2982960" y="712800"/>
-            <a:ext cx="55440" cy="55440"/>
+            <a:ext cx="54720" cy="54720"/>
           </a:xfrm>
           <a:custGeom>
             <a:avLst/>
             <a:gdLst>
-              <a:gd name="textAreaLeft" fmla="*/ 0 w 55440"/>
-              <a:gd name="textAreaRight" fmla="*/ 57240 w 55440"/>
-              <a:gd name="textAreaTop" fmla="*/ 0 h 55440"/>
-              <a:gd name="textAreaBottom" fmla="*/ 57240 h 55440"/>
+              <a:gd name="textAreaLeft" fmla="*/ 0 w 54720"/>
+              <a:gd name="textAreaRight" fmla="*/ 57240 w 54720"/>
+              <a:gd name="textAreaTop" fmla="*/ 0 h 54720"/>
+              <a:gd name="textAreaBottom" fmla="*/ 57240 h 54720"/>
             </a:gdLst>
             <a:ahLst/>
             <a:rect l="textAreaLeft" t="textAreaTop" r="textAreaRight" b="textAreaBottom"/>
@@ -3051,15 +2896,15 @@
         <p:spPr>
           <a:xfrm>
             <a:off x="2998800" y="725400"/>
-            <a:ext cx="23760" cy="29880"/>
+            <a:ext cx="23040" cy="29160"/>
           </a:xfrm>
           <a:custGeom>
             <a:avLst/>
             <a:gdLst>
-              <a:gd name="textAreaLeft" fmla="*/ 0 w 23760"/>
-              <a:gd name="textAreaRight" fmla="*/ 25560 w 23760"/>
-              <a:gd name="textAreaTop" fmla="*/ 0 h 29880"/>
-              <a:gd name="textAreaBottom" fmla="*/ 31680 h 29880"/>
+              <a:gd name="textAreaLeft" fmla="*/ 0 w 23040"/>
+              <a:gd name="textAreaRight" fmla="*/ 25560 w 23040"/>
+              <a:gd name="textAreaTop" fmla="*/ 0 h 29160"/>
+              <a:gd name="textAreaBottom" fmla="*/ 31680 h 29160"/>
             </a:gdLst>
             <a:ahLst/>
             <a:rect l="textAreaLeft" t="textAreaTop" r="textAreaRight" b="textAreaBottom"/>
@@ -3232,7 +3077,7 @@
         <p:spPr>
           <a:xfrm>
             <a:off x="18627840" y="10253160"/>
-            <a:ext cx="1203480" cy="862560"/>
+            <a:ext cx="1202760" cy="861840"/>
           </a:xfrm>
           <a:prstGeom prst="rect">
             <a:avLst/>
@@ -3274,7 +3119,7 @@
                 <a:tab algn="l" pos="0"/>
               </a:tabLst>
             </a:pPr>
-            <a:fld id="{E98D9C2B-8AA4-4C13-B0BC-BF597E9EB94E}" type="slidenum">
+            <a:fld id="{FD134B50-2DA3-4EB4-90CA-1E7B58140537}" type="slidenum">
               <a:rPr b="0" lang="en-IN" sz="2200" spc="-1" strike="noStrike">
                 <a:solidFill>
                   <a:schemeClr val="dk2"/>
@@ -3331,70 +3176,7 @@
                 </a:solidFill>
                 <a:latin typeface="Arial"/>
               </a:rPr>
-              <a:t>Clic</a:t>
-            </a:r>
-            <a:r>
-              <a:rPr b="0" lang="en-US" sz="4400" spc="-1" strike="noStrike">
-                <a:solidFill>
-                  <a:srgbClr val="000000"/>
-                </a:solidFill>
-                <a:latin typeface="Arial"/>
-              </a:rPr>
-              <a:t>k to </a:t>
-            </a:r>
-            <a:r>
-              <a:rPr b="0" lang="en-US" sz="4400" spc="-1" strike="noStrike">
-                <a:solidFill>
-                  <a:srgbClr val="000000"/>
-                </a:solidFill>
-                <a:latin typeface="Arial"/>
-              </a:rPr>
-              <a:t>edit </a:t>
-            </a:r>
-            <a:r>
-              <a:rPr b="0" lang="en-US" sz="4400" spc="-1" strike="noStrike">
-                <a:solidFill>
-                  <a:srgbClr val="000000"/>
-                </a:solidFill>
-                <a:latin typeface="Arial"/>
-              </a:rPr>
-              <a:t>the </a:t>
-            </a:r>
-            <a:r>
-              <a:rPr b="0" lang="en-US" sz="4400" spc="-1" strike="noStrike">
-                <a:solidFill>
-                  <a:srgbClr val="000000"/>
-                </a:solidFill>
-                <a:latin typeface="Arial"/>
-              </a:rPr>
-              <a:t>title </a:t>
-            </a:r>
-            <a:r>
-              <a:rPr b="0" lang="en-US" sz="4400" spc="-1" strike="noStrike">
-                <a:solidFill>
-                  <a:srgbClr val="000000"/>
-                </a:solidFill>
-                <a:latin typeface="Arial"/>
-              </a:rPr>
-              <a:t>text </a:t>
-            </a:r>
-            <a:r>
-              <a:rPr b="0" lang="en-US" sz="4400" spc="-1" strike="noStrike">
-                <a:solidFill>
-                  <a:srgbClr val="000000"/>
-                </a:solidFill>
-                <a:latin typeface="Arial"/>
-              </a:rPr>
-              <a:t>for</a:t>
-            </a:r>
-            <a:r>
-              <a:rPr b="0" lang="en-US" sz="4400" spc="-1" strike="noStrike">
-                <a:solidFill>
-                  <a:srgbClr val="000000"/>
-                </a:solidFill>
-                <a:latin typeface="Arial"/>
-              </a:rPr>
-              <a:t>mat</a:t>
+              <a:t>Click to edit the title text format</a:t>
             </a:r>
             <a:endParaRPr b="0" lang="en-US" sz="4400" spc="-1" strike="noStrike">
               <a:solidFill>
@@ -3677,7 +3459,7 @@
         <p:spPr>
           <a:xfrm>
             <a:off x="474840" y="474840"/>
-            <a:ext cx="3312360" cy="1422360"/>
+            <a:ext cx="3311640" cy="1421640"/>
           </a:xfrm>
           <a:prstGeom prst="rect">
             <a:avLst/>
@@ -3700,7 +3482,7 @@
         <p:spPr>
           <a:xfrm>
             <a:off x="15354360" y="912600"/>
-            <a:ext cx="4337280" cy="657720"/>
+            <a:ext cx="4336560" cy="657000"/>
           </a:xfrm>
           <a:prstGeom prst="rect">
             <a:avLst/>
@@ -3723,7 +3505,7 @@
         <p:spPr>
           <a:xfrm>
             <a:off x="18627840" y="10253160"/>
-            <a:ext cx="1203480" cy="862560"/>
+            <a:ext cx="1202760" cy="861840"/>
           </a:xfrm>
           <a:prstGeom prst="rect">
             <a:avLst/>
@@ -3765,7 +3547,7 @@
                 <a:tab algn="l" pos="0"/>
               </a:tabLst>
             </a:pPr>
-            <a:fld id="{7C21F9C5-EF1C-4A65-915D-8421512D4BBF}" type="slidenum">
+            <a:fld id="{4FC7BFFC-E586-44CA-AF75-47D4846E1F9D}" type="slidenum">
               <a:rPr b="0" lang="en-IN" sz="2200" spc="-1" strike="noStrike">
                 <a:solidFill>
                   <a:schemeClr val="dk2"/>
@@ -3831,7 +3613,7 @@
         <p:spPr>
           <a:xfrm>
             <a:off x="474840" y="474840"/>
-            <a:ext cx="3312360" cy="1422360"/>
+            <a:ext cx="3311640" cy="1421640"/>
           </a:xfrm>
           <a:prstGeom prst="rect">
             <a:avLst/>
@@ -3854,7 +3636,7 @@
         <p:spPr>
           <a:xfrm>
             <a:off x="15354360" y="912600"/>
-            <a:ext cx="4337280" cy="657720"/>
+            <a:ext cx="4336560" cy="657000"/>
           </a:xfrm>
           <a:prstGeom prst="rect">
             <a:avLst/>
@@ -3877,7 +3659,7 @@
         <p:spPr>
           <a:xfrm>
             <a:off x="18627840" y="10253160"/>
-            <a:ext cx="1203480" cy="862560"/>
+            <a:ext cx="1202760" cy="861840"/>
           </a:xfrm>
           <a:prstGeom prst="rect">
             <a:avLst/>
@@ -3919,7 +3701,7 @@
                 <a:tab algn="l" pos="0"/>
               </a:tabLst>
             </a:pPr>
-            <a:fld id="{1EF799C1-9C2A-44A5-B585-18068E698C08}" type="slidenum">
+            <a:fld id="{106FDFE4-2469-4465-B256-ECDEC2310485}" type="slidenum">
               <a:rPr b="0" lang="en-IN" sz="2200" spc="-1" strike="noStrike">
                 <a:solidFill>
                   <a:schemeClr val="dk2"/>
@@ -3985,7 +3767,7 @@
         <p:spPr>
           <a:xfrm>
             <a:off x="474840" y="474840"/>
-            <a:ext cx="3312360" cy="1422360"/>
+            <a:ext cx="3311640" cy="1421640"/>
           </a:xfrm>
           <a:prstGeom prst="rect">
             <a:avLst/>
@@ -4008,7 +3790,7 @@
         <p:spPr>
           <a:xfrm>
             <a:off x="15354360" y="912600"/>
-            <a:ext cx="4337280" cy="657720"/>
+            <a:ext cx="4336560" cy="657000"/>
           </a:xfrm>
           <a:prstGeom prst="rect">
             <a:avLst/>
@@ -4031,7 +3813,7 @@
         <p:spPr>
           <a:xfrm>
             <a:off x="18627840" y="10253160"/>
-            <a:ext cx="1203480" cy="862560"/>
+            <a:ext cx="1202760" cy="861840"/>
           </a:xfrm>
           <a:prstGeom prst="rect">
             <a:avLst/>
@@ -4073,7 +3855,7 @@
                 <a:tab algn="l" pos="0"/>
               </a:tabLst>
             </a:pPr>
-            <a:fld id="{FF632869-88ED-4621-BF11-29C45D7BA7D7}" type="slidenum">
+            <a:fld id="{A67C588A-D3A3-4C2E-B298-871F09DF012E}" type="slidenum">
               <a:rPr b="0" lang="en-IN" sz="2200" spc="-1" strike="noStrike">
                 <a:solidFill>
                   <a:schemeClr val="dk2"/>
@@ -4139,7 +3921,7 @@
         <p:spPr>
           <a:xfrm>
             <a:off x="474840" y="474840"/>
-            <a:ext cx="3312360" cy="1422360"/>
+            <a:ext cx="3311640" cy="1421640"/>
           </a:xfrm>
           <a:prstGeom prst="rect">
             <a:avLst/>
@@ -4162,7 +3944,7 @@
         <p:spPr>
           <a:xfrm>
             <a:off x="15354360" y="912600"/>
-            <a:ext cx="4337280" cy="657720"/>
+            <a:ext cx="4336560" cy="657000"/>
           </a:xfrm>
           <a:prstGeom prst="rect">
             <a:avLst/>
@@ -4185,7 +3967,7 @@
         <p:spPr>
           <a:xfrm>
             <a:off x="18627840" y="10253160"/>
-            <a:ext cx="1203480" cy="862560"/>
+            <a:ext cx="1202760" cy="861840"/>
           </a:xfrm>
           <a:prstGeom prst="rect">
             <a:avLst/>
@@ -4227,7 +4009,7 @@
                 <a:tab algn="l" pos="0"/>
               </a:tabLst>
             </a:pPr>
-            <a:fld id="{1C5DF5CA-E1D5-4D90-86D2-B3421018F798}" type="slidenum">
+            <a:fld id="{B0E93A2C-8321-46B2-929E-09A15E51601A}" type="slidenum">
               <a:rPr b="0" lang="en-IN" sz="2200" spc="-1" strike="noStrike">
                 <a:solidFill>
                   <a:schemeClr val="dk2"/>
@@ -4293,7 +4075,7 @@
         <p:spPr>
           <a:xfrm>
             <a:off x="474840" y="474840"/>
-            <a:ext cx="3312360" cy="1422360"/>
+            <a:ext cx="3311640" cy="1421640"/>
           </a:xfrm>
           <a:prstGeom prst="rect">
             <a:avLst/>
@@ -4316,7 +4098,7 @@
         <p:spPr>
           <a:xfrm>
             <a:off x="15354360" y="912600"/>
-            <a:ext cx="4337280" cy="657720"/>
+            <a:ext cx="4336560" cy="657000"/>
           </a:xfrm>
           <a:prstGeom prst="rect">
             <a:avLst/>
@@ -4339,7 +4121,7 @@
         <p:spPr>
           <a:xfrm>
             <a:off x="861120" y="2054160"/>
-            <a:ext cx="18730800" cy="1256760"/>
+            <a:ext cx="18730080" cy="1256040"/>
           </a:xfrm>
           <a:prstGeom prst="rect">
             <a:avLst/>
@@ -4388,7 +4170,7 @@
         <p:spPr>
           <a:xfrm>
             <a:off x="556560" y="4084560"/>
-            <a:ext cx="18730800" cy="7509240"/>
+            <a:ext cx="18730080" cy="7508520"/>
           </a:xfrm>
           <a:prstGeom prst="rect">
             <a:avLst/>
@@ -4613,7 +4395,7 @@
         <p:spPr>
           <a:xfrm>
             <a:off x="18627840" y="10253160"/>
-            <a:ext cx="1203480" cy="862560"/>
+            <a:ext cx="1202760" cy="861840"/>
           </a:xfrm>
           <a:prstGeom prst="rect">
             <a:avLst/>
@@ -4655,7 +4437,7 @@
                 <a:tab algn="l" pos="0"/>
               </a:tabLst>
             </a:pPr>
-            <a:fld id="{E3473B71-CE2F-4529-94B2-5F24FA1A8305}" type="slidenum">
+            <a:fld id="{D1166AF6-3422-46C2-B502-A767E5988D52}" type="slidenum">
               <a:rPr b="0" lang="en-IN" sz="2200" spc="-1" strike="noStrike">
                 <a:solidFill>
                   <a:schemeClr val="dk2"/>
@@ -4709,7 +4491,7 @@
         <p:spPr>
           <a:xfrm>
             <a:off x="4443840" y="2008080"/>
-            <a:ext cx="11215080" cy="1393560"/>
+            <a:ext cx="11214360" cy="1392840"/>
           </a:xfrm>
           <a:prstGeom prst="rect">
             <a:avLst/>
@@ -4766,7 +4548,7 @@
         <p:spPr>
           <a:xfrm>
             <a:off x="1575360" y="3254400"/>
-            <a:ext cx="17015400" cy="6957720"/>
+            <a:ext cx="17014680" cy="6957000"/>
           </a:xfrm>
           <a:prstGeom prst="rect">
             <a:avLst/>
@@ -5189,7 +4971,7 @@
         <p:spPr>
           <a:xfrm>
             <a:off x="18627840" y="10253160"/>
-            <a:ext cx="1203480" cy="862560"/>
+            <a:ext cx="1202760" cy="861840"/>
           </a:xfrm>
           <a:prstGeom prst="rect">
             <a:avLst/>
@@ -5231,7 +5013,7 @@
                 <a:tab algn="l" pos="0"/>
               </a:tabLst>
             </a:pPr>
-            <a:fld id="{39806F76-F5B4-461F-94DD-D7B344B9AE31}" type="slidenum">
+            <a:fld id="{3C37B4A7-F6E4-4967-A442-7E82B371C4A3}" type="slidenum">
               <a:rPr b="0" lang="en-IN" sz="2200" spc="-1" strike="noStrike">
                 <a:solidFill>
                   <a:schemeClr val="dk2"/>
@@ -5259,7 +5041,7 @@
         <p:spPr>
           <a:xfrm>
             <a:off x="4599360" y="351000"/>
-            <a:ext cx="10903680" cy="1393560"/>
+            <a:ext cx="10902960" cy="1392840"/>
           </a:xfrm>
           <a:prstGeom prst="rect">
             <a:avLst/>
@@ -5346,15 +5128,15 @@
         <p:spPr>
           <a:xfrm>
             <a:off x="2982960" y="712800"/>
-            <a:ext cx="55440" cy="55440"/>
+            <a:ext cx="54720" cy="54720"/>
           </a:xfrm>
           <a:custGeom>
             <a:avLst/>
             <a:gdLst>
-              <a:gd name="textAreaLeft" fmla="*/ 0 w 55440"/>
-              <a:gd name="textAreaRight" fmla="*/ 57240 w 55440"/>
-              <a:gd name="textAreaTop" fmla="*/ 0 h 55440"/>
-              <a:gd name="textAreaBottom" fmla="*/ 57240 h 55440"/>
+              <a:gd name="textAreaLeft" fmla="*/ 0 w 54720"/>
+              <a:gd name="textAreaRight" fmla="*/ 57240 w 54720"/>
+              <a:gd name="textAreaTop" fmla="*/ 0 h 54720"/>
+              <a:gd name="textAreaBottom" fmla="*/ 57240 h 54720"/>
             </a:gdLst>
             <a:ahLst/>
             <a:rect l="textAreaLeft" t="textAreaTop" r="textAreaRight" b="textAreaBottom"/>
@@ -5532,15 +5314,15 @@
         <p:spPr>
           <a:xfrm>
             <a:off x="2998800" y="725400"/>
-            <a:ext cx="23760" cy="29880"/>
+            <a:ext cx="23040" cy="29160"/>
           </a:xfrm>
           <a:custGeom>
             <a:avLst/>
             <a:gdLst>
-              <a:gd name="textAreaLeft" fmla="*/ 0 w 23760"/>
-              <a:gd name="textAreaRight" fmla="*/ 25560 w 23760"/>
-              <a:gd name="textAreaTop" fmla="*/ 0 h 29880"/>
-              <a:gd name="textAreaBottom" fmla="*/ 31680 h 29880"/>
+              <a:gd name="textAreaLeft" fmla="*/ 0 w 23040"/>
+              <a:gd name="textAreaRight" fmla="*/ 25560 w 23040"/>
+              <a:gd name="textAreaTop" fmla="*/ 0 h 29160"/>
+              <a:gd name="textAreaBottom" fmla="*/ 31680 h 29160"/>
             </a:gdLst>
             <a:ahLst/>
             <a:rect l="textAreaLeft" t="textAreaTop" r="textAreaRight" b="textAreaBottom"/>
@@ -5713,7 +5495,7 @@
         <p:spPr>
           <a:xfrm>
             <a:off x="18627840" y="10253160"/>
-            <a:ext cx="1203480" cy="862560"/>
+            <a:ext cx="1202760" cy="861840"/>
           </a:xfrm>
           <a:prstGeom prst="rect">
             <a:avLst/>
@@ -5755,7 +5537,7 @@
                 <a:tab algn="l" pos="0"/>
               </a:tabLst>
             </a:pPr>
-            <a:fld id="{7035FA7D-A95F-40EC-9168-036FD17DECA0}" type="slidenum">
+            <a:fld id="{1C01F7B6-7E53-4B46-97C8-89660D51EEB6}" type="slidenum">
               <a:rPr b="0" lang="en-IN" sz="2200" spc="-1" strike="noStrike">
                 <a:solidFill>
                   <a:schemeClr val="dk2"/>
@@ -5763,7 +5545,7 @@
                 <a:latin typeface="Arial"/>
                 <a:ea typeface="Arial"/>
               </a:rPr>
-              <a:t>10</a:t>
+              <a:t>&lt;number&gt;</a:t>
             </a:fld>
             <a:endParaRPr b="0" lang="en-US" sz="2200" spc="-1" strike="noStrike">
               <a:solidFill>
@@ -5783,7 +5565,7 @@
         <p:spPr>
           <a:xfrm>
             <a:off x="5057640" y="290520"/>
-            <a:ext cx="9069120" cy="637920"/>
+            <a:ext cx="9068400" cy="637200"/>
           </a:xfrm>
           <a:prstGeom prst="rect">
             <a:avLst/>
@@ -5831,39 +5613,16 @@
           </a:p>
         </p:txBody>
       </p:sp>
-      <p:pic>
-        <p:nvPicPr>
-          <p:cNvPr id="79" name="" descr=""/>
-          <p:cNvPicPr/>
-          <p:nvPr/>
-        </p:nvPicPr>
-        <p:blipFill>
-          <a:blip r:embed="rId1"/>
-          <a:stretch/>
-        </p:blipFill>
-        <p:spPr>
-          <a:xfrm>
-            <a:off x="3742920" y="3281040"/>
-            <a:ext cx="12617280" cy="6339240"/>
-          </a:xfrm>
-          <a:prstGeom prst="rect">
-            <a:avLst/>
-          </a:prstGeom>
-          <a:ln w="0">
-            <a:noFill/>
-          </a:ln>
-        </p:spPr>
-      </p:pic>
       <p:sp>
         <p:nvSpPr>
-          <p:cNvPr id="80" name="Google Shape;119;p 1"/>
+          <p:cNvPr id="79" name="Google Shape;119;p 1"/>
           <p:cNvSpPr/>
           <p:nvPr/>
         </p:nvSpPr>
         <p:spPr>
           <a:xfrm>
-            <a:off x="347400" y="2081880"/>
-            <a:ext cx="2785320" cy="637920"/>
+            <a:off x="8458200" y="10335240"/>
+            <a:ext cx="2784600" cy="637200"/>
           </a:xfrm>
           <a:prstGeom prst="rect">
             <a:avLst/>
@@ -5911,6 +5670,29 @@
           </a:p>
         </p:txBody>
       </p:sp>
+      <p:pic>
+        <p:nvPicPr>
+          <p:cNvPr id="80" name="" descr=""/>
+          <p:cNvPicPr/>
+          <p:nvPr/>
+        </p:nvPicPr>
+        <p:blipFill>
+          <a:blip r:embed="rId1"/>
+          <a:stretch/>
+        </p:blipFill>
+        <p:spPr>
+          <a:xfrm>
+            <a:off x="4069440" y="1798560"/>
+            <a:ext cx="11703600" cy="7802280"/>
+          </a:xfrm>
+          <a:prstGeom prst="rect">
+            <a:avLst/>
+          </a:prstGeom>
+          <a:ln w="0">
+            <a:noFill/>
+          </a:ln>
+        </p:spPr>
+      </p:pic>
     </p:spTree>
   </p:cSld>
   <mc:AlternateContent>
@@ -5950,15 +5732,15 @@
         <p:spPr>
           <a:xfrm>
             <a:off x="2982960" y="712800"/>
-            <a:ext cx="55440" cy="55440"/>
+            <a:ext cx="54720" cy="54720"/>
           </a:xfrm>
           <a:custGeom>
             <a:avLst/>
             <a:gdLst>
-              <a:gd name="textAreaLeft" fmla="*/ 0 w 55440"/>
-              <a:gd name="textAreaRight" fmla="*/ 57240 w 55440"/>
-              <a:gd name="textAreaTop" fmla="*/ 0 h 55440"/>
-              <a:gd name="textAreaBottom" fmla="*/ 57240 h 55440"/>
+              <a:gd name="textAreaLeft" fmla="*/ 0 w 54720"/>
+              <a:gd name="textAreaRight" fmla="*/ 57240 w 54720"/>
+              <a:gd name="textAreaTop" fmla="*/ 0 h 54720"/>
+              <a:gd name="textAreaBottom" fmla="*/ 57240 h 54720"/>
             </a:gdLst>
             <a:ahLst/>
             <a:rect l="textAreaLeft" t="textAreaTop" r="textAreaRight" b="textAreaBottom"/>
@@ -6136,15 +5918,15 @@
         <p:spPr>
           <a:xfrm>
             <a:off x="2998800" y="725400"/>
-            <a:ext cx="23760" cy="29880"/>
+            <a:ext cx="23040" cy="29160"/>
           </a:xfrm>
           <a:custGeom>
             <a:avLst/>
             <a:gdLst>
-              <a:gd name="textAreaLeft" fmla="*/ 0 w 23760"/>
-              <a:gd name="textAreaRight" fmla="*/ 25560 w 23760"/>
-              <a:gd name="textAreaTop" fmla="*/ 0 h 29880"/>
-              <a:gd name="textAreaBottom" fmla="*/ 31680 h 29880"/>
+              <a:gd name="textAreaLeft" fmla="*/ 0 w 23040"/>
+              <a:gd name="textAreaRight" fmla="*/ 25560 w 23040"/>
+              <a:gd name="textAreaTop" fmla="*/ 0 h 29160"/>
+              <a:gd name="textAreaBottom" fmla="*/ 31680 h 29160"/>
             </a:gdLst>
             <a:ahLst/>
             <a:rect l="textAreaLeft" t="textAreaTop" r="textAreaRight" b="textAreaBottom"/>
@@ -6317,7 +6099,7 @@
         <p:spPr>
           <a:xfrm>
             <a:off x="18627840" y="10253160"/>
-            <a:ext cx="1203480" cy="862560"/>
+            <a:ext cx="1202760" cy="861840"/>
           </a:xfrm>
           <a:prstGeom prst="rect">
             <a:avLst/>
@@ -6359,7 +6141,7 @@
                 <a:tab algn="l" pos="0"/>
               </a:tabLst>
             </a:pPr>
-            <a:fld id="{6150BF2C-B353-43FC-8759-A65B641D4266}" type="slidenum">
+            <a:fld id="{1B30A8AC-F7AF-40C8-96FF-7E10EB1EF264}" type="slidenum">
               <a:rPr b="0" lang="en-IN" sz="2200" spc="-1" strike="noStrike">
                 <a:solidFill>
                   <a:schemeClr val="dk2"/>
@@ -6367,7 +6149,7 @@
                 <a:latin typeface="Arial"/>
                 <a:ea typeface="Arial"/>
               </a:rPr>
-              <a:t>11</a:t>
+              <a:t>&lt;number&gt;</a:t>
             </a:fld>
             <a:endParaRPr b="0" lang="en-US" sz="2200" spc="-1" strike="noStrike">
               <a:solidFill>
@@ -6380,177 +6162,14 @@
       </p:sp>
       <p:sp>
         <p:nvSpPr>
-          <p:cNvPr id="84" name="Google Shape;129;p12"/>
-          <p:cNvSpPr/>
-          <p:nvPr/>
-        </p:nvSpPr>
-        <p:spPr>
-          <a:xfrm>
-            <a:off x="969840" y="1847520"/>
-            <a:ext cx="18525960" cy="4660200"/>
-          </a:xfrm>
-          <a:prstGeom prst="rect">
-            <a:avLst/>
-          </a:prstGeom>
-          <a:noFill/>
-          <a:ln w="0">
-            <a:noFill/>
-          </a:ln>
-        </p:spPr>
-        <p:style>
-          <a:lnRef idx="0"/>
-          <a:fillRef idx="0"/>
-          <a:effectRef idx="0"/>
-          <a:fontRef idx="minor"/>
-        </p:style>
-        <p:txBody>
-          <a:bodyPr lIns="90000" rIns="90000" tIns="45000" bIns="45000" anchor="t">
-            <a:spAutoFit/>
-          </a:bodyPr>
-          <a:p>
-            <a:pPr algn="just">
-              <a:lnSpc>
-                <a:spcPct val="100000"/>
-              </a:lnSpc>
-              <a:tabLst>
-                <a:tab algn="l" pos="0"/>
-              </a:tabLst>
-            </a:pPr>
-            <a:r>
-              <a:rPr b="0" lang="en-IN" sz="4000" spc="-1" strike="noStrike">
-                <a:solidFill>
-                  <a:srgbClr val="000000"/>
-                </a:solidFill>
-                <a:latin typeface="Times New Roman"/>
-                <a:ea typeface="Times New Roman"/>
-              </a:rPr>
-              <a:t>Architectural diagram should  be shown and explained &lt;&lt;sample given&gt;&gt;  </a:t>
-            </a:r>
-            <a:endParaRPr b="0" lang="en-US" sz="4000" spc="-1" strike="noStrike">
-              <a:solidFill>
-                <a:srgbClr val="000000"/>
-              </a:solidFill>
-              <a:latin typeface="Arial"/>
-            </a:endParaRPr>
-          </a:p>
-          <a:p>
-            <a:pPr algn="just">
-              <a:lnSpc>
-                <a:spcPct val="100000"/>
-              </a:lnSpc>
-              <a:tabLst>
-                <a:tab algn="l" pos="0"/>
-              </a:tabLst>
-            </a:pPr>
-            <a:endParaRPr b="0" lang="en-US" sz="4000" spc="-1" strike="noStrike">
-              <a:solidFill>
-                <a:srgbClr val="000000"/>
-              </a:solidFill>
-              <a:latin typeface="Arial"/>
-            </a:endParaRPr>
-          </a:p>
-          <a:p>
-            <a:pPr>
-              <a:lnSpc>
-                <a:spcPct val="100000"/>
-              </a:lnSpc>
-              <a:tabLst>
-                <a:tab algn="l" pos="0"/>
-              </a:tabLst>
-            </a:pPr>
-            <a:endParaRPr b="0" lang="en-US" sz="4400" spc="-1" strike="noStrike">
-              <a:solidFill>
-                <a:srgbClr val="000000"/>
-              </a:solidFill>
-              <a:latin typeface="Arial"/>
-            </a:endParaRPr>
-          </a:p>
-          <a:p>
-            <a:pPr>
-              <a:lnSpc>
-                <a:spcPct val="100000"/>
-              </a:lnSpc>
-              <a:tabLst>
-                <a:tab algn="l" pos="0"/>
-              </a:tabLst>
-            </a:pPr>
-            <a:endParaRPr b="0" lang="en-US" sz="4400" spc="-1" strike="noStrike">
-              <a:solidFill>
-                <a:srgbClr val="000000"/>
-              </a:solidFill>
-              <a:latin typeface="Arial"/>
-            </a:endParaRPr>
-          </a:p>
-          <a:p>
-            <a:pPr>
-              <a:lnSpc>
-                <a:spcPct val="100000"/>
-              </a:lnSpc>
-              <a:tabLst>
-                <a:tab algn="l" pos="0"/>
-              </a:tabLst>
-            </a:pPr>
-            <a:endParaRPr b="0" lang="en-US" sz="4400" spc="-1" strike="noStrike">
-              <a:solidFill>
-                <a:srgbClr val="000000"/>
-              </a:solidFill>
-              <a:latin typeface="Arial"/>
-            </a:endParaRPr>
-          </a:p>
-          <a:p>
-            <a:pPr>
-              <a:lnSpc>
-                <a:spcPct val="100000"/>
-              </a:lnSpc>
-              <a:tabLst>
-                <a:tab algn="l" pos="0"/>
-              </a:tabLst>
-            </a:pPr>
-            <a:endParaRPr b="0" lang="en-US" sz="4400" spc="-1" strike="noStrike">
-              <a:solidFill>
-                <a:srgbClr val="000000"/>
-              </a:solidFill>
-              <a:latin typeface="Arial"/>
-            </a:endParaRPr>
-          </a:p>
-          <a:p>
-            <a:pPr>
-              <a:lnSpc>
-                <a:spcPct val="100000"/>
-              </a:lnSpc>
-              <a:tabLst>
-                <a:tab algn="l" pos="0"/>
-              </a:tabLst>
-            </a:pPr>
-            <a:r>
-              <a:rPr b="1" lang="en-IN" sz="4400" spc="-1" strike="noStrike">
-                <a:solidFill>
-                  <a:srgbClr val="000000"/>
-                </a:solidFill>
-                <a:latin typeface="Times New Roman"/>
-                <a:ea typeface="Times New Roman"/>
-              </a:rPr>
-              <a:t> </a:t>
-            </a:r>
-            <a:endParaRPr b="0" lang="en-US" sz="4400" spc="-1" strike="noStrike">
-              <a:solidFill>
-                <a:srgbClr val="000000"/>
-              </a:solidFill>
-              <a:latin typeface="Arial"/>
-            </a:endParaRPr>
-          </a:p>
-        </p:txBody>
-      </p:sp>
-      <p:sp>
-        <p:nvSpPr>
-          <p:cNvPr id="85" name="Google Shape;130;p12"/>
+          <p:cNvPr id="84" name="Google Shape;130;p12"/>
           <p:cNvSpPr/>
           <p:nvPr/>
         </p:nvSpPr>
         <p:spPr>
           <a:xfrm>
             <a:off x="5057640" y="290520"/>
-            <a:ext cx="9069120" cy="637920"/>
+            <a:ext cx="9068400" cy="637200"/>
           </a:xfrm>
           <a:prstGeom prst="rect">
             <a:avLst/>
@@ -6598,6 +6217,84 @@
           </a:p>
         </p:txBody>
       </p:sp>
+      <p:pic>
+        <p:nvPicPr>
+          <p:cNvPr id="85" name="" descr=""/>
+          <p:cNvPicPr/>
+          <p:nvPr/>
+        </p:nvPicPr>
+        <p:blipFill>
+          <a:blip r:embed="rId1"/>
+          <a:srcRect l="16009" t="0" r="15628" b="5"/>
+          <a:stretch/>
+        </p:blipFill>
+        <p:spPr>
+          <a:xfrm>
+            <a:off x="5715000" y="1828800"/>
+            <a:ext cx="8000280" cy="7801560"/>
+          </a:xfrm>
+          <a:prstGeom prst="rect">
+            <a:avLst/>
+          </a:prstGeom>
+          <a:ln w="0">
+            <a:noFill/>
+          </a:ln>
+        </p:spPr>
+      </p:pic>
+      <p:sp>
+        <p:nvSpPr>
+          <p:cNvPr id="86" name=""/>
+          <p:cNvSpPr/>
+          <p:nvPr/>
+        </p:nvSpPr>
+        <p:spPr>
+          <a:xfrm>
+            <a:off x="7086600" y="10094400"/>
+            <a:ext cx="5028840" cy="1214640"/>
+          </a:xfrm>
+          <a:prstGeom prst="rect">
+            <a:avLst/>
+          </a:prstGeom>
+          <a:noFill/>
+          <a:ln w="0">
+            <a:noFill/>
+          </a:ln>
+        </p:spPr>
+        <p:style>
+          <a:lnRef idx="0"/>
+          <a:fillRef idx="0"/>
+          <a:effectRef idx="0"/>
+          <a:fontRef idx="minor"/>
+        </p:style>
+        <p:txBody>
+          <a:bodyPr lIns="90000" rIns="90000" tIns="45000" bIns="45000" anchor="t">
+            <a:noAutofit/>
+          </a:bodyPr>
+          <a:p>
+            <a:pPr>
+              <a:lnSpc>
+                <a:spcPct val="100000"/>
+              </a:lnSpc>
+            </a:pPr>
+            <a:r>
+              <a:rPr b="0" lang="en-IN" sz="4000" spc="-1" strike="noStrike">
+                <a:solidFill>
+                  <a:srgbClr val="000000"/>
+                </a:solidFill>
+                <a:latin typeface="Times New Roman"/>
+                <a:ea typeface="Times New Roman"/>
+              </a:rPr>
+              <a:t>Architectural diagram</a:t>
+            </a:r>
+            <a:endParaRPr b="0" lang="en-US" sz="4000" spc="-1" strike="noStrike">
+              <a:solidFill>
+                <a:srgbClr val="000000"/>
+              </a:solidFill>
+              <a:latin typeface="Arial"/>
+            </a:endParaRPr>
+          </a:p>
+        </p:txBody>
+      </p:sp>
     </p:spTree>
   </p:cSld>
   <mc:AlternateContent>
@@ -6628,453 +6325,39 @@
           <a:chExt cx="0" cy="0"/>
         </a:xfrm>
       </p:grpSpPr>
+      <p:pic>
+        <p:nvPicPr>
+          <p:cNvPr id="87" name="" descr=""/>
+          <p:cNvPicPr/>
+          <p:nvPr/>
+        </p:nvPicPr>
+        <p:blipFill>
+          <a:blip r:embed="rId1"/>
+          <a:stretch/>
+        </p:blipFill>
+        <p:spPr>
+          <a:xfrm>
+            <a:off x="4800600" y="2057400"/>
+            <a:ext cx="10058040" cy="7658280"/>
+          </a:xfrm>
+          <a:prstGeom prst="rect">
+            <a:avLst/>
+          </a:prstGeom>
+          <a:ln w="0">
+            <a:noFill/>
+          </a:ln>
+        </p:spPr>
+      </p:pic>
       <p:sp>
         <p:nvSpPr>
-          <p:cNvPr id="86" name="Google Shape;137;p13"/>
+          <p:cNvPr id="88" name=""/>
           <p:cNvSpPr/>
           <p:nvPr/>
         </p:nvSpPr>
         <p:spPr>
           <a:xfrm>
-            <a:off x="2982960" y="712800"/>
-            <a:ext cx="55440" cy="55440"/>
-          </a:xfrm>
-          <a:custGeom>
-            <a:avLst/>
-            <a:gdLst>
-              <a:gd name="textAreaLeft" fmla="*/ 0 w 55440"/>
-              <a:gd name="textAreaRight" fmla="*/ 57240 w 55440"/>
-              <a:gd name="textAreaTop" fmla="*/ 0 h 55440"/>
-              <a:gd name="textAreaBottom" fmla="*/ 57240 h 55440"/>
-            </a:gdLst>
-            <a:ahLst/>
-            <a:rect l="textAreaLeft" t="textAreaTop" r="textAreaRight" b="textAreaBottom"/>
-            <a:pathLst>
-              <a:path w="56514" h="56515">
-                <a:moveTo>
-                  <a:pt x="28145" y="0"/>
-                </a:moveTo>
-                <a:lnTo>
-                  <a:pt x="17201" y="2207"/>
-                </a:lnTo>
-                <a:lnTo>
-                  <a:pt x="8253" y="8227"/>
-                </a:lnTo>
-                <a:lnTo>
-                  <a:pt x="2215" y="17157"/>
-                </a:lnTo>
-                <a:lnTo>
-                  <a:pt x="0" y="28093"/>
-                </a:lnTo>
-                <a:lnTo>
-                  <a:pt x="2215" y="39037"/>
-                </a:lnTo>
-                <a:lnTo>
-                  <a:pt x="8253" y="47985"/>
-                </a:lnTo>
-                <a:lnTo>
-                  <a:pt x="17201" y="54023"/>
-                </a:lnTo>
-                <a:lnTo>
-                  <a:pt x="28145" y="56239"/>
-                </a:lnTo>
-                <a:lnTo>
-                  <a:pt x="39070" y="54023"/>
-                </a:lnTo>
-                <a:lnTo>
-                  <a:pt x="41803" y="52176"/>
-                </a:lnTo>
-                <a:lnTo>
-                  <a:pt x="28145" y="52176"/>
-                </a:lnTo>
-                <a:lnTo>
-                  <a:pt x="18763" y="50280"/>
-                </a:lnTo>
-                <a:lnTo>
-                  <a:pt x="11109" y="45113"/>
-                </a:lnTo>
-                <a:lnTo>
-                  <a:pt x="5952" y="37457"/>
-                </a:lnTo>
-                <a:lnTo>
-                  <a:pt x="4062" y="28093"/>
-                </a:lnTo>
-                <a:lnTo>
-                  <a:pt x="5952" y="18722"/>
-                </a:lnTo>
-                <a:lnTo>
-                  <a:pt x="11109" y="11052"/>
-                </a:lnTo>
-                <a:lnTo>
-                  <a:pt x="18763" y="5870"/>
-                </a:lnTo>
-                <a:lnTo>
-                  <a:pt x="28145" y="3968"/>
-                </a:lnTo>
-                <a:lnTo>
-                  <a:pt x="41684" y="3968"/>
-                </a:lnTo>
-                <a:lnTo>
-                  <a:pt x="39070" y="2207"/>
-                </a:lnTo>
-                <a:lnTo>
-                  <a:pt x="28145" y="0"/>
-                </a:lnTo>
-                <a:close/>
-              </a:path>
-              <a:path w="56514" h="56515">
-                <a:moveTo>
-                  <a:pt x="41684" y="3968"/>
-                </a:moveTo>
-                <a:lnTo>
-                  <a:pt x="28145" y="3968"/>
-                </a:lnTo>
-                <a:lnTo>
-                  <a:pt x="37527" y="5870"/>
-                </a:lnTo>
-                <a:lnTo>
-                  <a:pt x="45181" y="11052"/>
-                </a:lnTo>
-                <a:lnTo>
-                  <a:pt x="50338" y="18722"/>
-                </a:lnTo>
-                <a:lnTo>
-                  <a:pt x="52228" y="28093"/>
-                </a:lnTo>
-                <a:lnTo>
-                  <a:pt x="50338" y="37457"/>
-                </a:lnTo>
-                <a:lnTo>
-                  <a:pt x="45181" y="45113"/>
-                </a:lnTo>
-                <a:lnTo>
-                  <a:pt x="37527" y="50280"/>
-                </a:lnTo>
-                <a:lnTo>
-                  <a:pt x="28145" y="52176"/>
-                </a:lnTo>
-                <a:lnTo>
-                  <a:pt x="41803" y="52176"/>
-                </a:lnTo>
-                <a:lnTo>
-                  <a:pt x="48005" y="47985"/>
-                </a:lnTo>
-                <a:lnTo>
-                  <a:pt x="54036" y="39037"/>
-                </a:lnTo>
-                <a:lnTo>
-                  <a:pt x="56249" y="28093"/>
-                </a:lnTo>
-                <a:lnTo>
-                  <a:pt x="54036" y="17157"/>
-                </a:lnTo>
-                <a:lnTo>
-                  <a:pt x="48005" y="8227"/>
-                </a:lnTo>
-                <a:lnTo>
-                  <a:pt x="41684" y="3968"/>
-                </a:lnTo>
-                <a:close/>
-              </a:path>
-            </a:pathLst>
-          </a:custGeom>
-          <a:solidFill>
-            <a:srgbClr val="231f20"/>
-          </a:solidFill>
-          <a:ln w="0">
-            <a:noFill/>
-          </a:ln>
-        </p:spPr>
-        <p:style>
-          <a:lnRef idx="0"/>
-          <a:fillRef idx="0"/>
-          <a:effectRef idx="0"/>
-          <a:fontRef idx="minor"/>
-        </p:style>
-        <p:txBody>
-          <a:bodyPr lIns="0" rIns="0" tIns="0" bIns="0" anchor="t">
-            <a:noAutofit/>
-          </a:bodyPr>
-          <a:p>
-            <a:pPr>
-              <a:lnSpc>
-                <a:spcPct val="100000"/>
-              </a:lnSpc>
-              <a:tabLst>
-                <a:tab algn="l" pos="0"/>
-              </a:tabLst>
-            </a:pPr>
-            <a:endParaRPr b="0" lang="en-US" sz="1800" spc="-1" strike="noStrike">
-              <a:solidFill>
-                <a:schemeClr val="dk1"/>
-              </a:solidFill>
-              <a:latin typeface="Arial"/>
-              <a:ea typeface="Arial"/>
-            </a:endParaRPr>
-          </a:p>
-        </p:txBody>
-      </p:sp>
-      <p:sp>
-        <p:nvSpPr>
-          <p:cNvPr id="87" name="Google Shape;138;p13"/>
-          <p:cNvSpPr/>
-          <p:nvPr/>
-        </p:nvSpPr>
-        <p:spPr>
-          <a:xfrm>
-            <a:off x="2998800" y="725400"/>
-            <a:ext cx="23760" cy="29880"/>
-          </a:xfrm>
-          <a:custGeom>
-            <a:avLst/>
-            <a:gdLst>
-              <a:gd name="textAreaLeft" fmla="*/ 0 w 23760"/>
-              <a:gd name="textAreaRight" fmla="*/ 25560 w 23760"/>
-              <a:gd name="textAreaTop" fmla="*/ 0 h 29880"/>
-              <a:gd name="textAreaBottom" fmla="*/ 31680 h 29880"/>
-            </a:gdLst>
-            <a:ahLst/>
-            <a:rect l="textAreaLeft" t="textAreaTop" r="textAreaRight" b="textAreaBottom"/>
-            <a:pathLst>
-              <a:path w="25400" h="31750">
-                <a:moveTo>
-                  <a:pt x="11999" y="0"/>
-                </a:moveTo>
-                <a:lnTo>
-                  <a:pt x="0" y="0"/>
-                </a:lnTo>
-                <a:lnTo>
-                  <a:pt x="0" y="31423"/>
-                </a:lnTo>
-                <a:lnTo>
-                  <a:pt x="5675" y="31423"/>
-                </a:lnTo>
-                <a:lnTo>
-                  <a:pt x="5675" y="18292"/>
-                </a:lnTo>
-                <a:lnTo>
-                  <a:pt x="16472" y="18292"/>
-                </a:lnTo>
-                <a:lnTo>
-                  <a:pt x="15633" y="17570"/>
-                </a:lnTo>
-                <a:lnTo>
-                  <a:pt x="21266" y="14669"/>
-                </a:lnTo>
-                <a:lnTo>
-                  <a:pt x="21701" y="13277"/>
-                </a:lnTo>
-                <a:lnTo>
-                  <a:pt x="5675" y="13277"/>
-                </a:lnTo>
-                <a:lnTo>
-                  <a:pt x="5675" y="5329"/>
-                </a:lnTo>
-                <a:lnTo>
-                  <a:pt x="22239" y="5329"/>
-                </a:lnTo>
-                <a:lnTo>
-                  <a:pt x="21884" y="3863"/>
-                </a:lnTo>
-                <a:lnTo>
-                  <a:pt x="18564" y="848"/>
-                </a:lnTo>
-                <a:lnTo>
-                  <a:pt x="11999" y="0"/>
-                </a:lnTo>
-                <a:close/>
-              </a:path>
-              <a:path w="25400" h="31750">
-                <a:moveTo>
-                  <a:pt x="16472" y="18292"/>
-                </a:moveTo>
-                <a:lnTo>
-                  <a:pt x="6837" y="18292"/>
-                </a:lnTo>
-                <a:lnTo>
-                  <a:pt x="9727" y="18680"/>
-                </a:lnTo>
-                <a:lnTo>
-                  <a:pt x="11465" y="19999"/>
-                </a:lnTo>
-                <a:lnTo>
-                  <a:pt x="14470" y="24596"/>
-                </a:lnTo>
-                <a:lnTo>
-                  <a:pt x="18564" y="31423"/>
-                </a:lnTo>
-                <a:lnTo>
-                  <a:pt x="25402" y="31423"/>
-                </a:lnTo>
-                <a:lnTo>
-                  <a:pt x="21967" y="25318"/>
-                </a:lnTo>
-                <a:lnTo>
-                  <a:pt x="18721" y="20229"/>
-                </a:lnTo>
-                <a:lnTo>
-                  <a:pt x="16472" y="18292"/>
-                </a:lnTo>
-                <a:close/>
-              </a:path>
-              <a:path w="25400" h="31750">
-                <a:moveTo>
-                  <a:pt x="22239" y="5329"/>
-                </a:moveTo>
-                <a:lnTo>
-                  <a:pt x="10156" y="5329"/>
-                </a:lnTo>
-                <a:lnTo>
-                  <a:pt x="14324" y="5444"/>
-                </a:lnTo>
-                <a:lnTo>
-                  <a:pt x="16449" y="6638"/>
-                </a:lnTo>
-                <a:lnTo>
-                  <a:pt x="17224" y="9224"/>
-                </a:lnTo>
-                <a:lnTo>
-                  <a:pt x="16638" y="11580"/>
-                </a:lnTo>
-                <a:lnTo>
-                  <a:pt x="15057" y="12889"/>
-                </a:lnTo>
-                <a:lnTo>
-                  <a:pt x="9926" y="13277"/>
-                </a:lnTo>
-                <a:lnTo>
-                  <a:pt x="21701" y="13277"/>
-                </a:lnTo>
-                <a:lnTo>
-                  <a:pt x="23088" y="8837"/>
-                </a:lnTo>
-                <a:lnTo>
-                  <a:pt x="22239" y="5329"/>
-                </a:lnTo>
-                <a:close/>
-              </a:path>
-            </a:pathLst>
-          </a:custGeom>
-          <a:solidFill>
-            <a:srgbClr val="231f20"/>
-          </a:solidFill>
-          <a:ln w="0">
-            <a:noFill/>
-          </a:ln>
-        </p:spPr>
-        <p:style>
-          <a:lnRef idx="0"/>
-          <a:fillRef idx="0"/>
-          <a:effectRef idx="0"/>
-          <a:fontRef idx="minor"/>
-        </p:style>
-        <p:txBody>
-          <a:bodyPr lIns="0" rIns="0" tIns="0" bIns="0" anchor="t">
-            <a:noAutofit/>
-          </a:bodyPr>
-          <a:p>
-            <a:pPr>
-              <a:lnSpc>
-                <a:spcPct val="100000"/>
-              </a:lnSpc>
-              <a:tabLst>
-                <a:tab algn="l" pos="0"/>
-              </a:tabLst>
-            </a:pPr>
-            <a:endParaRPr b="0" lang="en-US" sz="1800" spc="-1" strike="noStrike">
-              <a:solidFill>
-                <a:schemeClr val="dk1"/>
-              </a:solidFill>
-              <a:latin typeface="Arial"/>
-              <a:ea typeface="Arial"/>
-            </a:endParaRPr>
-          </a:p>
-        </p:txBody>
-      </p:sp>
-      <p:sp>
-        <p:nvSpPr>
-          <p:cNvPr id="88" name="PlaceHolder 1"/>
-          <p:cNvSpPr>
-            <a:spLocks noGrp="1"/>
-          </p:cNvSpPr>
-          <p:nvPr>
-            <p:ph type="sldNum" idx="20"/>
-          </p:nvPr>
-        </p:nvSpPr>
-        <p:spPr>
-          <a:xfrm>
-            <a:off x="18627840" y="10253160"/>
-            <a:ext cx="1203480" cy="862560"/>
-          </a:xfrm>
-          <a:prstGeom prst="rect">
-            <a:avLst/>
-          </a:prstGeom>
-          <a:noFill/>
-          <a:ln w="0">
-            <a:noFill/>
-          </a:ln>
-        </p:spPr>
-        <p:txBody>
-          <a:bodyPr lIns="91440" rIns="91440" tIns="91440" bIns="91440" anchor="ctr">
-            <a:normAutofit/>
-          </a:bodyPr>
-          <a:lstStyle>
-            <a:lvl1pPr indent="0" algn="r">
-              <a:lnSpc>
-                <a:spcPct val="100000"/>
-              </a:lnSpc>
-              <a:buNone/>
-              <a:tabLst>
-                <a:tab algn="l" pos="0"/>
-              </a:tabLst>
-              <a:defRPr b="0" lang="en-IN" sz="2200" spc="-1" strike="noStrike">
-                <a:solidFill>
-                  <a:schemeClr val="dk2"/>
-                </a:solidFill>
-                <a:latin typeface="Arial"/>
-                <a:ea typeface="Arial"/>
-              </a:defRPr>
-            </a:lvl1pPr>
-          </a:lstStyle>
-          <a:p>
-            <a:pPr indent="0" algn="r">
-              <a:lnSpc>
-                <a:spcPct val="100000"/>
-              </a:lnSpc>
-              <a:buNone/>
-              <a:tabLst>
-                <a:tab algn="l" pos="0"/>
-              </a:tabLst>
-            </a:pPr>
-            <a:fld id="{87276BB9-2B25-458C-AFD2-27AD11E6791A}" type="slidenum">
-              <a:rPr b="0" lang="en-IN" sz="2200" spc="-1" strike="noStrike">
-                <a:solidFill>
-                  <a:schemeClr val="dk2"/>
-                </a:solidFill>
-                <a:latin typeface="Arial"/>
-                <a:ea typeface="Arial"/>
-              </a:rPr>
-              <a:t>12</a:t>
-            </a:fld>
-            <a:endParaRPr b="0" lang="en-US" sz="2200" spc="-1" strike="noStrike">
-              <a:solidFill>
-                <a:srgbClr val="000000"/>
-              </a:solidFill>
-              <a:latin typeface="Times New Roman"/>
-            </a:endParaRPr>
-          </a:p>
-        </p:txBody>
-      </p:sp>
-      <p:sp>
-        <p:nvSpPr>
-          <p:cNvPr id="89" name="Google Shape;140;p13"/>
-          <p:cNvSpPr/>
-          <p:nvPr/>
-        </p:nvSpPr>
-        <p:spPr>
-          <a:xfrm>
-            <a:off x="995400" y="2623320"/>
-            <a:ext cx="18525960" cy="4660200"/>
+            <a:off x="8015400" y="10287000"/>
+            <a:ext cx="3871440" cy="652680"/>
           </a:xfrm>
           <a:prstGeom prst="rect">
             <a:avLst/>
@@ -7092,10 +6375,10 @@
         </p:style>
         <p:txBody>
           <a:bodyPr lIns="90000" rIns="90000" tIns="45000" bIns="45000" anchor="t">
-            <a:spAutoFit/>
+            <a:noAutofit/>
           </a:bodyPr>
           <a:p>
-            <a:pPr algn="just">
+            <a:pPr>
               <a:lnSpc>
                 <a:spcPct val="100000"/>
               </a:lnSpc>
@@ -7108,99 +6391,9 @@
                 <a:latin typeface="Times New Roman"/>
                 <a:ea typeface="Times New Roman"/>
               </a:rPr>
-              <a:t>Use Case diagram, sequence diagram, Class Diagram, activity diagram to be drawn with proper notations</a:t>
+              <a:t>Use Case diagram</a:t>
             </a:r>
             <a:endParaRPr b="0" lang="en-US" sz="4000" spc="-1" strike="noStrike">
-              <a:solidFill>
-                <a:srgbClr val="000000"/>
-              </a:solidFill>
-              <a:latin typeface="Arial"/>
-            </a:endParaRPr>
-          </a:p>
-          <a:p>
-            <a:pPr>
-              <a:lnSpc>
-                <a:spcPct val="100000"/>
-              </a:lnSpc>
-              <a:tabLst>
-                <a:tab algn="l" pos="0"/>
-              </a:tabLst>
-            </a:pPr>
-            <a:endParaRPr b="0" lang="en-US" sz="4400" spc="-1" strike="noStrike">
-              <a:solidFill>
-                <a:srgbClr val="000000"/>
-              </a:solidFill>
-              <a:latin typeface="Arial"/>
-            </a:endParaRPr>
-          </a:p>
-          <a:p>
-            <a:pPr>
-              <a:lnSpc>
-                <a:spcPct val="100000"/>
-              </a:lnSpc>
-              <a:tabLst>
-                <a:tab algn="l" pos="0"/>
-              </a:tabLst>
-            </a:pPr>
-            <a:endParaRPr b="0" lang="en-US" sz="4400" spc="-1" strike="noStrike">
-              <a:solidFill>
-                <a:srgbClr val="000000"/>
-              </a:solidFill>
-              <a:latin typeface="Arial"/>
-            </a:endParaRPr>
-          </a:p>
-          <a:p>
-            <a:pPr>
-              <a:lnSpc>
-                <a:spcPct val="100000"/>
-              </a:lnSpc>
-              <a:tabLst>
-                <a:tab algn="l" pos="0"/>
-              </a:tabLst>
-            </a:pPr>
-            <a:endParaRPr b="0" lang="en-US" sz="4400" spc="-1" strike="noStrike">
-              <a:solidFill>
-                <a:srgbClr val="000000"/>
-              </a:solidFill>
-              <a:latin typeface="Arial"/>
-            </a:endParaRPr>
-          </a:p>
-          <a:p>
-            <a:pPr>
-              <a:lnSpc>
-                <a:spcPct val="100000"/>
-              </a:lnSpc>
-              <a:tabLst>
-                <a:tab algn="l" pos="0"/>
-              </a:tabLst>
-            </a:pPr>
-            <a:endParaRPr b="0" lang="en-US" sz="4400" spc="-1" strike="noStrike">
-              <a:solidFill>
-                <a:srgbClr val="000000"/>
-              </a:solidFill>
-              <a:latin typeface="Arial"/>
-            </a:endParaRPr>
-          </a:p>
-          <a:p>
-            <a:pPr>
-              <a:lnSpc>
-                <a:spcPct val="100000"/>
-              </a:lnSpc>
-              <a:tabLst>
-                <a:tab algn="l" pos="0"/>
-              </a:tabLst>
-            </a:pPr>
-            <a:r>
-              <a:rPr b="1" lang="en-IN" sz="4400" spc="-1" strike="noStrike">
-                <a:solidFill>
-                  <a:srgbClr val="000000"/>
-                </a:solidFill>
-                <a:latin typeface="Times New Roman"/>
-                <a:ea typeface="Times New Roman"/>
-              </a:rPr>
-              <a:t> </a:t>
-            </a:r>
-            <a:endParaRPr b="0" lang="en-US" sz="4400" spc="-1" strike="noStrike">
               <a:solidFill>
                 <a:srgbClr val="000000"/>
               </a:solidFill>
@@ -7211,14 +6404,14 @@
       </p:sp>
       <p:sp>
         <p:nvSpPr>
-          <p:cNvPr id="90" name="Google Shape;141;p13"/>
+          <p:cNvPr id="89" name=""/>
           <p:cNvSpPr/>
           <p:nvPr/>
         </p:nvSpPr>
         <p:spPr>
           <a:xfrm>
-            <a:off x="5057640" y="290520"/>
-            <a:ext cx="9069120" cy="637920"/>
+            <a:off x="7543800" y="685800"/>
+            <a:ext cx="3923280" cy="709200"/>
           </a:xfrm>
           <a:prstGeom prst="rect">
             <a:avLst/>
@@ -7235,17 +6428,14 @@
           <a:fontRef idx="minor"/>
         </p:style>
         <p:txBody>
-          <a:bodyPr lIns="0" rIns="0" tIns="0" bIns="0" anchor="ctr">
+          <a:bodyPr lIns="90000" rIns="90000" tIns="45000" bIns="45000" anchor="t">
             <a:noAutofit/>
           </a:bodyPr>
           <a:p>
-            <a:pPr algn="ctr">
+            <a:pPr>
               <a:lnSpc>
                 <a:spcPct val="100000"/>
               </a:lnSpc>
-              <a:tabLst>
-                <a:tab algn="l" pos="0"/>
-              </a:tabLst>
             </a:pPr>
             <a:r>
               <a:rPr b="1" lang="en-IN" sz="4400" spc="-1" strike="noStrike">
@@ -7296,24 +6486,345 @@
           <a:chExt cx="0" cy="0"/>
         </a:xfrm>
       </p:grpSpPr>
+      <p:pic>
+        <p:nvPicPr>
+          <p:cNvPr id="90" name="" descr=""/>
+          <p:cNvPicPr/>
+          <p:nvPr/>
+        </p:nvPicPr>
+        <p:blipFill>
+          <a:blip r:embed="rId1"/>
+          <a:stretch/>
+        </p:blipFill>
+        <p:spPr>
+          <a:xfrm>
+            <a:off x="2632680" y="1324080"/>
+            <a:ext cx="13597560" cy="8733960"/>
+          </a:xfrm>
+          <a:prstGeom prst="rect">
+            <a:avLst/>
+          </a:prstGeom>
+          <a:ln w="0">
+            <a:noFill/>
+          </a:ln>
+        </p:spPr>
+      </p:pic>
       <p:sp>
         <p:nvSpPr>
-          <p:cNvPr id="91" name="Google Shape;147;g3616559daea_0_0"/>
+          <p:cNvPr id="91" name=""/>
+          <p:cNvSpPr/>
+          <p:nvPr/>
+        </p:nvSpPr>
+        <p:spPr>
+          <a:xfrm>
+            <a:off x="7772400" y="10287000"/>
+            <a:ext cx="3828960" cy="652680"/>
+          </a:xfrm>
+          <a:prstGeom prst="rect">
+            <a:avLst/>
+          </a:prstGeom>
+          <a:noFill/>
+          <a:ln w="0">
+            <a:noFill/>
+          </a:ln>
+        </p:spPr>
+        <p:style>
+          <a:lnRef idx="0"/>
+          <a:fillRef idx="0"/>
+          <a:effectRef idx="0"/>
+          <a:fontRef idx="minor"/>
+        </p:style>
+        <p:txBody>
+          <a:bodyPr lIns="90000" rIns="90000" tIns="45000" bIns="45000" anchor="t">
+            <a:noAutofit/>
+          </a:bodyPr>
+          <a:p>
+            <a:pPr>
+              <a:lnSpc>
+                <a:spcPct val="100000"/>
+              </a:lnSpc>
+            </a:pPr>
+            <a:r>
+              <a:rPr b="0" lang="en-IN" sz="4000" spc="-1" strike="noStrike">
+                <a:solidFill>
+                  <a:srgbClr val="000000"/>
+                </a:solidFill>
+                <a:latin typeface="Times New Roman"/>
+                <a:ea typeface="Times New Roman"/>
+              </a:rPr>
+              <a:t>sequence diagram</a:t>
+            </a:r>
+            <a:endParaRPr b="0" lang="en-US" sz="4000" spc="-1" strike="noStrike">
+              <a:solidFill>
+                <a:srgbClr val="000000"/>
+              </a:solidFill>
+              <a:latin typeface="Arial"/>
+            </a:endParaRPr>
+          </a:p>
+        </p:txBody>
+      </p:sp>
+    </p:spTree>
+  </p:cSld>
+  <mc:AlternateContent>
+    <mc:Choice Requires="p14">
+      <p:transition spd="slow" p14:dur="2000"/>
+    </mc:Choice>
+    <mc:Fallback>
+      <p:transition spd="slow"/>
+    </mc:Fallback>
+  </mc:AlternateContent>
+</p:sld>
+</file>
+
+<file path=ppt/slides/slide14.xml><?xml version="1.0" encoding="utf-8"?>
+<p:sld xmlns:a="http://schemas.openxmlformats.org/drawingml/2006/main" xmlns:p="http://schemas.openxmlformats.org/presentationml/2006/main" xmlns:r="http://schemas.openxmlformats.org/officeDocument/2006/relationships" xmlns:p14="http://schemas.microsoft.com/office/powerpoint/2010/main" xmlns:p15="http://schemas.microsoft.com/office/powerpoint/2012/main" xmlns:mc="http://schemas.openxmlformats.org/markup-compatibility/2006">
+  <p:cSld>
+    <p:spTree>
+      <p:nvGrpSpPr>
+        <p:cNvPr id="1" name=""/>
+        <p:cNvGrpSpPr/>
+        <p:nvPr/>
+      </p:nvGrpSpPr>
+      <p:grpSpPr>
+        <a:xfrm>
+          <a:off x="0" y="0"/>
+          <a:ext cx="0" cy="0"/>
+          <a:chOff x="0" y="0"/>
+          <a:chExt cx="0" cy="0"/>
+        </a:xfrm>
+      </p:grpSpPr>
+      <p:sp>
+        <p:nvSpPr>
+          <p:cNvPr id="92" name=""/>
+          <p:cNvSpPr/>
+          <p:nvPr/>
+        </p:nvSpPr>
+        <p:spPr>
+          <a:xfrm>
+            <a:off x="7791480" y="9829800"/>
+            <a:ext cx="3180960" cy="652680"/>
+          </a:xfrm>
+          <a:prstGeom prst="rect">
+            <a:avLst/>
+          </a:prstGeom>
+          <a:noFill/>
+          <a:ln w="0">
+            <a:noFill/>
+          </a:ln>
+        </p:spPr>
+        <p:style>
+          <a:lnRef idx="0"/>
+          <a:fillRef idx="0"/>
+          <a:effectRef idx="0"/>
+          <a:fontRef idx="minor"/>
+        </p:style>
+        <p:txBody>
+          <a:bodyPr lIns="90000" rIns="90000" tIns="45000" bIns="45000" anchor="t">
+            <a:noAutofit/>
+          </a:bodyPr>
+          <a:p>
+            <a:pPr>
+              <a:lnSpc>
+                <a:spcPct val="100000"/>
+              </a:lnSpc>
+            </a:pPr>
+            <a:r>
+              <a:rPr b="0" lang="en-IN" sz="4000" spc="-1" strike="noStrike">
+                <a:solidFill>
+                  <a:srgbClr val="000000"/>
+                </a:solidFill>
+                <a:latin typeface="Times New Roman"/>
+                <a:ea typeface="Times New Roman"/>
+              </a:rPr>
+              <a:t>Class Diagram</a:t>
+            </a:r>
+            <a:endParaRPr b="0" lang="en-US" sz="4000" spc="-1" strike="noStrike">
+              <a:solidFill>
+                <a:srgbClr val="000000"/>
+              </a:solidFill>
+              <a:latin typeface="Arial"/>
+            </a:endParaRPr>
+          </a:p>
+        </p:txBody>
+      </p:sp>
+      <p:pic>
+        <p:nvPicPr>
+          <p:cNvPr id="93" name="" descr=""/>
+          <p:cNvPicPr/>
+          <p:nvPr/>
+        </p:nvPicPr>
+        <p:blipFill>
+          <a:blip r:embed="rId1"/>
+          <a:stretch/>
+        </p:blipFill>
+        <p:spPr>
+          <a:xfrm>
+            <a:off x="4069440" y="2027160"/>
+            <a:ext cx="11703600" cy="7802280"/>
+          </a:xfrm>
+          <a:prstGeom prst="rect">
+            <a:avLst/>
+          </a:prstGeom>
+          <a:ln w="0">
+            <a:noFill/>
+          </a:ln>
+        </p:spPr>
+      </p:pic>
+    </p:spTree>
+  </p:cSld>
+  <mc:AlternateContent>
+    <mc:Choice Requires="p14">
+      <p:transition spd="slow" p14:dur="2000"/>
+    </mc:Choice>
+    <mc:Fallback>
+      <p:transition spd="slow"/>
+    </mc:Fallback>
+  </mc:AlternateContent>
+</p:sld>
+</file>
+
+<file path=ppt/slides/slide15.xml><?xml version="1.0" encoding="utf-8"?>
+<p:sld xmlns:a="http://schemas.openxmlformats.org/drawingml/2006/main" xmlns:p="http://schemas.openxmlformats.org/presentationml/2006/main" xmlns:r="http://schemas.openxmlformats.org/officeDocument/2006/relationships" xmlns:p14="http://schemas.microsoft.com/office/powerpoint/2010/main" xmlns:p15="http://schemas.microsoft.com/office/powerpoint/2012/main" xmlns:mc="http://schemas.openxmlformats.org/markup-compatibility/2006">
+  <p:cSld>
+    <p:spTree>
+      <p:nvGrpSpPr>
+        <p:cNvPr id="1" name=""/>
+        <p:cNvGrpSpPr/>
+        <p:nvPr/>
+      </p:nvGrpSpPr>
+      <p:grpSpPr>
+        <a:xfrm>
+          <a:off x="0" y="0"/>
+          <a:ext cx="0" cy="0"/>
+          <a:chOff x="0" y="0"/>
+          <a:chExt cx="0" cy="0"/>
+        </a:xfrm>
+      </p:grpSpPr>
+      <p:sp>
+        <p:nvSpPr>
+          <p:cNvPr id="94" name=""/>
+          <p:cNvSpPr/>
+          <p:nvPr/>
+        </p:nvSpPr>
+        <p:spPr>
+          <a:xfrm>
+            <a:off x="8160840" y="10272240"/>
+            <a:ext cx="3490200" cy="652320"/>
+          </a:xfrm>
+          <a:prstGeom prst="rect">
+            <a:avLst/>
+          </a:prstGeom>
+          <a:noFill/>
+          <a:ln w="0">
+            <a:noFill/>
+          </a:ln>
+        </p:spPr>
+        <p:style>
+          <a:lnRef idx="0"/>
+          <a:fillRef idx="0"/>
+          <a:effectRef idx="0"/>
+          <a:fontRef idx="minor"/>
+        </p:style>
+        <p:txBody>
+          <a:bodyPr lIns="90000" rIns="90000" tIns="45000" bIns="45000" anchor="t">
+            <a:noAutofit/>
+          </a:bodyPr>
+          <a:p>
+            <a:pPr>
+              <a:lnSpc>
+                <a:spcPct val="100000"/>
+              </a:lnSpc>
+            </a:pPr>
+            <a:r>
+              <a:rPr b="0" lang="en-IN" sz="4000" spc="-1" strike="noStrike">
+                <a:solidFill>
+                  <a:srgbClr val="000000"/>
+                </a:solidFill>
+                <a:latin typeface="Times New Roman"/>
+                <a:ea typeface="Times New Roman"/>
+              </a:rPr>
+              <a:t>activity diagram</a:t>
+            </a:r>
+            <a:endParaRPr b="0" lang="en-US" sz="4000" spc="-1" strike="noStrike">
+              <a:solidFill>
+                <a:srgbClr val="000000"/>
+              </a:solidFill>
+              <a:latin typeface="Arial"/>
+            </a:endParaRPr>
+          </a:p>
+        </p:txBody>
+      </p:sp>
+      <p:pic>
+        <p:nvPicPr>
+          <p:cNvPr id="95" name="" descr=""/>
+          <p:cNvPicPr/>
+          <p:nvPr/>
+        </p:nvPicPr>
+        <p:blipFill>
+          <a:blip r:embed="rId1"/>
+          <a:stretch/>
+        </p:blipFill>
+        <p:spPr>
+          <a:xfrm>
+            <a:off x="5029200" y="1143000"/>
+            <a:ext cx="10058040" cy="8735040"/>
+          </a:xfrm>
+          <a:prstGeom prst="rect">
+            <a:avLst/>
+          </a:prstGeom>
+          <a:ln w="0">
+            <a:noFill/>
+          </a:ln>
+        </p:spPr>
+      </p:pic>
+    </p:spTree>
+  </p:cSld>
+  <mc:AlternateContent>
+    <mc:Choice Requires="p14">
+      <p:transition spd="slow" p14:dur="2000"/>
+    </mc:Choice>
+    <mc:Fallback>
+      <p:transition spd="slow"/>
+    </mc:Fallback>
+  </mc:AlternateContent>
+</p:sld>
+</file>
+
+<file path=ppt/slides/slide16.xml><?xml version="1.0" encoding="utf-8"?>
+<p:sld xmlns:a="http://schemas.openxmlformats.org/drawingml/2006/main" xmlns:p="http://schemas.openxmlformats.org/presentationml/2006/main" xmlns:r="http://schemas.openxmlformats.org/officeDocument/2006/relationships" xmlns:p14="http://schemas.microsoft.com/office/powerpoint/2010/main" xmlns:p15="http://schemas.microsoft.com/office/powerpoint/2012/main" xmlns:mc="http://schemas.openxmlformats.org/markup-compatibility/2006">
+  <p:cSld>
+    <p:spTree>
+      <p:nvGrpSpPr>
+        <p:cNvPr id="1" name=""/>
+        <p:cNvGrpSpPr/>
+        <p:nvPr/>
+      </p:nvGrpSpPr>
+      <p:grpSpPr>
+        <a:xfrm>
+          <a:off x="0" y="0"/>
+          <a:ext cx="0" cy="0"/>
+          <a:chOff x="0" y="0"/>
+          <a:chExt cx="0" cy="0"/>
+        </a:xfrm>
+      </p:grpSpPr>
+      <p:sp>
+        <p:nvSpPr>
+          <p:cNvPr id="96" name="Google Shape;147;g3616559daea_0_0"/>
           <p:cNvSpPr/>
           <p:nvPr/>
         </p:nvSpPr>
         <p:spPr>
           <a:xfrm>
             <a:off x="2982960" y="712800"/>
-            <a:ext cx="55440" cy="55440"/>
+            <a:ext cx="54720" cy="54720"/>
           </a:xfrm>
           <a:custGeom>
             <a:avLst/>
             <a:gdLst>
-              <a:gd name="textAreaLeft" fmla="*/ 0 w 55440"/>
-              <a:gd name="textAreaRight" fmla="*/ 57240 w 55440"/>
-              <a:gd name="textAreaTop" fmla="*/ 0 h 55440"/>
-              <a:gd name="textAreaBottom" fmla="*/ 57240 h 55440"/>
+              <a:gd name="textAreaLeft" fmla="*/ 0 w 54720"/>
+              <a:gd name="textAreaRight" fmla="*/ 57240 w 54720"/>
+              <a:gd name="textAreaTop" fmla="*/ 0 h 54720"/>
+              <a:gd name="textAreaBottom" fmla="*/ 57240 h 54720"/>
             </a:gdLst>
             <a:ahLst/>
             <a:rect l="textAreaLeft" t="textAreaTop" r="textAreaRight" b="textAreaBottom"/>
@@ -7484,22 +6995,22 @@
       </p:sp>
       <p:sp>
         <p:nvSpPr>
-          <p:cNvPr id="92" name="Google Shape;148;g3616559daea_0_0"/>
+          <p:cNvPr id="97" name="Google Shape;148;g3616559daea_0_0"/>
           <p:cNvSpPr/>
           <p:nvPr/>
         </p:nvSpPr>
         <p:spPr>
           <a:xfrm>
             <a:off x="2998800" y="725400"/>
-            <a:ext cx="23760" cy="29880"/>
+            <a:ext cx="23040" cy="29160"/>
           </a:xfrm>
           <a:custGeom>
             <a:avLst/>
             <a:gdLst>
-              <a:gd name="textAreaLeft" fmla="*/ 0 w 23760"/>
-              <a:gd name="textAreaRight" fmla="*/ 25560 w 23760"/>
-              <a:gd name="textAreaTop" fmla="*/ 0 h 29880"/>
-              <a:gd name="textAreaBottom" fmla="*/ 31680 h 29880"/>
+              <a:gd name="textAreaLeft" fmla="*/ 0 w 23040"/>
+              <a:gd name="textAreaRight" fmla="*/ 25560 w 23040"/>
+              <a:gd name="textAreaTop" fmla="*/ 0 h 29160"/>
+              <a:gd name="textAreaBottom" fmla="*/ 31680 h 29160"/>
             </a:gdLst>
             <a:ahLst/>
             <a:rect l="textAreaLeft" t="textAreaTop" r="textAreaRight" b="textAreaBottom"/>
@@ -7661,18 +7172,18 @@
       </p:sp>
       <p:sp>
         <p:nvSpPr>
-          <p:cNvPr id="93" name="PlaceHolder 1"/>
+          <p:cNvPr id="98" name="PlaceHolder 1"/>
           <p:cNvSpPr>
             <a:spLocks noGrp="1"/>
           </p:cNvSpPr>
           <p:nvPr>
-            <p:ph type="sldNum" idx="21"/>
+            <p:ph type="sldNum" idx="20"/>
           </p:nvPr>
         </p:nvSpPr>
         <p:spPr>
           <a:xfrm>
             <a:off x="18627840" y="10253160"/>
-            <a:ext cx="1203480" cy="862560"/>
+            <a:ext cx="1202760" cy="861840"/>
           </a:xfrm>
           <a:prstGeom prst="rect">
             <a:avLst/>
@@ -7714,7 +7225,7 @@
                 <a:tab algn="l" pos="0"/>
               </a:tabLst>
             </a:pPr>
-            <a:fld id="{6139BE90-E2DC-410D-A1C7-3D213D30990F}" type="slidenum">
+            <a:fld id="{0E0D3A2B-D8A7-4DE8-B140-3190D5B3861F}" type="slidenum">
               <a:rPr b="0" lang="en-IN" sz="2200" spc="-1" strike="noStrike">
                 <a:solidFill>
                   <a:schemeClr val="dk2"/>
@@ -7722,7 +7233,7 @@
                 <a:latin typeface="Arial"/>
                 <a:ea typeface="Arial"/>
               </a:rPr>
-              <a:t>13</a:t>
+              <a:t>&lt;number&gt;</a:t>
             </a:fld>
             <a:endParaRPr b="0" lang="en-US" sz="2200" spc="-1" strike="noStrike">
               <a:solidFill>
@@ -7735,14 +7246,14 @@
       </p:sp>
       <p:sp>
         <p:nvSpPr>
-          <p:cNvPr id="94" name="Google Shape;151;g3616559daea_0_0"/>
+          <p:cNvPr id="99" name="Google Shape;151;g3616559daea_0_0"/>
           <p:cNvSpPr/>
           <p:nvPr/>
         </p:nvSpPr>
         <p:spPr>
           <a:xfrm>
             <a:off x="5057640" y="290520"/>
-            <a:ext cx="9069480" cy="638280"/>
+            <a:ext cx="9068760" cy="637560"/>
           </a:xfrm>
           <a:prstGeom prst="rect">
             <a:avLst/>
@@ -7792,14 +7303,14 @@
       </p:sp>
       <p:sp>
         <p:nvSpPr>
-          <p:cNvPr id="95" name=""/>
-          <p:cNvSpPr txBox="1"/>
+          <p:cNvPr id="100" name=""/>
+          <p:cNvSpPr/>
           <p:nvPr/>
         </p:nvSpPr>
         <p:spPr>
           <a:xfrm>
             <a:off x="7511400" y="8595720"/>
-            <a:ext cx="3237840" cy="653040"/>
+            <a:ext cx="3237120" cy="652320"/>
           </a:xfrm>
           <a:prstGeom prst="rect">
             <a:avLst/>
@@ -7809,11 +7320,22 @@
             <a:noFill/>
           </a:ln>
         </p:spPr>
+        <p:style>
+          <a:lnRef idx="0"/>
+          <a:fillRef idx="0"/>
+          <a:effectRef idx="0"/>
+          <a:fontRef idx="minor"/>
+        </p:style>
         <p:txBody>
           <a:bodyPr lIns="90000" rIns="90000" tIns="45000" bIns="45000" anchor="t">
             <a:noAutofit/>
           </a:bodyPr>
           <a:p>
+            <a:pPr>
+              <a:lnSpc>
+                <a:spcPct val="100000"/>
+              </a:lnSpc>
+            </a:pPr>
             <a:r>
               <a:rPr b="0" lang="en-IN" sz="4000" spc="-1" strike="noStrike">
                 <a:solidFill>
@@ -7835,7 +7357,7 @@
       </p:sp>
       <p:pic>
         <p:nvPicPr>
-          <p:cNvPr id="96" name="" descr=""/>
+          <p:cNvPr id="101" name="" descr=""/>
           <p:cNvPicPr/>
           <p:nvPr/>
         </p:nvPicPr>
@@ -7846,60 +7368,7 @@
         <p:spPr>
           <a:xfrm>
             <a:off x="3711600" y="3186000"/>
-            <a:ext cx="11913480" cy="4641840"/>
-          </a:xfrm>
-          <a:prstGeom prst="rect">
-            <a:avLst/>
-          </a:prstGeom>
-          <a:ln w="0">
-            <a:noFill/>
-          </a:ln>
-        </p:spPr>
-      </p:pic>
-    </p:spTree>
-  </p:cSld>
-  <mc:AlternateContent>
-    <mc:Choice Requires="p14">
-      <p:transition spd="slow" p14:dur="2000"/>
-    </mc:Choice>
-    <mc:Fallback>
-      <p:transition spd="slow"/>
-    </mc:Fallback>
-  </mc:AlternateContent>
-</p:sld>
-</file>
-
-<file path=ppt/slides/slide14.xml><?xml version="1.0" encoding="utf-8"?>
-<p:sld xmlns:a="http://schemas.openxmlformats.org/drawingml/2006/main" xmlns:p="http://schemas.openxmlformats.org/presentationml/2006/main" xmlns:r="http://schemas.openxmlformats.org/officeDocument/2006/relationships" xmlns:p14="http://schemas.microsoft.com/office/powerpoint/2010/main" xmlns:p15="http://schemas.microsoft.com/office/powerpoint/2012/main" xmlns:mc="http://schemas.openxmlformats.org/markup-compatibility/2006">
-  <p:cSld>
-    <p:spTree>
-      <p:nvGrpSpPr>
-        <p:cNvPr id="1" name=""/>
-        <p:cNvGrpSpPr/>
-        <p:nvPr/>
-      </p:nvGrpSpPr>
-      <p:grpSpPr>
-        <a:xfrm>
-          <a:off x="0" y="0"/>
-          <a:ext cx="0" cy="0"/>
-          <a:chOff x="0" y="0"/>
-          <a:chExt cx="0" cy="0"/>
-        </a:xfrm>
-      </p:grpSpPr>
-      <p:pic>
-        <p:nvPicPr>
-          <p:cNvPr id="97" name="" descr=""/>
-          <p:cNvPicPr/>
-          <p:nvPr/>
-        </p:nvPicPr>
-        <p:blipFill>
-          <a:blip r:embed="rId1"/>
-          <a:stretch/>
-        </p:blipFill>
-        <p:spPr>
-          <a:xfrm>
-            <a:off x="4401360" y="2286000"/>
-            <a:ext cx="10700280" cy="7533000"/>
+            <a:ext cx="11912760" cy="4641120"/>
           </a:xfrm>
           <a:prstGeom prst="rect">
             <a:avLst/>
@@ -7911,14 +7380,14 @@
       </p:pic>
       <p:sp>
         <p:nvSpPr>
-          <p:cNvPr id="98" name=""/>
-          <p:cNvSpPr txBox="1"/>
+          <p:cNvPr id="102" name=""/>
+          <p:cNvSpPr/>
           <p:nvPr/>
         </p:nvSpPr>
         <p:spPr>
           <a:xfrm>
-            <a:off x="8121240" y="10092240"/>
-            <a:ext cx="3237840" cy="653040"/>
+            <a:off x="15278760" y="8458200"/>
+            <a:ext cx="4380480" cy="1371240"/>
           </a:xfrm>
           <a:prstGeom prst="rect">
             <a:avLst/>
@@ -7928,22 +7397,56 @@
             <a:noFill/>
           </a:ln>
         </p:spPr>
+        <p:style>
+          <a:lnRef idx="0"/>
+          <a:fillRef idx="0"/>
+          <a:effectRef idx="0"/>
+          <a:fontRef idx="minor"/>
+        </p:style>
         <p:txBody>
           <a:bodyPr lIns="90000" rIns="90000" tIns="45000" bIns="45000" anchor="t">
             <a:noAutofit/>
           </a:bodyPr>
           <a:p>
+            <a:pPr>
+              <a:lnSpc>
+                <a:spcPct val="100000"/>
+              </a:lnSpc>
+            </a:pPr>
             <a:r>
-              <a:rPr b="0" lang="en-IN" sz="4000" spc="-1" strike="noStrike">
+              <a:rPr b="0" lang="en-IN" sz="2400" spc="-1" strike="noStrike">
                 <a:solidFill>
                   <a:srgbClr val="000000"/>
                 </a:solidFill>
                 <a:latin typeface="Times New Roman"/>
                 <a:ea typeface="Times New Roman"/>
               </a:rPr>
-              <a:t>DFD – Level 1</a:t>
+              <a:t>DS1- Recieving sensor data</a:t>
             </a:r>
-            <a:endParaRPr b="0" lang="en-US" sz="4000" spc="-1" strike="noStrike">
+            <a:endParaRPr b="0" lang="en-US" sz="2400" spc="-1" strike="noStrike">
+              <a:solidFill>
+                <a:srgbClr val="000000"/>
+              </a:solidFill>
+              <a:latin typeface="Arial"/>
+            </a:endParaRPr>
+          </a:p>
+          <a:p>
+            <a:pPr>
+              <a:lnSpc>
+                <a:spcPct val="100000"/>
+              </a:lnSpc>
+            </a:pPr>
+            <a:r>
+              <a:rPr b="0" lang="en-IN" sz="2400" spc="-1" strike="noStrike">
+                <a:solidFill>
+                  <a:srgbClr val="000000"/>
+                </a:solidFill>
+                <a:latin typeface="Times New Roman"/>
+                <a:ea typeface="Times New Roman"/>
+              </a:rPr>
+              <a:t>DS2-Sending data</a:t>
+            </a:r>
+            <a:endParaRPr b="0" lang="en-US" sz="2400" spc="-1" strike="noStrike">
               <a:solidFill>
                 <a:srgbClr val="000000"/>
               </a:solidFill>
@@ -7965,7 +7468,375 @@
 </p:sld>
 </file>
 
-<file path=ppt/slides/slide15.xml><?xml version="1.0" encoding="utf-8"?>
+<file path=ppt/slides/slide17.xml><?xml version="1.0" encoding="utf-8"?>
+<p:sld xmlns:a="http://schemas.openxmlformats.org/drawingml/2006/main" xmlns:p="http://schemas.openxmlformats.org/presentationml/2006/main" xmlns:r="http://schemas.openxmlformats.org/officeDocument/2006/relationships" xmlns:p14="http://schemas.microsoft.com/office/powerpoint/2010/main" xmlns:p15="http://schemas.microsoft.com/office/powerpoint/2012/main" xmlns:mc="http://schemas.openxmlformats.org/markup-compatibility/2006">
+  <p:cSld>
+    <p:spTree>
+      <p:nvGrpSpPr>
+        <p:cNvPr id="1" name=""/>
+        <p:cNvGrpSpPr/>
+        <p:nvPr/>
+      </p:nvGrpSpPr>
+      <p:grpSpPr>
+        <a:xfrm>
+          <a:off x="0" y="0"/>
+          <a:ext cx="0" cy="0"/>
+          <a:chOff x="0" y="0"/>
+          <a:chExt cx="0" cy="0"/>
+        </a:xfrm>
+      </p:grpSpPr>
+      <p:pic>
+        <p:nvPicPr>
+          <p:cNvPr id="103" name="" descr=""/>
+          <p:cNvPicPr/>
+          <p:nvPr/>
+        </p:nvPicPr>
+        <p:blipFill>
+          <a:blip r:embed="rId1"/>
+          <a:stretch/>
+        </p:blipFill>
+        <p:spPr>
+          <a:xfrm>
+            <a:off x="4401360" y="2286000"/>
+            <a:ext cx="10699560" cy="7532280"/>
+          </a:xfrm>
+          <a:prstGeom prst="rect">
+            <a:avLst/>
+          </a:prstGeom>
+          <a:ln w="0">
+            <a:noFill/>
+          </a:ln>
+        </p:spPr>
+      </p:pic>
+      <p:sp>
+        <p:nvSpPr>
+          <p:cNvPr id="104" name=""/>
+          <p:cNvSpPr/>
+          <p:nvPr/>
+        </p:nvSpPr>
+        <p:spPr>
+          <a:xfrm>
+            <a:off x="8121240" y="10092240"/>
+            <a:ext cx="3237120" cy="652320"/>
+          </a:xfrm>
+          <a:prstGeom prst="rect">
+            <a:avLst/>
+          </a:prstGeom>
+          <a:noFill/>
+          <a:ln w="0">
+            <a:noFill/>
+          </a:ln>
+        </p:spPr>
+        <p:style>
+          <a:lnRef idx="0"/>
+          <a:fillRef idx="0"/>
+          <a:effectRef idx="0"/>
+          <a:fontRef idx="minor"/>
+        </p:style>
+        <p:txBody>
+          <a:bodyPr lIns="90000" rIns="90000" tIns="45000" bIns="45000" anchor="t">
+            <a:noAutofit/>
+          </a:bodyPr>
+          <a:p>
+            <a:pPr>
+              <a:lnSpc>
+                <a:spcPct val="100000"/>
+              </a:lnSpc>
+            </a:pPr>
+            <a:r>
+              <a:rPr b="0" lang="en-IN" sz="4000" spc="-1" strike="noStrike">
+                <a:solidFill>
+                  <a:srgbClr val="000000"/>
+                </a:solidFill>
+                <a:latin typeface="Times New Roman"/>
+                <a:ea typeface="Times New Roman"/>
+              </a:rPr>
+              <a:t>DFD – Level 1</a:t>
+            </a:r>
+            <a:endParaRPr b="0" lang="en-US" sz="4000" spc="-1" strike="noStrike">
+              <a:solidFill>
+                <a:srgbClr val="000000"/>
+              </a:solidFill>
+              <a:latin typeface="Arial"/>
+            </a:endParaRPr>
+          </a:p>
+        </p:txBody>
+      </p:sp>
+      <p:sp>
+        <p:nvSpPr>
+          <p:cNvPr id="105" name=""/>
+          <p:cNvSpPr/>
+          <p:nvPr/>
+        </p:nvSpPr>
+        <p:spPr>
+          <a:xfrm>
+            <a:off x="16002000" y="9601200"/>
+            <a:ext cx="3574440" cy="764280"/>
+          </a:xfrm>
+          <a:prstGeom prst="rect">
+            <a:avLst/>
+          </a:prstGeom>
+          <a:noFill/>
+          <a:ln w="0">
+            <a:noFill/>
+          </a:ln>
+        </p:spPr>
+        <p:style>
+          <a:lnRef idx="0"/>
+          <a:fillRef idx="0"/>
+          <a:effectRef idx="0"/>
+          <a:fontRef idx="minor"/>
+        </p:style>
+        <p:txBody>
+          <a:bodyPr lIns="90000" rIns="90000" tIns="45000" bIns="45000" anchor="t">
+            <a:noAutofit/>
+          </a:bodyPr>
+          <a:p>
+            <a:pPr>
+              <a:lnSpc>
+                <a:spcPct val="100000"/>
+              </a:lnSpc>
+            </a:pPr>
+            <a:r>
+              <a:rPr b="0" lang="en-IN" sz="2400" spc="-1" strike="noStrike">
+                <a:solidFill>
+                  <a:srgbClr val="000000"/>
+                </a:solidFill>
+                <a:latin typeface="Times New Roman"/>
+                <a:ea typeface="Times New Roman"/>
+              </a:rPr>
+              <a:t>DS1- Recieving sensor data</a:t>
+            </a:r>
+            <a:endParaRPr b="0" lang="en-US" sz="2400" spc="-1" strike="noStrike">
+              <a:solidFill>
+                <a:srgbClr val="000000"/>
+              </a:solidFill>
+              <a:latin typeface="Arial"/>
+            </a:endParaRPr>
+          </a:p>
+          <a:p>
+            <a:pPr>
+              <a:lnSpc>
+                <a:spcPct val="100000"/>
+              </a:lnSpc>
+            </a:pPr>
+            <a:r>
+              <a:rPr b="0" lang="en-IN" sz="2400" spc="-1" strike="noStrike">
+                <a:solidFill>
+                  <a:srgbClr val="000000"/>
+                </a:solidFill>
+                <a:latin typeface="Times New Roman"/>
+                <a:ea typeface="Times New Roman"/>
+              </a:rPr>
+              <a:t>DS2-Sending data</a:t>
+            </a:r>
+            <a:endParaRPr b="0" lang="en-US" sz="2400" spc="-1" strike="noStrike">
+              <a:solidFill>
+                <a:srgbClr val="000000"/>
+              </a:solidFill>
+              <a:latin typeface="Arial"/>
+            </a:endParaRPr>
+          </a:p>
+        </p:txBody>
+      </p:sp>
+    </p:spTree>
+  </p:cSld>
+  <mc:AlternateContent>
+    <mc:Choice Requires="p14">
+      <p:transition spd="slow" p14:dur="2000"/>
+    </mc:Choice>
+    <mc:Fallback>
+      <p:transition spd="slow"/>
+    </mc:Fallback>
+  </mc:AlternateContent>
+</p:sld>
+</file>
+
+<file path=ppt/slides/slide18.xml><?xml version="1.0" encoding="utf-8"?>
+<p:sld xmlns:a="http://schemas.openxmlformats.org/drawingml/2006/main" xmlns:p="http://schemas.openxmlformats.org/presentationml/2006/main" xmlns:r="http://schemas.openxmlformats.org/officeDocument/2006/relationships" xmlns:p14="http://schemas.microsoft.com/office/powerpoint/2010/main" xmlns:p15="http://schemas.microsoft.com/office/powerpoint/2012/main" xmlns:mc="http://schemas.openxmlformats.org/markup-compatibility/2006">
+  <p:cSld>
+    <p:spTree>
+      <p:nvGrpSpPr>
+        <p:cNvPr id="1" name=""/>
+        <p:cNvGrpSpPr/>
+        <p:nvPr/>
+      </p:nvGrpSpPr>
+      <p:grpSpPr>
+        <a:xfrm>
+          <a:off x="0" y="0"/>
+          <a:ext cx="0" cy="0"/>
+          <a:chOff x="0" y="0"/>
+          <a:chExt cx="0" cy="0"/>
+        </a:xfrm>
+      </p:grpSpPr>
+      <p:pic>
+        <p:nvPicPr>
+          <p:cNvPr id="106" name="" descr=""/>
+          <p:cNvPicPr/>
+          <p:nvPr/>
+        </p:nvPicPr>
+        <p:blipFill>
+          <a:blip r:embed="rId1"/>
+          <a:stretch/>
+        </p:blipFill>
+        <p:spPr>
+          <a:xfrm>
+            <a:off x="3082680" y="1932480"/>
+            <a:ext cx="13376160" cy="7998840"/>
+          </a:xfrm>
+          <a:prstGeom prst="rect">
+            <a:avLst/>
+          </a:prstGeom>
+          <a:ln w="0">
+            <a:noFill/>
+          </a:ln>
+        </p:spPr>
+      </p:pic>
+      <p:sp>
+        <p:nvSpPr>
+          <p:cNvPr id="107" name=""/>
+          <p:cNvSpPr/>
+          <p:nvPr/>
+        </p:nvSpPr>
+        <p:spPr>
+          <a:xfrm>
+            <a:off x="9340200" y="10396800"/>
+            <a:ext cx="3237120" cy="652320"/>
+          </a:xfrm>
+          <a:prstGeom prst="rect">
+            <a:avLst/>
+          </a:prstGeom>
+          <a:noFill/>
+          <a:ln w="0">
+            <a:noFill/>
+          </a:ln>
+        </p:spPr>
+        <p:style>
+          <a:lnRef idx="0"/>
+          <a:fillRef idx="0"/>
+          <a:effectRef idx="0"/>
+          <a:fontRef idx="minor"/>
+        </p:style>
+        <p:txBody>
+          <a:bodyPr lIns="90000" rIns="90000" tIns="45000" bIns="45000" anchor="t">
+            <a:noAutofit/>
+          </a:bodyPr>
+          <a:p>
+            <a:pPr>
+              <a:lnSpc>
+                <a:spcPct val="100000"/>
+              </a:lnSpc>
+            </a:pPr>
+            <a:r>
+              <a:rPr b="0" lang="en-IN" sz="4000" spc="-1" strike="noStrike">
+                <a:solidFill>
+                  <a:srgbClr val="000000"/>
+                </a:solidFill>
+                <a:latin typeface="Times New Roman"/>
+                <a:ea typeface="Times New Roman"/>
+              </a:rPr>
+              <a:t>DFD – Level 2</a:t>
+            </a:r>
+            <a:endParaRPr b="0" lang="en-US" sz="4000" spc="-1" strike="noStrike">
+              <a:solidFill>
+                <a:srgbClr val="000000"/>
+              </a:solidFill>
+              <a:latin typeface="Arial"/>
+            </a:endParaRPr>
+          </a:p>
+        </p:txBody>
+      </p:sp>
+      <p:sp>
+        <p:nvSpPr>
+          <p:cNvPr id="108" name=""/>
+          <p:cNvSpPr/>
+          <p:nvPr/>
+        </p:nvSpPr>
+        <p:spPr>
+          <a:xfrm>
+            <a:off x="15856200" y="9931680"/>
+            <a:ext cx="3574440" cy="764280"/>
+          </a:xfrm>
+          <a:prstGeom prst="rect">
+            <a:avLst/>
+          </a:prstGeom>
+          <a:noFill/>
+          <a:ln w="0">
+            <a:noFill/>
+          </a:ln>
+        </p:spPr>
+        <p:style>
+          <a:lnRef idx="0"/>
+          <a:fillRef idx="0"/>
+          <a:effectRef idx="0"/>
+          <a:fontRef idx="minor"/>
+        </p:style>
+        <p:txBody>
+          <a:bodyPr lIns="90000" rIns="90000" tIns="45000" bIns="45000" anchor="t">
+            <a:noAutofit/>
+          </a:bodyPr>
+          <a:p>
+            <a:pPr>
+              <a:lnSpc>
+                <a:spcPct val="100000"/>
+              </a:lnSpc>
+            </a:pPr>
+            <a:r>
+              <a:rPr b="0" lang="en-IN" sz="2400" spc="-1" strike="noStrike">
+                <a:solidFill>
+                  <a:srgbClr val="000000"/>
+                </a:solidFill>
+                <a:latin typeface="Times New Roman"/>
+                <a:ea typeface="Times New Roman"/>
+              </a:rPr>
+              <a:t>DS1- Recieving sensor data</a:t>
+            </a:r>
+            <a:endParaRPr b="0" lang="en-US" sz="2400" spc="-1" strike="noStrike">
+              <a:solidFill>
+                <a:srgbClr val="000000"/>
+              </a:solidFill>
+              <a:latin typeface="Arial"/>
+            </a:endParaRPr>
+          </a:p>
+          <a:p>
+            <a:pPr>
+              <a:lnSpc>
+                <a:spcPct val="100000"/>
+              </a:lnSpc>
+            </a:pPr>
+            <a:r>
+              <a:rPr b="0" lang="en-IN" sz="2400" spc="-1" strike="noStrike">
+                <a:solidFill>
+                  <a:srgbClr val="000000"/>
+                </a:solidFill>
+                <a:latin typeface="Times New Roman"/>
+                <a:ea typeface="Times New Roman"/>
+              </a:rPr>
+              <a:t>DS2-Sending data</a:t>
+            </a:r>
+            <a:endParaRPr b="0" lang="en-US" sz="2400" spc="-1" strike="noStrike">
+              <a:solidFill>
+                <a:srgbClr val="000000"/>
+              </a:solidFill>
+              <a:latin typeface="Arial"/>
+            </a:endParaRPr>
+          </a:p>
+        </p:txBody>
+      </p:sp>
+    </p:spTree>
+  </p:cSld>
+  <mc:AlternateContent>
+    <mc:Choice Requires="p14">
+      <p:transition spd="slow" p14:dur="2000"/>
+    </mc:Choice>
+    <mc:Fallback>
+      <p:transition spd="slow"/>
+    </mc:Fallback>
+  </mc:AlternateContent>
+</p:sld>
+</file>
+
+<file path=ppt/slides/slide19.xml><?xml version="1.0" encoding="utf-8"?>
 <p:sld xmlns:a="http://schemas.openxmlformats.org/drawingml/2006/main" xmlns:p="http://schemas.openxmlformats.org/presentationml/2006/main" xmlns:r="http://schemas.openxmlformats.org/officeDocument/2006/relationships" xmlns:p14="http://schemas.microsoft.com/office/powerpoint/2010/main" xmlns:p15="http://schemas.microsoft.com/office/powerpoint/2012/main" xmlns:mc="http://schemas.openxmlformats.org/markup-compatibility/2006">
   <p:cSld>
     <p:spTree>
@@ -7984,22 +7855,22 @@
       </p:grpSpPr>
       <p:sp>
         <p:nvSpPr>
-          <p:cNvPr id="99" name="Google Shape;157;p14"/>
+          <p:cNvPr id="109" name="Google Shape;157;p14"/>
           <p:cNvSpPr/>
           <p:nvPr/>
         </p:nvSpPr>
         <p:spPr>
           <a:xfrm>
             <a:off x="2982960" y="712800"/>
-            <a:ext cx="55440" cy="55440"/>
+            <a:ext cx="54720" cy="54720"/>
           </a:xfrm>
           <a:custGeom>
             <a:avLst/>
             <a:gdLst>
-              <a:gd name="textAreaLeft" fmla="*/ 0 w 55440"/>
-              <a:gd name="textAreaRight" fmla="*/ 57240 w 55440"/>
-              <a:gd name="textAreaTop" fmla="*/ 0 h 55440"/>
-              <a:gd name="textAreaBottom" fmla="*/ 57240 h 55440"/>
+              <a:gd name="textAreaLeft" fmla="*/ 0 w 54720"/>
+              <a:gd name="textAreaRight" fmla="*/ 57240 w 54720"/>
+              <a:gd name="textAreaTop" fmla="*/ 0 h 54720"/>
+              <a:gd name="textAreaBottom" fmla="*/ 57240 h 54720"/>
             </a:gdLst>
             <a:ahLst/>
             <a:rect l="textAreaLeft" t="textAreaTop" r="textAreaRight" b="textAreaBottom"/>
@@ -8170,22 +8041,22 @@
       </p:sp>
       <p:sp>
         <p:nvSpPr>
-          <p:cNvPr id="100" name="Google Shape;158;p14"/>
+          <p:cNvPr id="110" name="Google Shape;158;p14"/>
           <p:cNvSpPr/>
           <p:nvPr/>
         </p:nvSpPr>
         <p:spPr>
           <a:xfrm>
             <a:off x="2998800" y="725400"/>
-            <a:ext cx="23760" cy="29880"/>
+            <a:ext cx="23040" cy="29160"/>
           </a:xfrm>
           <a:custGeom>
             <a:avLst/>
             <a:gdLst>
-              <a:gd name="textAreaLeft" fmla="*/ 0 w 23760"/>
-              <a:gd name="textAreaRight" fmla="*/ 25560 w 23760"/>
-              <a:gd name="textAreaTop" fmla="*/ 0 h 29880"/>
-              <a:gd name="textAreaBottom" fmla="*/ 31680 h 29880"/>
+              <a:gd name="textAreaLeft" fmla="*/ 0 w 23040"/>
+              <a:gd name="textAreaRight" fmla="*/ 25560 w 23040"/>
+              <a:gd name="textAreaTop" fmla="*/ 0 h 29160"/>
+              <a:gd name="textAreaBottom" fmla="*/ 31680 h 29160"/>
             </a:gdLst>
             <a:ahLst/>
             <a:rect l="textAreaLeft" t="textAreaTop" r="textAreaRight" b="textAreaBottom"/>
@@ -8347,18 +8218,18 @@
       </p:sp>
       <p:sp>
         <p:nvSpPr>
-          <p:cNvPr id="101" name="PlaceHolder 1"/>
+          <p:cNvPr id="111" name="PlaceHolder 1"/>
           <p:cNvSpPr>
             <a:spLocks noGrp="1"/>
           </p:cNvSpPr>
           <p:nvPr>
-            <p:ph type="sldNum" idx="22"/>
+            <p:ph type="sldNum" idx="21"/>
           </p:nvPr>
         </p:nvSpPr>
         <p:spPr>
           <a:xfrm>
             <a:off x="18627840" y="10253160"/>
-            <a:ext cx="1203480" cy="862560"/>
+            <a:ext cx="1202760" cy="861840"/>
           </a:xfrm>
           <a:prstGeom prst="rect">
             <a:avLst/>
@@ -8400,7 +8271,7 @@
                 <a:tab algn="l" pos="0"/>
               </a:tabLst>
             </a:pPr>
-            <a:fld id="{3D36BBDB-F57E-435A-8E8A-9C340A24C99F}" type="slidenum">
+            <a:fld id="{EB9D5365-1904-4347-90CC-399C67B514A9}" type="slidenum">
               <a:rPr b="0" lang="en-IN" sz="2200" spc="-1" strike="noStrike">
                 <a:solidFill>
                   <a:schemeClr val="dk2"/>
@@ -8408,7 +8279,7 @@
                 <a:latin typeface="Arial"/>
                 <a:ea typeface="Arial"/>
               </a:rPr>
-              <a:t>15</a:t>
+              <a:t>&lt;number&gt;</a:t>
             </a:fld>
             <a:endParaRPr b="0" lang="en-US" sz="2200" spc="-1" strike="noStrike">
               <a:solidFill>
@@ -8421,14 +8292,14 @@
       </p:sp>
       <p:sp>
         <p:nvSpPr>
-          <p:cNvPr id="102" name="Google Shape;161;p14"/>
+          <p:cNvPr id="112" name="Google Shape;161;p14"/>
           <p:cNvSpPr/>
           <p:nvPr/>
         </p:nvSpPr>
         <p:spPr>
           <a:xfrm>
             <a:off x="5057640" y="290520"/>
-            <a:ext cx="9069120" cy="637920"/>
+            <a:ext cx="9068400" cy="637200"/>
           </a:xfrm>
           <a:prstGeom prst="rect">
             <a:avLst/>
@@ -8478,14 +8349,14 @@
       </p:sp>
       <p:sp>
         <p:nvSpPr>
-          <p:cNvPr id="103" name=""/>
-          <p:cNvSpPr txBox="1"/>
+          <p:cNvPr id="113" name=""/>
+          <p:cNvSpPr/>
           <p:nvPr/>
         </p:nvSpPr>
         <p:spPr>
           <a:xfrm>
             <a:off x="554400" y="2341440"/>
-            <a:ext cx="18662040" cy="7891200"/>
+            <a:ext cx="18661320" cy="7890480"/>
           </a:xfrm>
           <a:prstGeom prst="rect">
             <a:avLst/>
@@ -8495,38 +8366,38 @@
             <a:noFill/>
           </a:ln>
         </p:spPr>
+        <p:style>
+          <a:lnRef idx="0"/>
+          <a:fillRef idx="0"/>
+          <a:effectRef idx="0"/>
+          <a:fontRef idx="minor"/>
+        </p:style>
         <p:txBody>
           <a:bodyPr lIns="90000" rIns="90000" tIns="45000" bIns="45000" anchor="t">
             <a:noAutofit/>
           </a:bodyPr>
           <a:p>
+            <a:pPr>
+              <a:lnSpc>
+                <a:spcPct val="100000"/>
+              </a:lnSpc>
+              <a:spcBef>
+                <a:spcPts val="567"/>
+              </a:spcBef>
+              <a:spcAft>
+                <a:spcPts val="567"/>
+              </a:spcAft>
+            </a:pPr>
             <a:r>
-              <a:rPr b="1" lang="en-US" sz="2800" spc="-1" strike="noStrike">
+              <a:rPr b="1" lang="en-US" sz="2600" spc="-1" strike="noStrike">
                 <a:solidFill>
                   <a:srgbClr val="000000"/>
                 </a:solidFill>
-                <a:latin typeface="Arial"/>
+                <a:latin typeface="times new roman"/>
               </a:rPr>
               <a:t>Work completed so far:</a:t>
             </a:r>
-            <a:endParaRPr b="0" lang="en-US" sz="2800" spc="-1" strike="noStrike">
-              <a:solidFill>
-                <a:srgbClr val="000000"/>
-              </a:solidFill>
-              <a:latin typeface="Arial"/>
-            </a:endParaRPr>
-          </a:p>
-          <a:p>
-            <a:r>
-              <a:rPr b="0" lang="en-US" sz="2400" spc="-1" strike="noStrike">
-                <a:solidFill>
-                  <a:srgbClr val="000000"/>
-                </a:solidFill>
-                <a:latin typeface="Arial"/>
-              </a:rPr>
-              <a:t>Design and selection of all hardware components (ESP32, LoRa, GPS, BMP180, Li-ion battery)</a:t>
-            </a:r>
-            <a:endParaRPr b="0" lang="en-US" sz="2400" spc="-1" strike="noStrike">
+            <a:endParaRPr b="0" lang="en-US" sz="2600" spc="-1" strike="noStrike">
               <a:solidFill>
                 <a:srgbClr val="000000"/>
               </a:solidFill>
@@ -8539,22 +8410,22 @@
                 <a:spcPct val="100000"/>
               </a:lnSpc>
               <a:spcBef>
-                <a:spcPts val="1191"/>
+                <a:spcPts val="567"/>
               </a:spcBef>
               <a:spcAft>
-                <a:spcPts val="992"/>
+                <a:spcPts val="567"/>
               </a:spcAft>
             </a:pPr>
             <a:r>
-              <a:rPr b="0" lang="en-US" sz="2400" spc="-1" strike="noStrike">
+              <a:rPr b="0" lang="en-US" sz="2600" spc="-1" strike="noStrike">
                 <a:solidFill>
                   <a:srgbClr val="000000"/>
                 </a:solidFill>
-                <a:latin typeface="Arial"/>
+                <a:latin typeface="times new roman"/>
               </a:rPr>
-              <a:t>Initial web dashboard (Next.js) for user authentication, location display, and alert visualization</a:t>
+              <a:t>Design and selection of all hardware components (ESP32, LoRa, GPS, BMP180, Li-ion battery)</a:t>
             </a:r>
-            <a:endParaRPr b="0" lang="en-US" sz="2400" spc="-1" strike="noStrike">
+            <a:endParaRPr b="0" lang="en-US" sz="2600" spc="-1" strike="noStrike">
               <a:solidFill>
                 <a:srgbClr val="000000"/>
               </a:solidFill>
@@ -8562,7 +8433,27 @@
             </a:endParaRPr>
           </a:p>
           <a:p>
-            <a:endParaRPr b="0" lang="en-US" sz="2400" spc="-1" strike="noStrike">
+            <a:pPr>
+              <a:lnSpc>
+                <a:spcPct val="100000"/>
+              </a:lnSpc>
+              <a:spcBef>
+                <a:spcPts val="1757"/>
+              </a:spcBef>
+              <a:spcAft>
+                <a:spcPts val="1559"/>
+              </a:spcAft>
+            </a:pPr>
+            <a:r>
+              <a:rPr b="0" lang="en-US" sz="2600" spc="-1" strike="noStrike">
+                <a:solidFill>
+                  <a:srgbClr val="000000"/>
+                </a:solidFill>
+                <a:latin typeface="times new roman"/>
+              </a:rPr>
+              <a:t>Initial web dashboard (Next.js) for user authentication, location display, and alert visualization</a:t>
+            </a:r>
+            <a:endParaRPr b="0" lang="en-US" sz="2600" spc="-1" strike="noStrike">
               <a:solidFill>
                 <a:srgbClr val="000000"/>
               </a:solidFill>
@@ -8570,7 +8461,18 @@
             </a:endParaRPr>
           </a:p>
           <a:p>
-            <a:endParaRPr b="0" lang="en-US" sz="2400" spc="-1" strike="noStrike">
+            <a:pPr>
+              <a:lnSpc>
+                <a:spcPct val="100000"/>
+              </a:lnSpc>
+              <a:spcBef>
+                <a:spcPts val="567"/>
+              </a:spcBef>
+              <a:spcAft>
+                <a:spcPts val="567"/>
+              </a:spcAft>
+            </a:pPr>
+            <a:endParaRPr b="0" lang="en-US" sz="2600" spc="-1" strike="noStrike">
               <a:solidFill>
                 <a:srgbClr val="000000"/>
               </a:solidFill>
@@ -8578,16 +8480,18 @@
             </a:endParaRPr>
           </a:p>
           <a:p>
-            <a:r>
-              <a:rPr b="1" lang="en-US" sz="2400" spc="-1" strike="noStrike">
-                <a:solidFill>
-                  <a:srgbClr val="000000"/>
-                </a:solidFill>
-                <a:latin typeface="Arial"/>
-              </a:rPr>
-              <a:t>Plan for Further Work</a:t>
-            </a:r>
-            <a:endParaRPr b="1" lang="en-US" sz="2400" spc="-1" strike="noStrike">
+            <a:pPr>
+              <a:lnSpc>
+                <a:spcPct val="100000"/>
+              </a:lnSpc>
+              <a:spcBef>
+                <a:spcPts val="567"/>
+              </a:spcBef>
+              <a:spcAft>
+                <a:spcPts val="567"/>
+              </a:spcAft>
+            </a:pPr>
+            <a:endParaRPr b="0" lang="en-US" sz="2600" spc="-1" strike="noStrike">
               <a:solidFill>
                 <a:srgbClr val="000000"/>
               </a:solidFill>
@@ -8595,16 +8499,28 @@
             </a:endParaRPr>
           </a:p>
           <a:p>
+            <a:pPr>
+              <a:lnSpc>
+                <a:spcPct val="100000"/>
+              </a:lnSpc>
+              <a:spcBef>
+                <a:spcPts val="567"/>
+              </a:spcBef>
+              <a:spcAft>
+                <a:spcPts val="567"/>
+              </a:spcAft>
+            </a:pPr>
             <a:r>
-              <a:rPr b="0" lang="en-US" sz="2400" spc="-1" strike="noStrike">
+              <a:rPr b="1" lang="en-US" sz="2600" spc="-1" strike="noStrike">
                 <a:solidFill>
                   <a:srgbClr val="000000"/>
                 </a:solidFill>
-                <a:latin typeface="Arial"/>
+                <a:latin typeface="times new roman"/>
+                <a:ea typeface="Noto Sans CJK SC"/>
               </a:rPr>
-              <a:t>Complete physical assembly and wiring of ESP32+LoRa+GPS+BME280 hardware nodes</a:t>
+              <a:t>Plan for Further Work</a:t>
             </a:r>
-            <a:endParaRPr b="0" lang="en-US" sz="2400" spc="-1" strike="noStrike">
+            <a:endParaRPr b="0" lang="en-US" sz="2600" spc="-1" strike="noStrike">
               <a:solidFill>
                 <a:srgbClr val="000000"/>
               </a:solidFill>
@@ -8612,16 +8528,28 @@
             </a:endParaRPr>
           </a:p>
           <a:p>
+            <a:pPr>
+              <a:lnSpc>
+                <a:spcPct val="100000"/>
+              </a:lnSpc>
+              <a:spcBef>
+                <a:spcPts val="567"/>
+              </a:spcBef>
+              <a:spcAft>
+                <a:spcPts val="567"/>
+              </a:spcAft>
+            </a:pPr>
             <a:r>
-              <a:rPr b="0" lang="en-US" sz="2400" spc="-1" strike="noStrike">
+              <a:rPr b="0" lang="en-US" sz="2600" spc="-1" strike="noStrike">
                 <a:solidFill>
                   <a:srgbClr val="000000"/>
                 </a:solidFill>
-                <a:latin typeface="Arial"/>
+                <a:latin typeface="times new roman"/>
+                <a:ea typeface="Noto Sans CJK SC"/>
               </a:rPr>
-              <a:t>Integrate battery monitoring and test power management features</a:t>
+              <a:t>Complete physical assembly and wiring of ESP32+LoRa+GPS+BME280 hardware nodes</a:t>
             </a:r>
-            <a:endParaRPr b="0" lang="en-US" sz="2400" spc="-1" strike="noStrike">
+            <a:endParaRPr b="0" lang="en-US" sz="2600" spc="-1" strike="noStrike">
               <a:solidFill>
                 <a:srgbClr val="000000"/>
               </a:solidFill>
@@ -8629,16 +8557,28 @@
             </a:endParaRPr>
           </a:p>
           <a:p>
+            <a:pPr>
+              <a:lnSpc>
+                <a:spcPct val="100000"/>
+              </a:lnSpc>
+              <a:spcBef>
+                <a:spcPts val="567"/>
+              </a:spcBef>
+              <a:spcAft>
+                <a:spcPts val="567"/>
+              </a:spcAft>
+            </a:pPr>
             <a:r>
-              <a:rPr b="0" lang="en-US" sz="2400" spc="-1" strike="noStrike">
+              <a:rPr b="0" lang="en-US" sz="2600" spc="-1" strike="noStrike">
                 <a:solidFill>
                   <a:srgbClr val="000000"/>
                 </a:solidFill>
-                <a:latin typeface="Arial"/>
+                <a:latin typeface="times new roman"/>
+                <a:ea typeface="Noto Sans CJK SC"/>
               </a:rPr>
-              <a:t>Finalize and test real-time data transmission from hardware to backend</a:t>
+              <a:t>Integrate battery monitoring and test power management features</a:t>
             </a:r>
-            <a:endParaRPr b="0" lang="en-US" sz="2400" spc="-1" strike="noStrike">
+            <a:endParaRPr b="0" lang="en-US" sz="2600" spc="-1" strike="noStrike">
               <a:solidFill>
                 <a:srgbClr val="000000"/>
               </a:solidFill>
@@ -8646,16 +8586,28 @@
             </a:endParaRPr>
           </a:p>
           <a:p>
+            <a:pPr>
+              <a:lnSpc>
+                <a:spcPct val="100000"/>
+              </a:lnSpc>
+              <a:spcBef>
+                <a:spcPts val="567"/>
+              </a:spcBef>
+              <a:spcAft>
+                <a:spcPts val="567"/>
+              </a:spcAft>
+            </a:pPr>
             <a:r>
-              <a:rPr b="0" lang="en-US" sz="2400" spc="-1" strike="noStrike">
+              <a:rPr b="0" lang="en-US" sz="2600" spc="-1" strike="noStrike">
                 <a:solidFill>
                   <a:srgbClr val="000000"/>
                 </a:solidFill>
-                <a:latin typeface="Arial"/>
+                <a:latin typeface="times new roman"/>
+                <a:ea typeface="Noto Sans CJK SC"/>
               </a:rPr>
-              <a:t>Enhance dashboard with historical data visualization and advanced filtering</a:t>
+              <a:t>Finalize and test real-time data transmission from hardware to backend</a:t>
             </a:r>
-            <a:endParaRPr b="0" lang="en-US" sz="2400" spc="-1" strike="noStrike">
+            <a:endParaRPr b="0" lang="en-US" sz="2600" spc="-1" strike="noStrike">
               <a:solidFill>
                 <a:srgbClr val="000000"/>
               </a:solidFill>
@@ -8663,16 +8615,28 @@
             </a:endParaRPr>
           </a:p>
           <a:p>
+            <a:pPr>
+              <a:lnSpc>
+                <a:spcPct val="100000"/>
+              </a:lnSpc>
+              <a:spcBef>
+                <a:spcPts val="567"/>
+              </a:spcBef>
+              <a:spcAft>
+                <a:spcPts val="567"/>
+              </a:spcAft>
+            </a:pPr>
             <a:r>
-              <a:rPr b="0" lang="en-US" sz="2400" spc="-1" strike="noStrike">
+              <a:rPr b="0" lang="en-US" sz="2600" spc="-1" strike="noStrike">
                 <a:solidFill>
                   <a:srgbClr val="000000"/>
                 </a:solidFill>
-                <a:latin typeface="Arial"/>
+                <a:latin typeface="times new roman"/>
+                <a:ea typeface="Noto Sans CJK SC"/>
               </a:rPr>
-              <a:t>Conduct field deployment and calibration of all sensors</a:t>
+              <a:t>Enhance dashboard with  data visualization and advanced filtering</a:t>
             </a:r>
-            <a:endParaRPr b="0" lang="en-US" sz="2400" spc="-1" strike="noStrike">
+            <a:endParaRPr b="0" lang="en-US" sz="2600" spc="-1" strike="noStrike">
               <a:solidFill>
                 <a:srgbClr val="000000"/>
               </a:solidFill>
@@ -8680,7 +8644,28 @@
             </a:endParaRPr>
           </a:p>
           <a:p>
-            <a:endParaRPr b="0" lang="en-US" sz="2400" spc="-1" strike="noStrike">
+            <a:pPr>
+              <a:lnSpc>
+                <a:spcPct val="100000"/>
+              </a:lnSpc>
+              <a:spcBef>
+                <a:spcPts val="567"/>
+              </a:spcBef>
+              <a:spcAft>
+                <a:spcPts val="567"/>
+              </a:spcAft>
+            </a:pPr>
+            <a:r>
+              <a:rPr b="0" lang="en-US" sz="2600" spc="-1" strike="noStrike">
+                <a:solidFill>
+                  <a:srgbClr val="000000"/>
+                </a:solidFill>
+                <a:latin typeface="times new roman"/>
+                <a:ea typeface="Noto Sans CJK SC"/>
+              </a:rPr>
+              <a:t>Conduct field deployment and calibration of all sensors</a:t>
+            </a:r>
+            <a:endParaRPr b="0" lang="en-US" sz="2600" spc="-1" strike="noStrike">
               <a:solidFill>
                 <a:srgbClr val="000000"/>
               </a:solidFill>
@@ -8688,7 +8673,37 @@
             </a:endParaRPr>
           </a:p>
           <a:p>
-            <a:endParaRPr b="0" lang="en-US" sz="2400" spc="-1" strike="noStrike">
+            <a:pPr>
+              <a:lnSpc>
+                <a:spcPct val="100000"/>
+              </a:lnSpc>
+              <a:spcBef>
+                <a:spcPts val="567"/>
+              </a:spcBef>
+              <a:spcAft>
+                <a:spcPts val="567"/>
+              </a:spcAft>
+            </a:pPr>
+            <a:endParaRPr b="0" lang="en-US" sz="2600" spc="-1" strike="noStrike">
+              <a:solidFill>
+                <a:srgbClr val="000000"/>
+              </a:solidFill>
+              <a:latin typeface="Arial"/>
+            </a:endParaRPr>
+          </a:p>
+          <a:p>
+            <a:pPr>
+              <a:lnSpc>
+                <a:spcPct val="100000"/>
+              </a:lnSpc>
+              <a:spcBef>
+                <a:spcPts val="567"/>
+              </a:spcBef>
+              <a:spcAft>
+                <a:spcPts val="567"/>
+              </a:spcAft>
+            </a:pPr>
+            <a:endParaRPr b="0" lang="en-US" sz="2600" spc="-1" strike="noStrike">
               <a:solidFill>
                 <a:srgbClr val="000000"/>
               </a:solidFill>
@@ -8710,7 +8725,7 @@
 </p:sld>
 </file>
 
-<file path=ppt/slides/slide16.xml><?xml version="1.0" encoding="utf-8"?>
+<file path=ppt/slides/slide2.xml><?xml version="1.0" encoding="utf-8"?>
 <p:sld xmlns:a="http://schemas.openxmlformats.org/drawingml/2006/main" xmlns:p="http://schemas.openxmlformats.org/presentationml/2006/main" xmlns:r="http://schemas.openxmlformats.org/officeDocument/2006/relationships" xmlns:p14="http://schemas.microsoft.com/office/powerpoint/2010/main" xmlns:p15="http://schemas.microsoft.com/office/powerpoint/2012/main" xmlns:mc="http://schemas.openxmlformats.org/markup-compatibility/2006">
   <p:cSld>
     <p:spTree>
@@ -8729,22 +8744,22 @@
       </p:grpSpPr>
       <p:sp>
         <p:nvSpPr>
-          <p:cNvPr id="104" name="Google Shape;167;p15"/>
+          <p:cNvPr id="36" name="Google Shape;44;p2"/>
           <p:cNvSpPr/>
           <p:nvPr/>
         </p:nvSpPr>
         <p:spPr>
           <a:xfrm>
             <a:off x="2982960" y="712800"/>
-            <a:ext cx="55440" cy="55440"/>
+            <a:ext cx="54720" cy="54720"/>
           </a:xfrm>
           <a:custGeom>
             <a:avLst/>
             <a:gdLst>
-              <a:gd name="textAreaLeft" fmla="*/ 0 w 55440"/>
-              <a:gd name="textAreaRight" fmla="*/ 57240 w 55440"/>
-              <a:gd name="textAreaTop" fmla="*/ 0 h 55440"/>
-              <a:gd name="textAreaBottom" fmla="*/ 57240 h 55440"/>
+              <a:gd name="textAreaLeft" fmla="*/ 0 w 54720"/>
+              <a:gd name="textAreaRight" fmla="*/ 57240 w 54720"/>
+              <a:gd name="textAreaTop" fmla="*/ 0 h 54720"/>
+              <a:gd name="textAreaBottom" fmla="*/ 57240 h 54720"/>
             </a:gdLst>
             <a:ahLst/>
             <a:rect l="textAreaLeft" t="textAreaTop" r="textAreaRight" b="textAreaBottom"/>
@@ -8915,22 +8930,22 @@
       </p:sp>
       <p:sp>
         <p:nvSpPr>
-          <p:cNvPr id="105" name="Google Shape;168;p15"/>
+          <p:cNvPr id="37" name="Google Shape;45;p2"/>
           <p:cNvSpPr/>
           <p:nvPr/>
         </p:nvSpPr>
         <p:spPr>
           <a:xfrm>
             <a:off x="2998800" y="725400"/>
-            <a:ext cx="23760" cy="29880"/>
+            <a:ext cx="23040" cy="29160"/>
           </a:xfrm>
           <a:custGeom>
             <a:avLst/>
             <a:gdLst>
-              <a:gd name="textAreaLeft" fmla="*/ 0 w 23760"/>
-              <a:gd name="textAreaRight" fmla="*/ 25560 w 23760"/>
-              <a:gd name="textAreaTop" fmla="*/ 0 h 29880"/>
-              <a:gd name="textAreaBottom" fmla="*/ 31680 h 29880"/>
+              <a:gd name="textAreaLeft" fmla="*/ 0 w 23040"/>
+              <a:gd name="textAreaRight" fmla="*/ 25560 w 23040"/>
+              <a:gd name="textAreaTop" fmla="*/ 0 h 29160"/>
+              <a:gd name="textAreaBottom" fmla="*/ 31680 h 29160"/>
             </a:gdLst>
             <a:ahLst/>
             <a:rect l="textAreaLeft" t="textAreaTop" r="textAreaRight" b="textAreaBottom"/>
@@ -9092,18 +9107,18 @@
       </p:sp>
       <p:sp>
         <p:nvSpPr>
-          <p:cNvPr id="106" name="PlaceHolder 1"/>
+          <p:cNvPr id="38" name="PlaceHolder 1"/>
           <p:cNvSpPr>
             <a:spLocks noGrp="1"/>
           </p:cNvSpPr>
           <p:nvPr>
-            <p:ph type="sldNum" idx="23"/>
+            <p:ph type="sldNum" idx="11"/>
           </p:nvPr>
         </p:nvSpPr>
         <p:spPr>
           <a:xfrm>
             <a:off x="18627840" y="10253160"/>
-            <a:ext cx="1203480" cy="862560"/>
+            <a:ext cx="1202760" cy="861840"/>
           </a:xfrm>
           <a:prstGeom prst="rect">
             <a:avLst/>
@@ -9145,7 +9160,7 @@
                 <a:tab algn="l" pos="0"/>
               </a:tabLst>
             </a:pPr>
-            <a:fld id="{CFEE2D88-EACB-4FA7-965A-916722DD006F}" type="slidenum">
+            <a:fld id="{94A84339-418D-43F5-996C-77D23ED1CF8D}" type="slidenum">
               <a:rPr b="0" lang="en-IN" sz="2200" spc="-1" strike="noStrike">
                 <a:solidFill>
                   <a:schemeClr val="dk2"/>
@@ -9153,7 +9168,7 @@
                 <a:latin typeface="Arial"/>
                 <a:ea typeface="Arial"/>
               </a:rPr>
-              <a:t>16</a:t>
+              <a:t>2</a:t>
             </a:fld>
             <a:endParaRPr b="0" lang="en-US" sz="2200" spc="-1" strike="noStrike">
               <a:solidFill>
@@ -9166,14 +9181,849 @@
       </p:sp>
       <p:sp>
         <p:nvSpPr>
-          <p:cNvPr id="107" name="Google Shape;171;p15"/>
+          <p:cNvPr id="39" name="Google Shape;47;p2"/>
+          <p:cNvSpPr/>
+          <p:nvPr/>
+        </p:nvSpPr>
+        <p:spPr>
+          <a:xfrm>
+            <a:off x="1008000" y="2411280"/>
+            <a:ext cx="18525240" cy="7795800"/>
+          </a:xfrm>
+          <a:prstGeom prst="rect">
+            <a:avLst/>
+          </a:prstGeom>
+          <a:noFill/>
+          <a:ln w="0">
+            <a:noFill/>
+          </a:ln>
+        </p:spPr>
+        <p:style>
+          <a:lnRef idx="0"/>
+          <a:fillRef idx="0"/>
+          <a:effectRef idx="0"/>
+          <a:fontRef idx="minor"/>
+        </p:style>
+        <p:txBody>
+          <a:bodyPr lIns="90000" rIns="90000" tIns="45000" bIns="45000" anchor="t">
+            <a:spAutoFit/>
+          </a:bodyPr>
+          <a:p>
+            <a:pPr marL="216000" indent="-216000" algn="just">
+              <a:lnSpc>
+                <a:spcPct val="115000"/>
+              </a:lnSpc>
+              <a:buClr>
+                <a:srgbClr val="000000"/>
+              </a:buClr>
+              <a:buFont typeface="Symbol" charset="2"/>
+              <a:buChar char=""/>
+            </a:pPr>
+            <a:r>
+              <a:rPr b="0" lang="en-IN" sz="4000" spc="-1" strike="noStrike">
+                <a:solidFill>
+                  <a:srgbClr val="000000"/>
+                </a:solidFill>
+                <a:latin typeface="Times New Roman"/>
+                <a:ea typeface="Times New Roman"/>
+              </a:rPr>
+              <a:t>Changes suggested in Phase I and Incorporation  </a:t>
+            </a:r>
+            <a:endParaRPr b="0" lang="en-US" sz="4000" spc="-1" strike="noStrike">
+              <a:solidFill>
+                <a:srgbClr val="000000"/>
+              </a:solidFill>
+              <a:latin typeface="Arial"/>
+            </a:endParaRPr>
+          </a:p>
+          <a:p>
+            <a:pPr marL="216000" indent="-216000" algn="just">
+              <a:lnSpc>
+                <a:spcPct val="115000"/>
+              </a:lnSpc>
+              <a:buClr>
+                <a:srgbClr val="000000"/>
+              </a:buClr>
+              <a:buFont typeface="Symbol" charset="2"/>
+              <a:buChar char=""/>
+            </a:pPr>
+            <a:r>
+              <a:rPr b="0" lang="en-IN" sz="4000" spc="-1" strike="noStrike">
+                <a:solidFill>
+                  <a:srgbClr val="000000"/>
+                </a:solidFill>
+                <a:latin typeface="Times New Roman"/>
+                <a:ea typeface="Times New Roman"/>
+              </a:rPr>
+              <a:t>Tools and Technologies Used</a:t>
+            </a:r>
+            <a:endParaRPr b="0" lang="en-US" sz="4000" spc="-1" strike="noStrike">
+              <a:solidFill>
+                <a:srgbClr val="000000"/>
+              </a:solidFill>
+              <a:latin typeface="Arial"/>
+            </a:endParaRPr>
+          </a:p>
+          <a:p>
+            <a:pPr marL="216000" indent="-216000" algn="just">
+              <a:lnSpc>
+                <a:spcPct val="115000"/>
+              </a:lnSpc>
+              <a:buClr>
+                <a:srgbClr val="000000"/>
+              </a:buClr>
+              <a:buFont typeface="Symbol" charset="2"/>
+              <a:buChar char=""/>
+            </a:pPr>
+            <a:r>
+              <a:rPr b="0" lang="en-IN" sz="4000" spc="-1" strike="noStrike">
+                <a:solidFill>
+                  <a:srgbClr val="000000"/>
+                </a:solidFill>
+                <a:latin typeface="Times New Roman"/>
+                <a:ea typeface="Times New Roman"/>
+              </a:rPr>
+              <a:t>Hardware and Software Requirements</a:t>
+            </a:r>
+            <a:endParaRPr b="0" lang="en-US" sz="4000" spc="-1" strike="noStrike">
+              <a:solidFill>
+                <a:srgbClr val="000000"/>
+              </a:solidFill>
+              <a:latin typeface="Arial"/>
+            </a:endParaRPr>
+          </a:p>
+          <a:p>
+            <a:pPr marL="216000" indent="-216000" algn="just">
+              <a:lnSpc>
+                <a:spcPct val="115000"/>
+              </a:lnSpc>
+              <a:buClr>
+                <a:srgbClr val="000000"/>
+              </a:buClr>
+              <a:buFont typeface="Symbol" charset="2"/>
+              <a:buChar char=""/>
+            </a:pPr>
+            <a:r>
+              <a:rPr b="0" lang="en-IN" sz="4000" spc="-1" strike="noStrike">
+                <a:solidFill>
+                  <a:srgbClr val="000000"/>
+                </a:solidFill>
+                <a:latin typeface="Times New Roman"/>
+                <a:ea typeface="Times New Roman"/>
+              </a:rPr>
+              <a:t>Functional Requirements- Module specification</a:t>
+            </a:r>
+            <a:endParaRPr b="0" lang="en-US" sz="4000" spc="-1" strike="noStrike">
+              <a:solidFill>
+                <a:srgbClr val="000000"/>
+              </a:solidFill>
+              <a:latin typeface="Arial"/>
+            </a:endParaRPr>
+          </a:p>
+          <a:p>
+            <a:pPr marL="216000" indent="-216000" algn="just">
+              <a:lnSpc>
+                <a:spcPct val="115000"/>
+              </a:lnSpc>
+              <a:buClr>
+                <a:srgbClr val="000000"/>
+              </a:buClr>
+              <a:buFont typeface="Symbol" charset="2"/>
+              <a:buChar char=""/>
+            </a:pPr>
+            <a:r>
+              <a:rPr b="0" lang="en-IN" sz="4000" spc="-1" strike="noStrike">
+                <a:solidFill>
+                  <a:srgbClr val="000000"/>
+                </a:solidFill>
+                <a:latin typeface="Times New Roman"/>
+                <a:ea typeface="Times New Roman"/>
+              </a:rPr>
+              <a:t>Non-functional Requirements</a:t>
+            </a:r>
+            <a:endParaRPr b="0" lang="en-US" sz="4000" spc="-1" strike="noStrike">
+              <a:solidFill>
+                <a:srgbClr val="000000"/>
+              </a:solidFill>
+              <a:latin typeface="Arial"/>
+            </a:endParaRPr>
+          </a:p>
+          <a:p>
+            <a:pPr marL="216000" indent="-216000" algn="just">
+              <a:lnSpc>
+                <a:spcPct val="115000"/>
+              </a:lnSpc>
+              <a:buClr>
+                <a:srgbClr val="000000"/>
+              </a:buClr>
+              <a:buFont typeface="Symbol" charset="2"/>
+              <a:buChar char=""/>
+            </a:pPr>
+            <a:r>
+              <a:rPr b="0" lang="en-IN" sz="4000" spc="-1" strike="noStrike">
+                <a:solidFill>
+                  <a:srgbClr val="000000"/>
+                </a:solidFill>
+                <a:latin typeface="Times New Roman"/>
+                <a:ea typeface="Times New Roman"/>
+              </a:rPr>
+              <a:t>Design Constraints</a:t>
+            </a:r>
+            <a:endParaRPr b="0" lang="en-US" sz="4000" spc="-1" strike="noStrike">
+              <a:solidFill>
+                <a:srgbClr val="000000"/>
+              </a:solidFill>
+              <a:latin typeface="Arial"/>
+            </a:endParaRPr>
+          </a:p>
+          <a:p>
+            <a:pPr marL="216000" indent="-216000" algn="just">
+              <a:lnSpc>
+                <a:spcPct val="115000"/>
+              </a:lnSpc>
+              <a:buClr>
+                <a:srgbClr val="000000"/>
+              </a:buClr>
+              <a:buFont typeface="Symbol" charset="2"/>
+              <a:buChar char=""/>
+            </a:pPr>
+            <a:r>
+              <a:rPr b="0" lang="en-IN" sz="4000" spc="-1" strike="noStrike">
+                <a:solidFill>
+                  <a:srgbClr val="000000"/>
+                </a:solidFill>
+                <a:latin typeface="Times New Roman"/>
+                <a:ea typeface="Times New Roman"/>
+              </a:rPr>
+              <a:t>System design- Architecture design</a:t>
+            </a:r>
+            <a:endParaRPr b="0" lang="en-US" sz="4000" spc="-1" strike="noStrike">
+              <a:solidFill>
+                <a:srgbClr val="000000"/>
+              </a:solidFill>
+              <a:latin typeface="Arial"/>
+            </a:endParaRPr>
+          </a:p>
+          <a:p>
+            <a:pPr marL="216000" indent="-216000" algn="just">
+              <a:lnSpc>
+                <a:spcPct val="115000"/>
+              </a:lnSpc>
+              <a:buClr>
+                <a:srgbClr val="000000"/>
+              </a:buClr>
+              <a:buFont typeface="Symbol" charset="2"/>
+              <a:buChar char=""/>
+            </a:pPr>
+            <a:r>
+              <a:rPr b="0" lang="en-IN" sz="4000" spc="-1" strike="noStrike">
+                <a:solidFill>
+                  <a:srgbClr val="000000"/>
+                </a:solidFill>
+                <a:latin typeface="Times New Roman"/>
+                <a:ea typeface="Times New Roman"/>
+              </a:rPr>
+              <a:t>Detailed Design- Class Diagram, Use Case diagram, sequence diagram, activity diagram and DFD (level-0 to level-2) </a:t>
+            </a:r>
+            <a:endParaRPr b="0" lang="en-US" sz="4000" spc="-1" strike="noStrike">
+              <a:solidFill>
+                <a:srgbClr val="000000"/>
+              </a:solidFill>
+              <a:latin typeface="Arial"/>
+            </a:endParaRPr>
+          </a:p>
+          <a:p>
+            <a:pPr marL="216000" indent="-216000" algn="just">
+              <a:lnSpc>
+                <a:spcPct val="115000"/>
+              </a:lnSpc>
+              <a:buClr>
+                <a:srgbClr val="000000"/>
+              </a:buClr>
+              <a:buFont typeface="Symbol" charset="2"/>
+              <a:buChar char=""/>
+            </a:pPr>
+            <a:r>
+              <a:rPr b="0" lang="en-IN" sz="4000" spc="-1" strike="noStrike">
+                <a:solidFill>
+                  <a:srgbClr val="000000"/>
+                </a:solidFill>
+                <a:latin typeface="Times New Roman"/>
+                <a:ea typeface="Times New Roman"/>
+              </a:rPr>
+              <a:t>Work progress</a:t>
+            </a:r>
+            <a:endParaRPr b="0" lang="en-US" sz="4000" spc="-1" strike="noStrike">
+              <a:solidFill>
+                <a:srgbClr val="000000"/>
+              </a:solidFill>
+              <a:latin typeface="Arial"/>
+            </a:endParaRPr>
+          </a:p>
+          <a:p>
+            <a:pPr marL="216000" indent="-216000" algn="just">
+              <a:lnSpc>
+                <a:spcPct val="115000"/>
+              </a:lnSpc>
+              <a:buClr>
+                <a:srgbClr val="000000"/>
+              </a:buClr>
+              <a:buFont typeface="Symbol" charset="2"/>
+              <a:buChar char=""/>
+            </a:pPr>
+            <a:r>
+              <a:rPr b="0" lang="en-IN" sz="4000" spc="-1" strike="noStrike">
+                <a:solidFill>
+                  <a:srgbClr val="000000"/>
+                </a:solidFill>
+                <a:latin typeface="Times New Roman"/>
+                <a:ea typeface="Times New Roman"/>
+              </a:rPr>
+              <a:t>References</a:t>
+            </a:r>
+            <a:endParaRPr b="0" lang="en-US" sz="4000" spc="-1" strike="noStrike">
+              <a:solidFill>
+                <a:srgbClr val="000000"/>
+              </a:solidFill>
+              <a:latin typeface="Arial"/>
+            </a:endParaRPr>
+          </a:p>
+        </p:txBody>
+      </p:sp>
+      <p:sp>
+        <p:nvSpPr>
+          <p:cNvPr id="40" name="Google Shape;48;p2"/>
+          <p:cNvSpPr/>
+          <p:nvPr/>
+        </p:nvSpPr>
+        <p:spPr>
+          <a:xfrm>
+            <a:off x="5040000" y="971640"/>
+            <a:ext cx="9068760" cy="637560"/>
+          </a:xfrm>
+          <a:prstGeom prst="rect">
+            <a:avLst/>
+          </a:prstGeom>
+          <a:noFill/>
+          <a:ln w="0">
+            <a:noFill/>
+          </a:ln>
+        </p:spPr>
+        <p:style>
+          <a:lnRef idx="0"/>
+          <a:fillRef idx="0"/>
+          <a:effectRef idx="0"/>
+          <a:fontRef idx="minor"/>
+        </p:style>
+        <p:txBody>
+          <a:bodyPr lIns="0" rIns="0" tIns="0" bIns="0" anchor="ctr">
+            <a:noAutofit/>
+          </a:bodyPr>
+          <a:p>
+            <a:pPr algn="ctr">
+              <a:lnSpc>
+                <a:spcPct val="100000"/>
+              </a:lnSpc>
+              <a:tabLst>
+                <a:tab algn="l" pos="0"/>
+              </a:tabLst>
+            </a:pPr>
+            <a:r>
+              <a:rPr b="0" lang="en-IN" sz="4400" spc="-1" strike="noStrike">
+                <a:solidFill>
+                  <a:srgbClr val="000000"/>
+                </a:solidFill>
+                <a:latin typeface="Times New Roman"/>
+                <a:ea typeface="Times New Roman"/>
+              </a:rPr>
+              <a:t>Agenda</a:t>
+            </a:r>
+            <a:endParaRPr b="0" lang="en-US" sz="4400" spc="-1" strike="noStrike">
+              <a:solidFill>
+                <a:srgbClr val="000000"/>
+              </a:solidFill>
+              <a:latin typeface="Arial"/>
+            </a:endParaRPr>
+          </a:p>
+        </p:txBody>
+      </p:sp>
+    </p:spTree>
+  </p:cSld>
+  <mc:AlternateContent>
+    <mc:Choice Requires="p14">
+      <p:transition spd="slow" p14:dur="2000"/>
+    </mc:Choice>
+    <mc:Fallback>
+      <p:transition spd="slow"/>
+    </mc:Fallback>
+  </mc:AlternateContent>
+</p:sld>
+</file>
+
+<file path=ppt/slides/slide20.xml><?xml version="1.0" encoding="utf-8"?>
+<p:sld xmlns:a="http://schemas.openxmlformats.org/drawingml/2006/main" xmlns:p="http://schemas.openxmlformats.org/presentationml/2006/main" xmlns:r="http://schemas.openxmlformats.org/officeDocument/2006/relationships" xmlns:p14="http://schemas.microsoft.com/office/powerpoint/2010/main" xmlns:p15="http://schemas.microsoft.com/office/powerpoint/2012/main" xmlns:mc="http://schemas.openxmlformats.org/markup-compatibility/2006">
+  <p:cSld>
+    <p:spTree>
+      <p:nvGrpSpPr>
+        <p:cNvPr id="1" name=""/>
+        <p:cNvGrpSpPr/>
+        <p:nvPr/>
+      </p:nvGrpSpPr>
+      <p:grpSpPr>
+        <a:xfrm>
+          <a:off x="0" y="0"/>
+          <a:ext cx="0" cy="0"/>
+          <a:chOff x="0" y="0"/>
+          <a:chExt cx="0" cy="0"/>
+        </a:xfrm>
+      </p:grpSpPr>
+      <p:sp>
+        <p:nvSpPr>
+          <p:cNvPr id="114" name="Google Shape;167;p15"/>
+          <p:cNvSpPr/>
+          <p:nvPr/>
+        </p:nvSpPr>
+        <p:spPr>
+          <a:xfrm>
+            <a:off x="2982960" y="712800"/>
+            <a:ext cx="54720" cy="54720"/>
+          </a:xfrm>
+          <a:custGeom>
+            <a:avLst/>
+            <a:gdLst>
+              <a:gd name="textAreaLeft" fmla="*/ 0 w 54720"/>
+              <a:gd name="textAreaRight" fmla="*/ 57240 w 54720"/>
+              <a:gd name="textAreaTop" fmla="*/ 0 h 54720"/>
+              <a:gd name="textAreaBottom" fmla="*/ 57240 h 54720"/>
+            </a:gdLst>
+            <a:ahLst/>
+            <a:rect l="textAreaLeft" t="textAreaTop" r="textAreaRight" b="textAreaBottom"/>
+            <a:pathLst>
+              <a:path w="56514" h="56515">
+                <a:moveTo>
+                  <a:pt x="28145" y="0"/>
+                </a:moveTo>
+                <a:lnTo>
+                  <a:pt x="17201" y="2207"/>
+                </a:lnTo>
+                <a:lnTo>
+                  <a:pt x="8253" y="8227"/>
+                </a:lnTo>
+                <a:lnTo>
+                  <a:pt x="2215" y="17157"/>
+                </a:lnTo>
+                <a:lnTo>
+                  <a:pt x="0" y="28093"/>
+                </a:lnTo>
+                <a:lnTo>
+                  <a:pt x="2215" y="39037"/>
+                </a:lnTo>
+                <a:lnTo>
+                  <a:pt x="8253" y="47985"/>
+                </a:lnTo>
+                <a:lnTo>
+                  <a:pt x="17201" y="54023"/>
+                </a:lnTo>
+                <a:lnTo>
+                  <a:pt x="28145" y="56239"/>
+                </a:lnTo>
+                <a:lnTo>
+                  <a:pt x="39070" y="54023"/>
+                </a:lnTo>
+                <a:lnTo>
+                  <a:pt x="41803" y="52176"/>
+                </a:lnTo>
+                <a:lnTo>
+                  <a:pt x="28145" y="52176"/>
+                </a:lnTo>
+                <a:lnTo>
+                  <a:pt x="18763" y="50280"/>
+                </a:lnTo>
+                <a:lnTo>
+                  <a:pt x="11109" y="45113"/>
+                </a:lnTo>
+                <a:lnTo>
+                  <a:pt x="5952" y="37457"/>
+                </a:lnTo>
+                <a:lnTo>
+                  <a:pt x="4062" y="28093"/>
+                </a:lnTo>
+                <a:lnTo>
+                  <a:pt x="5952" y="18722"/>
+                </a:lnTo>
+                <a:lnTo>
+                  <a:pt x="11109" y="11052"/>
+                </a:lnTo>
+                <a:lnTo>
+                  <a:pt x="18763" y="5870"/>
+                </a:lnTo>
+                <a:lnTo>
+                  <a:pt x="28145" y="3968"/>
+                </a:lnTo>
+                <a:lnTo>
+                  <a:pt x="41684" y="3968"/>
+                </a:lnTo>
+                <a:lnTo>
+                  <a:pt x="39070" y="2207"/>
+                </a:lnTo>
+                <a:lnTo>
+                  <a:pt x="28145" y="0"/>
+                </a:lnTo>
+                <a:close/>
+              </a:path>
+              <a:path w="56514" h="56515">
+                <a:moveTo>
+                  <a:pt x="41684" y="3968"/>
+                </a:moveTo>
+                <a:lnTo>
+                  <a:pt x="28145" y="3968"/>
+                </a:lnTo>
+                <a:lnTo>
+                  <a:pt x="37527" y="5870"/>
+                </a:lnTo>
+                <a:lnTo>
+                  <a:pt x="45181" y="11052"/>
+                </a:lnTo>
+                <a:lnTo>
+                  <a:pt x="50338" y="18722"/>
+                </a:lnTo>
+                <a:lnTo>
+                  <a:pt x="52228" y="28093"/>
+                </a:lnTo>
+                <a:lnTo>
+                  <a:pt x="50338" y="37457"/>
+                </a:lnTo>
+                <a:lnTo>
+                  <a:pt x="45181" y="45113"/>
+                </a:lnTo>
+                <a:lnTo>
+                  <a:pt x="37527" y="50280"/>
+                </a:lnTo>
+                <a:lnTo>
+                  <a:pt x="28145" y="52176"/>
+                </a:lnTo>
+                <a:lnTo>
+                  <a:pt x="41803" y="52176"/>
+                </a:lnTo>
+                <a:lnTo>
+                  <a:pt x="48005" y="47985"/>
+                </a:lnTo>
+                <a:lnTo>
+                  <a:pt x="54036" y="39037"/>
+                </a:lnTo>
+                <a:lnTo>
+                  <a:pt x="56249" y="28093"/>
+                </a:lnTo>
+                <a:lnTo>
+                  <a:pt x="54036" y="17157"/>
+                </a:lnTo>
+                <a:lnTo>
+                  <a:pt x="48005" y="8227"/>
+                </a:lnTo>
+                <a:lnTo>
+                  <a:pt x="41684" y="3968"/>
+                </a:lnTo>
+                <a:close/>
+              </a:path>
+            </a:pathLst>
+          </a:custGeom>
+          <a:solidFill>
+            <a:srgbClr val="231f20"/>
+          </a:solidFill>
+          <a:ln w="0">
+            <a:noFill/>
+          </a:ln>
+        </p:spPr>
+        <p:style>
+          <a:lnRef idx="0"/>
+          <a:fillRef idx="0"/>
+          <a:effectRef idx="0"/>
+          <a:fontRef idx="minor"/>
+        </p:style>
+        <p:txBody>
+          <a:bodyPr lIns="0" rIns="0" tIns="0" bIns="0" anchor="t">
+            <a:noAutofit/>
+          </a:bodyPr>
+          <a:p>
+            <a:pPr>
+              <a:lnSpc>
+                <a:spcPct val="100000"/>
+              </a:lnSpc>
+              <a:tabLst>
+                <a:tab algn="l" pos="0"/>
+              </a:tabLst>
+            </a:pPr>
+            <a:endParaRPr b="0" lang="en-US" sz="1800" spc="-1" strike="noStrike">
+              <a:solidFill>
+                <a:schemeClr val="dk1"/>
+              </a:solidFill>
+              <a:latin typeface="Arial"/>
+              <a:ea typeface="Arial"/>
+            </a:endParaRPr>
+          </a:p>
+        </p:txBody>
+      </p:sp>
+      <p:sp>
+        <p:nvSpPr>
+          <p:cNvPr id="115" name="Google Shape;168;p15"/>
+          <p:cNvSpPr/>
+          <p:nvPr/>
+        </p:nvSpPr>
+        <p:spPr>
+          <a:xfrm>
+            <a:off x="2998800" y="725400"/>
+            <a:ext cx="23040" cy="29160"/>
+          </a:xfrm>
+          <a:custGeom>
+            <a:avLst/>
+            <a:gdLst>
+              <a:gd name="textAreaLeft" fmla="*/ 0 w 23040"/>
+              <a:gd name="textAreaRight" fmla="*/ 25560 w 23040"/>
+              <a:gd name="textAreaTop" fmla="*/ 0 h 29160"/>
+              <a:gd name="textAreaBottom" fmla="*/ 31680 h 29160"/>
+            </a:gdLst>
+            <a:ahLst/>
+            <a:rect l="textAreaLeft" t="textAreaTop" r="textAreaRight" b="textAreaBottom"/>
+            <a:pathLst>
+              <a:path w="25400" h="31750">
+                <a:moveTo>
+                  <a:pt x="11999" y="0"/>
+                </a:moveTo>
+                <a:lnTo>
+                  <a:pt x="0" y="0"/>
+                </a:lnTo>
+                <a:lnTo>
+                  <a:pt x="0" y="31423"/>
+                </a:lnTo>
+                <a:lnTo>
+                  <a:pt x="5675" y="31423"/>
+                </a:lnTo>
+                <a:lnTo>
+                  <a:pt x="5675" y="18292"/>
+                </a:lnTo>
+                <a:lnTo>
+                  <a:pt x="16472" y="18292"/>
+                </a:lnTo>
+                <a:lnTo>
+                  <a:pt x="15633" y="17570"/>
+                </a:lnTo>
+                <a:lnTo>
+                  <a:pt x="21266" y="14669"/>
+                </a:lnTo>
+                <a:lnTo>
+                  <a:pt x="21701" y="13277"/>
+                </a:lnTo>
+                <a:lnTo>
+                  <a:pt x="5675" y="13277"/>
+                </a:lnTo>
+                <a:lnTo>
+                  <a:pt x="5675" y="5329"/>
+                </a:lnTo>
+                <a:lnTo>
+                  <a:pt x="22239" y="5329"/>
+                </a:lnTo>
+                <a:lnTo>
+                  <a:pt x="21884" y="3863"/>
+                </a:lnTo>
+                <a:lnTo>
+                  <a:pt x="18564" y="848"/>
+                </a:lnTo>
+                <a:lnTo>
+                  <a:pt x="11999" y="0"/>
+                </a:lnTo>
+                <a:close/>
+              </a:path>
+              <a:path w="25400" h="31750">
+                <a:moveTo>
+                  <a:pt x="16472" y="18292"/>
+                </a:moveTo>
+                <a:lnTo>
+                  <a:pt x="6837" y="18292"/>
+                </a:lnTo>
+                <a:lnTo>
+                  <a:pt x="9727" y="18680"/>
+                </a:lnTo>
+                <a:lnTo>
+                  <a:pt x="11465" y="19999"/>
+                </a:lnTo>
+                <a:lnTo>
+                  <a:pt x="14470" y="24596"/>
+                </a:lnTo>
+                <a:lnTo>
+                  <a:pt x="18564" y="31423"/>
+                </a:lnTo>
+                <a:lnTo>
+                  <a:pt x="25402" y="31423"/>
+                </a:lnTo>
+                <a:lnTo>
+                  <a:pt x="21967" y="25318"/>
+                </a:lnTo>
+                <a:lnTo>
+                  <a:pt x="18721" y="20229"/>
+                </a:lnTo>
+                <a:lnTo>
+                  <a:pt x="16472" y="18292"/>
+                </a:lnTo>
+                <a:close/>
+              </a:path>
+              <a:path w="25400" h="31750">
+                <a:moveTo>
+                  <a:pt x="22239" y="5329"/>
+                </a:moveTo>
+                <a:lnTo>
+                  <a:pt x="10156" y="5329"/>
+                </a:lnTo>
+                <a:lnTo>
+                  <a:pt x="14324" y="5444"/>
+                </a:lnTo>
+                <a:lnTo>
+                  <a:pt x="16449" y="6638"/>
+                </a:lnTo>
+                <a:lnTo>
+                  <a:pt x="17224" y="9224"/>
+                </a:lnTo>
+                <a:lnTo>
+                  <a:pt x="16638" y="11580"/>
+                </a:lnTo>
+                <a:lnTo>
+                  <a:pt x="15057" y="12889"/>
+                </a:lnTo>
+                <a:lnTo>
+                  <a:pt x="9926" y="13277"/>
+                </a:lnTo>
+                <a:lnTo>
+                  <a:pt x="21701" y="13277"/>
+                </a:lnTo>
+                <a:lnTo>
+                  <a:pt x="23088" y="8837"/>
+                </a:lnTo>
+                <a:lnTo>
+                  <a:pt x="22239" y="5329"/>
+                </a:lnTo>
+                <a:close/>
+              </a:path>
+            </a:pathLst>
+          </a:custGeom>
+          <a:solidFill>
+            <a:srgbClr val="231f20"/>
+          </a:solidFill>
+          <a:ln w="0">
+            <a:noFill/>
+          </a:ln>
+        </p:spPr>
+        <p:style>
+          <a:lnRef idx="0"/>
+          <a:fillRef idx="0"/>
+          <a:effectRef idx="0"/>
+          <a:fontRef idx="minor"/>
+        </p:style>
+        <p:txBody>
+          <a:bodyPr lIns="0" rIns="0" tIns="0" bIns="0" anchor="t">
+            <a:noAutofit/>
+          </a:bodyPr>
+          <a:p>
+            <a:pPr>
+              <a:lnSpc>
+                <a:spcPct val="100000"/>
+              </a:lnSpc>
+              <a:tabLst>
+                <a:tab algn="l" pos="0"/>
+              </a:tabLst>
+            </a:pPr>
+            <a:endParaRPr b="0" lang="en-US" sz="1800" spc="-1" strike="noStrike">
+              <a:solidFill>
+                <a:schemeClr val="dk1"/>
+              </a:solidFill>
+              <a:latin typeface="Arial"/>
+              <a:ea typeface="Arial"/>
+            </a:endParaRPr>
+          </a:p>
+        </p:txBody>
+      </p:sp>
+      <p:sp>
+        <p:nvSpPr>
+          <p:cNvPr id="116" name="PlaceHolder 1"/>
+          <p:cNvSpPr>
+            <a:spLocks noGrp="1"/>
+          </p:cNvSpPr>
+          <p:nvPr>
+            <p:ph type="sldNum" idx="22"/>
+          </p:nvPr>
+        </p:nvSpPr>
+        <p:spPr>
+          <a:xfrm>
+            <a:off x="18627840" y="10253160"/>
+            <a:ext cx="1202760" cy="861840"/>
+          </a:xfrm>
+          <a:prstGeom prst="rect">
+            <a:avLst/>
+          </a:prstGeom>
+          <a:noFill/>
+          <a:ln w="0">
+            <a:noFill/>
+          </a:ln>
+        </p:spPr>
+        <p:txBody>
+          <a:bodyPr lIns="91440" rIns="91440" tIns="91440" bIns="91440" anchor="ctr">
+            <a:normAutofit/>
+          </a:bodyPr>
+          <a:lstStyle>
+            <a:lvl1pPr indent="0" algn="r">
+              <a:lnSpc>
+                <a:spcPct val="100000"/>
+              </a:lnSpc>
+              <a:buNone/>
+              <a:tabLst>
+                <a:tab algn="l" pos="0"/>
+              </a:tabLst>
+              <a:defRPr b="0" lang="en-IN" sz="2200" spc="-1" strike="noStrike">
+                <a:solidFill>
+                  <a:schemeClr val="dk2"/>
+                </a:solidFill>
+                <a:latin typeface="Arial"/>
+                <a:ea typeface="Arial"/>
+              </a:defRPr>
+            </a:lvl1pPr>
+          </a:lstStyle>
+          <a:p>
+            <a:pPr indent="0" algn="r">
+              <a:lnSpc>
+                <a:spcPct val="100000"/>
+              </a:lnSpc>
+              <a:buNone/>
+              <a:tabLst>
+                <a:tab algn="l" pos="0"/>
+              </a:tabLst>
+            </a:pPr>
+            <a:fld id="{F8927457-6610-402F-8845-34209ABA1ABE}" type="slidenum">
+              <a:rPr b="0" lang="en-IN" sz="2200" spc="-1" strike="noStrike">
+                <a:solidFill>
+                  <a:schemeClr val="dk2"/>
+                </a:solidFill>
+                <a:latin typeface="Arial"/>
+                <a:ea typeface="Arial"/>
+              </a:rPr>
+              <a:t>&lt;number&gt;</a:t>
+            </a:fld>
+            <a:endParaRPr b="0" lang="en-US" sz="2200" spc="-1" strike="noStrike">
+              <a:solidFill>
+                <a:srgbClr val="000000"/>
+              </a:solidFill>
+              <a:latin typeface="Times New Roman"/>
+            </a:endParaRPr>
+          </a:p>
+        </p:txBody>
+      </p:sp>
+      <p:sp>
+        <p:nvSpPr>
+          <p:cNvPr id="117" name="Google Shape;171;p15"/>
           <p:cNvSpPr/>
           <p:nvPr/>
         </p:nvSpPr>
         <p:spPr>
           <a:xfrm>
             <a:off x="905040" y="2229840"/>
-            <a:ext cx="18525960" cy="9079560"/>
+            <a:ext cx="18525240" cy="9079560"/>
           </a:xfrm>
           <a:prstGeom prst="rect">
             <a:avLst/>
@@ -9539,14 +10389,14 @@
       </p:sp>
       <p:sp>
         <p:nvSpPr>
-          <p:cNvPr id="108" name="Google Shape;172;p15"/>
+          <p:cNvPr id="118" name="Google Shape;172;p15"/>
           <p:cNvSpPr/>
           <p:nvPr/>
         </p:nvSpPr>
         <p:spPr>
           <a:xfrm>
             <a:off x="5057640" y="290520"/>
-            <a:ext cx="9069120" cy="637920"/>
+            <a:ext cx="9068400" cy="637200"/>
           </a:xfrm>
           <a:prstGeom prst="rect">
             <a:avLst/>
@@ -9639,841 +10489,6 @@
 </p:sld>
 </file>
 
-<file path=ppt/slides/slide2.xml><?xml version="1.0" encoding="utf-8"?>
-<p:sld xmlns:a="http://schemas.openxmlformats.org/drawingml/2006/main" xmlns:p="http://schemas.openxmlformats.org/presentationml/2006/main" xmlns:r="http://schemas.openxmlformats.org/officeDocument/2006/relationships" xmlns:p14="http://schemas.microsoft.com/office/powerpoint/2010/main" xmlns:p15="http://schemas.microsoft.com/office/powerpoint/2012/main" xmlns:mc="http://schemas.openxmlformats.org/markup-compatibility/2006">
-  <p:cSld>
-    <p:spTree>
-      <p:nvGrpSpPr>
-        <p:cNvPr id="1" name=""/>
-        <p:cNvGrpSpPr/>
-        <p:nvPr/>
-      </p:nvGrpSpPr>
-      <p:grpSpPr>
-        <a:xfrm>
-          <a:off x="0" y="0"/>
-          <a:ext cx="0" cy="0"/>
-          <a:chOff x="0" y="0"/>
-          <a:chExt cx="0" cy="0"/>
-        </a:xfrm>
-      </p:grpSpPr>
-      <p:sp>
-        <p:nvSpPr>
-          <p:cNvPr id="36" name="Google Shape;44;p2"/>
-          <p:cNvSpPr/>
-          <p:nvPr/>
-        </p:nvSpPr>
-        <p:spPr>
-          <a:xfrm>
-            <a:off x="2982960" y="712800"/>
-            <a:ext cx="55440" cy="55440"/>
-          </a:xfrm>
-          <a:custGeom>
-            <a:avLst/>
-            <a:gdLst>
-              <a:gd name="textAreaLeft" fmla="*/ 0 w 55440"/>
-              <a:gd name="textAreaRight" fmla="*/ 57240 w 55440"/>
-              <a:gd name="textAreaTop" fmla="*/ 0 h 55440"/>
-              <a:gd name="textAreaBottom" fmla="*/ 57240 h 55440"/>
-            </a:gdLst>
-            <a:ahLst/>
-            <a:rect l="textAreaLeft" t="textAreaTop" r="textAreaRight" b="textAreaBottom"/>
-            <a:pathLst>
-              <a:path w="56514" h="56515">
-                <a:moveTo>
-                  <a:pt x="28145" y="0"/>
-                </a:moveTo>
-                <a:lnTo>
-                  <a:pt x="17201" y="2207"/>
-                </a:lnTo>
-                <a:lnTo>
-                  <a:pt x="8253" y="8227"/>
-                </a:lnTo>
-                <a:lnTo>
-                  <a:pt x="2215" y="17157"/>
-                </a:lnTo>
-                <a:lnTo>
-                  <a:pt x="0" y="28093"/>
-                </a:lnTo>
-                <a:lnTo>
-                  <a:pt x="2215" y="39037"/>
-                </a:lnTo>
-                <a:lnTo>
-                  <a:pt x="8253" y="47985"/>
-                </a:lnTo>
-                <a:lnTo>
-                  <a:pt x="17201" y="54023"/>
-                </a:lnTo>
-                <a:lnTo>
-                  <a:pt x="28145" y="56239"/>
-                </a:lnTo>
-                <a:lnTo>
-                  <a:pt x="39070" y="54023"/>
-                </a:lnTo>
-                <a:lnTo>
-                  <a:pt x="41803" y="52176"/>
-                </a:lnTo>
-                <a:lnTo>
-                  <a:pt x="28145" y="52176"/>
-                </a:lnTo>
-                <a:lnTo>
-                  <a:pt x="18763" y="50280"/>
-                </a:lnTo>
-                <a:lnTo>
-                  <a:pt x="11109" y="45113"/>
-                </a:lnTo>
-                <a:lnTo>
-                  <a:pt x="5952" y="37457"/>
-                </a:lnTo>
-                <a:lnTo>
-                  <a:pt x="4062" y="28093"/>
-                </a:lnTo>
-                <a:lnTo>
-                  <a:pt x="5952" y="18722"/>
-                </a:lnTo>
-                <a:lnTo>
-                  <a:pt x="11109" y="11052"/>
-                </a:lnTo>
-                <a:lnTo>
-                  <a:pt x="18763" y="5870"/>
-                </a:lnTo>
-                <a:lnTo>
-                  <a:pt x="28145" y="3968"/>
-                </a:lnTo>
-                <a:lnTo>
-                  <a:pt x="41684" y="3968"/>
-                </a:lnTo>
-                <a:lnTo>
-                  <a:pt x="39070" y="2207"/>
-                </a:lnTo>
-                <a:lnTo>
-                  <a:pt x="28145" y="0"/>
-                </a:lnTo>
-                <a:close/>
-              </a:path>
-              <a:path w="56514" h="56515">
-                <a:moveTo>
-                  <a:pt x="41684" y="3968"/>
-                </a:moveTo>
-                <a:lnTo>
-                  <a:pt x="28145" y="3968"/>
-                </a:lnTo>
-                <a:lnTo>
-                  <a:pt x="37527" y="5870"/>
-                </a:lnTo>
-                <a:lnTo>
-                  <a:pt x="45181" y="11052"/>
-                </a:lnTo>
-                <a:lnTo>
-                  <a:pt x="50338" y="18722"/>
-                </a:lnTo>
-                <a:lnTo>
-                  <a:pt x="52228" y="28093"/>
-                </a:lnTo>
-                <a:lnTo>
-                  <a:pt x="50338" y="37457"/>
-                </a:lnTo>
-                <a:lnTo>
-                  <a:pt x="45181" y="45113"/>
-                </a:lnTo>
-                <a:lnTo>
-                  <a:pt x="37527" y="50280"/>
-                </a:lnTo>
-                <a:lnTo>
-                  <a:pt x="28145" y="52176"/>
-                </a:lnTo>
-                <a:lnTo>
-                  <a:pt x="41803" y="52176"/>
-                </a:lnTo>
-                <a:lnTo>
-                  <a:pt x="48005" y="47985"/>
-                </a:lnTo>
-                <a:lnTo>
-                  <a:pt x="54036" y="39037"/>
-                </a:lnTo>
-                <a:lnTo>
-                  <a:pt x="56249" y="28093"/>
-                </a:lnTo>
-                <a:lnTo>
-                  <a:pt x="54036" y="17157"/>
-                </a:lnTo>
-                <a:lnTo>
-                  <a:pt x="48005" y="8227"/>
-                </a:lnTo>
-                <a:lnTo>
-                  <a:pt x="41684" y="3968"/>
-                </a:lnTo>
-                <a:close/>
-              </a:path>
-            </a:pathLst>
-          </a:custGeom>
-          <a:solidFill>
-            <a:srgbClr val="231f20"/>
-          </a:solidFill>
-          <a:ln w="0">
-            <a:noFill/>
-          </a:ln>
-        </p:spPr>
-        <p:style>
-          <a:lnRef idx="0"/>
-          <a:fillRef idx="0"/>
-          <a:effectRef idx="0"/>
-          <a:fontRef idx="minor"/>
-        </p:style>
-        <p:txBody>
-          <a:bodyPr lIns="0" rIns="0" tIns="0" bIns="0" anchor="t">
-            <a:noAutofit/>
-          </a:bodyPr>
-          <a:p>
-            <a:pPr>
-              <a:lnSpc>
-                <a:spcPct val="100000"/>
-              </a:lnSpc>
-              <a:tabLst>
-                <a:tab algn="l" pos="0"/>
-              </a:tabLst>
-            </a:pPr>
-            <a:endParaRPr b="0" lang="en-US" sz="1800" spc="-1" strike="noStrike">
-              <a:solidFill>
-                <a:schemeClr val="dk1"/>
-              </a:solidFill>
-              <a:latin typeface="Arial"/>
-              <a:ea typeface="Arial"/>
-            </a:endParaRPr>
-          </a:p>
-        </p:txBody>
-      </p:sp>
-      <p:sp>
-        <p:nvSpPr>
-          <p:cNvPr id="37" name="Google Shape;45;p2"/>
-          <p:cNvSpPr/>
-          <p:nvPr/>
-        </p:nvSpPr>
-        <p:spPr>
-          <a:xfrm>
-            <a:off x="2998800" y="725400"/>
-            <a:ext cx="23760" cy="29880"/>
-          </a:xfrm>
-          <a:custGeom>
-            <a:avLst/>
-            <a:gdLst>
-              <a:gd name="textAreaLeft" fmla="*/ 0 w 23760"/>
-              <a:gd name="textAreaRight" fmla="*/ 25560 w 23760"/>
-              <a:gd name="textAreaTop" fmla="*/ 0 h 29880"/>
-              <a:gd name="textAreaBottom" fmla="*/ 31680 h 29880"/>
-            </a:gdLst>
-            <a:ahLst/>
-            <a:rect l="textAreaLeft" t="textAreaTop" r="textAreaRight" b="textAreaBottom"/>
-            <a:pathLst>
-              <a:path w="25400" h="31750">
-                <a:moveTo>
-                  <a:pt x="11999" y="0"/>
-                </a:moveTo>
-                <a:lnTo>
-                  <a:pt x="0" y="0"/>
-                </a:lnTo>
-                <a:lnTo>
-                  <a:pt x="0" y="31423"/>
-                </a:lnTo>
-                <a:lnTo>
-                  <a:pt x="5675" y="31423"/>
-                </a:lnTo>
-                <a:lnTo>
-                  <a:pt x="5675" y="18292"/>
-                </a:lnTo>
-                <a:lnTo>
-                  <a:pt x="16472" y="18292"/>
-                </a:lnTo>
-                <a:lnTo>
-                  <a:pt x="15633" y="17570"/>
-                </a:lnTo>
-                <a:lnTo>
-                  <a:pt x="21266" y="14669"/>
-                </a:lnTo>
-                <a:lnTo>
-                  <a:pt x="21701" y="13277"/>
-                </a:lnTo>
-                <a:lnTo>
-                  <a:pt x="5675" y="13277"/>
-                </a:lnTo>
-                <a:lnTo>
-                  <a:pt x="5675" y="5329"/>
-                </a:lnTo>
-                <a:lnTo>
-                  <a:pt x="22239" y="5329"/>
-                </a:lnTo>
-                <a:lnTo>
-                  <a:pt x="21884" y="3863"/>
-                </a:lnTo>
-                <a:lnTo>
-                  <a:pt x="18564" y="848"/>
-                </a:lnTo>
-                <a:lnTo>
-                  <a:pt x="11999" y="0"/>
-                </a:lnTo>
-                <a:close/>
-              </a:path>
-              <a:path w="25400" h="31750">
-                <a:moveTo>
-                  <a:pt x="16472" y="18292"/>
-                </a:moveTo>
-                <a:lnTo>
-                  <a:pt x="6837" y="18292"/>
-                </a:lnTo>
-                <a:lnTo>
-                  <a:pt x="9727" y="18680"/>
-                </a:lnTo>
-                <a:lnTo>
-                  <a:pt x="11465" y="19999"/>
-                </a:lnTo>
-                <a:lnTo>
-                  <a:pt x="14470" y="24596"/>
-                </a:lnTo>
-                <a:lnTo>
-                  <a:pt x="18564" y="31423"/>
-                </a:lnTo>
-                <a:lnTo>
-                  <a:pt x="25402" y="31423"/>
-                </a:lnTo>
-                <a:lnTo>
-                  <a:pt x="21967" y="25318"/>
-                </a:lnTo>
-                <a:lnTo>
-                  <a:pt x="18721" y="20229"/>
-                </a:lnTo>
-                <a:lnTo>
-                  <a:pt x="16472" y="18292"/>
-                </a:lnTo>
-                <a:close/>
-              </a:path>
-              <a:path w="25400" h="31750">
-                <a:moveTo>
-                  <a:pt x="22239" y="5329"/>
-                </a:moveTo>
-                <a:lnTo>
-                  <a:pt x="10156" y="5329"/>
-                </a:lnTo>
-                <a:lnTo>
-                  <a:pt x="14324" y="5444"/>
-                </a:lnTo>
-                <a:lnTo>
-                  <a:pt x="16449" y="6638"/>
-                </a:lnTo>
-                <a:lnTo>
-                  <a:pt x="17224" y="9224"/>
-                </a:lnTo>
-                <a:lnTo>
-                  <a:pt x="16638" y="11580"/>
-                </a:lnTo>
-                <a:lnTo>
-                  <a:pt x="15057" y="12889"/>
-                </a:lnTo>
-                <a:lnTo>
-                  <a:pt x="9926" y="13277"/>
-                </a:lnTo>
-                <a:lnTo>
-                  <a:pt x="21701" y="13277"/>
-                </a:lnTo>
-                <a:lnTo>
-                  <a:pt x="23088" y="8837"/>
-                </a:lnTo>
-                <a:lnTo>
-                  <a:pt x="22239" y="5329"/>
-                </a:lnTo>
-                <a:close/>
-              </a:path>
-            </a:pathLst>
-          </a:custGeom>
-          <a:solidFill>
-            <a:srgbClr val="231f20"/>
-          </a:solidFill>
-          <a:ln w="0">
-            <a:noFill/>
-          </a:ln>
-        </p:spPr>
-        <p:style>
-          <a:lnRef idx="0"/>
-          <a:fillRef idx="0"/>
-          <a:effectRef idx="0"/>
-          <a:fontRef idx="minor"/>
-        </p:style>
-        <p:txBody>
-          <a:bodyPr lIns="0" rIns="0" tIns="0" bIns="0" anchor="t">
-            <a:noAutofit/>
-          </a:bodyPr>
-          <a:p>
-            <a:pPr>
-              <a:lnSpc>
-                <a:spcPct val="100000"/>
-              </a:lnSpc>
-              <a:tabLst>
-                <a:tab algn="l" pos="0"/>
-              </a:tabLst>
-            </a:pPr>
-            <a:endParaRPr b="0" lang="en-US" sz="1800" spc="-1" strike="noStrike">
-              <a:solidFill>
-                <a:schemeClr val="dk1"/>
-              </a:solidFill>
-              <a:latin typeface="Arial"/>
-              <a:ea typeface="Arial"/>
-            </a:endParaRPr>
-          </a:p>
-        </p:txBody>
-      </p:sp>
-      <p:sp>
-        <p:nvSpPr>
-          <p:cNvPr id="38" name="PlaceHolder 1"/>
-          <p:cNvSpPr>
-            <a:spLocks noGrp="1"/>
-          </p:cNvSpPr>
-          <p:nvPr>
-            <p:ph type="sldNum" idx="11"/>
-          </p:nvPr>
-        </p:nvSpPr>
-        <p:spPr>
-          <a:xfrm>
-            <a:off x="18627840" y="10253160"/>
-            <a:ext cx="1203480" cy="862560"/>
-          </a:xfrm>
-          <a:prstGeom prst="rect">
-            <a:avLst/>
-          </a:prstGeom>
-          <a:noFill/>
-          <a:ln w="0">
-            <a:noFill/>
-          </a:ln>
-        </p:spPr>
-        <p:txBody>
-          <a:bodyPr lIns="91440" rIns="91440" tIns="91440" bIns="91440" anchor="ctr">
-            <a:normAutofit/>
-          </a:bodyPr>
-          <a:lstStyle>
-            <a:lvl1pPr indent="0" algn="r">
-              <a:lnSpc>
-                <a:spcPct val="100000"/>
-              </a:lnSpc>
-              <a:buNone/>
-              <a:tabLst>
-                <a:tab algn="l" pos="0"/>
-              </a:tabLst>
-              <a:defRPr b="0" lang="en-IN" sz="2200" spc="-1" strike="noStrike">
-                <a:solidFill>
-                  <a:schemeClr val="dk2"/>
-                </a:solidFill>
-                <a:latin typeface="Arial"/>
-                <a:ea typeface="Arial"/>
-              </a:defRPr>
-            </a:lvl1pPr>
-          </a:lstStyle>
-          <a:p>
-            <a:pPr indent="0" algn="r">
-              <a:lnSpc>
-                <a:spcPct val="100000"/>
-              </a:lnSpc>
-              <a:buNone/>
-              <a:tabLst>
-                <a:tab algn="l" pos="0"/>
-              </a:tabLst>
-            </a:pPr>
-            <a:fld id="{6277AB44-203E-46BA-AB9D-503C16A6B319}" type="slidenum">
-              <a:rPr b="0" lang="en-IN" sz="2200" spc="-1" strike="noStrike">
-                <a:solidFill>
-                  <a:schemeClr val="dk2"/>
-                </a:solidFill>
-                <a:latin typeface="Arial"/>
-                <a:ea typeface="Arial"/>
-              </a:rPr>
-              <a:t>2</a:t>
-            </a:fld>
-            <a:endParaRPr b="0" lang="en-US" sz="2200" spc="-1" strike="noStrike">
-              <a:solidFill>
-                <a:srgbClr val="000000"/>
-              </a:solidFill>
-              <a:latin typeface="Times New Roman"/>
-            </a:endParaRPr>
-          </a:p>
-        </p:txBody>
-      </p:sp>
-      <p:sp>
-        <p:nvSpPr>
-          <p:cNvPr id="39" name="Google Shape;47;p2"/>
-          <p:cNvSpPr/>
-          <p:nvPr/>
-        </p:nvSpPr>
-        <p:spPr>
-          <a:xfrm>
-            <a:off x="1008000" y="2411280"/>
-            <a:ext cx="18525960" cy="7795800"/>
-          </a:xfrm>
-          <a:prstGeom prst="rect">
-            <a:avLst/>
-          </a:prstGeom>
-          <a:noFill/>
-          <a:ln w="0">
-            <a:noFill/>
-          </a:ln>
-        </p:spPr>
-        <p:style>
-          <a:lnRef idx="0"/>
-          <a:fillRef idx="0"/>
-          <a:effectRef idx="0"/>
-          <a:fontRef idx="minor"/>
-        </p:style>
-        <p:txBody>
-          <a:bodyPr lIns="90000" rIns="90000" tIns="45000" bIns="45000" anchor="t">
-            <a:spAutoFit/>
-          </a:bodyPr>
-          <a:p>
-            <a:pPr marL="216000" indent="-216000" algn="just">
-              <a:lnSpc>
-                <a:spcPct val="115000"/>
-              </a:lnSpc>
-              <a:buClr>
-                <a:srgbClr val="000000"/>
-              </a:buClr>
-              <a:buFont typeface="Noto Sans Symbols"/>
-              <a:buChar char="●"/>
-            </a:pPr>
-            <a:r>
-              <a:rPr b="0" lang="en-IN" sz="4000" spc="-1" strike="noStrike">
-                <a:solidFill>
-                  <a:srgbClr val="000000"/>
-                </a:solidFill>
-                <a:latin typeface="Times New Roman"/>
-                <a:ea typeface="Times New Roman"/>
-              </a:rPr>
-              <a:t>Changes suggested in Phase I and Incorporation  </a:t>
-            </a:r>
-            <a:endParaRPr b="0" lang="en-US" sz="4000" spc="-1" strike="noStrike">
-              <a:solidFill>
-                <a:srgbClr val="000000"/>
-              </a:solidFill>
-              <a:latin typeface="Arial"/>
-            </a:endParaRPr>
-          </a:p>
-          <a:p>
-            <a:pPr marL="216000" indent="-216000" algn="just">
-              <a:lnSpc>
-                <a:spcPct val="115000"/>
-              </a:lnSpc>
-              <a:buClr>
-                <a:srgbClr val="000000"/>
-              </a:buClr>
-              <a:buFont typeface="Noto Sans Symbols"/>
-              <a:buChar char="●"/>
-            </a:pPr>
-            <a:r>
-              <a:rPr b="0" lang="en-IN" sz="4000" spc="-1" strike="noStrike">
-                <a:solidFill>
-                  <a:srgbClr val="000000"/>
-                </a:solidFill>
-                <a:latin typeface="Times New Roman"/>
-                <a:ea typeface="Times New Roman"/>
-              </a:rPr>
-              <a:t>Tools and Technologies Used</a:t>
-            </a:r>
-            <a:endParaRPr b="0" lang="en-US" sz="4000" spc="-1" strike="noStrike">
-              <a:solidFill>
-                <a:srgbClr val="000000"/>
-              </a:solidFill>
-              <a:latin typeface="Arial"/>
-            </a:endParaRPr>
-          </a:p>
-          <a:p>
-            <a:pPr marL="216000" indent="-216000" algn="just">
-              <a:lnSpc>
-                <a:spcPct val="115000"/>
-              </a:lnSpc>
-              <a:buClr>
-                <a:srgbClr val="000000"/>
-              </a:buClr>
-              <a:buFont typeface="Noto Sans Symbols"/>
-              <a:buChar char="●"/>
-            </a:pPr>
-            <a:r>
-              <a:rPr b="0" lang="en-IN" sz="4000" spc="-1" strike="noStrike">
-                <a:solidFill>
-                  <a:srgbClr val="000000"/>
-                </a:solidFill>
-                <a:latin typeface="Times New Roman"/>
-                <a:ea typeface="Times New Roman"/>
-              </a:rPr>
-              <a:t>Hardware and Software Requirements</a:t>
-            </a:r>
-            <a:endParaRPr b="0" lang="en-US" sz="4000" spc="-1" strike="noStrike">
-              <a:solidFill>
-                <a:srgbClr val="000000"/>
-              </a:solidFill>
-              <a:latin typeface="Arial"/>
-            </a:endParaRPr>
-          </a:p>
-          <a:p>
-            <a:pPr marL="216000" indent="-216000" algn="just">
-              <a:lnSpc>
-                <a:spcPct val="115000"/>
-              </a:lnSpc>
-              <a:buClr>
-                <a:srgbClr val="000000"/>
-              </a:buClr>
-              <a:buFont typeface="Noto Sans Symbols"/>
-              <a:buChar char="●"/>
-            </a:pPr>
-            <a:r>
-              <a:rPr b="0" lang="en-IN" sz="4000" spc="-1" strike="noStrike">
-                <a:solidFill>
-                  <a:srgbClr val="000000"/>
-                </a:solidFill>
-                <a:latin typeface="Times New Roman"/>
-                <a:ea typeface="Times New Roman"/>
-              </a:rPr>
-              <a:t>Functional Requirements- Module specification</a:t>
-            </a:r>
-            <a:endParaRPr b="0" lang="en-US" sz="4000" spc="-1" strike="noStrike">
-              <a:solidFill>
-                <a:srgbClr val="000000"/>
-              </a:solidFill>
-              <a:latin typeface="Arial"/>
-            </a:endParaRPr>
-          </a:p>
-          <a:p>
-            <a:pPr marL="216000" indent="-216000" algn="just">
-              <a:lnSpc>
-                <a:spcPct val="115000"/>
-              </a:lnSpc>
-              <a:buClr>
-                <a:srgbClr val="000000"/>
-              </a:buClr>
-              <a:buFont typeface="Noto Sans Symbols"/>
-              <a:buChar char="●"/>
-            </a:pPr>
-            <a:r>
-              <a:rPr b="0" lang="en-IN" sz="4000" spc="-1" strike="noStrike">
-                <a:solidFill>
-                  <a:srgbClr val="000000"/>
-                </a:solidFill>
-                <a:latin typeface="Times New Roman"/>
-                <a:ea typeface="Times New Roman"/>
-              </a:rPr>
-              <a:t>Non-functional Requirements</a:t>
-            </a:r>
-            <a:endParaRPr b="0" lang="en-US" sz="4000" spc="-1" strike="noStrike">
-              <a:solidFill>
-                <a:srgbClr val="000000"/>
-              </a:solidFill>
-              <a:latin typeface="Arial"/>
-            </a:endParaRPr>
-          </a:p>
-          <a:p>
-            <a:pPr marL="216000" indent="-216000" algn="just">
-              <a:lnSpc>
-                <a:spcPct val="115000"/>
-              </a:lnSpc>
-              <a:buClr>
-                <a:srgbClr val="000000"/>
-              </a:buClr>
-              <a:buFont typeface="Noto Sans Symbols"/>
-              <a:buChar char="●"/>
-            </a:pPr>
-            <a:r>
-              <a:rPr b="0" lang="en-IN" sz="4000" spc="-1" strike="noStrike">
-                <a:solidFill>
-                  <a:srgbClr val="000000"/>
-                </a:solidFill>
-                <a:latin typeface="Times New Roman"/>
-                <a:ea typeface="Times New Roman"/>
-              </a:rPr>
-              <a:t>Design Constraints</a:t>
-            </a:r>
-            <a:endParaRPr b="0" lang="en-US" sz="4000" spc="-1" strike="noStrike">
-              <a:solidFill>
-                <a:srgbClr val="000000"/>
-              </a:solidFill>
-              <a:latin typeface="Arial"/>
-            </a:endParaRPr>
-          </a:p>
-          <a:p>
-            <a:pPr marL="216000" indent="-216000" algn="just">
-              <a:lnSpc>
-                <a:spcPct val="115000"/>
-              </a:lnSpc>
-              <a:buClr>
-                <a:srgbClr val="000000"/>
-              </a:buClr>
-              <a:buFont typeface="Noto Sans Symbols"/>
-              <a:buChar char="●"/>
-            </a:pPr>
-            <a:r>
-              <a:rPr b="0" lang="en-IN" sz="4000" spc="-1" strike="noStrike">
-                <a:solidFill>
-                  <a:srgbClr val="000000"/>
-                </a:solidFill>
-                <a:latin typeface="Times New Roman"/>
-                <a:ea typeface="Times New Roman"/>
-              </a:rPr>
-              <a:t>System design- Architecture design</a:t>
-            </a:r>
-            <a:endParaRPr b="0" lang="en-US" sz="4000" spc="-1" strike="noStrike">
-              <a:solidFill>
-                <a:srgbClr val="000000"/>
-              </a:solidFill>
-              <a:latin typeface="Arial"/>
-            </a:endParaRPr>
-          </a:p>
-          <a:p>
-            <a:pPr marL="216000" indent="-216000" algn="just">
-              <a:lnSpc>
-                <a:spcPct val="115000"/>
-              </a:lnSpc>
-              <a:buClr>
-                <a:srgbClr val="000000"/>
-              </a:buClr>
-              <a:buFont typeface="Noto Sans Symbols"/>
-              <a:buChar char="●"/>
-            </a:pPr>
-            <a:r>
-              <a:rPr b="0" lang="en-IN" sz="4000" spc="-1" strike="noStrike">
-                <a:solidFill>
-                  <a:srgbClr val="000000"/>
-                </a:solidFill>
-                <a:latin typeface="Times New Roman"/>
-                <a:ea typeface="Times New Roman"/>
-              </a:rPr>
-              <a:t>Detailed Design- Class Diagram, Use Case diagram, sequence diagram, activity diagram and DFD (level-0 to level-2) </a:t>
-            </a:r>
-            <a:endParaRPr b="0" lang="en-US" sz="4000" spc="-1" strike="noStrike">
-              <a:solidFill>
-                <a:srgbClr val="000000"/>
-              </a:solidFill>
-              <a:latin typeface="Arial"/>
-            </a:endParaRPr>
-          </a:p>
-          <a:p>
-            <a:pPr marL="216000" indent="-216000" algn="just">
-              <a:lnSpc>
-                <a:spcPct val="115000"/>
-              </a:lnSpc>
-              <a:buClr>
-                <a:srgbClr val="000000"/>
-              </a:buClr>
-              <a:buFont typeface="Noto Sans Symbols"/>
-              <a:buChar char="●"/>
-            </a:pPr>
-            <a:r>
-              <a:rPr b="0" lang="en-IN" sz="4000" spc="-1" strike="noStrike">
-                <a:solidFill>
-                  <a:srgbClr val="000000"/>
-                </a:solidFill>
-                <a:latin typeface="Times New Roman"/>
-                <a:ea typeface="Times New Roman"/>
-              </a:rPr>
-              <a:t>Work progress</a:t>
-            </a:r>
-            <a:endParaRPr b="0" lang="en-US" sz="4000" spc="-1" strike="noStrike">
-              <a:solidFill>
-                <a:srgbClr val="000000"/>
-              </a:solidFill>
-              <a:latin typeface="Arial"/>
-            </a:endParaRPr>
-          </a:p>
-          <a:p>
-            <a:pPr marL="216000" indent="-216000" algn="just">
-              <a:lnSpc>
-                <a:spcPct val="115000"/>
-              </a:lnSpc>
-              <a:buClr>
-                <a:srgbClr val="000000"/>
-              </a:buClr>
-              <a:buFont typeface="Noto Sans Symbols"/>
-              <a:buChar char="●"/>
-            </a:pPr>
-            <a:r>
-              <a:rPr b="0" lang="en-IN" sz="4000" spc="-1" strike="noStrike">
-                <a:solidFill>
-                  <a:srgbClr val="000000"/>
-                </a:solidFill>
-                <a:latin typeface="Times New Roman"/>
-                <a:ea typeface="Times New Roman"/>
-              </a:rPr>
-              <a:t>References</a:t>
-            </a:r>
-            <a:endParaRPr b="0" lang="en-US" sz="4000" spc="-1" strike="noStrike">
-              <a:solidFill>
-                <a:srgbClr val="000000"/>
-              </a:solidFill>
-              <a:latin typeface="Arial"/>
-            </a:endParaRPr>
-          </a:p>
-        </p:txBody>
-      </p:sp>
-      <p:sp>
-        <p:nvSpPr>
-          <p:cNvPr id="40" name="Google Shape;48;p2"/>
-          <p:cNvSpPr/>
-          <p:nvPr/>
-        </p:nvSpPr>
-        <p:spPr>
-          <a:xfrm>
-            <a:off x="5040000" y="971640"/>
-            <a:ext cx="9069480" cy="638280"/>
-          </a:xfrm>
-          <a:prstGeom prst="rect">
-            <a:avLst/>
-          </a:prstGeom>
-          <a:noFill/>
-          <a:ln w="0">
-            <a:noFill/>
-          </a:ln>
-        </p:spPr>
-        <p:style>
-          <a:lnRef idx="0"/>
-          <a:fillRef idx="0"/>
-          <a:effectRef idx="0"/>
-          <a:fontRef idx="minor"/>
-        </p:style>
-        <p:txBody>
-          <a:bodyPr lIns="0" rIns="0" tIns="0" bIns="0" anchor="ctr">
-            <a:noAutofit/>
-          </a:bodyPr>
-          <a:p>
-            <a:pPr algn="ctr">
-              <a:lnSpc>
-                <a:spcPct val="100000"/>
-              </a:lnSpc>
-              <a:tabLst>
-                <a:tab algn="l" pos="0"/>
-              </a:tabLst>
-            </a:pPr>
-            <a:r>
-              <a:rPr b="0" lang="en-IN" sz="4400" spc="-1" strike="noStrike">
-                <a:solidFill>
-                  <a:srgbClr val="000000"/>
-                </a:solidFill>
-                <a:latin typeface="Times New Roman"/>
-                <a:ea typeface="Times New Roman"/>
-              </a:rPr>
-              <a:t>Agenda</a:t>
-            </a:r>
-            <a:endParaRPr b="0" lang="en-US" sz="4400" spc="-1" strike="noStrike">
-              <a:solidFill>
-                <a:srgbClr val="000000"/>
-              </a:solidFill>
-              <a:latin typeface="Arial"/>
-            </a:endParaRPr>
-          </a:p>
-        </p:txBody>
-      </p:sp>
-    </p:spTree>
-  </p:cSld>
-  <mc:AlternateContent>
-    <mc:Choice Requires="p14">
-      <p:transition spd="slow" p14:dur="2000"/>
-    </mc:Choice>
-    <mc:Fallback>
-      <p:transition spd="slow"/>
-    </mc:Fallback>
-  </mc:AlternateContent>
-</p:sld>
-</file>
-
 <file path=ppt/slides/slide3.xml><?xml version="1.0" encoding="utf-8"?>
 <p:sld xmlns:a="http://schemas.openxmlformats.org/drawingml/2006/main" xmlns:p="http://schemas.openxmlformats.org/presentationml/2006/main" xmlns:r="http://schemas.openxmlformats.org/officeDocument/2006/relationships" xmlns:p14="http://schemas.microsoft.com/office/powerpoint/2010/main" xmlns:p15="http://schemas.microsoft.com/office/powerpoint/2012/main" xmlns:mc="http://schemas.openxmlformats.org/markup-compatibility/2006">
   <p:cSld>
@@ -10500,15 +10515,15 @@
         <p:spPr>
           <a:xfrm>
             <a:off x="2982960" y="712800"/>
-            <a:ext cx="55440" cy="55440"/>
+            <a:ext cx="54720" cy="54720"/>
           </a:xfrm>
           <a:custGeom>
             <a:avLst/>
             <a:gdLst>
-              <a:gd name="textAreaLeft" fmla="*/ 0 w 55440"/>
-              <a:gd name="textAreaRight" fmla="*/ 57240 w 55440"/>
-              <a:gd name="textAreaTop" fmla="*/ 0 h 55440"/>
-              <a:gd name="textAreaBottom" fmla="*/ 57240 h 55440"/>
+              <a:gd name="textAreaLeft" fmla="*/ 0 w 54720"/>
+              <a:gd name="textAreaRight" fmla="*/ 57240 w 54720"/>
+              <a:gd name="textAreaTop" fmla="*/ 0 h 54720"/>
+              <a:gd name="textAreaBottom" fmla="*/ 57240 h 54720"/>
             </a:gdLst>
             <a:ahLst/>
             <a:rect l="textAreaLeft" t="textAreaTop" r="textAreaRight" b="textAreaBottom"/>
@@ -10686,15 +10701,15 @@
         <p:spPr>
           <a:xfrm>
             <a:off x="2998800" y="725400"/>
-            <a:ext cx="23760" cy="29880"/>
+            <a:ext cx="23040" cy="29160"/>
           </a:xfrm>
           <a:custGeom>
             <a:avLst/>
             <a:gdLst>
-              <a:gd name="textAreaLeft" fmla="*/ 0 w 23760"/>
-              <a:gd name="textAreaRight" fmla="*/ 25560 w 23760"/>
-              <a:gd name="textAreaTop" fmla="*/ 0 h 29880"/>
-              <a:gd name="textAreaBottom" fmla="*/ 31680 h 29880"/>
+              <a:gd name="textAreaLeft" fmla="*/ 0 w 23040"/>
+              <a:gd name="textAreaRight" fmla="*/ 25560 w 23040"/>
+              <a:gd name="textAreaTop" fmla="*/ 0 h 29160"/>
+              <a:gd name="textAreaBottom" fmla="*/ 31680 h 29160"/>
             </a:gdLst>
             <a:ahLst/>
             <a:rect l="textAreaLeft" t="textAreaTop" r="textAreaRight" b="textAreaBottom"/>
@@ -10867,7 +10882,7 @@
         <p:spPr>
           <a:xfrm>
             <a:off x="18627840" y="10253160"/>
-            <a:ext cx="1203480" cy="862560"/>
+            <a:ext cx="1202760" cy="861840"/>
           </a:xfrm>
           <a:prstGeom prst="rect">
             <a:avLst/>
@@ -10909,7 +10924,7 @@
                 <a:tab algn="l" pos="0"/>
               </a:tabLst>
             </a:pPr>
-            <a:fld id="{4ADA46FD-5D47-410D-A33F-B834D5B52679}" type="slidenum">
+            <a:fld id="{68A98609-5ADF-448C-8FCE-0B24C6B4F835}" type="slidenum">
               <a:rPr b="0" lang="en-IN" sz="2200" spc="-1" strike="noStrike">
                 <a:solidFill>
                   <a:schemeClr val="dk2"/>
@@ -10917,7 +10932,7 @@
                 <a:latin typeface="Arial"/>
                 <a:ea typeface="Arial"/>
               </a:rPr>
-              <a:t>3</a:t>
+              <a:t>&lt;number&gt;</a:t>
             </a:fld>
             <a:endParaRPr b="0" lang="en-US" sz="2200" spc="-1" strike="noStrike">
               <a:solidFill>
@@ -10937,7 +10952,7 @@
         <p:spPr>
           <a:xfrm>
             <a:off x="995400" y="2149560"/>
-            <a:ext cx="18525960" cy="6122520"/>
+            <a:ext cx="18525240" cy="6122520"/>
           </a:xfrm>
           <a:prstGeom prst="rect">
             <a:avLst/>
@@ -11132,7 +11147,7 @@
         <p:spPr>
           <a:xfrm>
             <a:off x="5057640" y="290520"/>
-            <a:ext cx="9069120" cy="637920"/>
+            <a:ext cx="9068400" cy="637200"/>
           </a:xfrm>
           <a:prstGeom prst="rect">
             <a:avLst/>
@@ -11219,15 +11234,15 @@
         <p:spPr>
           <a:xfrm>
             <a:off x="2982960" y="712800"/>
-            <a:ext cx="55440" cy="55440"/>
+            <a:ext cx="54720" cy="54720"/>
           </a:xfrm>
           <a:custGeom>
             <a:avLst/>
             <a:gdLst>
-              <a:gd name="textAreaLeft" fmla="*/ 0 w 55440"/>
-              <a:gd name="textAreaRight" fmla="*/ 57240 w 55440"/>
-              <a:gd name="textAreaTop" fmla="*/ 0 h 55440"/>
-              <a:gd name="textAreaBottom" fmla="*/ 57240 h 55440"/>
+              <a:gd name="textAreaLeft" fmla="*/ 0 w 54720"/>
+              <a:gd name="textAreaRight" fmla="*/ 57240 w 54720"/>
+              <a:gd name="textAreaTop" fmla="*/ 0 h 54720"/>
+              <a:gd name="textAreaBottom" fmla="*/ 57240 h 54720"/>
             </a:gdLst>
             <a:ahLst/>
             <a:rect l="textAreaLeft" t="textAreaTop" r="textAreaRight" b="textAreaBottom"/>
@@ -11405,15 +11420,15 @@
         <p:spPr>
           <a:xfrm>
             <a:off x="2998800" y="725400"/>
-            <a:ext cx="23760" cy="29880"/>
+            <a:ext cx="23040" cy="29160"/>
           </a:xfrm>
           <a:custGeom>
             <a:avLst/>
             <a:gdLst>
-              <a:gd name="textAreaLeft" fmla="*/ 0 w 23760"/>
-              <a:gd name="textAreaRight" fmla="*/ 25560 w 23760"/>
-              <a:gd name="textAreaTop" fmla="*/ 0 h 29880"/>
-              <a:gd name="textAreaBottom" fmla="*/ 31680 h 29880"/>
+              <a:gd name="textAreaLeft" fmla="*/ 0 w 23040"/>
+              <a:gd name="textAreaRight" fmla="*/ 25560 w 23040"/>
+              <a:gd name="textAreaTop" fmla="*/ 0 h 29160"/>
+              <a:gd name="textAreaBottom" fmla="*/ 31680 h 29160"/>
             </a:gdLst>
             <a:ahLst/>
             <a:rect l="textAreaLeft" t="textAreaTop" r="textAreaRight" b="textAreaBottom"/>
@@ -11586,7 +11601,7 @@
         <p:spPr>
           <a:xfrm>
             <a:off x="18627840" y="10253160"/>
-            <a:ext cx="1203480" cy="862560"/>
+            <a:ext cx="1202760" cy="861840"/>
           </a:xfrm>
           <a:prstGeom prst="rect">
             <a:avLst/>
@@ -11628,7 +11643,7 @@
                 <a:tab algn="l" pos="0"/>
               </a:tabLst>
             </a:pPr>
-            <a:fld id="{018A3EDE-5371-4C1F-A299-F916942699BE}" type="slidenum">
+            <a:fld id="{F74733EB-6735-47F1-9858-F39D7D14F9C3}" type="slidenum">
               <a:rPr b="0" lang="en-IN" sz="2200" spc="-1" strike="noStrike">
                 <a:solidFill>
                   <a:schemeClr val="dk2"/>
@@ -11636,7 +11651,7 @@
                 <a:latin typeface="Arial"/>
                 <a:ea typeface="Arial"/>
               </a:rPr>
-              <a:t>4</a:t>
+              <a:t>&lt;number&gt;</a:t>
             </a:fld>
             <a:endParaRPr b="0" lang="en-US" sz="2200" spc="-1" strike="noStrike">
               <a:solidFill>
@@ -11656,7 +11671,7 @@
         <p:spPr>
           <a:xfrm>
             <a:off x="5057640" y="290520"/>
-            <a:ext cx="9069120" cy="637920"/>
+            <a:ext cx="9068400" cy="637200"/>
           </a:xfrm>
           <a:prstGeom prst="rect">
             <a:avLst/>
@@ -11743,7 +11758,7 @@
                           <a:solidFill>
                             <a:schemeClr val="lt1"/>
                           </a:solidFill>
-                          <a:latin typeface="Times New Roman"/>
+                          <a:latin typeface="times new roman"/>
                           <a:ea typeface="Times New Roman"/>
                         </a:rPr>
                         <a:t>Sl No</a:t>
@@ -11805,7 +11820,7 @@
                           <a:solidFill>
                             <a:schemeClr val="lt1"/>
                           </a:solidFill>
-                          <a:latin typeface="Times New Roman"/>
+                          <a:latin typeface="times new roman"/>
                           <a:ea typeface="Times New Roman"/>
                         </a:rPr>
                         <a:t>  </a:t>
@@ -11815,7 +11830,7 @@
                           <a:solidFill>
                             <a:schemeClr val="lt1"/>
                           </a:solidFill>
-                          <a:latin typeface="Times New Roman"/>
+                          <a:latin typeface="times new roman"/>
                           <a:ea typeface="Times New Roman"/>
                         </a:rPr>
                         <a:t>Particulars  / Details</a:t>
@@ -11877,7 +11892,7 @@
                           <a:solidFill>
                             <a:schemeClr val="lt1"/>
                           </a:solidFill>
-                          <a:latin typeface="Times New Roman"/>
+                          <a:latin typeface="times new roman"/>
                           <a:ea typeface="Times New Roman"/>
                         </a:rPr>
                         <a:t> </a:t>
@@ -11887,7 +11902,7 @@
                           <a:solidFill>
                             <a:schemeClr val="lt1"/>
                           </a:solidFill>
-                          <a:latin typeface="Times New Roman"/>
+                          <a:latin typeface="times new roman"/>
                           <a:ea typeface="Times New Roman"/>
                         </a:rPr>
                         <a:t>Details of Implementation </a:t>
@@ -11967,7 +11982,7 @@
                           <a:solidFill>
                             <a:schemeClr val="dk1"/>
                           </a:solidFill>
-                          <a:latin typeface="Times New Roman"/>
+                          <a:latin typeface="times new roman"/>
                           <a:ea typeface="Times New Roman"/>
                         </a:rPr>
                         <a:t>1</a:t>
@@ -12029,7 +12044,7 @@
                           <a:solidFill>
                             <a:schemeClr val="dk1"/>
                           </a:solidFill>
-                          <a:latin typeface="Times New Roman"/>
+                          <a:latin typeface="times new roman"/>
                           <a:ea typeface="Times New Roman"/>
                         </a:rPr>
                         <a:t> </a:t>
@@ -12039,7 +12054,7 @@
                           <a:solidFill>
                             <a:schemeClr val="dk1"/>
                           </a:solidFill>
-                          <a:latin typeface="Times New Roman"/>
+                          <a:latin typeface="times new roman"/>
                           <a:ea typeface="Times New Roman"/>
                         </a:rPr>
                         <a:t>Course on “ReactJS” </a:t>
@@ -12101,7 +12116,7 @@
                           <a:solidFill>
                             <a:schemeClr val="dk1"/>
                           </a:solidFill>
-                          <a:latin typeface="Times New Roman"/>
+                          <a:latin typeface="times new roman"/>
                           <a:ea typeface="Times New Roman"/>
                         </a:rPr>
                         <a:t>It helps us to design the frontend of the web interface</a:t>
@@ -12162,7 +12177,7 @@
                           <a:solidFill>
                             <a:srgbClr val="000000"/>
                           </a:solidFill>
-                          <a:latin typeface="Times New Roman"/>
+                          <a:latin typeface="times new roman"/>
                         </a:rPr>
                         <a:t>2</a:t>
                       </a:r>
@@ -12220,7 +12235,7 @@
                           <a:solidFill>
                             <a:srgbClr val="000000"/>
                           </a:solidFill>
-                          <a:latin typeface="Times New Roman"/>
+                          <a:latin typeface="times new roman"/>
                         </a:rPr>
                         <a:t>Course on “NodeJS”</a:t>
                       </a:r>
@@ -12278,7 +12293,7 @@
                           <a:solidFill>
                             <a:srgbClr val="000000"/>
                           </a:solidFill>
-                          <a:latin typeface="Times New Roman"/>
+                          <a:latin typeface="times new roman"/>
                         </a:rPr>
                         <a:t>It helps to build the backend of the web application</a:t>
                       </a:r>
@@ -12364,15 +12379,15 @@
         <p:spPr>
           <a:xfrm>
             <a:off x="2982960" y="712800"/>
-            <a:ext cx="55440" cy="55440"/>
+            <a:ext cx="54720" cy="54720"/>
           </a:xfrm>
           <a:custGeom>
             <a:avLst/>
             <a:gdLst>
-              <a:gd name="textAreaLeft" fmla="*/ 0 w 55440"/>
-              <a:gd name="textAreaRight" fmla="*/ 57240 w 55440"/>
-              <a:gd name="textAreaTop" fmla="*/ 0 h 55440"/>
-              <a:gd name="textAreaBottom" fmla="*/ 57240 h 55440"/>
+              <a:gd name="textAreaLeft" fmla="*/ 0 w 54720"/>
+              <a:gd name="textAreaRight" fmla="*/ 57240 w 54720"/>
+              <a:gd name="textAreaTop" fmla="*/ 0 h 54720"/>
+              <a:gd name="textAreaBottom" fmla="*/ 57240 h 54720"/>
             </a:gdLst>
             <a:ahLst/>
             <a:rect l="textAreaLeft" t="textAreaTop" r="textAreaRight" b="textAreaBottom"/>
@@ -12550,15 +12565,15 @@
         <p:spPr>
           <a:xfrm>
             <a:off x="2998800" y="725400"/>
-            <a:ext cx="23760" cy="29880"/>
+            <a:ext cx="23040" cy="29160"/>
           </a:xfrm>
           <a:custGeom>
             <a:avLst/>
             <a:gdLst>
-              <a:gd name="textAreaLeft" fmla="*/ 0 w 23760"/>
-              <a:gd name="textAreaRight" fmla="*/ 25560 w 23760"/>
-              <a:gd name="textAreaTop" fmla="*/ 0 h 29880"/>
-              <a:gd name="textAreaBottom" fmla="*/ 31680 h 29880"/>
+              <a:gd name="textAreaLeft" fmla="*/ 0 w 23040"/>
+              <a:gd name="textAreaRight" fmla="*/ 25560 w 23040"/>
+              <a:gd name="textAreaTop" fmla="*/ 0 h 29160"/>
+              <a:gd name="textAreaBottom" fmla="*/ 31680 h 29160"/>
             </a:gdLst>
             <a:ahLst/>
             <a:rect l="textAreaLeft" t="textAreaTop" r="textAreaRight" b="textAreaBottom"/>
@@ -12731,7 +12746,7 @@
         <p:spPr>
           <a:xfrm>
             <a:off x="18627840" y="10253160"/>
-            <a:ext cx="1203480" cy="862560"/>
+            <a:ext cx="1202760" cy="861840"/>
           </a:xfrm>
           <a:prstGeom prst="rect">
             <a:avLst/>
@@ -12773,7 +12788,7 @@
                 <a:tab algn="l" pos="0"/>
               </a:tabLst>
             </a:pPr>
-            <a:fld id="{C17D3A9D-CED7-4795-87B0-4A5B4EAD6C01}" type="slidenum">
+            <a:fld id="{6A66C83C-2D2D-45F0-990B-4426A067F085}" type="slidenum">
               <a:rPr b="0" lang="en-IN" sz="2200" spc="-1" strike="noStrike">
                 <a:solidFill>
                   <a:schemeClr val="dk2"/>
@@ -12781,7 +12796,7 @@
                 <a:latin typeface="Arial"/>
                 <a:ea typeface="Arial"/>
               </a:rPr>
-              <a:t>5</a:t>
+              <a:t>&lt;number&gt;</a:t>
             </a:fld>
             <a:endParaRPr b="0" lang="en-US" sz="2200" spc="-1" strike="noStrike">
               <a:solidFill>
@@ -12801,7 +12816,7 @@
         <p:spPr>
           <a:xfrm>
             <a:off x="5057640" y="290520"/>
-            <a:ext cx="9069120" cy="637920"/>
+            <a:ext cx="9068400" cy="637200"/>
           </a:xfrm>
           <a:prstGeom prst="rect">
             <a:avLst/>
@@ -12857,7 +12872,7 @@
         </p:nvGraphicFramePr>
         <p:xfrm>
           <a:off x="986040" y="2026440"/>
-          <a:ext cx="16458480" cy="3918960"/>
+          <a:ext cx="16458480" cy="2826000"/>
         </p:xfrm>
         <a:graphic>
           <a:graphicData uri="http://schemas.openxmlformats.org/drawingml/2006/table">
@@ -14924,15 +14939,15 @@
         <p:spPr>
           <a:xfrm>
             <a:off x="2982960" y="712800"/>
-            <a:ext cx="55440" cy="55440"/>
+            <a:ext cx="54720" cy="54720"/>
           </a:xfrm>
           <a:custGeom>
             <a:avLst/>
             <a:gdLst>
-              <a:gd name="textAreaLeft" fmla="*/ 0 w 55440"/>
-              <a:gd name="textAreaRight" fmla="*/ 57240 w 55440"/>
-              <a:gd name="textAreaTop" fmla="*/ 0 h 55440"/>
-              <a:gd name="textAreaBottom" fmla="*/ 57240 h 55440"/>
+              <a:gd name="textAreaLeft" fmla="*/ 0 w 54720"/>
+              <a:gd name="textAreaRight" fmla="*/ 57240 w 54720"/>
+              <a:gd name="textAreaTop" fmla="*/ 0 h 54720"/>
+              <a:gd name="textAreaBottom" fmla="*/ 57240 h 54720"/>
             </a:gdLst>
             <a:ahLst/>
             <a:rect l="textAreaLeft" t="textAreaTop" r="textAreaRight" b="textAreaBottom"/>
@@ -15110,15 +15125,15 @@
         <p:spPr>
           <a:xfrm>
             <a:off x="2998800" y="725400"/>
-            <a:ext cx="23760" cy="29880"/>
+            <a:ext cx="23040" cy="29160"/>
           </a:xfrm>
           <a:custGeom>
             <a:avLst/>
             <a:gdLst>
-              <a:gd name="textAreaLeft" fmla="*/ 0 w 23760"/>
-              <a:gd name="textAreaRight" fmla="*/ 25560 w 23760"/>
-              <a:gd name="textAreaTop" fmla="*/ 0 h 29880"/>
-              <a:gd name="textAreaBottom" fmla="*/ 31680 h 29880"/>
+              <a:gd name="textAreaLeft" fmla="*/ 0 w 23040"/>
+              <a:gd name="textAreaRight" fmla="*/ 25560 w 23040"/>
+              <a:gd name="textAreaTop" fmla="*/ 0 h 29160"/>
+              <a:gd name="textAreaBottom" fmla="*/ 31680 h 29160"/>
             </a:gdLst>
             <a:ahLst/>
             <a:rect l="textAreaLeft" t="textAreaTop" r="textAreaRight" b="textAreaBottom"/>
@@ -15291,7 +15306,7 @@
         <p:spPr>
           <a:xfrm>
             <a:off x="18627840" y="10253160"/>
-            <a:ext cx="1203480" cy="862560"/>
+            <a:ext cx="1202760" cy="861840"/>
           </a:xfrm>
           <a:prstGeom prst="rect">
             <a:avLst/>
@@ -15333,7 +15348,7 @@
                 <a:tab algn="l" pos="0"/>
               </a:tabLst>
             </a:pPr>
-            <a:fld id="{D3B93913-971E-42F0-836D-84DCB221511E}" type="slidenum">
+            <a:fld id="{605AD9BF-B46B-47C9-B64C-94C7283D5C82}" type="slidenum">
               <a:rPr b="0" lang="en-IN" sz="2200" spc="-1" strike="noStrike">
                 <a:solidFill>
                   <a:schemeClr val="dk2"/>
@@ -15341,7 +15356,7 @@
                 <a:latin typeface="Arial"/>
                 <a:ea typeface="Arial"/>
               </a:rPr>
-              <a:t>6</a:t>
+              <a:t>&lt;number&gt;</a:t>
             </a:fld>
             <a:endParaRPr b="0" lang="en-US" sz="2200" spc="-1" strike="noStrike">
               <a:solidFill>
@@ -15361,7 +15376,7 @@
         <p:spPr>
           <a:xfrm>
             <a:off x="995400" y="2378160"/>
-            <a:ext cx="18525960" cy="6175080"/>
+            <a:ext cx="18525240" cy="6940440"/>
           </a:xfrm>
           <a:prstGeom prst="rect">
             <a:avLst/>
@@ -15387,31 +15402,30 @@
                 <a:spcPct val="100000"/>
               </a:lnSpc>
               <a:spcBef>
-                <a:spcPts val="1474"/>
+                <a:spcPts val="1757"/>
               </a:spcBef>
               <a:spcAft>
-                <a:spcPts val="1276"/>
+                <a:spcPts val="1559"/>
               </a:spcAft>
               <a:tabLst>
                 <a:tab algn="l" pos="0"/>
               </a:tabLst>
             </a:pPr>
             <a:r>
-              <a:rPr b="0" lang="en-US" sz="2400" spc="-1" strike="noStrike">
+              <a:rPr b="0" lang="en-US" sz="3200" spc="-1" strike="noStrike">
                 <a:solidFill>
                   <a:srgbClr val="000000"/>
                 </a:solidFill>
-                <a:latin typeface="Times New Roman"/>
+                <a:latin typeface="times new roman"/>
                 <a:ea typeface="Arial"/>
               </a:rPr>
               <a:t>ESP32 + LoRa enables low-power, long-range wireless communication for field-deployed sensor nodes.</a:t>
             </a:r>
-            <a:endParaRPr b="0" lang="en-US" sz="2400" spc="-1" strike="noStrike">
+            <a:endParaRPr b="0" lang="en-US" sz="3200" spc="-1" strike="noStrike">
               <a:solidFill>
                 <a:srgbClr val="000000"/>
               </a:solidFill>
               <a:latin typeface="Arial"/>
-              <a:ea typeface="Noto Sans CJK SC"/>
             </a:endParaRPr>
           </a:p>
           <a:p>
@@ -15420,31 +15434,30 @@
                 <a:spcPct val="100000"/>
               </a:lnSpc>
               <a:spcBef>
-                <a:spcPts val="1474"/>
+                <a:spcPts val="1757"/>
               </a:spcBef>
               <a:spcAft>
-                <a:spcPts val="1276"/>
+                <a:spcPts val="1559"/>
               </a:spcAft>
               <a:tabLst>
                 <a:tab algn="l" pos="0"/>
               </a:tabLst>
             </a:pPr>
             <a:r>
-              <a:rPr b="0" lang="en-US" sz="2400" spc="-1" strike="noStrike">
+              <a:rPr b="0" lang="en-US" sz="3200" spc="-1" strike="noStrike">
                 <a:solidFill>
                   <a:srgbClr val="000000"/>
                 </a:solidFill>
-                <a:latin typeface="Times New Roman"/>
+                <a:latin typeface="times new roman"/>
                 <a:ea typeface="Arial"/>
               </a:rPr>
               <a:t>MQTT ensures efficient, real-time data transfer between devices and the backend with minimal bandwidth.</a:t>
             </a:r>
-            <a:endParaRPr b="0" lang="en-US" sz="2400" spc="-1" strike="noStrike">
+            <a:endParaRPr b="0" lang="en-US" sz="3200" spc="-1" strike="noStrike">
               <a:solidFill>
                 <a:srgbClr val="000000"/>
               </a:solidFill>
               <a:latin typeface="Arial"/>
-              <a:ea typeface="Noto Sans CJK SC"/>
             </a:endParaRPr>
           </a:p>
           <a:p>
@@ -15453,31 +15466,30 @@
                 <a:spcPct val="100000"/>
               </a:lnSpc>
               <a:spcBef>
-                <a:spcPts val="1474"/>
+                <a:spcPts val="1757"/>
               </a:spcBef>
               <a:spcAft>
-                <a:spcPts val="1276"/>
+                <a:spcPts val="1559"/>
               </a:spcAft>
               <a:tabLst>
                 <a:tab algn="l" pos="0"/>
               </a:tabLst>
             </a:pPr>
             <a:r>
-              <a:rPr b="0" lang="en-US" sz="2400" spc="-1" strike="noStrike">
+              <a:rPr b="0" lang="en-US" sz="3200" spc="-1" strike="noStrike">
                 <a:solidFill>
                   <a:srgbClr val="000000"/>
                 </a:solidFill>
-                <a:latin typeface="Times New Roman"/>
+                <a:latin typeface="times new roman"/>
                 <a:ea typeface="Arial"/>
               </a:rPr>
               <a:t>PostgreSQL provides reliable storage, advanced geospatial queries, and robust data integrity for sensor logs.</a:t>
             </a:r>
-            <a:endParaRPr b="0" lang="en-US" sz="2400" spc="-1" strike="noStrike">
+            <a:endParaRPr b="0" lang="en-US" sz="3200" spc="-1" strike="noStrike">
               <a:solidFill>
                 <a:srgbClr val="000000"/>
               </a:solidFill>
               <a:latin typeface="Arial"/>
-              <a:ea typeface="Noto Sans CJK SC"/>
             </a:endParaRPr>
           </a:p>
           <a:p>
@@ -15486,31 +15498,30 @@
                 <a:spcPct val="100000"/>
               </a:lnSpc>
               <a:spcBef>
-                <a:spcPts val="1474"/>
+                <a:spcPts val="1757"/>
               </a:spcBef>
               <a:spcAft>
-                <a:spcPts val="1276"/>
+                <a:spcPts val="1559"/>
               </a:spcAft>
               <a:tabLst>
                 <a:tab algn="l" pos="0"/>
               </a:tabLst>
             </a:pPr>
             <a:r>
-              <a:rPr b="0" lang="en-US" sz="2400" spc="-1" strike="noStrike">
+              <a:rPr b="0" lang="en-US" sz="3200" spc="-1" strike="noStrike">
                 <a:solidFill>
                   <a:srgbClr val="000000"/>
                 </a:solidFill>
-                <a:latin typeface="Times New Roman"/>
+                <a:latin typeface="times new roman"/>
                 <a:ea typeface="Arial"/>
               </a:rPr>
               <a:t>Next.js delivers a fast, modern web dashboard with server-side rendering and seamless user experience.</a:t>
             </a:r>
-            <a:endParaRPr b="0" lang="en-US" sz="2400" spc="-1" strike="noStrike">
+            <a:endParaRPr b="0" lang="en-US" sz="3200" spc="-1" strike="noStrike">
               <a:solidFill>
                 <a:srgbClr val="000000"/>
               </a:solidFill>
               <a:latin typeface="Arial"/>
-              <a:ea typeface="Noto Sans CJK SC"/>
             </a:endParaRPr>
           </a:p>
           <a:p>
@@ -15519,31 +15530,30 @@
                 <a:spcPct val="100000"/>
               </a:lnSpc>
               <a:spcBef>
-                <a:spcPts val="1474"/>
+                <a:spcPts val="1757"/>
               </a:spcBef>
               <a:spcAft>
-                <a:spcPts val="1276"/>
+                <a:spcPts val="1559"/>
               </a:spcAft>
               <a:tabLst>
                 <a:tab algn="l" pos="0"/>
               </a:tabLst>
             </a:pPr>
             <a:r>
-              <a:rPr b="0" lang="en-US" sz="2400" spc="-1" strike="noStrike">
+              <a:rPr b="0" lang="en-US" sz="3200" spc="-1" strike="noStrike">
                 <a:solidFill>
                   <a:srgbClr val="000000"/>
                 </a:solidFill>
-                <a:latin typeface="Times New Roman"/>
+                <a:latin typeface="times new roman"/>
                 <a:ea typeface="Arial"/>
               </a:rPr>
               <a:t>Python allows flexible backend scripting for data processing, alert logic, and easy future enhancements.</a:t>
             </a:r>
-            <a:endParaRPr b="0" lang="en-US" sz="2400" spc="-1" strike="noStrike">
+            <a:endParaRPr b="0" lang="en-US" sz="3200" spc="-1" strike="noStrike">
               <a:solidFill>
                 <a:srgbClr val="000000"/>
               </a:solidFill>
               <a:latin typeface="Arial"/>
-              <a:ea typeface="Noto Sans CJK SC"/>
             </a:endParaRPr>
           </a:p>
           <a:p>
@@ -15552,31 +15562,30 @@
                 <a:spcPct val="100000"/>
               </a:lnSpc>
               <a:spcBef>
-                <a:spcPts val="1474"/>
+                <a:spcPts val="1757"/>
               </a:spcBef>
               <a:spcAft>
-                <a:spcPts val="1276"/>
+                <a:spcPts val="1559"/>
               </a:spcAft>
               <a:tabLst>
                 <a:tab algn="l" pos="0"/>
               </a:tabLst>
             </a:pPr>
             <a:r>
-              <a:rPr b="0" lang="en-US" sz="2400" spc="-1" strike="noStrike">
+              <a:rPr b="0" lang="en-US" sz="3200" spc="-1" strike="noStrike">
                 <a:solidFill>
                   <a:srgbClr val="000000"/>
                 </a:solidFill>
-                <a:latin typeface="Times New Roman"/>
+                <a:latin typeface="times new roman"/>
                 <a:ea typeface="Arial"/>
               </a:rPr>
               <a:t>Leaflet.js integrates interactive maps for live location tracking and visualization of all field nodes.</a:t>
             </a:r>
-            <a:endParaRPr b="0" lang="en-US" sz="2400" spc="-1" strike="noStrike">
+            <a:endParaRPr b="0" lang="en-US" sz="3200" spc="-1" strike="noStrike">
               <a:solidFill>
                 <a:srgbClr val="000000"/>
               </a:solidFill>
               <a:latin typeface="Arial"/>
-              <a:ea typeface="Noto Sans CJK SC"/>
             </a:endParaRPr>
           </a:p>
           <a:p>
@@ -15585,31 +15594,30 @@
                 <a:spcPct val="100000"/>
               </a:lnSpc>
               <a:spcBef>
-                <a:spcPts val="1474"/>
+                <a:spcPts val="1757"/>
               </a:spcBef>
               <a:spcAft>
-                <a:spcPts val="1276"/>
+                <a:spcPts val="1559"/>
               </a:spcAft>
               <a:tabLst>
                 <a:tab algn="l" pos="0"/>
               </a:tabLst>
             </a:pPr>
             <a:r>
-              <a:rPr b="0" lang="en-US" sz="2400" spc="-1" strike="noStrike">
+              <a:rPr b="0" lang="en-US" sz="3200" spc="-1" strike="noStrike">
                 <a:solidFill>
                   <a:srgbClr val="000000"/>
                 </a:solidFill>
-                <a:latin typeface="Times New Roman"/>
+                <a:latin typeface="times new roman"/>
                 <a:ea typeface="Arial"/>
               </a:rPr>
-              <a:t>Bootstrap ensures the dashboard is mobile-friendly and accessible to users with varying digital skills.</a:t>
+              <a:t>Arduino IDE simplifies firmware development and rapid prototyping for ESP32-based sensor nodes.</a:t>
             </a:r>
-            <a:endParaRPr b="0" lang="en-US" sz="2400" spc="-1" strike="noStrike">
+            <a:endParaRPr b="0" lang="en-US" sz="3200" spc="-1" strike="noStrike">
               <a:solidFill>
                 <a:srgbClr val="000000"/>
               </a:solidFill>
               <a:latin typeface="Arial"/>
-              <a:ea typeface="Noto Sans CJK SC"/>
             </a:endParaRPr>
           </a:p>
           <a:p>
@@ -15618,54 +15626,20 @@
                 <a:spcPct val="100000"/>
               </a:lnSpc>
               <a:spcBef>
-                <a:spcPts val="1474"/>
+                <a:spcPts val="1757"/>
               </a:spcBef>
               <a:spcAft>
-                <a:spcPts val="1276"/>
+                <a:spcPts val="1559"/>
               </a:spcAft>
               <a:tabLst>
                 <a:tab algn="l" pos="0"/>
               </a:tabLst>
             </a:pPr>
-            <a:r>
-              <a:rPr b="0" lang="en-US" sz="2400" spc="-1" strike="noStrike">
-                <a:solidFill>
-                  <a:srgbClr val="000000"/>
-                </a:solidFill>
-                <a:latin typeface="Times New Roman"/>
-                <a:ea typeface="Arial"/>
-              </a:rPr>
-              <a:t>Arduino IDE simplifies firmware development and rapid prototyping for ESP32-based sensor nodes.</a:t>
-            </a:r>
-            <a:endParaRPr b="0" lang="en-US" sz="2400" spc="-1" strike="noStrike">
+            <a:endParaRPr b="0" lang="en-US" sz="3200" spc="-1" strike="noStrike">
               <a:solidFill>
                 <a:srgbClr val="000000"/>
               </a:solidFill>
               <a:latin typeface="Arial"/>
-              <a:ea typeface="Noto Sans CJK SC"/>
-            </a:endParaRPr>
-          </a:p>
-          <a:p>
-            <a:pPr>
-              <a:lnSpc>
-                <a:spcPct val="100000"/>
-              </a:lnSpc>
-              <a:spcBef>
-                <a:spcPts val="1474"/>
-              </a:spcBef>
-              <a:spcAft>
-                <a:spcPts val="1276"/>
-              </a:spcAft>
-              <a:tabLst>
-                <a:tab algn="l" pos="0"/>
-              </a:tabLst>
-            </a:pPr>
-            <a:endParaRPr b="0" lang="en-US" sz="2400" spc="-1" strike="noStrike">
-              <a:solidFill>
-                <a:srgbClr val="000000"/>
-              </a:solidFill>
-              <a:latin typeface="Arial"/>
-              <a:ea typeface="Noto Sans CJK SC"/>
             </a:endParaRPr>
           </a:p>
         </p:txBody>
@@ -15679,7 +15653,7 @@
         <p:spPr>
           <a:xfrm>
             <a:off x="5057640" y="290520"/>
-            <a:ext cx="9069120" cy="637920"/>
+            <a:ext cx="9068400" cy="637200"/>
           </a:xfrm>
           <a:prstGeom prst="rect">
             <a:avLst/>
@@ -15736,7 +15710,7 @@
         <p:spPr>
           <a:xfrm>
             <a:off x="1025280" y="6143400"/>
-            <a:ext cx="18525960" cy="455400"/>
+            <a:ext cx="18525240" cy="455400"/>
           </a:xfrm>
           <a:prstGeom prst="rect">
             <a:avLst/>
@@ -15829,15 +15803,15 @@
         <p:spPr>
           <a:xfrm>
             <a:off x="2982960" y="712800"/>
-            <a:ext cx="55440" cy="55440"/>
+            <a:ext cx="54720" cy="54720"/>
           </a:xfrm>
           <a:custGeom>
             <a:avLst/>
             <a:gdLst>
-              <a:gd name="textAreaLeft" fmla="*/ 0 w 55440"/>
-              <a:gd name="textAreaRight" fmla="*/ 57240 w 55440"/>
-              <a:gd name="textAreaTop" fmla="*/ 0 h 55440"/>
-              <a:gd name="textAreaBottom" fmla="*/ 57240 h 55440"/>
+              <a:gd name="textAreaLeft" fmla="*/ 0 w 54720"/>
+              <a:gd name="textAreaRight" fmla="*/ 57240 w 54720"/>
+              <a:gd name="textAreaTop" fmla="*/ 0 h 54720"/>
+              <a:gd name="textAreaBottom" fmla="*/ 57240 h 54720"/>
             </a:gdLst>
             <a:ahLst/>
             <a:rect l="textAreaLeft" t="textAreaTop" r="textAreaRight" b="textAreaBottom"/>
@@ -16015,15 +15989,15 @@
         <p:spPr>
           <a:xfrm>
             <a:off x="2998800" y="725400"/>
-            <a:ext cx="23760" cy="29880"/>
+            <a:ext cx="23040" cy="29160"/>
           </a:xfrm>
           <a:custGeom>
             <a:avLst/>
             <a:gdLst>
-              <a:gd name="textAreaLeft" fmla="*/ 0 w 23760"/>
-              <a:gd name="textAreaRight" fmla="*/ 25560 w 23760"/>
-              <a:gd name="textAreaTop" fmla="*/ 0 h 29880"/>
-              <a:gd name="textAreaBottom" fmla="*/ 31680 h 29880"/>
+              <a:gd name="textAreaLeft" fmla="*/ 0 w 23040"/>
+              <a:gd name="textAreaRight" fmla="*/ 25560 w 23040"/>
+              <a:gd name="textAreaTop" fmla="*/ 0 h 29160"/>
+              <a:gd name="textAreaBottom" fmla="*/ 31680 h 29160"/>
             </a:gdLst>
             <a:ahLst/>
             <a:rect l="textAreaLeft" t="textAreaTop" r="textAreaRight" b="textAreaBottom"/>
@@ -16196,7 +16170,7 @@
         <p:spPr>
           <a:xfrm>
             <a:off x="18627840" y="10253160"/>
-            <a:ext cx="1203480" cy="862560"/>
+            <a:ext cx="1202760" cy="861840"/>
           </a:xfrm>
           <a:prstGeom prst="rect">
             <a:avLst/>
@@ -16238,7 +16212,7 @@
                 <a:tab algn="l" pos="0"/>
               </a:tabLst>
             </a:pPr>
-            <a:fld id="{2A3B69BD-FDAC-4055-AC56-54A61F4125E3}" type="slidenum">
+            <a:fld id="{7B6F7A13-70F5-42CA-B910-B9E224DE7171}" type="slidenum">
               <a:rPr b="0" lang="en-IN" sz="2200" spc="-1" strike="noStrike">
                 <a:solidFill>
                   <a:schemeClr val="dk2"/>
@@ -16246,7 +16220,7 @@
                 <a:latin typeface="Arial"/>
                 <a:ea typeface="Arial"/>
               </a:rPr>
-              <a:t>6</a:t>
+              <a:t>&lt;number&gt;</a:t>
             </a:fld>
             <a:endParaRPr b="0" lang="en-US" sz="2200" spc="-1" strike="noStrike">
               <a:solidFill>
@@ -16266,7 +16240,7 @@
         <p:spPr>
           <a:xfrm>
             <a:off x="1008000" y="2073240"/>
-            <a:ext cx="18525960" cy="8868600"/>
+            <a:ext cx="18525240" cy="8867880"/>
           </a:xfrm>
           <a:prstGeom prst="rect">
             <a:avLst/>
@@ -16300,7 +16274,7 @@
                 <a:latin typeface="Times New Roman"/>
                 <a:ea typeface="Times New Roman"/>
               </a:rPr>
-              <a:t>Module Name: Real-Time Location Tracking</a:t>
+              <a:t>Module Name:  Location Tracking</a:t>
             </a:r>
             <a:br>
               <a:rPr sz="2400"/>
@@ -16359,7 +16333,6 @@
                 <a:srgbClr val="000000"/>
               </a:solidFill>
               <a:latin typeface="Arial"/>
-              <a:ea typeface="Noto Sans CJK SC"/>
             </a:endParaRPr>
           </a:p>
           <a:p>
@@ -16373,7 +16346,6 @@
                 <a:srgbClr val="000000"/>
               </a:solidFill>
               <a:latin typeface="Arial"/>
-              <a:ea typeface="Noto Sans CJK SC"/>
             </a:endParaRPr>
           </a:p>
           <a:p>
@@ -16449,7 +16421,6 @@
                 <a:srgbClr val="000000"/>
               </a:solidFill>
               <a:latin typeface="Arial"/>
-              <a:ea typeface="Noto Sans CJK SC"/>
             </a:endParaRPr>
           </a:p>
           <a:p>
@@ -16463,7 +16434,6 @@
                 <a:srgbClr val="000000"/>
               </a:solidFill>
               <a:latin typeface="Arial"/>
-              <a:ea typeface="Noto Sans CJK SC"/>
             </a:endParaRPr>
           </a:p>
           <a:p>
@@ -16480,7 +16450,7 @@
                 <a:latin typeface="Times New Roman"/>
                 <a:ea typeface="Times New Roman"/>
               </a:rPr>
-              <a:t>Module Name: Battery/Energy Monitoring</a:t>
+              <a:t>Module Name: Energy Monitoring</a:t>
             </a:r>
             <a:br>
               <a:rPr sz="2400"/>
@@ -16539,7 +16509,6 @@
                 <a:srgbClr val="000000"/>
               </a:solidFill>
               <a:latin typeface="Arial"/>
-              <a:ea typeface="Noto Sans CJK SC"/>
             </a:endParaRPr>
           </a:p>
           <a:p>
@@ -16556,7 +16525,6 @@
                 <a:srgbClr val="000000"/>
               </a:solidFill>
               <a:latin typeface="Arial"/>
-              <a:ea typeface="Noto Sans CJK SC"/>
             </a:endParaRPr>
           </a:p>
           <a:p>
@@ -16632,7 +16600,6 @@
                 <a:srgbClr val="000000"/>
               </a:solidFill>
               <a:latin typeface="Arial"/>
-              <a:ea typeface="Noto Sans CJK SC"/>
             </a:endParaRPr>
           </a:p>
         </p:txBody>
@@ -16646,7 +16613,7 @@
         <p:spPr>
           <a:xfrm>
             <a:off x="5057640" y="290520"/>
-            <a:ext cx="9527760" cy="638280"/>
+            <a:ext cx="9527040" cy="637560"/>
           </a:xfrm>
           <a:prstGeom prst="rect">
             <a:avLst/>
@@ -16733,15 +16700,15 @@
         <p:spPr>
           <a:xfrm>
             <a:off x="2982960" y="712800"/>
-            <a:ext cx="55440" cy="55440"/>
+            <a:ext cx="54720" cy="54720"/>
           </a:xfrm>
           <a:custGeom>
             <a:avLst/>
             <a:gdLst>
-              <a:gd name="textAreaLeft" fmla="*/ 0 w 55440"/>
-              <a:gd name="textAreaRight" fmla="*/ 57240 w 55440"/>
-              <a:gd name="textAreaTop" fmla="*/ 0 h 55440"/>
-              <a:gd name="textAreaBottom" fmla="*/ 57240 h 55440"/>
+              <a:gd name="textAreaLeft" fmla="*/ 0 w 54720"/>
+              <a:gd name="textAreaRight" fmla="*/ 57240 w 54720"/>
+              <a:gd name="textAreaTop" fmla="*/ 0 h 54720"/>
+              <a:gd name="textAreaBottom" fmla="*/ 57240 h 54720"/>
             </a:gdLst>
             <a:ahLst/>
             <a:rect l="textAreaLeft" t="textAreaTop" r="textAreaRight" b="textAreaBottom"/>
@@ -16919,15 +16886,15 @@
         <p:spPr>
           <a:xfrm>
             <a:off x="2998800" y="725400"/>
-            <a:ext cx="23760" cy="29880"/>
+            <a:ext cx="23040" cy="29160"/>
           </a:xfrm>
           <a:custGeom>
             <a:avLst/>
             <a:gdLst>
-              <a:gd name="textAreaLeft" fmla="*/ 0 w 23760"/>
-              <a:gd name="textAreaRight" fmla="*/ 25560 w 23760"/>
-              <a:gd name="textAreaTop" fmla="*/ 0 h 29880"/>
-              <a:gd name="textAreaBottom" fmla="*/ 31680 h 29880"/>
+              <a:gd name="textAreaLeft" fmla="*/ 0 w 23040"/>
+              <a:gd name="textAreaRight" fmla="*/ 25560 w 23040"/>
+              <a:gd name="textAreaTop" fmla="*/ 0 h 29160"/>
+              <a:gd name="textAreaBottom" fmla="*/ 31680 h 29160"/>
             </a:gdLst>
             <a:ahLst/>
             <a:rect l="textAreaLeft" t="textAreaTop" r="textAreaRight" b="textAreaBottom"/>
@@ -17100,7 +17067,7 @@
         <p:spPr>
           <a:xfrm>
             <a:off x="18627840" y="10253160"/>
-            <a:ext cx="1203480" cy="862560"/>
+            <a:ext cx="1202760" cy="861840"/>
           </a:xfrm>
           <a:prstGeom prst="rect">
             <a:avLst/>
@@ -17142,7 +17109,7 @@
                 <a:tab algn="l" pos="0"/>
               </a:tabLst>
             </a:pPr>
-            <a:fld id="{40C2A507-AC0B-41E1-95ED-14A1DD87B90A}" type="slidenum">
+            <a:fld id="{01252E42-59ED-4440-BEF9-3FB6D240A9BD}" type="slidenum">
               <a:rPr b="0" lang="en-IN" sz="2200" spc="-1" strike="noStrike">
                 <a:solidFill>
                   <a:schemeClr val="dk2"/>
@@ -17150,7 +17117,7 @@
                 <a:latin typeface="Arial"/>
                 <a:ea typeface="Arial"/>
               </a:rPr>
-              <a:t>8</a:t>
+              <a:t>&lt;number&gt;</a:t>
             </a:fld>
             <a:endParaRPr b="0" lang="en-US" sz="2200" spc="-1" strike="noStrike">
               <a:solidFill>
@@ -17170,7 +17137,7 @@
         <p:spPr>
           <a:xfrm>
             <a:off x="5057640" y="290520"/>
-            <a:ext cx="10639080" cy="638280"/>
+            <a:ext cx="10638360" cy="637560"/>
           </a:xfrm>
           <a:prstGeom prst="rect">
             <a:avLst/>
@@ -17226,7 +17193,7 @@
         </p:nvGraphicFramePr>
         <p:xfrm>
           <a:off x="1194840" y="2414160"/>
-          <a:ext cx="17214840" cy="2937240"/>
+          <a:ext cx="17214840" cy="2718000"/>
         </p:xfrm>
         <a:graphic>
           <a:graphicData uri="http://schemas.openxmlformats.org/drawingml/2006/table">
@@ -18006,7 +17973,7 @@
         <p:spPr>
           <a:xfrm>
             <a:off x="7523640" y="656280"/>
-            <a:ext cx="5056200" cy="1256760"/>
+            <a:ext cx="5055480" cy="1256040"/>
           </a:xfrm>
           <a:prstGeom prst="rect">
             <a:avLst/>
@@ -18060,7 +18027,7 @@
         </p:nvGraphicFramePr>
         <p:xfrm>
           <a:off x="1577520" y="2368440"/>
-          <a:ext cx="17352720" cy="5740200"/>
+          <a:ext cx="17352720" cy="6698520"/>
         </p:xfrm>
         <a:graphic>
           <a:graphicData uri="http://schemas.openxmlformats.org/drawingml/2006/table">
@@ -18432,6 +18399,11 @@
                       <a:noAutofit/>
                     </a:bodyPr>
                     <a:p>
+                      <a:pPr>
+                        <a:lnSpc>
+                          <a:spcPct val="100000"/>
+                        </a:lnSpc>
+                      </a:pPr>
                       <a:r>
                         <a:rPr b="0" lang="en-IN" sz="2400" spc="-1" strike="noStrike">
                           <a:solidFill>
@@ -18802,6 +18774,11 @@
                       <a:noAutofit/>
                     </a:bodyPr>
                     <a:p>
+                      <a:pPr>
+                        <a:lnSpc>
+                          <a:spcPct val="100000"/>
+                        </a:lnSpc>
+                      </a:pPr>
                       <a:r>
                         <a:rPr b="0" lang="en-US" sz="2400" spc="-1" strike="noStrike">
                           <a:solidFill>
@@ -18973,6 +18950,11 @@
                       <a:noAutofit/>
                     </a:bodyPr>
                     <a:p>
+                      <a:pPr>
+                        <a:lnSpc>
+                          <a:spcPct val="100000"/>
+                        </a:lnSpc>
+                      </a:pPr>
                       <a:r>
                         <a:rPr b="0" lang="en-US" sz="2400" spc="-1" strike="noStrike">
                           <a:solidFill>
@@ -19144,6 +19126,11 @@
                       <a:noAutofit/>
                     </a:bodyPr>
                     <a:p>
+                      <a:pPr>
+                        <a:lnSpc>
+                          <a:spcPct val="100000"/>
+                        </a:lnSpc>
+                      </a:pPr>
                       <a:r>
                         <a:rPr b="0" lang="en-US" sz="2400" spc="-1" strike="noStrike">
                           <a:solidFill>
@@ -19199,6 +19186,11 @@
                       <a:noAutofit/>
                     </a:bodyPr>
                     <a:p>
+                      <a:pPr>
+                        <a:lnSpc>
+                          <a:spcPct val="100000"/>
+                        </a:lnSpc>
+                      </a:pPr>
                       <a:r>
                         <a:rPr b="0" lang="en-US" sz="1800" spc="-1" strike="noStrike">
                           <a:solidFill>
@@ -19252,6 +19244,11 @@
                       <a:noAutofit/>
                     </a:bodyPr>
                     <a:p>
+                      <a:pPr>
+                        <a:lnSpc>
+                          <a:spcPct val="100000"/>
+                        </a:lnSpc>
+                      </a:pPr>
                       <a:r>
                         <a:rPr b="0" lang="en-US" sz="2400" spc="-1" strike="noStrike">
                           <a:solidFill>
@@ -19265,7 +19262,7 @@
                         <a:solidFill>
                           <a:srgbClr val="000000"/>
                         </a:solidFill>
-                        <a:latin typeface="Times new roman"/>
+                        <a:latin typeface="Arial"/>
                       </a:endParaRPr>
                     </a:p>
                   </a:txBody>
@@ -19305,6 +19302,11 @@
                       <a:noAutofit/>
                     </a:bodyPr>
                     <a:p>
+                      <a:pPr>
+                        <a:lnSpc>
+                          <a:spcPct val="100000"/>
+                        </a:lnSpc>
+                      </a:pPr>
                       <a:r>
                         <a:rPr b="0" lang="en-US" sz="2400" spc="-1" strike="noStrike">
                           <a:solidFill>

--- a/Phase II Major Project(1).pptx
+++ b/Phase II Major Project(1).pptx
@@ -363,7 +363,7 @@
             <a:pPr indent="0" algn="r">
               <a:buNone/>
             </a:pPr>
-            <a:fld id="{66B2ABA7-FEC2-4DA0-8CEE-CF57990F2A03}" type="slidenum">
+            <a:fld id="{538975A9-EA23-4664-BE2F-C6EC016C8682}" type="slidenum">
               <a:rPr b="0" lang="en-US" sz="1400" spc="-1" strike="noStrike">
                 <a:solidFill>
                   <a:srgbClr val="000000"/>
@@ -417,7 +417,7 @@
         <p:spPr>
           <a:xfrm>
             <a:off x="6281640" y="847800"/>
-            <a:ext cx="7536600" cy="4237920"/>
+            <a:ext cx="7535520" cy="4236840"/>
           </a:xfrm>
           <a:prstGeom prst="rect">
             <a:avLst/>
@@ -440,7 +440,7 @@
         <p:spPr>
           <a:xfrm>
             <a:off x="2009880" y="5372280"/>
-            <a:ext cx="16080480" cy="5085720"/>
+            <a:ext cx="16079400" cy="5084640"/>
           </a:xfrm>
           <a:prstGeom prst="rect">
             <a:avLst/>
@@ -480,7 +480,7 @@
         <p:spPr>
           <a:xfrm>
             <a:off x="11387160" y="10742760"/>
-            <a:ext cx="8708400" cy="561240"/>
+            <a:ext cx="8707320" cy="560160"/>
           </a:xfrm>
           <a:prstGeom prst="rect">
             <a:avLst/>
@@ -522,7 +522,7 @@
                 <a:tab algn="l" pos="0"/>
               </a:tabLst>
             </a:pPr>
-            <a:fld id="{76F1B5F3-270C-4443-95E4-BF3DD469D627}" type="slidenum">
+            <a:fld id="{2A50F77E-578C-4384-B8D4-FA9E037B3B5D}" type="slidenum">
               <a:rPr b="0" lang="en-IN" sz="1200" spc="-1" strike="noStrike">
                 <a:solidFill>
                   <a:schemeClr val="dk1"/>
@@ -530,7 +530,7 @@
                 <a:latin typeface="Calibri"/>
                 <a:ea typeface="Calibri"/>
               </a:rPr>
-              <a:t>&lt;number&gt;</a:t>
+              <a:t>19</a:t>
             </a:fld>
             <a:endParaRPr b="0" lang="en-US" sz="1200" spc="-1" strike="noStrike">
               <a:solidFill>
@@ -576,7 +576,7 @@
         <p:spPr>
           <a:xfrm>
             <a:off x="6281640" y="847800"/>
-            <a:ext cx="7536600" cy="4237920"/>
+            <a:ext cx="7535520" cy="4236840"/>
           </a:xfrm>
           <a:prstGeom prst="rect">
             <a:avLst/>
@@ -599,7 +599,7 @@
         <p:spPr>
           <a:xfrm>
             <a:off x="2009880" y="5372280"/>
-            <a:ext cx="16080480" cy="5085720"/>
+            <a:ext cx="16079400" cy="5084640"/>
           </a:xfrm>
           <a:prstGeom prst="rect">
             <a:avLst/>
@@ -639,7 +639,7 @@
         <p:spPr>
           <a:xfrm>
             <a:off x="11387160" y="10742760"/>
-            <a:ext cx="8708400" cy="561240"/>
+            <a:ext cx="8707320" cy="560160"/>
           </a:xfrm>
           <a:prstGeom prst="rect">
             <a:avLst/>
@@ -681,7 +681,7 @@
                 <a:tab algn="l" pos="0"/>
               </a:tabLst>
             </a:pPr>
-            <a:fld id="{38F0F453-454B-4D03-B703-1598769C37C4}" type="slidenum">
+            <a:fld id="{D558864C-FCD7-41B5-A1F3-F25253D2ADDC}" type="slidenum">
               <a:rPr b="0" lang="en-IN" sz="1200" spc="-1" strike="noStrike">
                 <a:solidFill>
                   <a:schemeClr val="dk1"/>
@@ -735,7 +735,7 @@
         <p:spPr>
           <a:xfrm>
             <a:off x="6281640" y="847800"/>
-            <a:ext cx="7536600" cy="4237920"/>
+            <a:ext cx="7535520" cy="4236840"/>
           </a:xfrm>
           <a:prstGeom prst="rect">
             <a:avLst/>
@@ -758,7 +758,7 @@
         <p:spPr>
           <a:xfrm>
             <a:off x="2009880" y="5372280"/>
-            <a:ext cx="16080480" cy="5085720"/>
+            <a:ext cx="16079400" cy="5084640"/>
           </a:xfrm>
           <a:prstGeom prst="rect">
             <a:avLst/>
@@ -798,7 +798,7 @@
         <p:spPr>
           <a:xfrm>
             <a:off x="11387160" y="10742760"/>
-            <a:ext cx="8708400" cy="561240"/>
+            <a:ext cx="8707320" cy="560160"/>
           </a:xfrm>
           <a:prstGeom prst="rect">
             <a:avLst/>
@@ -840,7 +840,7 @@
                 <a:tab algn="l" pos="0"/>
               </a:tabLst>
             </a:pPr>
-            <a:fld id="{684F5869-DFC9-4996-8619-F1E17B19843E}" type="slidenum">
+            <a:fld id="{39A82331-4238-4494-A623-EB4459FB47F2}" type="slidenum">
               <a:rPr b="0" lang="en-IN" sz="1200" spc="-1" strike="noStrike">
                 <a:solidFill>
                   <a:schemeClr val="dk1"/>
@@ -894,7 +894,7 @@
         <p:spPr>
           <a:xfrm>
             <a:off x="6281640" y="847800"/>
-            <a:ext cx="7536600" cy="4237920"/>
+            <a:ext cx="7535520" cy="4236840"/>
           </a:xfrm>
           <a:prstGeom prst="rect">
             <a:avLst/>
@@ -917,7 +917,7 @@
         <p:spPr>
           <a:xfrm>
             <a:off x="2009880" y="5372280"/>
-            <a:ext cx="16080480" cy="5085720"/>
+            <a:ext cx="16079400" cy="5084640"/>
           </a:xfrm>
           <a:prstGeom prst="rect">
             <a:avLst/>
@@ -957,7 +957,7 @@
         <p:spPr>
           <a:xfrm>
             <a:off x="11387160" y="10742760"/>
-            <a:ext cx="8708400" cy="561240"/>
+            <a:ext cx="8707320" cy="560160"/>
           </a:xfrm>
           <a:prstGeom prst="rect">
             <a:avLst/>
@@ -999,7 +999,7 @@
                 <a:tab algn="l" pos="0"/>
               </a:tabLst>
             </a:pPr>
-            <a:fld id="{BE023B63-C8CA-4759-95FB-B85CB8104A8C}" type="slidenum">
+            <a:fld id="{D085DCDC-F33B-41FB-B1C8-D6203209A5D8}" type="slidenum">
               <a:rPr b="0" lang="en-IN" sz="1200" spc="-1" strike="noStrike">
                 <a:solidFill>
                   <a:schemeClr val="dk1"/>
@@ -1053,7 +1053,7 @@
         <p:spPr>
           <a:xfrm>
             <a:off x="6281640" y="847800"/>
-            <a:ext cx="7536600" cy="4237920"/>
+            <a:ext cx="7535520" cy="4236840"/>
           </a:xfrm>
           <a:prstGeom prst="rect">
             <a:avLst/>
@@ -1076,7 +1076,7 @@
         <p:spPr>
           <a:xfrm>
             <a:off x="2009880" y="5372280"/>
-            <a:ext cx="16080480" cy="5085720"/>
+            <a:ext cx="16079400" cy="5084640"/>
           </a:xfrm>
           <a:prstGeom prst="rect">
             <a:avLst/>
@@ -1116,7 +1116,7 @@
         <p:spPr>
           <a:xfrm>
             <a:off x="11387160" y="10742760"/>
-            <a:ext cx="8708400" cy="561240"/>
+            <a:ext cx="8707320" cy="560160"/>
           </a:xfrm>
           <a:prstGeom prst="rect">
             <a:avLst/>
@@ -1158,7 +1158,7 @@
                 <a:tab algn="l" pos="0"/>
               </a:tabLst>
             </a:pPr>
-            <a:fld id="{11D8210E-CEAD-4D0D-9E8E-5864ECE0BC09}" type="slidenum">
+            <a:fld id="{EF494AD6-A120-4EB0-9705-70C4C22B58E4}" type="slidenum">
               <a:rPr b="0" lang="en-IN" sz="1200" spc="-1" strike="noStrike">
                 <a:solidFill>
                   <a:schemeClr val="dk1"/>
@@ -1212,7 +1212,7 @@
         <p:spPr>
           <a:xfrm>
             <a:off x="6281640" y="847800"/>
-            <a:ext cx="7536600" cy="4237920"/>
+            <a:ext cx="7535520" cy="4236840"/>
           </a:xfrm>
           <a:prstGeom prst="rect">
             <a:avLst/>
@@ -1235,7 +1235,7 @@
         <p:spPr>
           <a:xfrm>
             <a:off x="2009880" y="5372280"/>
-            <a:ext cx="16080480" cy="5085720"/>
+            <a:ext cx="16079400" cy="5084640"/>
           </a:xfrm>
           <a:prstGeom prst="rect">
             <a:avLst/>
@@ -1275,7 +1275,7 @@
         <p:spPr>
           <a:xfrm>
             <a:off x="11387160" y="10742760"/>
-            <a:ext cx="8708400" cy="561240"/>
+            <a:ext cx="8707320" cy="560160"/>
           </a:xfrm>
           <a:prstGeom prst="rect">
             <a:avLst/>
@@ -1317,7 +1317,7 @@
                 <a:tab algn="l" pos="0"/>
               </a:tabLst>
             </a:pPr>
-            <a:fld id="{CD4149B4-BAEF-4399-89FD-0E744B4AF55B}" type="slidenum">
+            <a:fld id="{642825EE-104F-4384-844B-674795ABAB40}" type="slidenum">
               <a:rPr b="0" lang="en-IN" sz="1200" spc="-1" strike="noStrike">
                 <a:solidFill>
                   <a:schemeClr val="dk1"/>
@@ -1371,7 +1371,7 @@
         <p:spPr>
           <a:xfrm>
             <a:off x="6281640" y="847800"/>
-            <a:ext cx="7536600" cy="4237920"/>
+            <a:ext cx="7535520" cy="4236840"/>
           </a:xfrm>
           <a:prstGeom prst="rect">
             <a:avLst/>
@@ -1394,7 +1394,7 @@
         <p:spPr>
           <a:xfrm>
             <a:off x="2009880" y="5372280"/>
-            <a:ext cx="16080480" cy="5085720"/>
+            <a:ext cx="16079400" cy="5084640"/>
           </a:xfrm>
           <a:prstGeom prst="rect">
             <a:avLst/>
@@ -1434,7 +1434,7 @@
         <p:spPr>
           <a:xfrm>
             <a:off x="11387160" y="10742760"/>
-            <a:ext cx="8708400" cy="561240"/>
+            <a:ext cx="8707320" cy="560160"/>
           </a:xfrm>
           <a:prstGeom prst="rect">
             <a:avLst/>
@@ -1476,7 +1476,7 @@
                 <a:tab algn="l" pos="0"/>
               </a:tabLst>
             </a:pPr>
-            <a:fld id="{1DDDB2D9-5A42-4ED7-BC4A-5E9932C49A85}" type="slidenum">
+            <a:fld id="{E0203D49-6310-452A-9AAF-EDE38761806D}" type="slidenum">
               <a:rPr b="0" lang="en-IN" sz="1200" spc="-1" strike="noStrike">
                 <a:solidFill>
                   <a:schemeClr val="dk1"/>
@@ -1530,7 +1530,7 @@
         <p:spPr>
           <a:xfrm>
             <a:off x="6281640" y="847800"/>
-            <a:ext cx="7536600" cy="4237920"/>
+            <a:ext cx="7535520" cy="4236840"/>
           </a:xfrm>
           <a:prstGeom prst="rect">
             <a:avLst/>
@@ -1553,7 +1553,7 @@
         <p:spPr>
           <a:xfrm>
             <a:off x="2009880" y="5372280"/>
-            <a:ext cx="16080480" cy="5085720"/>
+            <a:ext cx="16079400" cy="5084640"/>
           </a:xfrm>
           <a:prstGeom prst="rect">
             <a:avLst/>
@@ -1593,7 +1593,7 @@
         <p:spPr>
           <a:xfrm>
             <a:off x="11387160" y="10742760"/>
-            <a:ext cx="8708400" cy="561240"/>
+            <a:ext cx="8707320" cy="560160"/>
           </a:xfrm>
           <a:prstGeom prst="rect">
             <a:avLst/>
@@ -1635,7 +1635,7 @@
                 <a:tab algn="l" pos="0"/>
               </a:tabLst>
             </a:pPr>
-            <a:fld id="{7EEE3703-5345-4F81-B320-77D2927E59C1}" type="slidenum">
+            <a:fld id="{725B865D-04FC-47F7-9BDD-D8839B4E8BA5}" type="slidenum">
               <a:rPr b="0" lang="en-IN" sz="1200" spc="-1" strike="noStrike">
                 <a:solidFill>
                   <a:schemeClr val="dk1"/>
@@ -1689,7 +1689,7 @@
         <p:spPr>
           <a:xfrm>
             <a:off x="6281640" y="847800"/>
-            <a:ext cx="7536600" cy="4237920"/>
+            <a:ext cx="7535520" cy="4236840"/>
           </a:xfrm>
           <a:prstGeom prst="rect">
             <a:avLst/>
@@ -1712,7 +1712,7 @@
         <p:spPr>
           <a:xfrm>
             <a:off x="2009880" y="5372280"/>
-            <a:ext cx="16080480" cy="5085720"/>
+            <a:ext cx="16079400" cy="5084640"/>
           </a:xfrm>
           <a:prstGeom prst="rect">
             <a:avLst/>
@@ -1752,7 +1752,7 @@
         <p:spPr>
           <a:xfrm>
             <a:off x="11387160" y="10742760"/>
-            <a:ext cx="8708400" cy="561240"/>
+            <a:ext cx="8707320" cy="560160"/>
           </a:xfrm>
           <a:prstGeom prst="rect">
             <a:avLst/>
@@ -1794,7 +1794,7 @@
                 <a:tab algn="l" pos="0"/>
               </a:tabLst>
             </a:pPr>
-            <a:fld id="{F1F54CEE-CACE-4A97-B2E6-71A67648BAB1}" type="slidenum">
+            <a:fld id="{D68137C6-F2FA-452E-B144-8BFC6CE3B4D3}" type="slidenum">
               <a:rPr b="0" lang="en-IN" sz="1200" spc="-1" strike="noStrike">
                 <a:solidFill>
                   <a:schemeClr val="dk1"/>
@@ -1848,7 +1848,7 @@
         <p:spPr>
           <a:xfrm>
             <a:off x="6281640" y="847800"/>
-            <a:ext cx="7536600" cy="4237920"/>
+            <a:ext cx="7535520" cy="4236840"/>
           </a:xfrm>
           <a:prstGeom prst="rect">
             <a:avLst/>
@@ -1871,7 +1871,7 @@
         <p:spPr>
           <a:xfrm>
             <a:off x="2009880" y="5372280"/>
-            <a:ext cx="16080480" cy="5085720"/>
+            <a:ext cx="16079400" cy="5084640"/>
           </a:xfrm>
           <a:prstGeom prst="rect">
             <a:avLst/>
@@ -1911,7 +1911,7 @@
         <p:spPr>
           <a:xfrm>
             <a:off x="11387160" y="10742760"/>
-            <a:ext cx="8708400" cy="561240"/>
+            <a:ext cx="8707320" cy="560160"/>
           </a:xfrm>
           <a:prstGeom prst="rect">
             <a:avLst/>
@@ -1953,7 +1953,7 @@
                 <a:tab algn="l" pos="0"/>
               </a:tabLst>
             </a:pPr>
-            <a:fld id="{9940CA79-7D6D-4DFC-8B62-6388B3315EAD}" type="slidenum">
+            <a:fld id="{AB9E6523-19CA-4EEB-B789-099C482EB304}" type="slidenum">
               <a:rPr b="0" lang="en-IN" sz="1200" spc="-1" strike="noStrike">
                 <a:solidFill>
                   <a:schemeClr val="dk1"/>
@@ -2007,7 +2007,7 @@
         <p:spPr>
           <a:xfrm>
             <a:off x="6281640" y="847800"/>
-            <a:ext cx="7536600" cy="4237920"/>
+            <a:ext cx="7535520" cy="4236840"/>
           </a:xfrm>
           <a:prstGeom prst="rect">
             <a:avLst/>
@@ -2030,7 +2030,7 @@
         <p:spPr>
           <a:xfrm>
             <a:off x="2009880" y="5372280"/>
-            <a:ext cx="16080480" cy="5085720"/>
+            <a:ext cx="16079400" cy="5084640"/>
           </a:xfrm>
           <a:prstGeom prst="rect">
             <a:avLst/>
@@ -2070,7 +2070,7 @@
         <p:spPr>
           <a:xfrm>
             <a:off x="11387160" y="10742760"/>
-            <a:ext cx="8708400" cy="561240"/>
+            <a:ext cx="8707320" cy="560160"/>
           </a:xfrm>
           <a:prstGeom prst="rect">
             <a:avLst/>
@@ -2112,7 +2112,7 @@
                 <a:tab algn="l" pos="0"/>
               </a:tabLst>
             </a:pPr>
-            <a:fld id="{8761ABF2-4425-415C-B168-40DD15A1AD4D}" type="slidenum">
+            <a:fld id="{07C1AFC1-D552-4A4D-AFED-F03A5847564C}" type="slidenum">
               <a:rPr b="0" lang="en-IN" sz="1200" spc="-1" strike="noStrike">
                 <a:solidFill>
                   <a:schemeClr val="dk1"/>
@@ -2166,7 +2166,7 @@
         <p:spPr>
           <a:xfrm>
             <a:off x="861120" y="2054160"/>
-            <a:ext cx="18728640" cy="1254600"/>
+            <a:ext cx="18727560" cy="1253520"/>
           </a:xfrm>
           <a:prstGeom prst="rect">
             <a:avLst/>
@@ -2206,7 +2206,7 @@
         <p:spPr>
           <a:xfrm>
             <a:off x="556560" y="4084560"/>
-            <a:ext cx="18728640" cy="7507080"/>
+            <a:ext cx="18727560" cy="7506000"/>
           </a:xfrm>
           <a:prstGeom prst="rect">
             <a:avLst/>
@@ -2250,7 +2250,7 @@
         <p:txBody>
           <a:bodyPr/>
           <a:p>
-            <a:fld id="{86BD86AA-5B2C-41B9-836B-0CF151AE845C}" type="slidenum">
+            <a:fld id="{1CDCC1F9-DFCF-4CF5-8623-EF95DB04604F}" type="slidenum">
               <a:t>&lt;#&gt;</a:t>
             </a:fld>
           </a:p>
@@ -2291,7 +2291,7 @@
         <p:spPr>
           <a:xfrm>
             <a:off x="861120" y="2054160"/>
-            <a:ext cx="18728640" cy="1254600"/>
+            <a:ext cx="18727560" cy="1253520"/>
           </a:xfrm>
           <a:prstGeom prst="rect">
             <a:avLst/>
@@ -2331,7 +2331,7 @@
         <p:spPr>
           <a:xfrm>
             <a:off x="556560" y="4084560"/>
-            <a:ext cx="18728640" cy="7507080"/>
+            <a:ext cx="18727560" cy="7506000"/>
           </a:xfrm>
           <a:prstGeom prst="rect">
             <a:avLst/>
@@ -2372,7 +2372,7 @@
         <p:txBody>
           <a:bodyPr/>
           <a:p>
-            <a:fld id="{B253499C-473C-4908-B2B9-C07FFEA29E55}" type="slidenum">
+            <a:fld id="{6257C536-5062-478C-9AD0-19F8E6247BF4}" type="slidenum">
               <a:t>&lt;#&gt;</a:t>
             </a:fld>
           </a:p>
@@ -2413,7 +2413,7 @@
         <p:spPr>
           <a:xfrm>
             <a:off x="861120" y="2054160"/>
-            <a:ext cx="18728640" cy="1254600"/>
+            <a:ext cx="18727560" cy="1253520"/>
           </a:xfrm>
           <a:prstGeom prst="rect">
             <a:avLst/>
@@ -2453,7 +2453,7 @@
         <p:spPr>
           <a:xfrm>
             <a:off x="556560" y="4084560"/>
-            <a:ext cx="18728640" cy="7507080"/>
+            <a:ext cx="18727560" cy="7506000"/>
           </a:xfrm>
           <a:prstGeom prst="rect">
             <a:avLst/>
@@ -2497,7 +2497,7 @@
         <p:txBody>
           <a:bodyPr/>
           <a:p>
-            <a:fld id="{01A63626-1526-477A-B269-80EADF74ADAB}" type="slidenum">
+            <a:fld id="{2ECA3A96-6CFD-4C36-B8A6-F3030E0919DE}" type="slidenum">
               <a:t>&lt;#&gt;</a:t>
             </a:fld>
           </a:p>
@@ -2538,7 +2538,7 @@
         <p:spPr>
           <a:xfrm>
             <a:off x="861120" y="2054160"/>
-            <a:ext cx="18728640" cy="1254600"/>
+            <a:ext cx="18727560" cy="1253520"/>
           </a:xfrm>
           <a:prstGeom prst="rect">
             <a:avLst/>
@@ -2578,7 +2578,7 @@
         <p:spPr>
           <a:xfrm>
             <a:off x="556560" y="4084560"/>
-            <a:ext cx="18728640" cy="7507080"/>
+            <a:ext cx="18727560" cy="7506000"/>
           </a:xfrm>
           <a:prstGeom prst="rect">
             <a:avLst/>
@@ -2622,7 +2622,7 @@
         <p:txBody>
           <a:bodyPr/>
           <a:p>
-            <a:fld id="{F5275774-2417-4C30-8948-8149C7501386}" type="slidenum">
+            <a:fld id="{61E538FF-6314-4259-BC6C-2E1256921AC9}" type="slidenum">
               <a:t>&lt;#&gt;</a:t>
             </a:fld>
           </a:p>
@@ -2663,7 +2663,7 @@
         <p:spPr>
           <a:xfrm>
             <a:off x="861120" y="2054160"/>
-            <a:ext cx="18728640" cy="1254600"/>
+            <a:ext cx="18727560" cy="1253520"/>
           </a:xfrm>
           <a:prstGeom prst="rect">
             <a:avLst/>
@@ -2703,7 +2703,7 @@
         <p:spPr>
           <a:xfrm>
             <a:off x="556560" y="4084560"/>
-            <a:ext cx="18728640" cy="7507080"/>
+            <a:ext cx="18727560" cy="7506000"/>
           </a:xfrm>
           <a:prstGeom prst="rect">
             <a:avLst/>
@@ -2747,7 +2747,7 @@
         <p:txBody>
           <a:bodyPr/>
           <a:p>
-            <a:fld id="{76C622C0-A6A1-4E6D-80F2-3D645BF71B80}" type="slidenum">
+            <a:fld id="{3536C9E9-DC59-4268-A65F-227117B62748}" type="slidenum">
               <a:t>&lt;#&gt;</a:t>
             </a:fld>
           </a:p>
@@ -2788,7 +2788,7 @@
         <p:spPr>
           <a:xfrm>
             <a:off x="861120" y="2054160"/>
-            <a:ext cx="18728640" cy="1254600"/>
+            <a:ext cx="18727560" cy="1253520"/>
           </a:xfrm>
           <a:prstGeom prst="rect">
             <a:avLst/>
@@ -2828,7 +2828,7 @@
         <p:spPr>
           <a:xfrm>
             <a:off x="556560" y="4084560"/>
-            <a:ext cx="18728640" cy="7507080"/>
+            <a:ext cx="18727560" cy="7506000"/>
           </a:xfrm>
           <a:prstGeom prst="rect">
             <a:avLst/>
@@ -2872,7 +2872,7 @@
         <p:txBody>
           <a:bodyPr/>
           <a:p>
-            <a:fld id="{33B369D8-EFD3-4CF2-AA6C-93B264BF86B0}" type="slidenum">
+            <a:fld id="{17E4765E-E8B2-47C2-85BF-2160943BCE80}" type="slidenum">
               <a:t>&lt;#&gt;</a:t>
             </a:fld>
           </a:p>
@@ -2913,7 +2913,7 @@
         <p:spPr>
           <a:xfrm>
             <a:off x="861120" y="2054160"/>
-            <a:ext cx="18728640" cy="1254600"/>
+            <a:ext cx="18727560" cy="1253520"/>
           </a:xfrm>
           <a:prstGeom prst="rect">
             <a:avLst/>
@@ -2953,7 +2953,7 @@
         <p:spPr>
           <a:xfrm>
             <a:off x="556560" y="4084560"/>
-            <a:ext cx="18728640" cy="7507080"/>
+            <a:ext cx="18727560" cy="7506000"/>
           </a:xfrm>
           <a:prstGeom prst="rect">
             <a:avLst/>
@@ -2997,7 +2997,7 @@
         <p:txBody>
           <a:bodyPr/>
           <a:p>
-            <a:fld id="{43947A7C-C2AB-449C-8D1D-4C54FE231A20}" type="slidenum">
+            <a:fld id="{37924475-AA1D-442B-8EBB-202EE5DDD44E}" type="slidenum">
               <a:t>&lt;#&gt;</a:t>
             </a:fld>
           </a:p>
@@ -3046,7 +3046,7 @@
         <p:spPr>
           <a:xfrm>
             <a:off x="474840" y="474840"/>
-            <a:ext cx="3310200" cy="1420200"/>
+            <a:ext cx="3309120" cy="1419120"/>
           </a:xfrm>
           <a:prstGeom prst="rect">
             <a:avLst/>
@@ -3069,7 +3069,7 @@
         <p:spPr>
           <a:xfrm>
             <a:off x="7614360" y="10400400"/>
-            <a:ext cx="4870800" cy="736920"/>
+            <a:ext cx="4869720" cy="735840"/>
           </a:xfrm>
           <a:prstGeom prst="rect">
             <a:avLst/>
@@ -3088,15 +3088,15 @@
         <p:spPr>
           <a:xfrm>
             <a:off x="2982960" y="712800"/>
-            <a:ext cx="53280" cy="53280"/>
+            <a:ext cx="52200" cy="52200"/>
           </a:xfrm>
           <a:custGeom>
             <a:avLst/>
             <a:gdLst>
-              <a:gd name="textAreaLeft" fmla="*/ 0 w 53280"/>
-              <a:gd name="textAreaRight" fmla="*/ 57240 w 53280"/>
-              <a:gd name="textAreaTop" fmla="*/ 0 h 53280"/>
-              <a:gd name="textAreaBottom" fmla="*/ 57240 h 53280"/>
+              <a:gd name="textAreaLeft" fmla="*/ 0 w 52200"/>
+              <a:gd name="textAreaRight" fmla="*/ 57240 w 52200"/>
+              <a:gd name="textAreaTop" fmla="*/ 0 h 52200"/>
+              <a:gd name="textAreaBottom" fmla="*/ 57240 h 52200"/>
             </a:gdLst>
             <a:ahLst/>
             <a:rect l="textAreaLeft" t="textAreaTop" r="textAreaRight" b="textAreaBottom"/>
@@ -3271,15 +3271,15 @@
         <p:spPr>
           <a:xfrm>
             <a:off x="2998800" y="725400"/>
-            <a:ext cx="21600" cy="27720"/>
+            <a:ext cx="20520" cy="26640"/>
           </a:xfrm>
           <a:custGeom>
             <a:avLst/>
             <a:gdLst>
-              <a:gd name="textAreaLeft" fmla="*/ 0 w 21600"/>
-              <a:gd name="textAreaRight" fmla="*/ 25560 w 21600"/>
-              <a:gd name="textAreaTop" fmla="*/ 0 h 27720"/>
-              <a:gd name="textAreaBottom" fmla="*/ 31680 h 27720"/>
+              <a:gd name="textAreaLeft" fmla="*/ 0 w 20520"/>
+              <a:gd name="textAreaRight" fmla="*/ 25560 w 20520"/>
+              <a:gd name="textAreaTop" fmla="*/ 0 h 26640"/>
+              <a:gd name="textAreaBottom" fmla="*/ 31680 h 26640"/>
             </a:gdLst>
             <a:ahLst/>
             <a:rect l="textAreaLeft" t="textAreaTop" r="textAreaRight" b="textAreaBottom"/>
@@ -3449,7 +3449,7 @@
         <p:spPr>
           <a:xfrm>
             <a:off x="861120" y="2054160"/>
-            <a:ext cx="18728640" cy="1254600"/>
+            <a:ext cx="18727560" cy="1253520"/>
           </a:xfrm>
           <a:prstGeom prst="rect">
             <a:avLst/>
@@ -3474,7 +3474,25 @@
                 </a:solidFill>
                 <a:latin typeface="Arial"/>
               </a:rPr>
-              <a:t>Click to edit the title text format</a:t>
+              <a:t>Click to edit </a:t>
+            </a:r>
+            <a:r>
+              <a:rPr b="0" lang="en-US" sz="1800" spc="-1" strike="noStrike">
+                <a:solidFill>
+                  <a:srgbClr val="000000"/>
+                </a:solidFill>
+                <a:latin typeface="Arial"/>
+              </a:rPr>
+              <a:t>the title text </a:t>
+            </a:r>
+            <a:r>
+              <a:rPr b="0" lang="en-US" sz="1800" spc="-1" strike="noStrike">
+                <a:solidFill>
+                  <a:srgbClr val="000000"/>
+                </a:solidFill>
+                <a:latin typeface="Arial"/>
+              </a:rPr>
+              <a:t>format</a:t>
             </a:r>
             <a:endParaRPr b="0" lang="en-US" sz="1800" spc="-1" strike="noStrike">
               <a:solidFill>
@@ -3498,7 +3516,7 @@
         <p:spPr>
           <a:xfrm>
             <a:off x="556560" y="4084560"/>
-            <a:ext cx="18728640" cy="7507080"/>
+            <a:ext cx="18727560" cy="7506000"/>
           </a:xfrm>
           <a:prstGeom prst="rect">
             <a:avLst/>
@@ -3723,7 +3741,7 @@
         <p:spPr>
           <a:xfrm>
             <a:off x="18627840" y="10253160"/>
-            <a:ext cx="1201320" cy="860400"/>
+            <a:ext cx="1200240" cy="859320"/>
           </a:xfrm>
           <a:prstGeom prst="rect">
             <a:avLst/>
@@ -3765,7 +3783,7 @@
                 <a:tab algn="l" pos="0"/>
               </a:tabLst>
             </a:pPr>
-            <a:fld id="{B058A21F-DB21-41A7-B042-F81FAA5C17A4}" type="slidenum">
+            <a:fld id="{EB6A60B8-7B86-44B2-917C-EF9CCDE76F7F}" type="slidenum">
               <a:rPr b="0" lang="en-IN" sz="2200" spc="-1" strike="noStrike">
                 <a:solidFill>
                   <a:schemeClr val="dk2"/>
@@ -3831,7 +3849,7 @@
         <p:spPr>
           <a:xfrm>
             <a:off x="474840" y="474840"/>
-            <a:ext cx="3310200" cy="1420200"/>
+            <a:ext cx="3309120" cy="1419120"/>
           </a:xfrm>
           <a:prstGeom prst="rect">
             <a:avLst/>
@@ -3854,7 +3872,7 @@
         <p:spPr>
           <a:xfrm>
             <a:off x="7614360" y="10400400"/>
-            <a:ext cx="4870800" cy="736920"/>
+            <a:ext cx="4869720" cy="735840"/>
           </a:xfrm>
           <a:prstGeom prst="rect">
             <a:avLst/>
@@ -3873,15 +3891,15 @@
         <p:spPr>
           <a:xfrm>
             <a:off x="2982960" y="712800"/>
-            <a:ext cx="53280" cy="53280"/>
+            <a:ext cx="52200" cy="52200"/>
           </a:xfrm>
           <a:custGeom>
             <a:avLst/>
             <a:gdLst>
-              <a:gd name="textAreaLeft" fmla="*/ 0 w 53280"/>
-              <a:gd name="textAreaRight" fmla="*/ 57240 w 53280"/>
-              <a:gd name="textAreaTop" fmla="*/ 0 h 53280"/>
-              <a:gd name="textAreaBottom" fmla="*/ 57240 h 53280"/>
+              <a:gd name="textAreaLeft" fmla="*/ 0 w 52200"/>
+              <a:gd name="textAreaRight" fmla="*/ 57240 w 52200"/>
+              <a:gd name="textAreaTop" fmla="*/ 0 h 52200"/>
+              <a:gd name="textAreaBottom" fmla="*/ 57240 h 52200"/>
             </a:gdLst>
             <a:ahLst/>
             <a:rect l="textAreaLeft" t="textAreaTop" r="textAreaRight" b="textAreaBottom"/>
@@ -4056,15 +4074,15 @@
         <p:spPr>
           <a:xfrm>
             <a:off x="2998800" y="725400"/>
-            <a:ext cx="21600" cy="27720"/>
+            <a:ext cx="20520" cy="26640"/>
           </a:xfrm>
           <a:custGeom>
             <a:avLst/>
             <a:gdLst>
-              <a:gd name="textAreaLeft" fmla="*/ 0 w 21600"/>
-              <a:gd name="textAreaRight" fmla="*/ 25560 w 21600"/>
-              <a:gd name="textAreaTop" fmla="*/ 0 h 27720"/>
-              <a:gd name="textAreaBottom" fmla="*/ 31680 h 27720"/>
+              <a:gd name="textAreaLeft" fmla="*/ 0 w 20520"/>
+              <a:gd name="textAreaRight" fmla="*/ 25560 w 20520"/>
+              <a:gd name="textAreaTop" fmla="*/ 0 h 26640"/>
+              <a:gd name="textAreaBottom" fmla="*/ 31680 h 26640"/>
             </a:gdLst>
             <a:ahLst/>
             <a:rect l="textAreaLeft" t="textAreaTop" r="textAreaRight" b="textAreaBottom"/>
@@ -4234,7 +4252,7 @@
         <p:spPr>
           <a:xfrm>
             <a:off x="861120" y="2054160"/>
-            <a:ext cx="18728640" cy="1254600"/>
+            <a:ext cx="18727560" cy="1253520"/>
           </a:xfrm>
           <a:prstGeom prst="rect">
             <a:avLst/>
@@ -4259,7 +4277,25 @@
                 </a:solidFill>
                 <a:latin typeface="Arial"/>
               </a:rPr>
-              <a:t>Click to edit the title text format</a:t>
+              <a:t>Click to edit </a:t>
+            </a:r>
+            <a:r>
+              <a:rPr b="0" lang="en-US" sz="1800" spc="-1" strike="noStrike">
+                <a:solidFill>
+                  <a:srgbClr val="000000"/>
+                </a:solidFill>
+                <a:latin typeface="Arial"/>
+              </a:rPr>
+              <a:t>the title text </a:t>
+            </a:r>
+            <a:r>
+              <a:rPr b="0" lang="en-US" sz="1800" spc="-1" strike="noStrike">
+                <a:solidFill>
+                  <a:srgbClr val="000000"/>
+                </a:solidFill>
+                <a:latin typeface="Arial"/>
+              </a:rPr>
+              <a:t>format</a:t>
             </a:r>
             <a:endParaRPr b="0" lang="en-US" sz="1800" spc="-1" strike="noStrike">
               <a:solidFill>
@@ -4283,7 +4319,7 @@
         <p:spPr>
           <a:xfrm>
             <a:off x="18627840" y="10253160"/>
-            <a:ext cx="1201320" cy="860400"/>
+            <a:ext cx="1200240" cy="859320"/>
           </a:xfrm>
           <a:prstGeom prst="rect">
             <a:avLst/>
@@ -4325,7 +4361,7 @@
                 <a:tab algn="l" pos="0"/>
               </a:tabLst>
             </a:pPr>
-            <a:fld id="{2E375D0F-F83C-40B0-9597-400D8614BE05}" type="slidenum">
+            <a:fld id="{FE800FAA-0969-402A-A51F-5D34F488A69B}" type="slidenum">
               <a:rPr b="0" lang="en-IN" sz="2200" spc="-1" strike="noStrike">
                 <a:solidFill>
                   <a:schemeClr val="dk2"/>
@@ -4616,7 +4652,7 @@
         <p:spPr>
           <a:xfrm>
             <a:off x="474840" y="474840"/>
-            <a:ext cx="3310200" cy="1420200"/>
+            <a:ext cx="3309120" cy="1419120"/>
           </a:xfrm>
           <a:prstGeom prst="rect">
             <a:avLst/>
@@ -4639,7 +4675,7 @@
         <p:spPr>
           <a:xfrm>
             <a:off x="15354360" y="912600"/>
-            <a:ext cx="4335120" cy="655560"/>
+            <a:ext cx="4334040" cy="654480"/>
           </a:xfrm>
           <a:prstGeom prst="rect">
             <a:avLst/>
@@ -4662,7 +4698,7 @@
         <p:spPr>
           <a:xfrm>
             <a:off x="861120" y="2054160"/>
-            <a:ext cx="18728640" cy="1254600"/>
+            <a:ext cx="18727560" cy="1253520"/>
           </a:xfrm>
           <a:prstGeom prst="rect">
             <a:avLst/>
@@ -4687,7 +4723,25 @@
                 </a:solidFill>
                 <a:latin typeface="Arial"/>
               </a:rPr>
-              <a:t>Click to edit the title text format</a:t>
+              <a:t>Click to edit </a:t>
+            </a:r>
+            <a:r>
+              <a:rPr b="0" lang="en-US" sz="1800" spc="-1" strike="noStrike">
+                <a:solidFill>
+                  <a:srgbClr val="000000"/>
+                </a:solidFill>
+                <a:latin typeface="Arial"/>
+              </a:rPr>
+              <a:t>the title text </a:t>
+            </a:r>
+            <a:r>
+              <a:rPr b="0" lang="en-US" sz="1800" spc="-1" strike="noStrike">
+                <a:solidFill>
+                  <a:srgbClr val="000000"/>
+                </a:solidFill>
+                <a:latin typeface="Arial"/>
+              </a:rPr>
+              <a:t>format</a:t>
             </a:r>
             <a:endParaRPr b="0" lang="en-US" sz="1800" spc="-1" strike="noStrike">
               <a:solidFill>
@@ -4711,7 +4765,7 @@
         <p:spPr>
           <a:xfrm>
             <a:off x="556560" y="4084560"/>
-            <a:ext cx="18728640" cy="7507080"/>
+            <a:ext cx="18727560" cy="7506000"/>
           </a:xfrm>
           <a:prstGeom prst="rect">
             <a:avLst/>
@@ -4936,7 +4990,7 @@
         <p:spPr>
           <a:xfrm>
             <a:off x="18627840" y="10253160"/>
-            <a:ext cx="1201320" cy="860400"/>
+            <a:ext cx="1200240" cy="859320"/>
           </a:xfrm>
           <a:prstGeom prst="rect">
             <a:avLst/>
@@ -4978,7 +5032,7 @@
                 <a:tab algn="l" pos="0"/>
               </a:tabLst>
             </a:pPr>
-            <a:fld id="{741F490B-A0D5-4320-8C3D-54EC8372B710}" type="slidenum">
+            <a:fld id="{8546844D-FC60-4E16-BAAA-A89CABEF948E}" type="slidenum">
               <a:rPr b="0" lang="en-IN" sz="2200" spc="-1" strike="noStrike">
                 <a:solidFill>
                   <a:schemeClr val="dk2"/>
@@ -5044,7 +5098,7 @@
         <p:spPr>
           <a:xfrm>
             <a:off x="474840" y="474840"/>
-            <a:ext cx="3310200" cy="1420200"/>
+            <a:ext cx="3309120" cy="1419120"/>
           </a:xfrm>
           <a:prstGeom prst="rect">
             <a:avLst/>
@@ -5067,7 +5121,7 @@
         <p:spPr>
           <a:xfrm>
             <a:off x="15354360" y="912600"/>
-            <a:ext cx="4335120" cy="655560"/>
+            <a:ext cx="4334040" cy="654480"/>
           </a:xfrm>
           <a:prstGeom prst="rect">
             <a:avLst/>
@@ -5090,7 +5144,7 @@
         <p:spPr>
           <a:xfrm>
             <a:off x="861120" y="2054160"/>
-            <a:ext cx="18728640" cy="1254600"/>
+            <a:ext cx="18727560" cy="1253520"/>
           </a:xfrm>
           <a:prstGeom prst="rect">
             <a:avLst/>
@@ -5115,7 +5169,25 @@
                 </a:solidFill>
                 <a:latin typeface="Arial"/>
               </a:rPr>
-              <a:t>Click to edit the title text format</a:t>
+              <a:t>Click to edit </a:t>
+            </a:r>
+            <a:r>
+              <a:rPr b="0" lang="en-US" sz="1800" spc="-1" strike="noStrike">
+                <a:solidFill>
+                  <a:srgbClr val="000000"/>
+                </a:solidFill>
+                <a:latin typeface="Arial"/>
+              </a:rPr>
+              <a:t>the title text </a:t>
+            </a:r>
+            <a:r>
+              <a:rPr b="0" lang="en-US" sz="1800" spc="-1" strike="noStrike">
+                <a:solidFill>
+                  <a:srgbClr val="000000"/>
+                </a:solidFill>
+                <a:latin typeface="Arial"/>
+              </a:rPr>
+              <a:t>format</a:t>
             </a:r>
             <a:endParaRPr b="0" lang="en-US" sz="1800" spc="-1" strike="noStrike">
               <a:solidFill>
@@ -5139,7 +5211,7 @@
         <p:spPr>
           <a:xfrm>
             <a:off x="556560" y="4084560"/>
-            <a:ext cx="18728640" cy="7507080"/>
+            <a:ext cx="18727560" cy="7506000"/>
           </a:xfrm>
           <a:prstGeom prst="rect">
             <a:avLst/>
@@ -5364,7 +5436,7 @@
         <p:spPr>
           <a:xfrm>
             <a:off x="18627840" y="10253160"/>
-            <a:ext cx="1201320" cy="860400"/>
+            <a:ext cx="1200240" cy="859320"/>
           </a:xfrm>
           <a:prstGeom prst="rect">
             <a:avLst/>
@@ -5406,7 +5478,7 @@
                 <a:tab algn="l" pos="0"/>
               </a:tabLst>
             </a:pPr>
-            <a:fld id="{E52A926B-6C76-499D-B285-7BC69AF8829A}" type="slidenum">
+            <a:fld id="{4AF07BE0-FD9E-4C74-8B6D-D7EF018BFA5B}" type="slidenum">
               <a:rPr b="0" lang="en-IN" sz="2200" spc="-1" strike="noStrike">
                 <a:solidFill>
                   <a:schemeClr val="dk2"/>
@@ -5472,7 +5544,7 @@
         <p:spPr>
           <a:xfrm>
             <a:off x="474840" y="474840"/>
-            <a:ext cx="3310200" cy="1420200"/>
+            <a:ext cx="3309120" cy="1419120"/>
           </a:xfrm>
           <a:prstGeom prst="rect">
             <a:avLst/>
@@ -5495,7 +5567,7 @@
         <p:spPr>
           <a:xfrm>
             <a:off x="15354360" y="912600"/>
-            <a:ext cx="4335120" cy="655560"/>
+            <a:ext cx="4334040" cy="654480"/>
           </a:xfrm>
           <a:prstGeom prst="rect">
             <a:avLst/>
@@ -5518,7 +5590,7 @@
         <p:spPr>
           <a:xfrm>
             <a:off x="861120" y="2054160"/>
-            <a:ext cx="18728640" cy="1254600"/>
+            <a:ext cx="18727560" cy="1253520"/>
           </a:xfrm>
           <a:prstGeom prst="rect">
             <a:avLst/>
@@ -5543,7 +5615,25 @@
                 </a:solidFill>
                 <a:latin typeface="Arial"/>
               </a:rPr>
-              <a:t>Click to edit the title text format</a:t>
+              <a:t>Click to edit </a:t>
+            </a:r>
+            <a:r>
+              <a:rPr b="0" lang="en-US" sz="1800" spc="-1" strike="noStrike">
+                <a:solidFill>
+                  <a:srgbClr val="000000"/>
+                </a:solidFill>
+                <a:latin typeface="Arial"/>
+              </a:rPr>
+              <a:t>the title text </a:t>
+            </a:r>
+            <a:r>
+              <a:rPr b="0" lang="en-US" sz="1800" spc="-1" strike="noStrike">
+                <a:solidFill>
+                  <a:srgbClr val="000000"/>
+                </a:solidFill>
+                <a:latin typeface="Arial"/>
+              </a:rPr>
+              <a:t>format</a:t>
             </a:r>
             <a:endParaRPr b="0" lang="en-US" sz="1800" spc="-1" strike="noStrike">
               <a:solidFill>
@@ -5567,7 +5657,7 @@
         <p:spPr>
           <a:xfrm>
             <a:off x="556560" y="4084560"/>
-            <a:ext cx="18728640" cy="7507080"/>
+            <a:ext cx="18727560" cy="7506000"/>
           </a:xfrm>
           <a:prstGeom prst="rect">
             <a:avLst/>
@@ -5792,7 +5882,7 @@
         <p:spPr>
           <a:xfrm>
             <a:off x="18627840" y="10253160"/>
-            <a:ext cx="1201320" cy="860400"/>
+            <a:ext cx="1200240" cy="859320"/>
           </a:xfrm>
           <a:prstGeom prst="rect">
             <a:avLst/>
@@ -5834,7 +5924,7 @@
                 <a:tab algn="l" pos="0"/>
               </a:tabLst>
             </a:pPr>
-            <a:fld id="{38ACF37C-43FF-4E9A-9B32-8FA23B60DD38}" type="slidenum">
+            <a:fld id="{FD3EBBBB-0280-4E83-B9B8-8C042FC23344}" type="slidenum">
               <a:rPr b="0" lang="en-IN" sz="2200" spc="-1" strike="noStrike">
                 <a:solidFill>
                   <a:schemeClr val="dk2"/>
@@ -5900,7 +5990,7 @@
         <p:spPr>
           <a:xfrm>
             <a:off x="474840" y="474840"/>
-            <a:ext cx="3310200" cy="1420200"/>
+            <a:ext cx="3309120" cy="1419120"/>
           </a:xfrm>
           <a:prstGeom prst="rect">
             <a:avLst/>
@@ -5923,7 +6013,7 @@
         <p:spPr>
           <a:xfrm>
             <a:off x="15354360" y="912600"/>
-            <a:ext cx="4335120" cy="655560"/>
+            <a:ext cx="4334040" cy="654480"/>
           </a:xfrm>
           <a:prstGeom prst="rect">
             <a:avLst/>
@@ -5946,7 +6036,7 @@
         <p:spPr>
           <a:xfrm>
             <a:off x="861120" y="2054160"/>
-            <a:ext cx="18728640" cy="1254600"/>
+            <a:ext cx="18727560" cy="1253520"/>
           </a:xfrm>
           <a:prstGeom prst="rect">
             <a:avLst/>
@@ -5971,7 +6061,25 @@
                 </a:solidFill>
                 <a:latin typeface="Arial"/>
               </a:rPr>
-              <a:t>Click to edit the title text format</a:t>
+              <a:t>Click to edit </a:t>
+            </a:r>
+            <a:r>
+              <a:rPr b="0" lang="en-US" sz="1800" spc="-1" strike="noStrike">
+                <a:solidFill>
+                  <a:srgbClr val="000000"/>
+                </a:solidFill>
+                <a:latin typeface="Arial"/>
+              </a:rPr>
+              <a:t>the title text </a:t>
+            </a:r>
+            <a:r>
+              <a:rPr b="0" lang="en-US" sz="1800" spc="-1" strike="noStrike">
+                <a:solidFill>
+                  <a:srgbClr val="000000"/>
+                </a:solidFill>
+                <a:latin typeface="Arial"/>
+              </a:rPr>
+              <a:t>format</a:t>
             </a:r>
             <a:endParaRPr b="0" lang="en-US" sz="1800" spc="-1" strike="noStrike">
               <a:solidFill>
@@ -5995,7 +6103,7 @@
         <p:spPr>
           <a:xfrm>
             <a:off x="556560" y="4084560"/>
-            <a:ext cx="18728640" cy="7507080"/>
+            <a:ext cx="18727560" cy="7506000"/>
           </a:xfrm>
           <a:prstGeom prst="rect">
             <a:avLst/>
@@ -6220,7 +6328,7 @@
         <p:spPr>
           <a:xfrm>
             <a:off x="18627840" y="10253160"/>
-            <a:ext cx="1201320" cy="860400"/>
+            <a:ext cx="1200240" cy="859320"/>
           </a:xfrm>
           <a:prstGeom prst="rect">
             <a:avLst/>
@@ -6262,7 +6370,7 @@
                 <a:tab algn="l" pos="0"/>
               </a:tabLst>
             </a:pPr>
-            <a:fld id="{B3F0297E-EB39-46FD-98B9-FF8CA757742D}" type="slidenum">
+            <a:fld id="{8592F63A-A4BB-43E6-9263-2BC76EB0C82D}" type="slidenum">
               <a:rPr b="0" lang="en-IN" sz="2200" spc="-1" strike="noStrike">
                 <a:solidFill>
                   <a:schemeClr val="dk2"/>
@@ -6328,7 +6436,7 @@
         <p:spPr>
           <a:xfrm>
             <a:off x="474840" y="474840"/>
-            <a:ext cx="3310200" cy="1420200"/>
+            <a:ext cx="3309120" cy="1419120"/>
           </a:xfrm>
           <a:prstGeom prst="rect">
             <a:avLst/>
@@ -6351,7 +6459,7 @@
         <p:spPr>
           <a:xfrm>
             <a:off x="15354360" y="912600"/>
-            <a:ext cx="4335120" cy="655560"/>
+            <a:ext cx="4334040" cy="654480"/>
           </a:xfrm>
           <a:prstGeom prst="rect">
             <a:avLst/>
@@ -6374,7 +6482,7 @@
         <p:spPr>
           <a:xfrm>
             <a:off x="861120" y="2054160"/>
-            <a:ext cx="18728640" cy="1254600"/>
+            <a:ext cx="18727560" cy="1253520"/>
           </a:xfrm>
           <a:prstGeom prst="rect">
             <a:avLst/>
@@ -6399,25 +6507,7 @@
                 </a:solidFill>
                 <a:latin typeface="Arial"/>
               </a:rPr>
-              <a:t>Click to edit </a:t>
-            </a:r>
-            <a:r>
-              <a:rPr b="0" lang="en-US" sz="1800" spc="-1" strike="noStrike">
-                <a:solidFill>
-                  <a:srgbClr val="000000"/>
-                </a:solidFill>
-                <a:latin typeface="Arial"/>
-              </a:rPr>
-              <a:t>the title text </a:t>
-            </a:r>
-            <a:r>
-              <a:rPr b="0" lang="en-US" sz="1800" spc="-1" strike="noStrike">
-                <a:solidFill>
-                  <a:srgbClr val="000000"/>
-                </a:solidFill>
-                <a:latin typeface="Arial"/>
-              </a:rPr>
-              <a:t>format</a:t>
+              <a:t>Click to edit the title text format</a:t>
             </a:r>
             <a:endParaRPr b="0" lang="en-US" sz="1800" spc="-1" strike="noStrike">
               <a:solidFill>
@@ -6441,7 +6531,7 @@
         <p:spPr>
           <a:xfrm>
             <a:off x="556560" y="4084560"/>
-            <a:ext cx="18728640" cy="7507080"/>
+            <a:ext cx="18727560" cy="7506000"/>
           </a:xfrm>
           <a:prstGeom prst="rect">
             <a:avLst/>
@@ -6666,7 +6756,7 @@
         <p:spPr>
           <a:xfrm>
             <a:off x="18627840" y="10253160"/>
-            <a:ext cx="1201320" cy="860400"/>
+            <a:ext cx="1200240" cy="859320"/>
           </a:xfrm>
           <a:prstGeom prst="rect">
             <a:avLst/>
@@ -6708,7 +6798,7 @@
                 <a:tab algn="l" pos="0"/>
               </a:tabLst>
             </a:pPr>
-            <a:fld id="{5F265B62-1847-4D04-A2F0-8EBA17CFEA36}" type="slidenum">
+            <a:fld id="{661D5638-9F50-4D57-B071-30A8AB99147A}" type="slidenum">
               <a:rPr b="0" lang="en-IN" sz="2200" spc="-1" strike="noStrike">
                 <a:solidFill>
                   <a:schemeClr val="dk2"/>
@@ -6762,7 +6852,7 @@
         <p:spPr>
           <a:xfrm>
             <a:off x="4443840" y="2008080"/>
-            <a:ext cx="11212920" cy="1391400"/>
+            <a:ext cx="11211840" cy="1390320"/>
           </a:xfrm>
           <a:prstGeom prst="rect">
             <a:avLst/>
@@ -6819,7 +6909,7 @@
         <p:spPr>
           <a:xfrm>
             <a:off x="1575360" y="3254400"/>
-            <a:ext cx="17013240" cy="6955560"/>
+            <a:ext cx="17012160" cy="6954480"/>
           </a:xfrm>
           <a:prstGeom prst="rect">
             <a:avLst/>
@@ -7040,7 +7130,7 @@
         <p:spPr>
           <a:xfrm>
             <a:off x="18627840" y="10253160"/>
-            <a:ext cx="1201320" cy="860400"/>
+            <a:ext cx="1200240" cy="859320"/>
           </a:xfrm>
           <a:prstGeom prst="rect">
             <a:avLst/>
@@ -7082,7 +7172,7 @@
                 <a:tab algn="l" pos="0"/>
               </a:tabLst>
             </a:pPr>
-            <a:fld id="{9E5AAD3C-6B4C-4342-89F6-40A10E4BD0D8}" type="slidenum">
+            <a:fld id="{CF7BE293-99B3-48DF-8100-31F0EFB83668}" type="slidenum">
               <a:rPr b="0" lang="en-IN" sz="2200" spc="-1" strike="noStrike">
                 <a:solidFill>
                   <a:schemeClr val="dk2"/>
@@ -7110,7 +7200,7 @@
         <p:spPr>
           <a:xfrm>
             <a:off x="4599360" y="351000"/>
-            <a:ext cx="10901520" cy="1391400"/>
+            <a:ext cx="10900440" cy="1390320"/>
           </a:xfrm>
           <a:prstGeom prst="rect">
             <a:avLst/>
@@ -7167,7 +7257,7 @@
         <p:spPr>
           <a:xfrm>
             <a:off x="7315200" y="8124840"/>
-            <a:ext cx="5501880" cy="3183840"/>
+            <a:ext cx="5500800" cy="3182760"/>
           </a:xfrm>
           <a:prstGeom prst="rect">
             <a:avLst/>
@@ -7251,15 +7341,15 @@
         <p:spPr>
           <a:xfrm>
             <a:off x="2982960" y="712800"/>
-            <a:ext cx="53280" cy="53280"/>
+            <a:ext cx="52200" cy="52200"/>
           </a:xfrm>
           <a:custGeom>
             <a:avLst/>
             <a:gdLst>
-              <a:gd name="textAreaLeft" fmla="*/ 0 w 53280"/>
-              <a:gd name="textAreaRight" fmla="*/ 57240 w 53280"/>
-              <a:gd name="textAreaTop" fmla="*/ 0 h 53280"/>
-              <a:gd name="textAreaBottom" fmla="*/ 57240 h 53280"/>
+              <a:gd name="textAreaLeft" fmla="*/ 0 w 52200"/>
+              <a:gd name="textAreaRight" fmla="*/ 57240 w 52200"/>
+              <a:gd name="textAreaTop" fmla="*/ 0 h 52200"/>
+              <a:gd name="textAreaBottom" fmla="*/ 57240 h 52200"/>
             </a:gdLst>
             <a:ahLst/>
             <a:rect l="textAreaLeft" t="textAreaTop" r="textAreaRight" b="textAreaBottom"/>
@@ -7434,15 +7524,15 @@
         <p:spPr>
           <a:xfrm>
             <a:off x="2998800" y="725400"/>
-            <a:ext cx="21600" cy="27720"/>
+            <a:ext cx="20520" cy="26640"/>
           </a:xfrm>
           <a:custGeom>
             <a:avLst/>
             <a:gdLst>
-              <a:gd name="textAreaLeft" fmla="*/ 0 w 21600"/>
-              <a:gd name="textAreaRight" fmla="*/ 25560 w 21600"/>
-              <a:gd name="textAreaTop" fmla="*/ 0 h 27720"/>
-              <a:gd name="textAreaBottom" fmla="*/ 31680 h 27720"/>
+              <a:gd name="textAreaLeft" fmla="*/ 0 w 20520"/>
+              <a:gd name="textAreaRight" fmla="*/ 25560 w 20520"/>
+              <a:gd name="textAreaTop" fmla="*/ 0 h 26640"/>
+              <a:gd name="textAreaBottom" fmla="*/ 31680 h 26640"/>
             </a:gdLst>
             <a:ahLst/>
             <a:rect l="textAreaLeft" t="textAreaTop" r="textAreaRight" b="textAreaBottom"/>
@@ -7612,7 +7702,7 @@
         <p:spPr>
           <a:xfrm>
             <a:off x="18627840" y="10253160"/>
-            <a:ext cx="1201320" cy="860400"/>
+            <a:ext cx="1200240" cy="859320"/>
           </a:xfrm>
           <a:prstGeom prst="rect">
             <a:avLst/>
@@ -7654,7 +7744,7 @@
                 <a:tab algn="l" pos="0"/>
               </a:tabLst>
             </a:pPr>
-            <a:fld id="{EE26C95E-8333-4BDE-9FAF-3CB1C0E0C38D}" type="slidenum">
+            <a:fld id="{314F4A0B-0592-46BB-BAD9-867FC515CDC1}" type="slidenum">
               <a:rPr b="0" lang="en-IN" sz="2200" spc="-1" strike="noStrike">
                 <a:solidFill>
                   <a:schemeClr val="dk2"/>
@@ -7682,7 +7772,7 @@
         <p:spPr>
           <a:xfrm>
             <a:off x="5057640" y="290520"/>
-            <a:ext cx="9066960" cy="635760"/>
+            <a:ext cx="9065880" cy="634680"/>
           </a:xfrm>
           <a:prstGeom prst="rect">
             <a:avLst/>
@@ -7739,7 +7829,7 @@
         <p:spPr>
           <a:xfrm>
             <a:off x="7086600" y="10094400"/>
-            <a:ext cx="5027400" cy="1213200"/>
+            <a:ext cx="5026320" cy="1212120"/>
           </a:xfrm>
           <a:prstGeom prst="rect">
             <a:avLst/>
@@ -7797,7 +7887,7 @@
         <p:spPr>
           <a:xfrm>
             <a:off x="6333120" y="1828800"/>
-            <a:ext cx="6927840" cy="7542720"/>
+            <a:ext cx="6926760" cy="7541640"/>
           </a:xfrm>
           <a:prstGeom prst="rect">
             <a:avLst/>
@@ -7850,7 +7940,7 @@
         <p:spPr>
           <a:xfrm>
             <a:off x="4800600" y="2057400"/>
-            <a:ext cx="10056600" cy="7656840"/>
+            <a:ext cx="10055520" cy="7655760"/>
           </a:xfrm>
           <a:prstGeom prst="rect">
             <a:avLst/>
@@ -7869,7 +7959,7 @@
         <p:spPr>
           <a:xfrm>
             <a:off x="8015400" y="10287000"/>
-            <a:ext cx="4557600" cy="914400"/>
+            <a:ext cx="4556520" cy="913320"/>
           </a:xfrm>
           <a:prstGeom prst="rect">
             <a:avLst/>
@@ -7923,7 +8013,7 @@
         <p:spPr>
           <a:xfrm>
             <a:off x="7543800" y="685800"/>
-            <a:ext cx="4572000" cy="707760"/>
+            <a:ext cx="4570920" cy="706680"/>
           </a:xfrm>
           <a:prstGeom prst="rect">
             <a:avLst/>
@@ -8011,7 +8101,7 @@
         <p:spPr>
           <a:xfrm>
             <a:off x="2632680" y="1324080"/>
-            <a:ext cx="13596120" cy="8732520"/>
+            <a:ext cx="13595040" cy="8731440"/>
           </a:xfrm>
           <a:prstGeom prst="rect">
             <a:avLst/>
@@ -8030,7 +8120,7 @@
         <p:spPr>
           <a:xfrm>
             <a:off x="7772400" y="10287000"/>
-            <a:ext cx="4343040" cy="651240"/>
+            <a:ext cx="4341960" cy="650160"/>
           </a:xfrm>
           <a:prstGeom prst="rect">
             <a:avLst/>
@@ -8114,7 +8204,7 @@
         <p:spPr>
           <a:xfrm>
             <a:off x="7772400" y="10092960"/>
-            <a:ext cx="3867120" cy="651240"/>
+            <a:ext cx="3866040" cy="650160"/>
           </a:xfrm>
           <a:prstGeom prst="rect">
             <a:avLst/>
@@ -8172,7 +8262,7 @@
         <p:spPr>
           <a:xfrm>
             <a:off x="5913360" y="2057400"/>
-            <a:ext cx="7802640" cy="7802640"/>
+            <a:ext cx="7801560" cy="7801560"/>
           </a:xfrm>
           <a:prstGeom prst="rect">
             <a:avLst/>
@@ -8221,7 +8311,7 @@
         <p:spPr>
           <a:xfrm>
             <a:off x="8160840" y="10272240"/>
-            <a:ext cx="4412160" cy="650880"/>
+            <a:ext cx="4411080" cy="649800"/>
           </a:xfrm>
           <a:prstGeom prst="rect">
             <a:avLst/>
@@ -8279,7 +8369,7 @@
         <p:spPr>
           <a:xfrm>
             <a:off x="4386960" y="1509120"/>
-            <a:ext cx="9786240" cy="8320680"/>
+            <a:ext cx="9785160" cy="8319600"/>
           </a:xfrm>
           <a:prstGeom prst="rect">
             <a:avLst/>
@@ -8328,15 +8418,15 @@
         <p:spPr>
           <a:xfrm>
             <a:off x="2982960" y="712800"/>
-            <a:ext cx="53280" cy="53280"/>
+            <a:ext cx="52200" cy="52200"/>
           </a:xfrm>
           <a:custGeom>
             <a:avLst/>
             <a:gdLst>
-              <a:gd name="textAreaLeft" fmla="*/ 0 w 53280"/>
-              <a:gd name="textAreaRight" fmla="*/ 57240 w 53280"/>
-              <a:gd name="textAreaTop" fmla="*/ 0 h 53280"/>
-              <a:gd name="textAreaBottom" fmla="*/ 57240 h 53280"/>
+              <a:gd name="textAreaLeft" fmla="*/ 0 w 52200"/>
+              <a:gd name="textAreaRight" fmla="*/ 57240 w 52200"/>
+              <a:gd name="textAreaTop" fmla="*/ 0 h 52200"/>
+              <a:gd name="textAreaBottom" fmla="*/ 57240 h 52200"/>
             </a:gdLst>
             <a:ahLst/>
             <a:rect l="textAreaLeft" t="textAreaTop" r="textAreaRight" b="textAreaBottom"/>
@@ -8511,15 +8601,15 @@
         <p:spPr>
           <a:xfrm>
             <a:off x="2998800" y="725400"/>
-            <a:ext cx="21600" cy="27720"/>
+            <a:ext cx="20520" cy="26640"/>
           </a:xfrm>
           <a:custGeom>
             <a:avLst/>
             <a:gdLst>
-              <a:gd name="textAreaLeft" fmla="*/ 0 w 21600"/>
-              <a:gd name="textAreaRight" fmla="*/ 25560 w 21600"/>
-              <a:gd name="textAreaTop" fmla="*/ 0 h 27720"/>
-              <a:gd name="textAreaBottom" fmla="*/ 31680 h 27720"/>
+              <a:gd name="textAreaLeft" fmla="*/ 0 w 20520"/>
+              <a:gd name="textAreaRight" fmla="*/ 25560 w 20520"/>
+              <a:gd name="textAreaTop" fmla="*/ 0 h 26640"/>
+              <a:gd name="textAreaBottom" fmla="*/ 31680 h 26640"/>
             </a:gdLst>
             <a:ahLst/>
             <a:rect l="textAreaLeft" t="textAreaTop" r="textAreaRight" b="textAreaBottom"/>
@@ -8689,7 +8779,7 @@
         <p:spPr>
           <a:xfrm>
             <a:off x="18627840" y="10253160"/>
-            <a:ext cx="1201320" cy="860400"/>
+            <a:ext cx="1200240" cy="859320"/>
           </a:xfrm>
           <a:prstGeom prst="rect">
             <a:avLst/>
@@ -8731,7 +8821,7 @@
                 <a:tab algn="l" pos="0"/>
               </a:tabLst>
             </a:pPr>
-            <a:fld id="{F2438794-E7AC-4FBB-ABE8-67DED4C739EC}" type="slidenum">
+            <a:fld id="{02FE205A-6B0F-4DFD-9F48-8351EB4389E0}" type="slidenum">
               <a:rPr b="0" lang="en-IN" sz="2200" spc="-1" strike="noStrike">
                 <a:solidFill>
                   <a:schemeClr val="dk2"/>
@@ -8759,7 +8849,7 @@
         <p:spPr>
           <a:xfrm>
             <a:off x="5057640" y="290520"/>
-            <a:ext cx="9067320" cy="636120"/>
+            <a:ext cx="9066240" cy="635040"/>
           </a:xfrm>
           <a:prstGeom prst="rect">
             <a:avLst/>
@@ -8816,7 +8906,7 @@
         <p:spPr>
           <a:xfrm>
             <a:off x="7511400" y="8595720"/>
-            <a:ext cx="3235680" cy="650880"/>
+            <a:ext cx="3234600" cy="649800"/>
           </a:xfrm>
           <a:prstGeom prst="rect">
             <a:avLst/>
@@ -8861,39 +8951,16 @@
           </a:p>
         </p:txBody>
       </p:sp>
-      <p:pic>
-        <p:nvPicPr>
-          <p:cNvPr id="125" name="" descr=""/>
-          <p:cNvPicPr/>
-          <p:nvPr/>
-        </p:nvPicPr>
-        <p:blipFill>
-          <a:blip r:embed="rId1"/>
-          <a:stretch/>
-        </p:blipFill>
-        <p:spPr>
-          <a:xfrm>
-            <a:off x="3711600" y="3186000"/>
-            <a:ext cx="11911320" cy="4639680"/>
-          </a:xfrm>
-          <a:prstGeom prst="rect">
-            <a:avLst/>
-          </a:prstGeom>
-          <a:ln w="0">
-            <a:noFill/>
-          </a:ln>
-        </p:spPr>
-      </p:pic>
       <p:sp>
         <p:nvSpPr>
-          <p:cNvPr id="126" name=""/>
+          <p:cNvPr id="125" name=""/>
           <p:cNvSpPr/>
           <p:nvPr/>
         </p:nvSpPr>
         <p:spPr>
           <a:xfrm>
-            <a:off x="15278760" y="8458200"/>
-            <a:ext cx="4379040" cy="1369800"/>
+            <a:off x="13716000" y="8686800"/>
+            <a:ext cx="5714280" cy="1368720"/>
           </a:xfrm>
           <a:prstGeom prst="rect">
             <a:avLst/>
@@ -8927,7 +8994,7 @@
                 <a:latin typeface="Times New Roman"/>
                 <a:ea typeface="Times New Roman"/>
               </a:rPr>
-              <a:t>DS1- store data</a:t>
+              <a:t>DS1- User data,Location history,Alert record</a:t>
             </a:r>
             <a:endParaRPr b="0" lang="en-US" sz="2400" spc="-1" strike="noStrike">
               <a:solidFill>
@@ -8950,7 +9017,7 @@
                 <a:latin typeface="Times New Roman"/>
                 <a:ea typeface="Times New Roman"/>
               </a:rPr>
-              <a:t>DS2-retrive data</a:t>
+              <a:t>DS2-User data,Location history,Alert record</a:t>
             </a:r>
             <a:endParaRPr b="0" lang="en-US" sz="2400" spc="-1" strike="noStrike">
               <a:solidFill>
@@ -8961,6 +9028,29 @@
           </a:p>
         </p:txBody>
       </p:sp>
+      <p:pic>
+        <p:nvPicPr>
+          <p:cNvPr id="126" name="" descr=""/>
+          <p:cNvPicPr/>
+          <p:nvPr/>
+        </p:nvPicPr>
+        <p:blipFill>
+          <a:blip r:embed="rId1"/>
+          <a:stretch/>
+        </p:blipFill>
+        <p:spPr>
+          <a:xfrm>
+            <a:off x="3726360" y="2743200"/>
+            <a:ext cx="12610440" cy="4912920"/>
+          </a:xfrm>
+          <a:prstGeom prst="rect">
+            <a:avLst/>
+          </a:prstGeom>
+          <a:ln w="0">
+            <a:noFill/>
+          </a:ln>
+        </p:spPr>
+      </p:pic>
     </p:spTree>
   </p:cSld>
   <mc:AlternateContent>
@@ -9003,8 +9093,8 @@
         </p:blipFill>
         <p:spPr>
           <a:xfrm>
-            <a:off x="4401360" y="2286000"/>
-            <a:ext cx="10698120" cy="7530840"/>
+            <a:off x="4389840" y="2070720"/>
+            <a:ext cx="10697040" cy="7529760"/>
           </a:xfrm>
           <a:prstGeom prst="rect">
             <a:avLst/>
@@ -9023,7 +9113,7 @@
         <p:spPr>
           <a:xfrm>
             <a:off x="8121240" y="10092240"/>
-            <a:ext cx="3765960" cy="650880"/>
+            <a:ext cx="3764880" cy="649800"/>
           </a:xfrm>
           <a:prstGeom prst="rect">
             <a:avLst/>
@@ -9076,8 +9166,8 @@
         </p:nvSpPr>
         <p:spPr>
           <a:xfrm>
-            <a:off x="16002000" y="9601200"/>
-            <a:ext cx="3573000" cy="762840"/>
+            <a:off x="13258800" y="9750960"/>
+            <a:ext cx="6135840" cy="1100520"/>
           </a:xfrm>
           <a:prstGeom prst="rect">
             <a:avLst/>
@@ -9111,7 +9201,7 @@
                 <a:latin typeface="Times New Roman"/>
                 <a:ea typeface="Times New Roman"/>
               </a:rPr>
-              <a:t>DS1- retrive</a:t>
+              <a:t>DS1- User data,Location history,Alert record,Environmental data</a:t>
             </a:r>
             <a:endParaRPr b="0" lang="en-US" sz="2400" spc="-1" strike="noStrike">
               <a:solidFill>
@@ -9134,7 +9224,7 @@
                 <a:latin typeface="Times New Roman"/>
                 <a:ea typeface="Times New Roman"/>
               </a:rPr>
-              <a:t>DS2-store</a:t>
+              <a:t>DS2-User data,Location history,Alert record</a:t>
             </a:r>
             <a:endParaRPr b="0" lang="en-US" sz="2400" spc="-1" strike="noStrike">
               <a:solidFill>
@@ -9188,7 +9278,7 @@
         <p:spPr>
           <a:xfrm>
             <a:off x="3082680" y="1932480"/>
-            <a:ext cx="13374720" cy="7997400"/>
+            <a:ext cx="13373640" cy="7996320"/>
           </a:xfrm>
           <a:prstGeom prst="rect">
             <a:avLst/>
@@ -9207,7 +9297,7 @@
         <p:spPr>
           <a:xfrm>
             <a:off x="9340200" y="10396800"/>
-            <a:ext cx="3235680" cy="650880"/>
+            <a:ext cx="3234600" cy="649800"/>
           </a:xfrm>
           <a:prstGeom prst="rect">
             <a:avLst/>
@@ -9261,7 +9351,7 @@
         <p:spPr>
           <a:xfrm>
             <a:off x="15856200" y="9931680"/>
-            <a:ext cx="3573000" cy="762840"/>
+            <a:ext cx="3571920" cy="761760"/>
           </a:xfrm>
           <a:prstGeom prst="rect">
             <a:avLst/>
@@ -9368,15 +9458,15 @@
         <p:spPr>
           <a:xfrm>
             <a:off x="2982960" y="712800"/>
-            <a:ext cx="53280" cy="53280"/>
+            <a:ext cx="52200" cy="52200"/>
           </a:xfrm>
           <a:custGeom>
             <a:avLst/>
             <a:gdLst>
-              <a:gd name="textAreaLeft" fmla="*/ 0 w 53280"/>
-              <a:gd name="textAreaRight" fmla="*/ 57240 w 53280"/>
-              <a:gd name="textAreaTop" fmla="*/ 0 h 53280"/>
-              <a:gd name="textAreaBottom" fmla="*/ 57240 h 53280"/>
+              <a:gd name="textAreaLeft" fmla="*/ 0 w 52200"/>
+              <a:gd name="textAreaRight" fmla="*/ 57240 w 52200"/>
+              <a:gd name="textAreaTop" fmla="*/ 0 h 52200"/>
+              <a:gd name="textAreaBottom" fmla="*/ 57240 h 52200"/>
             </a:gdLst>
             <a:ahLst/>
             <a:rect l="textAreaLeft" t="textAreaTop" r="textAreaRight" b="textAreaBottom"/>
@@ -9551,15 +9641,15 @@
         <p:spPr>
           <a:xfrm>
             <a:off x="2998800" y="725400"/>
-            <a:ext cx="21600" cy="27720"/>
+            <a:ext cx="20520" cy="26640"/>
           </a:xfrm>
           <a:custGeom>
             <a:avLst/>
             <a:gdLst>
-              <a:gd name="textAreaLeft" fmla="*/ 0 w 21600"/>
-              <a:gd name="textAreaRight" fmla="*/ 25560 w 21600"/>
-              <a:gd name="textAreaTop" fmla="*/ 0 h 27720"/>
-              <a:gd name="textAreaBottom" fmla="*/ 31680 h 27720"/>
+              <a:gd name="textAreaLeft" fmla="*/ 0 w 20520"/>
+              <a:gd name="textAreaRight" fmla="*/ 25560 w 20520"/>
+              <a:gd name="textAreaTop" fmla="*/ 0 h 26640"/>
+              <a:gd name="textAreaBottom" fmla="*/ 31680 h 26640"/>
             </a:gdLst>
             <a:ahLst/>
             <a:rect l="textAreaLeft" t="textAreaTop" r="textAreaRight" b="textAreaBottom"/>
@@ -9729,7 +9819,7 @@
         <p:spPr>
           <a:xfrm>
             <a:off x="18627840" y="10253160"/>
-            <a:ext cx="1201320" cy="860400"/>
+            <a:ext cx="1200240" cy="859320"/>
           </a:xfrm>
           <a:prstGeom prst="rect">
             <a:avLst/>
@@ -9771,7 +9861,7 @@
                 <a:tab algn="l" pos="0"/>
               </a:tabLst>
             </a:pPr>
-            <a:fld id="{C42218A1-855C-41D6-9F93-679358512084}" type="slidenum">
+            <a:fld id="{9DF3E73C-6929-4005-A0BB-2402730E3E10}" type="slidenum">
               <a:rPr b="0" lang="en-IN" sz="2200" spc="-1" strike="noStrike">
                 <a:solidFill>
                   <a:schemeClr val="dk2"/>
@@ -9799,7 +9889,7 @@
         <p:spPr>
           <a:xfrm>
             <a:off x="5057640" y="290520"/>
-            <a:ext cx="9066960" cy="635760"/>
+            <a:ext cx="9065880" cy="634680"/>
           </a:xfrm>
           <a:prstGeom prst="rect">
             <a:avLst/>
@@ -9856,7 +9946,7 @@
         <p:spPr>
           <a:xfrm>
             <a:off x="554400" y="2341440"/>
-            <a:ext cx="18659880" cy="7889040"/>
+            <a:ext cx="18658800" cy="7887960"/>
           </a:xfrm>
           <a:prstGeom prst="rect">
             <a:avLst/>
@@ -10254,15 +10344,15 @@
         <p:spPr>
           <a:xfrm>
             <a:off x="2982960" y="712800"/>
-            <a:ext cx="53280" cy="53280"/>
+            <a:ext cx="52200" cy="52200"/>
           </a:xfrm>
           <a:custGeom>
             <a:avLst/>
             <a:gdLst>
-              <a:gd name="textAreaLeft" fmla="*/ 0 w 53280"/>
-              <a:gd name="textAreaRight" fmla="*/ 57240 w 53280"/>
-              <a:gd name="textAreaTop" fmla="*/ 0 h 53280"/>
-              <a:gd name="textAreaBottom" fmla="*/ 57240 h 53280"/>
+              <a:gd name="textAreaLeft" fmla="*/ 0 w 52200"/>
+              <a:gd name="textAreaRight" fmla="*/ 57240 w 52200"/>
+              <a:gd name="textAreaTop" fmla="*/ 0 h 52200"/>
+              <a:gd name="textAreaBottom" fmla="*/ 57240 h 52200"/>
             </a:gdLst>
             <a:ahLst/>
             <a:rect l="textAreaLeft" t="textAreaTop" r="textAreaRight" b="textAreaBottom"/>
@@ -10437,15 +10527,15 @@
         <p:spPr>
           <a:xfrm>
             <a:off x="2998800" y="725400"/>
-            <a:ext cx="21600" cy="27720"/>
+            <a:ext cx="20520" cy="26640"/>
           </a:xfrm>
           <a:custGeom>
             <a:avLst/>
             <a:gdLst>
-              <a:gd name="textAreaLeft" fmla="*/ 0 w 21600"/>
-              <a:gd name="textAreaRight" fmla="*/ 25560 w 21600"/>
-              <a:gd name="textAreaTop" fmla="*/ 0 h 27720"/>
-              <a:gd name="textAreaBottom" fmla="*/ 31680 h 27720"/>
+              <a:gd name="textAreaLeft" fmla="*/ 0 w 20520"/>
+              <a:gd name="textAreaRight" fmla="*/ 25560 w 20520"/>
+              <a:gd name="textAreaTop" fmla="*/ 0 h 26640"/>
+              <a:gd name="textAreaBottom" fmla="*/ 31680 h 26640"/>
             </a:gdLst>
             <a:ahLst/>
             <a:rect l="textAreaLeft" t="textAreaTop" r="textAreaRight" b="textAreaBottom"/>
@@ -10615,7 +10705,7 @@
         <p:spPr>
           <a:xfrm>
             <a:off x="18627840" y="10253160"/>
-            <a:ext cx="1201320" cy="860400"/>
+            <a:ext cx="1200240" cy="859320"/>
           </a:xfrm>
           <a:prstGeom prst="rect">
             <a:avLst/>
@@ -10657,7 +10747,7 @@
                 <a:tab algn="l" pos="0"/>
               </a:tabLst>
             </a:pPr>
-            <a:fld id="{70B8BD2E-E5E8-48A6-839F-497A8B69B25C}" type="slidenum">
+            <a:fld id="{7A2CD0C0-1147-4CC9-B8B9-7A28ACE0B69A}" type="slidenum">
               <a:rPr b="0" lang="en-IN" sz="2200" spc="-1" strike="noStrike">
                 <a:solidFill>
                   <a:schemeClr val="dk2"/>
@@ -10685,7 +10775,7 @@
         <p:spPr>
           <a:xfrm>
             <a:off x="905040" y="2229840"/>
-            <a:ext cx="18523800" cy="9079560"/>
+            <a:ext cx="18522720" cy="9079560"/>
           </a:xfrm>
           <a:prstGeom prst="rect">
             <a:avLst/>
@@ -11058,7 +11148,7 @@
         <p:spPr>
           <a:xfrm>
             <a:off x="5057640" y="290520"/>
-            <a:ext cx="9066960" cy="635760"/>
+            <a:ext cx="9065880" cy="634680"/>
           </a:xfrm>
           <a:prstGeom prst="rect">
             <a:avLst/>
@@ -11177,15 +11267,15 @@
         <p:spPr>
           <a:xfrm>
             <a:off x="2982960" y="712800"/>
-            <a:ext cx="53280" cy="53280"/>
+            <a:ext cx="52200" cy="52200"/>
           </a:xfrm>
           <a:custGeom>
             <a:avLst/>
             <a:gdLst>
-              <a:gd name="textAreaLeft" fmla="*/ 0 w 53280"/>
-              <a:gd name="textAreaRight" fmla="*/ 57240 w 53280"/>
-              <a:gd name="textAreaTop" fmla="*/ 0 h 53280"/>
-              <a:gd name="textAreaBottom" fmla="*/ 57240 h 53280"/>
+              <a:gd name="textAreaLeft" fmla="*/ 0 w 52200"/>
+              <a:gd name="textAreaRight" fmla="*/ 57240 w 52200"/>
+              <a:gd name="textAreaTop" fmla="*/ 0 h 52200"/>
+              <a:gd name="textAreaBottom" fmla="*/ 57240 h 52200"/>
             </a:gdLst>
             <a:ahLst/>
             <a:rect l="textAreaLeft" t="textAreaTop" r="textAreaRight" b="textAreaBottom"/>
@@ -11360,15 +11450,15 @@
         <p:spPr>
           <a:xfrm>
             <a:off x="2998800" y="725400"/>
-            <a:ext cx="21600" cy="27720"/>
+            <a:ext cx="20520" cy="26640"/>
           </a:xfrm>
           <a:custGeom>
             <a:avLst/>
             <a:gdLst>
-              <a:gd name="textAreaLeft" fmla="*/ 0 w 21600"/>
-              <a:gd name="textAreaRight" fmla="*/ 25560 w 21600"/>
-              <a:gd name="textAreaTop" fmla="*/ 0 h 27720"/>
-              <a:gd name="textAreaBottom" fmla="*/ 31680 h 27720"/>
+              <a:gd name="textAreaLeft" fmla="*/ 0 w 20520"/>
+              <a:gd name="textAreaRight" fmla="*/ 25560 w 20520"/>
+              <a:gd name="textAreaTop" fmla="*/ 0 h 26640"/>
+              <a:gd name="textAreaBottom" fmla="*/ 31680 h 26640"/>
             </a:gdLst>
             <a:ahLst/>
             <a:rect l="textAreaLeft" t="textAreaTop" r="textAreaRight" b="textAreaBottom"/>
@@ -11538,7 +11628,7 @@
         <p:spPr>
           <a:xfrm>
             <a:off x="18627840" y="10253160"/>
-            <a:ext cx="1201320" cy="860400"/>
+            <a:ext cx="1200240" cy="859320"/>
           </a:xfrm>
           <a:prstGeom prst="rect">
             <a:avLst/>
@@ -11580,7 +11670,7 @@
                 <a:tab algn="l" pos="0"/>
               </a:tabLst>
             </a:pPr>
-            <a:fld id="{54AC211B-B42E-4CF1-8335-48D4E3FA3102}" type="slidenum">
+            <a:fld id="{EC02B047-1CA5-4B17-B90B-475987C5BC7B}" type="slidenum">
               <a:rPr b="0" lang="en-IN" sz="2200" spc="-1" strike="noStrike">
                 <a:solidFill>
                   <a:schemeClr val="dk2"/>
@@ -11608,7 +11698,7 @@
         <p:spPr>
           <a:xfrm>
             <a:off x="1008000" y="2411280"/>
-            <a:ext cx="18523800" cy="7795800"/>
+            <a:ext cx="18522720" cy="7795800"/>
           </a:xfrm>
           <a:prstGeom prst="rect">
             <a:avLst/>
@@ -11919,7 +12009,7 @@
         <p:spPr>
           <a:xfrm>
             <a:off x="5040000" y="971640"/>
-            <a:ext cx="9067320" cy="636120"/>
+            <a:ext cx="9066240" cy="635040"/>
           </a:xfrm>
           <a:prstGeom prst="rect">
             <a:avLst/>
@@ -12006,15 +12096,15 @@
         <p:spPr>
           <a:xfrm>
             <a:off x="2982960" y="712800"/>
-            <a:ext cx="53280" cy="53280"/>
+            <a:ext cx="52200" cy="52200"/>
           </a:xfrm>
           <a:custGeom>
             <a:avLst/>
             <a:gdLst>
-              <a:gd name="textAreaLeft" fmla="*/ 0 w 53280"/>
-              <a:gd name="textAreaRight" fmla="*/ 57240 w 53280"/>
-              <a:gd name="textAreaTop" fmla="*/ 0 h 53280"/>
-              <a:gd name="textAreaBottom" fmla="*/ 57240 h 53280"/>
+              <a:gd name="textAreaLeft" fmla="*/ 0 w 52200"/>
+              <a:gd name="textAreaRight" fmla="*/ 57240 w 52200"/>
+              <a:gd name="textAreaTop" fmla="*/ 0 h 52200"/>
+              <a:gd name="textAreaBottom" fmla="*/ 57240 h 52200"/>
             </a:gdLst>
             <a:ahLst/>
             <a:rect l="textAreaLeft" t="textAreaTop" r="textAreaRight" b="textAreaBottom"/>
@@ -12189,15 +12279,15 @@
         <p:spPr>
           <a:xfrm>
             <a:off x="2998800" y="725400"/>
-            <a:ext cx="21600" cy="27720"/>
+            <a:ext cx="20520" cy="26640"/>
           </a:xfrm>
           <a:custGeom>
             <a:avLst/>
             <a:gdLst>
-              <a:gd name="textAreaLeft" fmla="*/ 0 w 21600"/>
-              <a:gd name="textAreaRight" fmla="*/ 25560 w 21600"/>
-              <a:gd name="textAreaTop" fmla="*/ 0 h 27720"/>
-              <a:gd name="textAreaBottom" fmla="*/ 31680 h 27720"/>
+              <a:gd name="textAreaLeft" fmla="*/ 0 w 20520"/>
+              <a:gd name="textAreaRight" fmla="*/ 25560 w 20520"/>
+              <a:gd name="textAreaTop" fmla="*/ 0 h 26640"/>
+              <a:gd name="textAreaBottom" fmla="*/ 31680 h 26640"/>
             </a:gdLst>
             <a:ahLst/>
             <a:rect l="textAreaLeft" t="textAreaTop" r="textAreaRight" b="textAreaBottom"/>
@@ -12367,7 +12457,7 @@
         <p:spPr>
           <a:xfrm>
             <a:off x="18627840" y="10253160"/>
-            <a:ext cx="1201320" cy="860400"/>
+            <a:ext cx="1200240" cy="859320"/>
           </a:xfrm>
           <a:prstGeom prst="rect">
             <a:avLst/>
@@ -12409,7 +12499,7 @@
                 <a:tab algn="l" pos="0"/>
               </a:tabLst>
             </a:pPr>
-            <a:fld id="{C8D223E7-E188-42AC-A592-BE6DF96B2283}" type="slidenum">
+            <a:fld id="{8A9203FC-8159-41F7-AA13-5E822C0B485E}" type="slidenum">
               <a:rPr b="0" lang="en-IN" sz="2200" spc="-1" strike="noStrike">
                 <a:solidFill>
                   <a:schemeClr val="dk2"/>
@@ -12437,7 +12527,7 @@
         <p:spPr>
           <a:xfrm>
             <a:off x="5029200" y="735840"/>
-            <a:ext cx="9066960" cy="635760"/>
+            <a:ext cx="9065880" cy="634680"/>
           </a:xfrm>
           <a:prstGeom prst="rect">
             <a:avLst/>
@@ -13145,15 +13235,15 @@
         <p:spPr>
           <a:xfrm>
             <a:off x="2982960" y="712800"/>
-            <a:ext cx="53280" cy="53280"/>
+            <a:ext cx="52200" cy="52200"/>
           </a:xfrm>
           <a:custGeom>
             <a:avLst/>
             <a:gdLst>
-              <a:gd name="textAreaLeft" fmla="*/ 0 w 53280"/>
-              <a:gd name="textAreaRight" fmla="*/ 57240 w 53280"/>
-              <a:gd name="textAreaTop" fmla="*/ 0 h 53280"/>
-              <a:gd name="textAreaBottom" fmla="*/ 57240 h 53280"/>
+              <a:gd name="textAreaLeft" fmla="*/ 0 w 52200"/>
+              <a:gd name="textAreaRight" fmla="*/ 57240 w 52200"/>
+              <a:gd name="textAreaTop" fmla="*/ 0 h 52200"/>
+              <a:gd name="textAreaBottom" fmla="*/ 57240 h 52200"/>
             </a:gdLst>
             <a:ahLst/>
             <a:rect l="textAreaLeft" t="textAreaTop" r="textAreaRight" b="textAreaBottom"/>
@@ -13328,15 +13418,15 @@
         <p:spPr>
           <a:xfrm>
             <a:off x="2998800" y="725400"/>
-            <a:ext cx="21600" cy="27720"/>
+            <a:ext cx="20520" cy="26640"/>
           </a:xfrm>
           <a:custGeom>
             <a:avLst/>
             <a:gdLst>
-              <a:gd name="textAreaLeft" fmla="*/ 0 w 21600"/>
-              <a:gd name="textAreaRight" fmla="*/ 25560 w 21600"/>
-              <a:gd name="textAreaTop" fmla="*/ 0 h 27720"/>
-              <a:gd name="textAreaBottom" fmla="*/ 31680 h 27720"/>
+              <a:gd name="textAreaLeft" fmla="*/ 0 w 20520"/>
+              <a:gd name="textAreaRight" fmla="*/ 25560 w 20520"/>
+              <a:gd name="textAreaTop" fmla="*/ 0 h 26640"/>
+              <a:gd name="textAreaBottom" fmla="*/ 31680 h 26640"/>
             </a:gdLst>
             <a:ahLst/>
             <a:rect l="textAreaLeft" t="textAreaTop" r="textAreaRight" b="textAreaBottom"/>
@@ -13506,7 +13596,7 @@
         <p:spPr>
           <a:xfrm>
             <a:off x="18627840" y="10253160"/>
-            <a:ext cx="1201320" cy="860400"/>
+            <a:ext cx="1200240" cy="859320"/>
           </a:xfrm>
           <a:prstGeom prst="rect">
             <a:avLst/>
@@ -13548,7 +13638,7 @@
                 <a:tab algn="l" pos="0"/>
               </a:tabLst>
             </a:pPr>
-            <a:fld id="{731BB5C3-58D4-4C94-85B7-0A2F6CD35950}" type="slidenum">
+            <a:fld id="{E14C8A38-FE96-47A2-AD15-1D7079987D24}" type="slidenum">
               <a:rPr b="0" lang="en-IN" sz="2200" spc="-1" strike="noStrike">
                 <a:solidFill>
                   <a:schemeClr val="dk2"/>
@@ -13576,7 +13666,7 @@
         <p:spPr>
           <a:xfrm>
             <a:off x="5057640" y="290520"/>
-            <a:ext cx="9066960" cy="635760"/>
+            <a:ext cx="9065880" cy="634680"/>
           </a:xfrm>
           <a:prstGeom prst="rect">
             <a:avLst/>
@@ -15678,7 +15768,7 @@
         <p:spPr>
           <a:xfrm>
             <a:off x="1320480" y="2081160"/>
-            <a:ext cx="9422640" cy="708480"/>
+            <a:ext cx="9421560" cy="707400"/>
           </a:xfrm>
           <a:prstGeom prst="rect">
             <a:avLst/>
@@ -15762,15 +15852,15 @@
         <p:spPr>
           <a:xfrm>
             <a:off x="2982960" y="712800"/>
-            <a:ext cx="53280" cy="53280"/>
+            <a:ext cx="52200" cy="52200"/>
           </a:xfrm>
           <a:custGeom>
             <a:avLst/>
             <a:gdLst>
-              <a:gd name="textAreaLeft" fmla="*/ 0 w 53280"/>
-              <a:gd name="textAreaRight" fmla="*/ 57240 w 53280"/>
-              <a:gd name="textAreaTop" fmla="*/ 0 h 53280"/>
-              <a:gd name="textAreaBottom" fmla="*/ 57240 h 53280"/>
+              <a:gd name="textAreaLeft" fmla="*/ 0 w 52200"/>
+              <a:gd name="textAreaRight" fmla="*/ 57240 w 52200"/>
+              <a:gd name="textAreaTop" fmla="*/ 0 h 52200"/>
+              <a:gd name="textAreaBottom" fmla="*/ 57240 h 52200"/>
             </a:gdLst>
             <a:ahLst/>
             <a:rect l="textAreaLeft" t="textAreaTop" r="textAreaRight" b="textAreaBottom"/>
@@ -15945,15 +16035,15 @@
         <p:spPr>
           <a:xfrm>
             <a:off x="2998800" y="725400"/>
-            <a:ext cx="21600" cy="27720"/>
+            <a:ext cx="20520" cy="26640"/>
           </a:xfrm>
           <a:custGeom>
             <a:avLst/>
             <a:gdLst>
-              <a:gd name="textAreaLeft" fmla="*/ 0 w 21600"/>
-              <a:gd name="textAreaRight" fmla="*/ 25560 w 21600"/>
-              <a:gd name="textAreaTop" fmla="*/ 0 h 27720"/>
-              <a:gd name="textAreaBottom" fmla="*/ 31680 h 27720"/>
+              <a:gd name="textAreaLeft" fmla="*/ 0 w 20520"/>
+              <a:gd name="textAreaRight" fmla="*/ 25560 w 20520"/>
+              <a:gd name="textAreaTop" fmla="*/ 0 h 26640"/>
+              <a:gd name="textAreaBottom" fmla="*/ 31680 h 26640"/>
             </a:gdLst>
             <a:ahLst/>
             <a:rect l="textAreaLeft" t="textAreaTop" r="textAreaRight" b="textAreaBottom"/>
@@ -16123,7 +16213,7 @@
         <p:spPr>
           <a:xfrm>
             <a:off x="18627840" y="10253160"/>
-            <a:ext cx="1201320" cy="860400"/>
+            <a:ext cx="1200240" cy="859320"/>
           </a:xfrm>
           <a:prstGeom prst="rect">
             <a:avLst/>
@@ -16165,7 +16255,7 @@
                 <a:tab algn="l" pos="0"/>
               </a:tabLst>
             </a:pPr>
-            <a:fld id="{896479BC-91CE-4957-B316-67E0CA5890B2}" type="slidenum">
+            <a:fld id="{06DEB554-C153-4C15-8984-B2A92CC58D44}" type="slidenum">
               <a:rPr b="0" lang="en-IN" sz="2200" spc="-1" strike="noStrike">
                 <a:solidFill>
                   <a:schemeClr val="dk2"/>
@@ -16193,7 +16283,7 @@
         <p:spPr>
           <a:xfrm>
             <a:off x="995400" y="2378160"/>
-            <a:ext cx="18523800" cy="6031440"/>
+            <a:ext cx="18522720" cy="5122440"/>
           </a:xfrm>
           <a:prstGeom prst="rect">
             <a:avLst/>
@@ -16389,7 +16479,7 @@
                 <a:latin typeface="times new roman"/>
                 <a:ea typeface="Arial"/>
               </a:rPr>
-              <a:t>Python allows flexible backend scripting for data processing, alert logic, and easy future enhancements.</a:t>
+              <a:t>Leaflet.js integrates interactive maps for live location tracking and visualization of all field nodes.</a:t>
             </a:r>
             <a:endParaRPr b="0" lang="en-US" sz="3200" spc="-1" strike="noStrike">
               <a:solidFill>
@@ -16426,43 +16516,6 @@
                 <a:latin typeface="times new roman"/>
                 <a:ea typeface="Arial"/>
               </a:rPr>
-              <a:t>Leaflet.js integrates interactive maps for live location tracking and visualization of all field nodes.</a:t>
-            </a:r>
-            <a:endParaRPr b="0" lang="en-US" sz="3200" spc="-1" strike="noStrike">
-              <a:solidFill>
-                <a:srgbClr val="000000"/>
-              </a:solidFill>
-              <a:latin typeface="Arial"/>
-            </a:endParaRPr>
-          </a:p>
-          <a:p>
-            <a:pPr marL="216000" indent="-216000">
-              <a:lnSpc>
-                <a:spcPct val="100000"/>
-              </a:lnSpc>
-              <a:spcBef>
-                <a:spcPts val="1757"/>
-              </a:spcBef>
-              <a:spcAft>
-                <a:spcPts val="1559"/>
-              </a:spcAft>
-              <a:buClr>
-                <a:srgbClr val="000000"/>
-              </a:buClr>
-              <a:buFont typeface="Symbol" charset="2"/>
-              <a:buChar char=""/>
-              <a:tabLst>
-                <a:tab algn="l" pos="0"/>
-              </a:tabLst>
-            </a:pPr>
-            <a:r>
-              <a:rPr b="0" lang="en-US" sz="3200" spc="-1" strike="noStrike">
-                <a:solidFill>
-                  <a:srgbClr val="000000"/>
-                </a:solidFill>
-                <a:latin typeface="times new roman"/>
-                <a:ea typeface="Arial"/>
-              </a:rPr>
               <a:t>Arduino IDE simplifies firmware development and rapid prototyping for ESP32-based sensor nodes.</a:t>
             </a:r>
             <a:endParaRPr b="0" lang="en-US" sz="3200" spc="-1" strike="noStrike">
@@ -16483,7 +16536,7 @@
         <p:spPr>
           <a:xfrm>
             <a:off x="5057640" y="290520"/>
-            <a:ext cx="9066960" cy="635760"/>
+            <a:ext cx="9065880" cy="634680"/>
           </a:xfrm>
           <a:prstGeom prst="rect">
             <a:avLst/>
@@ -16540,7 +16593,7 @@
         <p:spPr>
           <a:xfrm>
             <a:off x="1025280" y="6143400"/>
-            <a:ext cx="18523800" cy="455400"/>
+            <a:ext cx="18522720" cy="455400"/>
           </a:xfrm>
           <a:prstGeom prst="rect">
             <a:avLst/>
@@ -16633,15 +16686,15 @@
         <p:spPr>
           <a:xfrm>
             <a:off x="2982960" y="712800"/>
-            <a:ext cx="53280" cy="53280"/>
+            <a:ext cx="52200" cy="52200"/>
           </a:xfrm>
           <a:custGeom>
             <a:avLst/>
             <a:gdLst>
-              <a:gd name="textAreaLeft" fmla="*/ 0 w 53280"/>
-              <a:gd name="textAreaRight" fmla="*/ 57240 w 53280"/>
-              <a:gd name="textAreaTop" fmla="*/ 0 h 53280"/>
-              <a:gd name="textAreaBottom" fmla="*/ 57240 h 53280"/>
+              <a:gd name="textAreaLeft" fmla="*/ 0 w 52200"/>
+              <a:gd name="textAreaRight" fmla="*/ 57240 w 52200"/>
+              <a:gd name="textAreaTop" fmla="*/ 0 h 52200"/>
+              <a:gd name="textAreaBottom" fmla="*/ 57240 h 52200"/>
             </a:gdLst>
             <a:ahLst/>
             <a:rect l="textAreaLeft" t="textAreaTop" r="textAreaRight" b="textAreaBottom"/>
@@ -16816,15 +16869,15 @@
         <p:spPr>
           <a:xfrm>
             <a:off x="2998800" y="725400"/>
-            <a:ext cx="21600" cy="27720"/>
+            <a:ext cx="20520" cy="26640"/>
           </a:xfrm>
           <a:custGeom>
             <a:avLst/>
             <a:gdLst>
-              <a:gd name="textAreaLeft" fmla="*/ 0 w 21600"/>
-              <a:gd name="textAreaRight" fmla="*/ 25560 w 21600"/>
-              <a:gd name="textAreaTop" fmla="*/ 0 h 27720"/>
-              <a:gd name="textAreaBottom" fmla="*/ 31680 h 27720"/>
+              <a:gd name="textAreaLeft" fmla="*/ 0 w 20520"/>
+              <a:gd name="textAreaRight" fmla="*/ 25560 w 20520"/>
+              <a:gd name="textAreaTop" fmla="*/ 0 h 26640"/>
+              <a:gd name="textAreaBottom" fmla="*/ 31680 h 26640"/>
             </a:gdLst>
             <a:ahLst/>
             <a:rect l="textAreaLeft" t="textAreaTop" r="textAreaRight" b="textAreaBottom"/>
@@ -16994,7 +17047,7 @@
         <p:spPr>
           <a:xfrm>
             <a:off x="18627840" y="10253160"/>
-            <a:ext cx="1201320" cy="860400"/>
+            <a:ext cx="1200240" cy="859320"/>
           </a:xfrm>
           <a:prstGeom prst="rect">
             <a:avLst/>
@@ -17036,7 +17089,7 @@
                 <a:tab algn="l" pos="0"/>
               </a:tabLst>
             </a:pPr>
-            <a:fld id="{AF4DA732-550E-4D4C-9CB2-671B0161F4CD}" type="slidenum">
+            <a:fld id="{B77A6E44-E22B-4A55-9BA6-D00FBCE34741}" type="slidenum">
               <a:rPr b="0" lang="en-IN" sz="2200" spc="-1" strike="noStrike">
                 <a:solidFill>
                   <a:schemeClr val="dk2"/>
@@ -17064,7 +17117,7 @@
         <p:spPr>
           <a:xfrm>
             <a:off x="1008000" y="2073240"/>
-            <a:ext cx="18523800" cy="8867880"/>
+            <a:ext cx="18522720" cy="8867880"/>
           </a:xfrm>
           <a:prstGeom prst="rect">
             <a:avLst/>
@@ -17437,7 +17490,7 @@
         <p:spPr>
           <a:xfrm>
             <a:off x="5057640" y="290520"/>
-            <a:ext cx="9525600" cy="636120"/>
+            <a:ext cx="9524520" cy="635040"/>
           </a:xfrm>
           <a:prstGeom prst="rect">
             <a:avLst/>
@@ -17524,15 +17577,15 @@
         <p:spPr>
           <a:xfrm>
             <a:off x="2982960" y="712800"/>
-            <a:ext cx="53280" cy="53280"/>
+            <a:ext cx="52200" cy="52200"/>
           </a:xfrm>
           <a:custGeom>
             <a:avLst/>
             <a:gdLst>
-              <a:gd name="textAreaLeft" fmla="*/ 0 w 53280"/>
-              <a:gd name="textAreaRight" fmla="*/ 57240 w 53280"/>
-              <a:gd name="textAreaTop" fmla="*/ 0 h 53280"/>
-              <a:gd name="textAreaBottom" fmla="*/ 57240 h 53280"/>
+              <a:gd name="textAreaLeft" fmla="*/ 0 w 52200"/>
+              <a:gd name="textAreaRight" fmla="*/ 57240 w 52200"/>
+              <a:gd name="textAreaTop" fmla="*/ 0 h 52200"/>
+              <a:gd name="textAreaBottom" fmla="*/ 57240 h 52200"/>
             </a:gdLst>
             <a:ahLst/>
             <a:rect l="textAreaLeft" t="textAreaTop" r="textAreaRight" b="textAreaBottom"/>
@@ -17707,15 +17760,15 @@
         <p:spPr>
           <a:xfrm>
             <a:off x="2998800" y="725400"/>
-            <a:ext cx="21600" cy="27720"/>
+            <a:ext cx="20520" cy="26640"/>
           </a:xfrm>
           <a:custGeom>
             <a:avLst/>
             <a:gdLst>
-              <a:gd name="textAreaLeft" fmla="*/ 0 w 21600"/>
-              <a:gd name="textAreaRight" fmla="*/ 25560 w 21600"/>
-              <a:gd name="textAreaTop" fmla="*/ 0 h 27720"/>
-              <a:gd name="textAreaBottom" fmla="*/ 31680 h 27720"/>
+              <a:gd name="textAreaLeft" fmla="*/ 0 w 20520"/>
+              <a:gd name="textAreaRight" fmla="*/ 25560 w 20520"/>
+              <a:gd name="textAreaTop" fmla="*/ 0 h 26640"/>
+              <a:gd name="textAreaBottom" fmla="*/ 31680 h 26640"/>
             </a:gdLst>
             <a:ahLst/>
             <a:rect l="textAreaLeft" t="textAreaTop" r="textAreaRight" b="textAreaBottom"/>
@@ -17885,7 +17938,7 @@
         <p:spPr>
           <a:xfrm>
             <a:off x="18627840" y="10253160"/>
-            <a:ext cx="1201320" cy="860400"/>
+            <a:ext cx="1200240" cy="859320"/>
           </a:xfrm>
           <a:prstGeom prst="rect">
             <a:avLst/>
@@ -17927,7 +17980,7 @@
                 <a:tab algn="l" pos="0"/>
               </a:tabLst>
             </a:pPr>
-            <a:fld id="{ACF2172D-432A-4DDC-A9CE-B9E864ED5837}" type="slidenum">
+            <a:fld id="{94F702FA-8AD6-49C5-8F6C-0B756B2DCAE5}" type="slidenum">
               <a:rPr b="0" lang="en-IN" sz="2200" spc="-1" strike="noStrike">
                 <a:solidFill>
                   <a:schemeClr val="dk2"/>
@@ -17955,7 +18008,7 @@
         <p:spPr>
           <a:xfrm>
             <a:off x="5057640" y="290520"/>
-            <a:ext cx="10636920" cy="636120"/>
+            <a:ext cx="10635840" cy="635040"/>
           </a:xfrm>
           <a:prstGeom prst="rect">
             <a:avLst/>
@@ -18815,7 +18868,7 @@
         <p:spPr>
           <a:xfrm>
             <a:off x="7523640" y="656280"/>
-            <a:ext cx="5054040" cy="1254600"/>
+            <a:ext cx="5052960" cy="1253520"/>
           </a:xfrm>
           <a:prstGeom prst="rect">
             <a:avLst/>
@@ -18869,7 +18922,7 @@
         </p:nvGraphicFramePr>
         <p:xfrm>
           <a:off x="1577520" y="2368440"/>
-          <a:ext cx="17352720" cy="5742000"/>
+          <a:ext cx="17352720" cy="3827520"/>
         </p:xfrm>
         <a:graphic>
           <a:graphicData uri="http://schemas.openxmlformats.org/drawingml/2006/table">
@@ -19493,358 +19546,6 @@
                   </a:tcPr>
                 </a:tc>
               </a:tr>
-              <a:tr h="956520">
-                <a:tc>
-                  <a:txBody>
-                    <a:bodyPr anchor="t">
-                      <a:noAutofit/>
-                    </a:bodyPr>
-                    <a:p>
-                      <a:pPr>
-                        <a:lnSpc>
-                          <a:spcPct val="100000"/>
-                        </a:lnSpc>
-                      </a:pPr>
-                      <a:r>
-                        <a:rPr b="0" lang="en-US" sz="2400" spc="-1" strike="noStrike">
-                          <a:solidFill>
-                            <a:srgbClr val="000000"/>
-                          </a:solidFill>
-                          <a:latin typeface="Times New Roman"/>
-                        </a:rPr>
-                        <a:t>3</a:t>
-                      </a:r>
-                      <a:endParaRPr b="0" lang="en-US" sz="2400" spc="-1" strike="noStrike">
-                        <a:solidFill>
-                          <a:srgbClr val="000000"/>
-                        </a:solidFill>
-                        <a:latin typeface="Arial"/>
-                      </a:endParaRPr>
-                    </a:p>
-                  </a:txBody>
-                  <a:tcPr anchor="t" marL="91440" marR="91440">
-                    <a:lnL w="12240">
-                      <a:solidFill>
-                        <a:srgbClr val="ffffff"/>
-                      </a:solidFill>
-                      <a:prstDash val="solid"/>
-                    </a:lnL>
-                    <a:lnR w="12240">
-                      <a:solidFill>
-                        <a:srgbClr val="ffffff"/>
-                      </a:solidFill>
-                      <a:prstDash val="solid"/>
-                    </a:lnR>
-                    <a:lnT w="12240">
-                      <a:solidFill>
-                        <a:srgbClr val="ffffff"/>
-                      </a:solidFill>
-                      <a:prstDash val="solid"/>
-                    </a:lnT>
-                    <a:lnB w="12240">
-                      <a:solidFill>
-                        <a:srgbClr val="ffffff"/>
-                      </a:solidFill>
-                      <a:prstDash val="solid"/>
-                    </a:lnB>
-                    <a:solidFill>
-                      <a:srgbClr val="cdd8fb"/>
-                    </a:solidFill>
-                  </a:tcPr>
-                </a:tc>
-                <a:tc>
-                  <a:txBody>
-                    <a:bodyPr anchor="t">
-                      <a:noAutofit/>
-                    </a:bodyPr>
-                    <a:p>
-                      <a:pPr>
-                        <a:lnSpc>
-                          <a:spcPct val="100000"/>
-                        </a:lnSpc>
-                      </a:pPr>
-                      <a:r>
-                        <a:rPr b="0" lang="en-US" sz="2400" spc="-1" strike="noStrike">
-                          <a:solidFill>
-                            <a:srgbClr val="000000"/>
-                          </a:solidFill>
-                          <a:latin typeface="Times New Roman"/>
-                        </a:rPr>
-                        <a:t>Budget</a:t>
-                      </a:r>
-                      <a:endParaRPr b="0" lang="en-US" sz="2400" spc="-1" strike="noStrike">
-                        <a:solidFill>
-                          <a:srgbClr val="000000"/>
-                        </a:solidFill>
-                        <a:latin typeface="Arial"/>
-                      </a:endParaRPr>
-                    </a:p>
-                  </a:txBody>
-                  <a:tcPr anchor="t" marL="91440" marR="91440">
-                    <a:lnL w="12240">
-                      <a:solidFill>
-                        <a:srgbClr val="ffffff"/>
-                      </a:solidFill>
-                      <a:prstDash val="solid"/>
-                    </a:lnL>
-                    <a:lnR w="12240">
-                      <a:solidFill>
-                        <a:srgbClr val="ffffff"/>
-                      </a:solidFill>
-                      <a:prstDash val="solid"/>
-                    </a:lnR>
-                    <a:lnT w="12240">
-                      <a:solidFill>
-                        <a:srgbClr val="ffffff"/>
-                      </a:solidFill>
-                      <a:prstDash val="solid"/>
-                    </a:lnT>
-                    <a:lnB w="12240">
-                      <a:solidFill>
-                        <a:srgbClr val="ffffff"/>
-                      </a:solidFill>
-                      <a:prstDash val="solid"/>
-                    </a:lnB>
-                    <a:solidFill>
-                      <a:srgbClr val="cdd8fb"/>
-                    </a:solidFill>
-                  </a:tcPr>
-                </a:tc>
-                <a:tc>
-                  <a:txBody>
-                    <a:bodyPr anchor="t">
-                      <a:noAutofit/>
-                    </a:bodyPr>
-                    <a:p>
-                      <a:pPr>
-                        <a:lnSpc>
-                          <a:spcPct val="100000"/>
-                        </a:lnSpc>
-                      </a:pPr>
-                      <a:r>
-                        <a:rPr b="0" lang="en-US" sz="2400" spc="-1" strike="noStrike">
-                          <a:solidFill>
-                            <a:srgbClr val="000000"/>
-                          </a:solidFill>
-                          <a:latin typeface="Times New Roman"/>
-                        </a:rPr>
-                        <a:t>Only low-cost, readily available components (ESP32, LoRa, BME280, GPS) are used; advanced modules or commercial IoT platforms are excluded.</a:t>
-                      </a:r>
-                      <a:endParaRPr b="0" lang="en-US" sz="2400" spc="-1" strike="noStrike">
-                        <a:solidFill>
-                          <a:srgbClr val="000000"/>
-                        </a:solidFill>
-                        <a:latin typeface="Arial"/>
-                      </a:endParaRPr>
-                    </a:p>
-                  </a:txBody>
-                  <a:tcPr anchor="t" marL="91440" marR="91440">
-                    <a:lnL w="12240">
-                      <a:solidFill>
-                        <a:srgbClr val="ffffff"/>
-                      </a:solidFill>
-                      <a:prstDash val="solid"/>
-                    </a:lnL>
-                    <a:lnR w="12240">
-                      <a:solidFill>
-                        <a:srgbClr val="ffffff"/>
-                      </a:solidFill>
-                      <a:prstDash val="solid"/>
-                    </a:lnR>
-                    <a:lnT w="12240">
-                      <a:solidFill>
-                        <a:srgbClr val="ffffff"/>
-                      </a:solidFill>
-                      <a:prstDash val="solid"/>
-                    </a:lnT>
-                    <a:lnB w="12240">
-                      <a:solidFill>
-                        <a:srgbClr val="ffffff"/>
-                      </a:solidFill>
-                      <a:prstDash val="solid"/>
-                    </a:lnB>
-                    <a:solidFill>
-                      <a:srgbClr val="cdd8fb"/>
-                    </a:solidFill>
-                  </a:tcPr>
-                </a:tc>
-              </a:tr>
-              <a:tr h="957960">
-                <a:tc>
-                  <a:txBody>
-                    <a:bodyPr anchor="t">
-                      <a:noAutofit/>
-                    </a:bodyPr>
-                    <a:p>
-                      <a:pPr>
-                        <a:lnSpc>
-                          <a:spcPct val="100000"/>
-                        </a:lnSpc>
-                      </a:pPr>
-                      <a:r>
-                        <a:rPr b="0" lang="en-US" sz="2400" spc="-1" strike="noStrike">
-                          <a:solidFill>
-                            <a:srgbClr val="000000"/>
-                          </a:solidFill>
-                          <a:latin typeface="Times New Roman"/>
-                        </a:rPr>
-                        <a:t>4</a:t>
-                      </a:r>
-                      <a:endParaRPr b="0" lang="en-US" sz="2400" spc="-1" strike="noStrike">
-                        <a:solidFill>
-                          <a:srgbClr val="000000"/>
-                        </a:solidFill>
-                        <a:latin typeface="Arial"/>
-                      </a:endParaRPr>
-                    </a:p>
-                  </a:txBody>
-                  <a:tcPr anchor="t" marL="91440" marR="91440">
-                    <a:lnL w="12240">
-                      <a:solidFill>
-                        <a:srgbClr val="ffffff"/>
-                      </a:solidFill>
-                      <a:prstDash val="solid"/>
-                    </a:lnL>
-                    <a:lnR w="12240">
-                      <a:solidFill>
-                        <a:srgbClr val="ffffff"/>
-                      </a:solidFill>
-                      <a:prstDash val="solid"/>
-                    </a:lnR>
-                    <a:lnT w="12240">
-                      <a:solidFill>
-                        <a:srgbClr val="ffffff"/>
-                      </a:solidFill>
-                      <a:prstDash val="solid"/>
-                    </a:lnT>
-                    <a:lnB w="12240">
-                      <a:solidFill>
-                        <a:srgbClr val="ffffff"/>
-                      </a:solidFill>
-                      <a:prstDash val="solid"/>
-                    </a:lnB>
-                    <a:solidFill>
-                      <a:srgbClr val="cdd8fb"/>
-                    </a:solidFill>
-                  </a:tcPr>
-                </a:tc>
-                <a:tc>
-                  <a:txBody>
-                    <a:bodyPr anchor="t">
-                      <a:noAutofit/>
-                    </a:bodyPr>
-                    <a:p>
-                      <a:pPr>
-                        <a:lnSpc>
-                          <a:spcPct val="100000"/>
-                        </a:lnSpc>
-                      </a:pPr>
-                      <a:r>
-                        <a:rPr b="0" lang="en-US" sz="2400" spc="-1" strike="noStrike">
-                          <a:solidFill>
-                            <a:srgbClr val="000000"/>
-                          </a:solidFill>
-                          <a:latin typeface="Times New Roman"/>
-                        </a:rPr>
-                        <a:t>Deployment</a:t>
-                      </a:r>
-                      <a:endParaRPr b="0" lang="en-US" sz="2400" spc="-1" strike="noStrike">
-                        <a:solidFill>
-                          <a:srgbClr val="000000"/>
-                        </a:solidFill>
-                        <a:latin typeface="Arial"/>
-                      </a:endParaRPr>
-                    </a:p>
-                  </a:txBody>
-                  <a:tcPr anchor="t" marL="91440" marR="91440">
-                    <a:lnL w="12240">
-                      <a:solidFill>
-                        <a:srgbClr val="ffffff"/>
-                      </a:solidFill>
-                      <a:prstDash val="solid"/>
-                    </a:lnL>
-                    <a:lnR w="12240">
-                      <a:solidFill>
-                        <a:srgbClr val="ffffff"/>
-                      </a:solidFill>
-                      <a:prstDash val="solid"/>
-                    </a:lnR>
-                    <a:lnT w="12240">
-                      <a:solidFill>
-                        <a:srgbClr val="ffffff"/>
-                      </a:solidFill>
-                      <a:prstDash val="solid"/>
-                    </a:lnT>
-                    <a:lnB w="12240">
-                      <a:solidFill>
-                        <a:srgbClr val="ffffff"/>
-                      </a:solidFill>
-                      <a:prstDash val="solid"/>
-                    </a:lnB>
-                    <a:solidFill>
-                      <a:srgbClr val="cdd8fb"/>
-                    </a:solidFill>
-                  </a:tcPr>
-                </a:tc>
-                <a:tc>
-                  <a:txBody>
-                    <a:bodyPr anchor="t">
-                      <a:noAutofit/>
-                    </a:bodyPr>
-                    <a:p>
-                      <a:pPr>
-                        <a:lnSpc>
-                          <a:spcPct val="100000"/>
-                        </a:lnSpc>
-                      </a:pPr>
-                      <a:r>
-                        <a:rPr b="0" lang="en-US" sz="2400" spc="-1" strike="noStrike">
-                          <a:solidFill>
-                            <a:srgbClr val="000000"/>
-                          </a:solidFill>
-                          <a:latin typeface="Times New Roman"/>
-                        </a:rPr>
-                        <a:t>System is designed for local or LAN-based deployment; cloud hosting and remote access are not implemented in the initial version.</a:t>
-                      </a:r>
-                      <a:endParaRPr b="0" lang="en-US" sz="2400" spc="-1" strike="noStrike">
-                        <a:solidFill>
-                          <a:srgbClr val="000000"/>
-                        </a:solidFill>
-                        <a:latin typeface="Arial"/>
-                      </a:endParaRPr>
-                    </a:p>
-                  </a:txBody>
-                  <a:tcPr anchor="t" marL="91440" marR="91440">
-                    <a:lnL w="12240">
-                      <a:solidFill>
-                        <a:srgbClr val="ffffff"/>
-                      </a:solidFill>
-                      <a:prstDash val="solid"/>
-                    </a:lnL>
-                    <a:lnR w="12240">
-                      <a:solidFill>
-                        <a:srgbClr val="ffffff"/>
-                      </a:solidFill>
-                      <a:prstDash val="solid"/>
-                    </a:lnR>
-                    <a:lnT w="12240">
-                      <a:solidFill>
-                        <a:srgbClr val="ffffff"/>
-                      </a:solidFill>
-                      <a:prstDash val="solid"/>
-                    </a:lnT>
-                    <a:lnB w="12240">
-                      <a:solidFill>
-                        <a:srgbClr val="ffffff"/>
-                      </a:solidFill>
-                      <a:prstDash val="solid"/>
-                    </a:lnB>
-                    <a:solidFill>
-                      <a:srgbClr val="cdd8fb"/>
-                    </a:solidFill>
-                  </a:tcPr>
-                </a:tc>
-              </a:tr>
               <a:tr h="957960">
                 <a:tc>
                   <a:txBody>
@@ -19864,7 +19565,7 @@
                           </a:solidFill>
                           <a:latin typeface="Arial"/>
                         </a:rPr>
-                        <a:t>5</a:t>
+                        <a:t>3</a:t>
                       </a:r>
                       <a:endParaRPr b="0" lang="en-US" sz="1800" spc="-1" strike="noStrike">
                         <a:solidFill>
@@ -20064,15 +19765,15 @@
         <p:spPr>
           <a:xfrm>
             <a:off x="2982960" y="712800"/>
-            <a:ext cx="53280" cy="53280"/>
+            <a:ext cx="52200" cy="52200"/>
           </a:xfrm>
           <a:custGeom>
             <a:avLst/>
             <a:gdLst>
-              <a:gd name="textAreaLeft" fmla="*/ 0 w 53280"/>
-              <a:gd name="textAreaRight" fmla="*/ 57240 w 53280"/>
-              <a:gd name="textAreaTop" fmla="*/ 0 h 53280"/>
-              <a:gd name="textAreaBottom" fmla="*/ 57240 h 53280"/>
+              <a:gd name="textAreaLeft" fmla="*/ 0 w 52200"/>
+              <a:gd name="textAreaRight" fmla="*/ 57240 w 52200"/>
+              <a:gd name="textAreaTop" fmla="*/ 0 h 52200"/>
+              <a:gd name="textAreaBottom" fmla="*/ 57240 h 52200"/>
             </a:gdLst>
             <a:ahLst/>
             <a:rect l="textAreaLeft" t="textAreaTop" r="textAreaRight" b="textAreaBottom"/>
@@ -20247,15 +19948,15 @@
         <p:spPr>
           <a:xfrm>
             <a:off x="2998800" y="725400"/>
-            <a:ext cx="21600" cy="27720"/>
+            <a:ext cx="20520" cy="26640"/>
           </a:xfrm>
           <a:custGeom>
             <a:avLst/>
             <a:gdLst>
-              <a:gd name="textAreaLeft" fmla="*/ 0 w 21600"/>
-              <a:gd name="textAreaRight" fmla="*/ 25560 w 21600"/>
-              <a:gd name="textAreaTop" fmla="*/ 0 h 27720"/>
-              <a:gd name="textAreaBottom" fmla="*/ 31680 h 27720"/>
+              <a:gd name="textAreaLeft" fmla="*/ 0 w 20520"/>
+              <a:gd name="textAreaRight" fmla="*/ 25560 w 20520"/>
+              <a:gd name="textAreaTop" fmla="*/ 0 h 26640"/>
+              <a:gd name="textAreaBottom" fmla="*/ 31680 h 26640"/>
             </a:gdLst>
             <a:ahLst/>
             <a:rect l="textAreaLeft" t="textAreaTop" r="textAreaRight" b="textAreaBottom"/>
@@ -20425,7 +20126,7 @@
         <p:spPr>
           <a:xfrm>
             <a:off x="18627840" y="10253160"/>
-            <a:ext cx="1201320" cy="860400"/>
+            <a:ext cx="1200240" cy="859320"/>
           </a:xfrm>
           <a:prstGeom prst="rect">
             <a:avLst/>
@@ -20467,7 +20168,7 @@
                 <a:tab algn="l" pos="0"/>
               </a:tabLst>
             </a:pPr>
-            <a:fld id="{C37C6C01-3077-48F0-93F7-3AD98BC35DCC}" type="slidenum">
+            <a:fld id="{7BD0311E-E008-4746-8CA8-F43EB1583824}" type="slidenum">
               <a:rPr b="0" lang="en-IN" sz="2200" spc="-1" strike="noStrike">
                 <a:solidFill>
                   <a:schemeClr val="dk2"/>
@@ -20495,7 +20196,7 @@
         <p:spPr>
           <a:xfrm>
             <a:off x="5057640" y="290520"/>
-            <a:ext cx="9066960" cy="635760"/>
+            <a:ext cx="9065880" cy="634680"/>
           </a:xfrm>
           <a:prstGeom prst="rect">
             <a:avLst/>
@@ -20551,8 +20252,8 @@
         </p:nvSpPr>
         <p:spPr>
           <a:xfrm>
-            <a:off x="8458200" y="10335240"/>
-            <a:ext cx="2783160" cy="635760"/>
+            <a:off x="9144000" y="10337400"/>
+            <a:ext cx="2782080" cy="634680"/>
           </a:xfrm>
           <a:prstGeom prst="rect">
             <a:avLst/>
@@ -20613,7 +20314,7 @@
         <p:spPr>
           <a:xfrm>
             <a:off x="6708600" y="3200400"/>
-            <a:ext cx="7693200" cy="5821200"/>
+            <a:ext cx="7692120" cy="5820120"/>
           </a:xfrm>
           <a:prstGeom prst="rect">
             <a:avLst/>
